--- a/納品レポート/ホテル別レポート/comment_yokohama_口コミ分析レポート.pptx
+++ b/納品レポート/ホテル別レポート/comment_yokohama_口コミ分析レポート.pptx
@@ -223,7 +223,7 @@
                   <c:v>8.5</c:v>
                 </c:pt>
                 <c:pt idx="5">
-                  <c:v>8.15</c:v>
+                  <c:v>8.21</c:v>
                 </c:pt>
               </c:numCache>
             </c:numRef>
@@ -566,7 +566,7 @@
               <c:numCache>
                 <c:ptCount val="3"/>
                 <c:pt idx="0">
-                  <c:v>85</c:v>
+                  <c:v>87</c:v>
                 </c:pt>
                 <c:pt idx="1">
                   <c:v>17</c:v>
@@ -795,13 +795,13 @@
                 <c:formatCode>General</c:formatCode>
                 <c:ptCount val="7"/>
                 <c:pt idx="0">
-                  <c:v>49</c:v>
+                  <c:v>50</c:v>
                 </c:pt>
                 <c:pt idx="1">
                   <c:v>16</c:v>
                 </c:pt>
                 <c:pt idx="2">
-                  <c:v>20</c:v>
+                  <c:v>21</c:v>
                 </c:pt>
                 <c:pt idx="3">
                   <c:v>9</c:v>
@@ -2764,7 +2764,7 @@
                 <a:ea typeface="Arial" pitchFamily="34" charset="-122"/>
                 <a:cs typeface="Arial" pitchFamily="34" charset="-120"/>
               </a:rPr>
-              <a:t>レビュー総数：103件（6サイト）</a:t>
+              <a:t>レビュー総数：105件（6サイト）</a:t>
             </a:r>
             <a:endParaRPr lang="en-US" sz="1000" dirty="0"/>
           </a:p>
@@ -2784,7 +2784,7 @@
                 <a:ea typeface="Arial" pitchFamily="34" charset="-122"/>
                 <a:cs typeface="Arial" pitchFamily="34" charset="-120"/>
               </a:rPr>
-              <a:t>作成日：2026年3月17日</a:t>
+              <a:t>作成日：2026年3月18日</a:t>
             </a:r>
             <a:endParaRPr lang="en-US" sz="1000" dirty="0"/>
           </a:p>
@@ -3604,7 +3604,7 @@
                           <a:ea typeface="Arial" pitchFamily="34" charset="-122"/>
                           <a:cs typeface="Arial" pitchFamily="34" charset="-120"/>
                         </a:rPr>
-                        <a:t>82.5%</a:t>
+                        <a:t>82.9%</a:t>
                       </a:r>
                       <a:endParaRPr lang="en-US" sz="1000" dirty="0">
                         <a:latin typeface="Arial" charset="0"/>
@@ -5464,7 +5464,7 @@
                 <a:ea typeface="Arial" pitchFamily="34" charset="-122"/>
                 <a:cs typeface="Arial" pitchFamily="34" charset="-120"/>
               </a:rPr>
-              <a:t>82.5%</a:t>
+              <a:t>82.9%</a:t>
             </a:r>
             <a:endParaRPr lang="en-US" sz="3200" dirty="0"/>
           </a:p>
@@ -5714,7 +5714,7 @@
                 <a:ea typeface="Arial" pitchFamily="34" charset="-122"/>
                 <a:cs typeface="Arial" pitchFamily="34" charset="-120"/>
               </a:rPr>
-              <a:t>103件</a:t>
+              <a:t>105件</a:t>
             </a:r>
             <a:endParaRPr lang="en-US" sz="3200" dirty="0"/>
           </a:p>
@@ -5862,7 +5862,7 @@
                 <a:ea typeface="Arial" pitchFamily="34" charset="-122"/>
                 <a:cs typeface="Arial" pitchFamily="34" charset="-120"/>
               </a:rPr>
-              <a:t>  com とても清潔かつ、大浴場も広くサウナも水風呂も付いていて良かったです</a:t>
+              <a:t>  部屋も清潔で、とにかくシンプルな滞在におすすめです</a:t>
             </a:r>
             <a:endParaRPr lang="en-US" sz="1100" dirty="0"/>
           </a:p>
@@ -5942,7 +5942,7 @@
                 <a:ea typeface="Arial" pitchFamily="34" charset="-122"/>
                 <a:cs typeface="Arial" pitchFamily="34" charset="-120"/>
               </a:rPr>
-              <a:t>  アメニティも充実しています</a:t>
+              <a:t>  しかし、水も備品も不要という方には快適かもしれません</a:t>
             </a:r>
             <a:endParaRPr lang="en-US" sz="1100" dirty="0"/>
           </a:p>
@@ -6648,7 +6648,7 @@
                 <a:ea typeface="Arial" pitchFamily="34" charset="-122"/>
                 <a:cs typeface="Arial" pitchFamily="34" charset="-120"/>
               </a:rPr>
-              <a:t>82.5%</a:t>
+              <a:t>82.9%</a:t>
             </a:r>
             <a:endParaRPr lang="en-US" sz="3200" dirty="0"/>
           </a:p>
@@ -6898,7 +6898,7 @@
                 <a:ea typeface="Arial" pitchFamily="34" charset="-122"/>
                 <a:cs typeface="Arial" pitchFamily="34" charset="-120"/>
               </a:rPr>
-              <a:t>103件</a:t>
+              <a:t>105件</a:t>
             </a:r>
             <a:endParaRPr lang="en-US" sz="3200" dirty="0"/>
           </a:p>
@@ -9587,7 +9587,7 @@
                           <a:ea typeface="Arial" pitchFamily="34" charset="-122"/>
                           <a:cs typeface="Arial" pitchFamily="34" charset="-120"/>
                         </a:rPr>
-                        <a:t>27</a:t>
+                        <a:t>29</a:t>
                       </a:r>
                       <a:endParaRPr lang="en-US" sz="900" dirty="0">
                         <a:latin typeface="Arial" charset="0"/>
@@ -9655,7 +9655,7 @@
                           <a:ea typeface="Arial" pitchFamily="34" charset="-122"/>
                           <a:cs typeface="Arial" pitchFamily="34" charset="-120"/>
                         </a:rPr>
-                        <a:t>8.15</a:t>
+                        <a:t>8.21</a:t>
                       </a:r>
                       <a:endParaRPr lang="en-US" sz="900" dirty="0">
                         <a:latin typeface="Arial" charset="0"/>
@@ -9791,7 +9791,7 @@
                           <a:ea typeface="Arial" pitchFamily="34" charset="-122"/>
                           <a:cs typeface="Arial" pitchFamily="34" charset="-120"/>
                         </a:rPr>
-                        <a:t>8.15</a:t>
+                        <a:t>8.21</a:t>
                       </a:r>
                       <a:endParaRPr lang="en-US" sz="900" dirty="0">
                         <a:latin typeface="Arial" charset="0"/>
@@ -10199,7 +10199,7 @@
                 <a:ea typeface="Arial" pitchFamily="34" charset="-122"/>
                 <a:cs typeface="Arial" pitchFamily="34" charset="-120"/>
               </a:rPr>
-              <a:t>85件（82.5%）</a:t>
+              <a:t>87件（82.9%）</a:t>
             </a:r>
             <a:endParaRPr lang="en-US" sz="1100" dirty="0"/>
           </a:p>
@@ -10297,7 +10297,7 @@
                 <a:ea typeface="Arial" pitchFamily="34" charset="-122"/>
                 <a:cs typeface="Arial" pitchFamily="34" charset="-120"/>
               </a:rPr>
-              <a:t>17件（16.5%）</a:t>
+              <a:t>17件（16.2%）</a:t>
             </a:r>
             <a:endParaRPr lang="en-US" sz="1100" dirty="0"/>
           </a:p>
@@ -10807,7 +10807,7 @@
                 <a:ea typeface="Arial" pitchFamily="34" charset="-122"/>
                 <a:cs typeface="Arial" pitchFamily="34" charset="-120"/>
               </a:rPr>
-              <a:t>com とても清潔かつ、大浴場も広くサウナも水風呂も付いていて良かったです</a:t>
+              <a:t>部屋も清潔で、とにかくシンプルな滞在におすすめです</a:t>
             </a:r>
             <a:endParaRPr lang="en-US" sz="900" dirty="0"/>
           </a:p>
@@ -10822,6 +10822,675 @@
         <p:spPr>
           <a:xfrm>
             <a:off x="594360" y="1828800"/>
+            <a:ext cx="2377440" cy="640080"/>
+          </a:xfrm>
+          <a:prstGeom prst="rect">
+            <a:avLst/>
+          </a:prstGeom>
+          <a:noFill/>
+          <a:ln/>
+        </p:spPr>
+        <p:txBody>
+          <a:bodyPr wrap="square" lIns="0" tIns="0" rIns="0" bIns="0" rtlCol="0" anchor="ctr"/>
+          <a:lstStyle/>
+          <a:p>
+            <a:pPr indent="0" marL="0">
+              <a:buNone/>
+            </a:pPr>
+            <a:r>
+              <a:rPr lang="en-US" sz="900" i="1" dirty="0">
+                <a:solidFill>
+                  <a:srgbClr val="3B7DD8"/>
+                </a:solidFill>
+                <a:latin typeface="Arial" pitchFamily="34" charset="0"/>
+                <a:ea typeface="Arial" pitchFamily="34" charset="-122"/>
+                <a:cs typeface="Arial" pitchFamily="34" charset="-120"/>
+              </a:rPr>
+              <a:t>「com とても清潔かつ、大浴場も広くサウナも水風呂も付いていて良かったです」</a:t>
+            </a:r>
+            <a:endParaRPr lang="en-US" sz="900" dirty="0"/>
+          </a:p>
+        </p:txBody>
+      </p:sp>
+      <p:sp>
+        <p:nvSpPr>
+          <p:cNvPr id="12" name="Shape 10"/>
+          <p:cNvSpPr/>
+          <p:nvPr/>
+        </p:nvSpPr>
+        <p:spPr>
+          <a:xfrm>
+            <a:off x="3291840" y="1051560"/>
+            <a:ext cx="2651760" cy="1600200"/>
+          </a:xfrm>
+          <a:prstGeom prst="rect">
+            <a:avLst/>
+          </a:prstGeom>
+          <a:solidFill>
+            <a:srgbClr val="FFFFFF"/>
+          </a:solidFill>
+          <a:ln/>
+          <a:effectLst>
+            <a:outerShdw sx="100000" sy="100000" kx="0" ky="0" algn="bl" rotWithShape="0" blurRad="50800" dist="25400" dir="8100000">
+              <a:srgbClr val="000000">
+                <a:alpha val="10000"/>
+              </a:srgbClr>
+            </a:outerShdw>
+          </a:effectLst>
+        </p:spPr>
+      </p:sp>
+      <p:sp>
+        <p:nvSpPr>
+          <p:cNvPr id="13" name="Shape 11"/>
+          <p:cNvSpPr/>
+          <p:nvPr/>
+        </p:nvSpPr>
+        <p:spPr>
+          <a:xfrm>
+            <a:off x="3291840" y="1051560"/>
+            <a:ext cx="54864" cy="1600200"/>
+          </a:xfrm>
+          <a:prstGeom prst="rect">
+            <a:avLst/>
+          </a:prstGeom>
+          <a:solidFill>
+            <a:srgbClr val="16A34A"/>
+          </a:solidFill>
+          <a:ln/>
+        </p:spPr>
+      </p:sp>
+      <p:sp>
+        <p:nvSpPr>
+          <p:cNvPr id="14" name="Shape 12"/>
+          <p:cNvSpPr/>
+          <p:nvPr/>
+        </p:nvSpPr>
+        <p:spPr>
+          <a:xfrm>
+            <a:off x="5120640" y="1124712"/>
+            <a:ext cx="658368" cy="228600"/>
+          </a:xfrm>
+          <a:prstGeom prst="rect">
+            <a:avLst/>
+          </a:prstGeom>
+          <a:solidFill>
+            <a:srgbClr val="DCFCE7"/>
+          </a:solidFill>
+          <a:ln/>
+        </p:spPr>
+      </p:sp>
+      <p:sp>
+        <p:nvSpPr>
+          <p:cNvPr id="15" name="Text 13"/>
+          <p:cNvSpPr/>
+          <p:nvPr/>
+        </p:nvSpPr>
+        <p:spPr>
+          <a:xfrm>
+            <a:off x="5120640" y="1124712"/>
+            <a:ext cx="658368" cy="228600"/>
+          </a:xfrm>
+          <a:prstGeom prst="rect">
+            <a:avLst/>
+          </a:prstGeom>
+          <a:noFill/>
+          <a:ln/>
+        </p:spPr>
+        <p:txBody>
+          <a:bodyPr wrap="square" lIns="0" tIns="0" rIns="0" bIns="0" rtlCol="0" anchor="ctr"/>
+          <a:lstStyle/>
+          <a:p>
+            <a:pPr algn="ctr" indent="0" marL="0">
+              <a:buNone/>
+            </a:pPr>
+            <a:r>
+              <a:rPr lang="en-US" sz="900" b="1" dirty="0">
+                <a:solidFill>
+                  <a:srgbClr val="16A34A"/>
+                </a:solidFill>
+                <a:latin typeface="Arial" pitchFamily="34" charset="0"/>
+                <a:ea typeface="Arial" pitchFamily="34" charset="-122"/>
+                <a:cs typeface="Arial" pitchFamily="34" charset="-120"/>
+              </a:rPr>
+              <a:t>20件+</a:t>
+            </a:r>
+            <a:endParaRPr lang="en-US" sz="900" dirty="0"/>
+          </a:p>
+        </p:txBody>
+      </p:sp>
+      <p:sp>
+        <p:nvSpPr>
+          <p:cNvPr id="16" name="Text 14"/>
+          <p:cNvSpPr/>
+          <p:nvPr/>
+        </p:nvSpPr>
+        <p:spPr>
+          <a:xfrm>
+            <a:off x="3429000" y="1124712"/>
+            <a:ext cx="1645920" cy="274320"/>
+          </a:xfrm>
+          <a:prstGeom prst="rect">
+            <a:avLst/>
+          </a:prstGeom>
+          <a:noFill/>
+          <a:ln/>
+        </p:spPr>
+        <p:txBody>
+          <a:bodyPr wrap="square" lIns="0" tIns="0" rIns="0" bIns="0" rtlCol="0" anchor="ctr"/>
+          <a:lstStyle/>
+          <a:p>
+            <a:pPr indent="0" marL="0">
+              <a:buNone/>
+            </a:pPr>
+            <a:r>
+              <a:rPr lang="en-US" sz="1300" b="1" dirty="0">
+                <a:solidFill>
+                  <a:srgbClr val="1A2744"/>
+                </a:solidFill>
+                <a:latin typeface="Arial" pitchFamily="34" charset="0"/>
+                <a:ea typeface="Arial" pitchFamily="34" charset="-122"/>
+                <a:cs typeface="Arial" pitchFamily="34" charset="-120"/>
+              </a:rPr>
+              <a:t>立地・アクセス</a:t>
+            </a:r>
+            <a:endParaRPr lang="en-US" sz="1300" dirty="0"/>
+          </a:p>
+        </p:txBody>
+      </p:sp>
+      <p:sp>
+        <p:nvSpPr>
+          <p:cNvPr id="17" name="Text 15"/>
+          <p:cNvSpPr/>
+          <p:nvPr/>
+        </p:nvSpPr>
+        <p:spPr>
+          <a:xfrm>
+            <a:off x="3429000" y="1417320"/>
+            <a:ext cx="2377440" cy="365760"/>
+          </a:xfrm>
+          <a:prstGeom prst="rect">
+            <a:avLst/>
+          </a:prstGeom>
+          <a:noFill/>
+          <a:ln/>
+        </p:spPr>
+        <p:txBody>
+          <a:bodyPr wrap="square" lIns="0" tIns="0" rIns="0" bIns="0" rtlCol="0" anchor="ctr"/>
+          <a:lstStyle/>
+          <a:p>
+            <a:pPr indent="0" marL="0">
+              <a:buNone/>
+            </a:pPr>
+            <a:r>
+              <a:rPr lang="en-US" sz="900" dirty="0">
+                <a:solidFill>
+                  <a:srgbClr val="64748B"/>
+                </a:solidFill>
+                <a:latin typeface="Arial" pitchFamily="34" charset="0"/>
+                <a:ea typeface="Arial" pitchFamily="34" charset="-122"/>
+                <a:cs typeface="Arial" pitchFamily="34" charset="-120"/>
+              </a:rPr>
+              <a:t>この近くに来るなら絶対リピしますね 朝食ブッフェは、金額の割にお味噌汁とスープの表記間違えてるし、アイスコーヒーと...</a:t>
+            </a:r>
+            <a:endParaRPr lang="en-US" sz="900" dirty="0"/>
+          </a:p>
+        </p:txBody>
+      </p:sp>
+      <p:sp>
+        <p:nvSpPr>
+          <p:cNvPr id="18" name="Text 16"/>
+          <p:cNvSpPr/>
+          <p:nvPr/>
+        </p:nvSpPr>
+        <p:spPr>
+          <a:xfrm>
+            <a:off x="3429000" y="1828800"/>
+            <a:ext cx="2377440" cy="640080"/>
+          </a:xfrm>
+          <a:prstGeom prst="rect">
+            <a:avLst/>
+          </a:prstGeom>
+          <a:noFill/>
+          <a:ln/>
+        </p:spPr>
+        <p:txBody>
+          <a:bodyPr wrap="square" lIns="0" tIns="0" rIns="0" bIns="0" rtlCol="0" anchor="ctr"/>
+          <a:lstStyle/>
+          <a:p>
+            <a:pPr indent="0" marL="0">
+              <a:buNone/>
+            </a:pPr>
+            <a:r>
+              <a:rPr lang="en-US" sz="900" i="1" dirty="0">
+                <a:solidFill>
+                  <a:srgbClr val="3B7DD8"/>
+                </a:solidFill>
+                <a:latin typeface="Arial" pitchFamily="34" charset="0"/>
+                <a:ea typeface="Arial" pitchFamily="34" charset="-122"/>
+                <a:cs typeface="Arial" pitchFamily="34" charset="-120"/>
+              </a:rPr>
+              <a:t>「Google いろんなホテルに泊まりましたが完璧に近いホテルです」</a:t>
+            </a:r>
+            <a:endParaRPr lang="en-US" sz="900" dirty="0"/>
+          </a:p>
+        </p:txBody>
+      </p:sp>
+      <p:sp>
+        <p:nvSpPr>
+          <p:cNvPr id="19" name="Shape 17"/>
+          <p:cNvSpPr/>
+          <p:nvPr/>
+        </p:nvSpPr>
+        <p:spPr>
+          <a:xfrm>
+            <a:off x="6126480" y="1051560"/>
+            <a:ext cx="2651760" cy="1600200"/>
+          </a:xfrm>
+          <a:prstGeom prst="rect">
+            <a:avLst/>
+          </a:prstGeom>
+          <a:solidFill>
+            <a:srgbClr val="FFFFFF"/>
+          </a:solidFill>
+          <a:ln/>
+          <a:effectLst>
+            <a:outerShdw sx="100000" sy="100000" kx="0" ky="0" algn="bl" rotWithShape="0" blurRad="50800" dist="25400" dir="8100000">
+              <a:srgbClr val="000000">
+                <a:alpha val="10000"/>
+              </a:srgbClr>
+            </a:outerShdw>
+          </a:effectLst>
+        </p:spPr>
+      </p:sp>
+      <p:sp>
+        <p:nvSpPr>
+          <p:cNvPr id="20" name="Shape 18"/>
+          <p:cNvSpPr/>
+          <p:nvPr/>
+        </p:nvSpPr>
+        <p:spPr>
+          <a:xfrm>
+            <a:off x="6126480" y="1051560"/>
+            <a:ext cx="54864" cy="1600200"/>
+          </a:xfrm>
+          <a:prstGeom prst="rect">
+            <a:avLst/>
+          </a:prstGeom>
+          <a:solidFill>
+            <a:srgbClr val="16A34A"/>
+          </a:solidFill>
+          <a:ln/>
+        </p:spPr>
+      </p:sp>
+      <p:sp>
+        <p:nvSpPr>
+          <p:cNvPr id="21" name="Shape 19"/>
+          <p:cNvSpPr/>
+          <p:nvPr/>
+        </p:nvSpPr>
+        <p:spPr>
+          <a:xfrm>
+            <a:off x="7955280" y="1124712"/>
+            <a:ext cx="658368" cy="228600"/>
+          </a:xfrm>
+          <a:prstGeom prst="rect">
+            <a:avLst/>
+          </a:prstGeom>
+          <a:solidFill>
+            <a:srgbClr val="DCFCE7"/>
+          </a:solidFill>
+          <a:ln/>
+        </p:spPr>
+      </p:sp>
+      <p:sp>
+        <p:nvSpPr>
+          <p:cNvPr id="22" name="Text 20"/>
+          <p:cNvSpPr/>
+          <p:nvPr/>
+        </p:nvSpPr>
+        <p:spPr>
+          <a:xfrm>
+            <a:off x="7955280" y="1124712"/>
+            <a:ext cx="658368" cy="228600"/>
+          </a:xfrm>
+          <a:prstGeom prst="rect">
+            <a:avLst/>
+          </a:prstGeom>
+          <a:noFill/>
+          <a:ln/>
+        </p:spPr>
+        <p:txBody>
+          <a:bodyPr wrap="square" lIns="0" tIns="0" rIns="0" bIns="0" rtlCol="0" anchor="ctr"/>
+          <a:lstStyle/>
+          <a:p>
+            <a:pPr algn="ctr" indent="0" marL="0">
+              <a:buNone/>
+            </a:pPr>
+            <a:r>
+              <a:rPr lang="en-US" sz="900" b="1" dirty="0">
+                <a:solidFill>
+                  <a:srgbClr val="16A34A"/>
+                </a:solidFill>
+                <a:latin typeface="Arial" pitchFamily="34" charset="0"/>
+                <a:ea typeface="Arial" pitchFamily="34" charset="-122"/>
+                <a:cs typeface="Arial" pitchFamily="34" charset="-120"/>
+              </a:rPr>
+              <a:t>20件+</a:t>
+            </a:r>
+            <a:endParaRPr lang="en-US" sz="900" dirty="0"/>
+          </a:p>
+        </p:txBody>
+      </p:sp>
+      <p:sp>
+        <p:nvSpPr>
+          <p:cNvPr id="23" name="Text 21"/>
+          <p:cNvSpPr/>
+          <p:nvPr/>
+        </p:nvSpPr>
+        <p:spPr>
+          <a:xfrm>
+            <a:off x="6263640" y="1124712"/>
+            <a:ext cx="1645920" cy="274320"/>
+          </a:xfrm>
+          <a:prstGeom prst="rect">
+            <a:avLst/>
+          </a:prstGeom>
+          <a:noFill/>
+          <a:ln/>
+        </p:spPr>
+        <p:txBody>
+          <a:bodyPr wrap="square" lIns="0" tIns="0" rIns="0" bIns="0" rtlCol="0" anchor="ctr"/>
+          <a:lstStyle/>
+          <a:p>
+            <a:pPr indent="0" marL="0">
+              <a:buNone/>
+            </a:pPr>
+            <a:r>
+              <a:rPr lang="en-US" sz="1300" b="1" dirty="0">
+                <a:solidFill>
+                  <a:srgbClr val="1A2744"/>
+                </a:solidFill>
+                <a:latin typeface="Arial" pitchFamily="34" charset="0"/>
+                <a:ea typeface="Arial" pitchFamily="34" charset="-122"/>
+                <a:cs typeface="Arial" pitchFamily="34" charset="-120"/>
+              </a:rPr>
+              <a:t>快適さ・設備</a:t>
+            </a:r>
+            <a:endParaRPr lang="en-US" sz="1300" dirty="0"/>
+          </a:p>
+        </p:txBody>
+      </p:sp>
+      <p:sp>
+        <p:nvSpPr>
+          <p:cNvPr id="24" name="Text 22"/>
+          <p:cNvSpPr/>
+          <p:nvPr/>
+        </p:nvSpPr>
+        <p:spPr>
+          <a:xfrm>
+            <a:off x="6263640" y="1417320"/>
+            <a:ext cx="2377440" cy="365760"/>
+          </a:xfrm>
+          <a:prstGeom prst="rect">
+            <a:avLst/>
+          </a:prstGeom>
+          <a:noFill/>
+          <a:ln/>
+        </p:spPr>
+        <p:txBody>
+          <a:bodyPr wrap="square" lIns="0" tIns="0" rIns="0" bIns="0" rtlCol="0" anchor="ctr"/>
+          <a:lstStyle/>
+          <a:p>
+            <a:pPr indent="0" marL="0">
+              <a:buNone/>
+            </a:pPr>
+            <a:r>
+              <a:rPr lang="en-US" sz="900" dirty="0">
+                <a:solidFill>
+                  <a:srgbClr val="64748B"/>
+                </a:solidFill>
+                <a:latin typeface="Arial" pitchFamily="34" charset="0"/>
+                <a:ea typeface="Arial" pitchFamily="34" charset="-122"/>
+                <a:cs typeface="Arial" pitchFamily="34" charset="-120"/>
+              </a:rPr>
+              <a:t>しかし、水も備品も不要という方には快適かもしれません</a:t>
+            </a:r>
+            <a:endParaRPr lang="en-US" sz="900" dirty="0"/>
+          </a:p>
+        </p:txBody>
+      </p:sp>
+      <p:sp>
+        <p:nvSpPr>
+          <p:cNvPr id="25" name="Text 23"/>
+          <p:cNvSpPr/>
+          <p:nvPr/>
+        </p:nvSpPr>
+        <p:spPr>
+          <a:xfrm>
+            <a:off x="6263640" y="1828800"/>
+            <a:ext cx="2377440" cy="640080"/>
+          </a:xfrm>
+          <a:prstGeom prst="rect">
+            <a:avLst/>
+          </a:prstGeom>
+          <a:noFill/>
+          <a:ln/>
+        </p:spPr>
+        <p:txBody>
+          <a:bodyPr wrap="square" lIns="0" tIns="0" rIns="0" bIns="0" rtlCol="0" anchor="ctr"/>
+          <a:lstStyle/>
+          <a:p>
+            <a:pPr indent="0" marL="0">
+              <a:buNone/>
+            </a:pPr>
+            <a:r>
+              <a:rPr lang="en-US" sz="900" i="1" dirty="0">
+                <a:solidFill>
+                  <a:srgbClr val="3B7DD8"/>
+                </a:solidFill>
+                <a:latin typeface="Arial" pitchFamily="34" charset="0"/>
+                <a:ea typeface="Arial" pitchFamily="34" charset="-122"/>
+                <a:cs typeface="Arial" pitchFamily="34" charset="-120"/>
+              </a:rPr>
+              <a:t>「アメニティも充実しています」</a:t>
+            </a:r>
+            <a:endParaRPr lang="en-US" sz="900" dirty="0"/>
+          </a:p>
+        </p:txBody>
+      </p:sp>
+      <p:sp>
+        <p:nvSpPr>
+          <p:cNvPr id="26" name="Shape 24"/>
+          <p:cNvSpPr/>
+          <p:nvPr/>
+        </p:nvSpPr>
+        <p:spPr>
+          <a:xfrm>
+            <a:off x="457200" y="2880360"/>
+            <a:ext cx="2651760" cy="1600200"/>
+          </a:xfrm>
+          <a:prstGeom prst="rect">
+            <a:avLst/>
+          </a:prstGeom>
+          <a:solidFill>
+            <a:srgbClr val="FFFFFF"/>
+          </a:solidFill>
+          <a:ln/>
+          <a:effectLst>
+            <a:outerShdw sx="100000" sy="100000" kx="0" ky="0" algn="bl" rotWithShape="0" blurRad="50800" dist="25400" dir="8100000">
+              <a:srgbClr val="000000">
+                <a:alpha val="10000"/>
+              </a:srgbClr>
+            </a:outerShdw>
+          </a:effectLst>
+        </p:spPr>
+      </p:sp>
+      <p:sp>
+        <p:nvSpPr>
+          <p:cNvPr id="27" name="Shape 25"/>
+          <p:cNvSpPr/>
+          <p:nvPr/>
+        </p:nvSpPr>
+        <p:spPr>
+          <a:xfrm>
+            <a:off x="457200" y="2880360"/>
+            <a:ext cx="54864" cy="1600200"/>
+          </a:xfrm>
+          <a:prstGeom prst="rect">
+            <a:avLst/>
+          </a:prstGeom>
+          <a:solidFill>
+            <a:srgbClr val="16A34A"/>
+          </a:solidFill>
+          <a:ln/>
+        </p:spPr>
+      </p:sp>
+      <p:sp>
+        <p:nvSpPr>
+          <p:cNvPr id="28" name="Shape 26"/>
+          <p:cNvSpPr/>
+          <p:nvPr/>
+        </p:nvSpPr>
+        <p:spPr>
+          <a:xfrm>
+            <a:off x="2286000" y="2953512"/>
+            <a:ext cx="658368" cy="228600"/>
+          </a:xfrm>
+          <a:prstGeom prst="rect">
+            <a:avLst/>
+          </a:prstGeom>
+          <a:solidFill>
+            <a:srgbClr val="DCFCE7"/>
+          </a:solidFill>
+          <a:ln/>
+        </p:spPr>
+      </p:sp>
+      <p:sp>
+        <p:nvSpPr>
+          <p:cNvPr id="29" name="Text 27"/>
+          <p:cNvSpPr/>
+          <p:nvPr/>
+        </p:nvSpPr>
+        <p:spPr>
+          <a:xfrm>
+            <a:off x="2286000" y="2953512"/>
+            <a:ext cx="658368" cy="228600"/>
+          </a:xfrm>
+          <a:prstGeom prst="rect">
+            <a:avLst/>
+          </a:prstGeom>
+          <a:noFill/>
+          <a:ln/>
+        </p:spPr>
+        <p:txBody>
+          <a:bodyPr wrap="square" lIns="0" tIns="0" rIns="0" bIns="0" rtlCol="0" anchor="ctr"/>
+          <a:lstStyle/>
+          <a:p>
+            <a:pPr algn="ctr" indent="0" marL="0">
+              <a:buNone/>
+            </a:pPr>
+            <a:r>
+              <a:rPr lang="en-US" sz="900" b="1" dirty="0">
+                <a:solidFill>
+                  <a:srgbClr val="16A34A"/>
+                </a:solidFill>
+                <a:latin typeface="Arial" pitchFamily="34" charset="0"/>
+                <a:ea typeface="Arial" pitchFamily="34" charset="-122"/>
+                <a:cs typeface="Arial" pitchFamily="34" charset="-120"/>
+              </a:rPr>
+              <a:t>20件+</a:t>
+            </a:r>
+            <a:endParaRPr lang="en-US" sz="900" dirty="0"/>
+          </a:p>
+        </p:txBody>
+      </p:sp>
+      <p:sp>
+        <p:nvSpPr>
+          <p:cNvPr id="30" name="Text 28"/>
+          <p:cNvSpPr/>
+          <p:nvPr/>
+        </p:nvSpPr>
+        <p:spPr>
+          <a:xfrm>
+            <a:off x="594360" y="2953512"/>
+            <a:ext cx="1645920" cy="274320"/>
+          </a:xfrm>
+          <a:prstGeom prst="rect">
+            <a:avLst/>
+          </a:prstGeom>
+          <a:noFill/>
+          <a:ln/>
+        </p:spPr>
+        <p:txBody>
+          <a:bodyPr wrap="square" lIns="0" tIns="0" rIns="0" bIns="0" rtlCol="0" anchor="ctr"/>
+          <a:lstStyle/>
+          <a:p>
+            <a:pPr indent="0" marL="0">
+              <a:buNone/>
+            </a:pPr>
+            <a:r>
+              <a:rPr lang="en-US" sz="1300" b="1" dirty="0">
+                <a:solidFill>
+                  <a:srgbClr val="1A2744"/>
+                </a:solidFill>
+                <a:latin typeface="Arial" pitchFamily="34" charset="0"/>
+                <a:ea typeface="Arial" pitchFamily="34" charset="-122"/>
+                <a:cs typeface="Arial" pitchFamily="34" charset="-120"/>
+              </a:rPr>
+              <a:t>スタッフの対応</a:t>
+            </a:r>
+            <a:endParaRPr lang="en-US" sz="1300" dirty="0"/>
+          </a:p>
+        </p:txBody>
+      </p:sp>
+      <p:sp>
+        <p:nvSpPr>
+          <p:cNvPr id="31" name="Text 29"/>
+          <p:cNvSpPr/>
+          <p:nvPr/>
+        </p:nvSpPr>
+        <p:spPr>
+          <a:xfrm>
+            <a:off x="594360" y="3246120"/>
+            <a:ext cx="2377440" cy="365760"/>
+          </a:xfrm>
+          <a:prstGeom prst="rect">
+            <a:avLst/>
+          </a:prstGeom>
+          <a:noFill/>
+          <a:ln/>
+        </p:spPr>
+        <p:txBody>
+          <a:bodyPr wrap="square" lIns="0" tIns="0" rIns="0" bIns="0" rtlCol="0" anchor="ctr"/>
+          <a:lstStyle/>
+          <a:p>
+            <a:pPr indent="0" marL="0">
+              <a:buNone/>
+            </a:pPr>
+            <a:r>
+              <a:rPr lang="en-US" sz="900" dirty="0">
+                <a:solidFill>
+                  <a:srgbClr val="64748B"/>
+                </a:solidFill>
+                <a:latin typeface="Arial" pitchFamily="34" charset="0"/>
+                <a:ea typeface="Arial" pitchFamily="34" charset="-122"/>
+                <a:cs typeface="Arial" pitchFamily="34" charset="-120"/>
+              </a:rPr>
+              <a:t>アカスリがなかったので、フロントにお願いすると、いただけたが、みんなに提供しても良いのでは</a:t>
+            </a:r>
+            <a:endParaRPr lang="en-US" sz="900" dirty="0"/>
+          </a:p>
+        </p:txBody>
+      </p:sp>
+      <p:sp>
+        <p:nvSpPr>
+          <p:cNvPr id="32" name="Text 30"/>
+          <p:cNvSpPr/>
+          <p:nvPr/>
+        </p:nvSpPr>
+        <p:spPr>
+          <a:xfrm>
+            <a:off x="594360" y="3657600"/>
             <a:ext cx="2377440" cy="640080"/>
           </a:xfrm>
           <a:prstGeom prst="rect">
@@ -10847,675 +11516,6 @@
                 <a:cs typeface="Arial" pitchFamily="34" charset="-120"/>
               </a:rPr>
               <a:t>「com 清潔 受付の対応 受付の対応」</a:t>
-            </a:r>
-            <a:endParaRPr lang="en-US" sz="900" dirty="0"/>
-          </a:p>
-        </p:txBody>
-      </p:sp>
-      <p:sp>
-        <p:nvSpPr>
-          <p:cNvPr id="12" name="Shape 10"/>
-          <p:cNvSpPr/>
-          <p:nvPr/>
-        </p:nvSpPr>
-        <p:spPr>
-          <a:xfrm>
-            <a:off x="3291840" y="1051560"/>
-            <a:ext cx="2651760" cy="1600200"/>
-          </a:xfrm>
-          <a:prstGeom prst="rect">
-            <a:avLst/>
-          </a:prstGeom>
-          <a:solidFill>
-            <a:srgbClr val="FFFFFF"/>
-          </a:solidFill>
-          <a:ln/>
-          <a:effectLst>
-            <a:outerShdw sx="100000" sy="100000" kx="0" ky="0" algn="bl" rotWithShape="0" blurRad="50800" dist="25400" dir="8100000">
-              <a:srgbClr val="000000">
-                <a:alpha val="10000"/>
-              </a:srgbClr>
-            </a:outerShdw>
-          </a:effectLst>
-        </p:spPr>
-      </p:sp>
-      <p:sp>
-        <p:nvSpPr>
-          <p:cNvPr id="13" name="Shape 11"/>
-          <p:cNvSpPr/>
-          <p:nvPr/>
-        </p:nvSpPr>
-        <p:spPr>
-          <a:xfrm>
-            <a:off x="3291840" y="1051560"/>
-            <a:ext cx="54864" cy="1600200"/>
-          </a:xfrm>
-          <a:prstGeom prst="rect">
-            <a:avLst/>
-          </a:prstGeom>
-          <a:solidFill>
-            <a:srgbClr val="16A34A"/>
-          </a:solidFill>
-          <a:ln/>
-        </p:spPr>
-      </p:sp>
-      <p:sp>
-        <p:nvSpPr>
-          <p:cNvPr id="14" name="Shape 12"/>
-          <p:cNvSpPr/>
-          <p:nvPr/>
-        </p:nvSpPr>
-        <p:spPr>
-          <a:xfrm>
-            <a:off x="5120640" y="1124712"/>
-            <a:ext cx="658368" cy="228600"/>
-          </a:xfrm>
-          <a:prstGeom prst="rect">
-            <a:avLst/>
-          </a:prstGeom>
-          <a:solidFill>
-            <a:srgbClr val="DCFCE7"/>
-          </a:solidFill>
-          <a:ln/>
-        </p:spPr>
-      </p:sp>
-      <p:sp>
-        <p:nvSpPr>
-          <p:cNvPr id="15" name="Text 13"/>
-          <p:cNvSpPr/>
-          <p:nvPr/>
-        </p:nvSpPr>
-        <p:spPr>
-          <a:xfrm>
-            <a:off x="5120640" y="1124712"/>
-            <a:ext cx="658368" cy="228600"/>
-          </a:xfrm>
-          <a:prstGeom prst="rect">
-            <a:avLst/>
-          </a:prstGeom>
-          <a:noFill/>
-          <a:ln/>
-        </p:spPr>
-        <p:txBody>
-          <a:bodyPr wrap="square" lIns="0" tIns="0" rIns="0" bIns="0" rtlCol="0" anchor="ctr"/>
-          <a:lstStyle/>
-          <a:p>
-            <a:pPr algn="ctr" indent="0" marL="0">
-              <a:buNone/>
-            </a:pPr>
-            <a:r>
-              <a:rPr lang="en-US" sz="900" b="1" dirty="0">
-                <a:solidFill>
-                  <a:srgbClr val="16A34A"/>
-                </a:solidFill>
-                <a:latin typeface="Arial" pitchFamily="34" charset="0"/>
-                <a:ea typeface="Arial" pitchFamily="34" charset="-122"/>
-                <a:cs typeface="Arial" pitchFamily="34" charset="-120"/>
-              </a:rPr>
-              <a:t>20件+</a:t>
-            </a:r>
-            <a:endParaRPr lang="en-US" sz="900" dirty="0"/>
-          </a:p>
-        </p:txBody>
-      </p:sp>
-      <p:sp>
-        <p:nvSpPr>
-          <p:cNvPr id="16" name="Text 14"/>
-          <p:cNvSpPr/>
-          <p:nvPr/>
-        </p:nvSpPr>
-        <p:spPr>
-          <a:xfrm>
-            <a:off x="3429000" y="1124712"/>
-            <a:ext cx="1645920" cy="274320"/>
-          </a:xfrm>
-          <a:prstGeom prst="rect">
-            <a:avLst/>
-          </a:prstGeom>
-          <a:noFill/>
-          <a:ln/>
-        </p:spPr>
-        <p:txBody>
-          <a:bodyPr wrap="square" lIns="0" tIns="0" rIns="0" bIns="0" rtlCol="0" anchor="ctr"/>
-          <a:lstStyle/>
-          <a:p>
-            <a:pPr indent="0" marL="0">
-              <a:buNone/>
-            </a:pPr>
-            <a:r>
-              <a:rPr lang="en-US" sz="1300" b="1" dirty="0">
-                <a:solidFill>
-                  <a:srgbClr val="1A2744"/>
-                </a:solidFill>
-                <a:latin typeface="Arial" pitchFamily="34" charset="0"/>
-                <a:ea typeface="Arial" pitchFamily="34" charset="-122"/>
-                <a:cs typeface="Arial" pitchFamily="34" charset="-120"/>
-              </a:rPr>
-              <a:t>立地・アクセス</a:t>
-            </a:r>
-            <a:endParaRPr lang="en-US" sz="1300" dirty="0"/>
-          </a:p>
-        </p:txBody>
-      </p:sp>
-      <p:sp>
-        <p:nvSpPr>
-          <p:cNvPr id="17" name="Text 15"/>
-          <p:cNvSpPr/>
-          <p:nvPr/>
-        </p:nvSpPr>
-        <p:spPr>
-          <a:xfrm>
-            <a:off x="3429000" y="1417320"/>
-            <a:ext cx="2377440" cy="365760"/>
-          </a:xfrm>
-          <a:prstGeom prst="rect">
-            <a:avLst/>
-          </a:prstGeom>
-          <a:noFill/>
-          <a:ln/>
-        </p:spPr>
-        <p:txBody>
-          <a:bodyPr wrap="square" lIns="0" tIns="0" rIns="0" bIns="0" rtlCol="0" anchor="ctr"/>
-          <a:lstStyle/>
-          <a:p>
-            <a:pPr indent="0" marL="0">
-              <a:buNone/>
-            </a:pPr>
-            <a:r>
-              <a:rPr lang="en-US" sz="900" dirty="0">
-                <a:solidFill>
-                  <a:srgbClr val="64748B"/>
-                </a:solidFill>
-                <a:latin typeface="Arial" pitchFamily="34" charset="0"/>
-                <a:ea typeface="Arial" pitchFamily="34" charset="-122"/>
-                <a:cs typeface="Arial" pitchFamily="34" charset="-120"/>
-              </a:rPr>
-              <a:t>この近くに来るなら絶対リピしますね 朝食ブッフェは、金額の割にお味噌汁とスープの表記間違えてるし、アイスコーヒーと...</a:t>
-            </a:r>
-            <a:endParaRPr lang="en-US" sz="900" dirty="0"/>
-          </a:p>
-        </p:txBody>
-      </p:sp>
-      <p:sp>
-        <p:nvSpPr>
-          <p:cNvPr id="18" name="Text 16"/>
-          <p:cNvSpPr/>
-          <p:nvPr/>
-        </p:nvSpPr>
-        <p:spPr>
-          <a:xfrm>
-            <a:off x="3429000" y="1828800"/>
-            <a:ext cx="2377440" cy="640080"/>
-          </a:xfrm>
-          <a:prstGeom prst="rect">
-            <a:avLst/>
-          </a:prstGeom>
-          <a:noFill/>
-          <a:ln/>
-        </p:spPr>
-        <p:txBody>
-          <a:bodyPr wrap="square" lIns="0" tIns="0" rIns="0" bIns="0" rtlCol="0" anchor="ctr"/>
-          <a:lstStyle/>
-          <a:p>
-            <a:pPr indent="0" marL="0">
-              <a:buNone/>
-            </a:pPr>
-            <a:r>
-              <a:rPr lang="en-US" sz="900" i="1" dirty="0">
-                <a:solidFill>
-                  <a:srgbClr val="3B7DD8"/>
-                </a:solidFill>
-                <a:latin typeface="Arial" pitchFamily="34" charset="0"/>
-                <a:ea typeface="Arial" pitchFamily="34" charset="-122"/>
-                <a:cs typeface="Arial" pitchFamily="34" charset="-120"/>
-              </a:rPr>
-              <a:t>「Google いろんなホテルに泊まりましたが完璧に近いホテルです」</a:t>
-            </a:r>
-            <a:endParaRPr lang="en-US" sz="900" dirty="0"/>
-          </a:p>
-        </p:txBody>
-      </p:sp>
-      <p:sp>
-        <p:nvSpPr>
-          <p:cNvPr id="19" name="Shape 17"/>
-          <p:cNvSpPr/>
-          <p:nvPr/>
-        </p:nvSpPr>
-        <p:spPr>
-          <a:xfrm>
-            <a:off x="6126480" y="1051560"/>
-            <a:ext cx="2651760" cy="1600200"/>
-          </a:xfrm>
-          <a:prstGeom prst="rect">
-            <a:avLst/>
-          </a:prstGeom>
-          <a:solidFill>
-            <a:srgbClr val="FFFFFF"/>
-          </a:solidFill>
-          <a:ln/>
-          <a:effectLst>
-            <a:outerShdw sx="100000" sy="100000" kx="0" ky="0" algn="bl" rotWithShape="0" blurRad="50800" dist="25400" dir="8100000">
-              <a:srgbClr val="000000">
-                <a:alpha val="10000"/>
-              </a:srgbClr>
-            </a:outerShdw>
-          </a:effectLst>
-        </p:spPr>
-      </p:sp>
-      <p:sp>
-        <p:nvSpPr>
-          <p:cNvPr id="20" name="Shape 18"/>
-          <p:cNvSpPr/>
-          <p:nvPr/>
-        </p:nvSpPr>
-        <p:spPr>
-          <a:xfrm>
-            <a:off x="6126480" y="1051560"/>
-            <a:ext cx="54864" cy="1600200"/>
-          </a:xfrm>
-          <a:prstGeom prst="rect">
-            <a:avLst/>
-          </a:prstGeom>
-          <a:solidFill>
-            <a:srgbClr val="16A34A"/>
-          </a:solidFill>
-          <a:ln/>
-        </p:spPr>
-      </p:sp>
-      <p:sp>
-        <p:nvSpPr>
-          <p:cNvPr id="21" name="Shape 19"/>
-          <p:cNvSpPr/>
-          <p:nvPr/>
-        </p:nvSpPr>
-        <p:spPr>
-          <a:xfrm>
-            <a:off x="7955280" y="1124712"/>
-            <a:ext cx="658368" cy="228600"/>
-          </a:xfrm>
-          <a:prstGeom prst="rect">
-            <a:avLst/>
-          </a:prstGeom>
-          <a:solidFill>
-            <a:srgbClr val="DCFCE7"/>
-          </a:solidFill>
-          <a:ln/>
-        </p:spPr>
-      </p:sp>
-      <p:sp>
-        <p:nvSpPr>
-          <p:cNvPr id="22" name="Text 20"/>
-          <p:cNvSpPr/>
-          <p:nvPr/>
-        </p:nvSpPr>
-        <p:spPr>
-          <a:xfrm>
-            <a:off x="7955280" y="1124712"/>
-            <a:ext cx="658368" cy="228600"/>
-          </a:xfrm>
-          <a:prstGeom prst="rect">
-            <a:avLst/>
-          </a:prstGeom>
-          <a:noFill/>
-          <a:ln/>
-        </p:spPr>
-        <p:txBody>
-          <a:bodyPr wrap="square" lIns="0" tIns="0" rIns="0" bIns="0" rtlCol="0" anchor="ctr"/>
-          <a:lstStyle/>
-          <a:p>
-            <a:pPr algn="ctr" indent="0" marL="0">
-              <a:buNone/>
-            </a:pPr>
-            <a:r>
-              <a:rPr lang="en-US" sz="900" b="1" dirty="0">
-                <a:solidFill>
-                  <a:srgbClr val="16A34A"/>
-                </a:solidFill>
-                <a:latin typeface="Arial" pitchFamily="34" charset="0"/>
-                <a:ea typeface="Arial" pitchFamily="34" charset="-122"/>
-                <a:cs typeface="Arial" pitchFamily="34" charset="-120"/>
-              </a:rPr>
-              <a:t>20件+</a:t>
-            </a:r>
-            <a:endParaRPr lang="en-US" sz="900" dirty="0"/>
-          </a:p>
-        </p:txBody>
-      </p:sp>
-      <p:sp>
-        <p:nvSpPr>
-          <p:cNvPr id="23" name="Text 21"/>
-          <p:cNvSpPr/>
-          <p:nvPr/>
-        </p:nvSpPr>
-        <p:spPr>
-          <a:xfrm>
-            <a:off x="6263640" y="1124712"/>
-            <a:ext cx="1645920" cy="274320"/>
-          </a:xfrm>
-          <a:prstGeom prst="rect">
-            <a:avLst/>
-          </a:prstGeom>
-          <a:noFill/>
-          <a:ln/>
-        </p:spPr>
-        <p:txBody>
-          <a:bodyPr wrap="square" lIns="0" tIns="0" rIns="0" bIns="0" rtlCol="0" anchor="ctr"/>
-          <a:lstStyle/>
-          <a:p>
-            <a:pPr indent="0" marL="0">
-              <a:buNone/>
-            </a:pPr>
-            <a:r>
-              <a:rPr lang="en-US" sz="1300" b="1" dirty="0">
-                <a:solidFill>
-                  <a:srgbClr val="1A2744"/>
-                </a:solidFill>
-                <a:latin typeface="Arial" pitchFamily="34" charset="0"/>
-                <a:ea typeface="Arial" pitchFamily="34" charset="-122"/>
-                <a:cs typeface="Arial" pitchFamily="34" charset="-120"/>
-              </a:rPr>
-              <a:t>快適さ・設備</a:t>
-            </a:r>
-            <a:endParaRPr lang="en-US" sz="1300" dirty="0"/>
-          </a:p>
-        </p:txBody>
-      </p:sp>
-      <p:sp>
-        <p:nvSpPr>
-          <p:cNvPr id="24" name="Text 22"/>
-          <p:cNvSpPr/>
-          <p:nvPr/>
-        </p:nvSpPr>
-        <p:spPr>
-          <a:xfrm>
-            <a:off x="6263640" y="1417320"/>
-            <a:ext cx="2377440" cy="365760"/>
-          </a:xfrm>
-          <a:prstGeom prst="rect">
-            <a:avLst/>
-          </a:prstGeom>
-          <a:noFill/>
-          <a:ln/>
-        </p:spPr>
-        <p:txBody>
-          <a:bodyPr wrap="square" lIns="0" tIns="0" rIns="0" bIns="0" rtlCol="0" anchor="ctr"/>
-          <a:lstStyle/>
-          <a:p>
-            <a:pPr indent="0" marL="0">
-              <a:buNone/>
-            </a:pPr>
-            <a:r>
-              <a:rPr lang="en-US" sz="900" dirty="0">
-                <a:solidFill>
-                  <a:srgbClr val="64748B"/>
-                </a:solidFill>
-                <a:latin typeface="Arial" pitchFamily="34" charset="0"/>
-                <a:ea typeface="Arial" pitchFamily="34" charset="-122"/>
-                <a:cs typeface="Arial" pitchFamily="34" charset="-120"/>
-              </a:rPr>
-              <a:t>アメニティも充実しています</a:t>
-            </a:r>
-            <a:endParaRPr lang="en-US" sz="900" dirty="0"/>
-          </a:p>
-        </p:txBody>
-      </p:sp>
-      <p:sp>
-        <p:nvSpPr>
-          <p:cNvPr id="25" name="Text 23"/>
-          <p:cNvSpPr/>
-          <p:nvPr/>
-        </p:nvSpPr>
-        <p:spPr>
-          <a:xfrm>
-            <a:off x="6263640" y="1828800"/>
-            <a:ext cx="2377440" cy="640080"/>
-          </a:xfrm>
-          <a:prstGeom prst="rect">
-            <a:avLst/>
-          </a:prstGeom>
-          <a:noFill/>
-          <a:ln/>
-        </p:spPr>
-        <p:txBody>
-          <a:bodyPr wrap="square" lIns="0" tIns="0" rIns="0" bIns="0" rtlCol="0" anchor="ctr"/>
-          <a:lstStyle/>
-          <a:p>
-            <a:pPr indent="0" marL="0">
-              <a:buNone/>
-            </a:pPr>
-            <a:r>
-              <a:rPr lang="en-US" sz="900" i="1" dirty="0">
-                <a:solidFill>
-                  <a:srgbClr val="3B7DD8"/>
-                </a:solidFill>
-                <a:latin typeface="Arial" pitchFamily="34" charset="0"/>
-                <a:ea typeface="Arial" pitchFamily="34" charset="-122"/>
-                <a:cs typeface="Arial" pitchFamily="34" charset="-120"/>
-              </a:rPr>
-              <a:t>「値段の割に、、、ですね 部屋は1人で泊まって、大きめのベッドで、良かったです」</a:t>
-            </a:r>
-            <a:endParaRPr lang="en-US" sz="900" dirty="0"/>
-          </a:p>
-        </p:txBody>
-      </p:sp>
-      <p:sp>
-        <p:nvSpPr>
-          <p:cNvPr id="26" name="Shape 24"/>
-          <p:cNvSpPr/>
-          <p:nvPr/>
-        </p:nvSpPr>
-        <p:spPr>
-          <a:xfrm>
-            <a:off x="457200" y="2880360"/>
-            <a:ext cx="2651760" cy="1600200"/>
-          </a:xfrm>
-          <a:prstGeom prst="rect">
-            <a:avLst/>
-          </a:prstGeom>
-          <a:solidFill>
-            <a:srgbClr val="FFFFFF"/>
-          </a:solidFill>
-          <a:ln/>
-          <a:effectLst>
-            <a:outerShdw sx="100000" sy="100000" kx="0" ky="0" algn="bl" rotWithShape="0" blurRad="50800" dist="25400" dir="8100000">
-              <a:srgbClr val="000000">
-                <a:alpha val="10000"/>
-              </a:srgbClr>
-            </a:outerShdw>
-          </a:effectLst>
-        </p:spPr>
-      </p:sp>
-      <p:sp>
-        <p:nvSpPr>
-          <p:cNvPr id="27" name="Shape 25"/>
-          <p:cNvSpPr/>
-          <p:nvPr/>
-        </p:nvSpPr>
-        <p:spPr>
-          <a:xfrm>
-            <a:off x="457200" y="2880360"/>
-            <a:ext cx="54864" cy="1600200"/>
-          </a:xfrm>
-          <a:prstGeom prst="rect">
-            <a:avLst/>
-          </a:prstGeom>
-          <a:solidFill>
-            <a:srgbClr val="16A34A"/>
-          </a:solidFill>
-          <a:ln/>
-        </p:spPr>
-      </p:sp>
-      <p:sp>
-        <p:nvSpPr>
-          <p:cNvPr id="28" name="Shape 26"/>
-          <p:cNvSpPr/>
-          <p:nvPr/>
-        </p:nvSpPr>
-        <p:spPr>
-          <a:xfrm>
-            <a:off x="2286000" y="2953512"/>
-            <a:ext cx="658368" cy="228600"/>
-          </a:xfrm>
-          <a:prstGeom prst="rect">
-            <a:avLst/>
-          </a:prstGeom>
-          <a:solidFill>
-            <a:srgbClr val="DCFCE7"/>
-          </a:solidFill>
-          <a:ln/>
-        </p:spPr>
-      </p:sp>
-      <p:sp>
-        <p:nvSpPr>
-          <p:cNvPr id="29" name="Text 27"/>
-          <p:cNvSpPr/>
-          <p:nvPr/>
-        </p:nvSpPr>
-        <p:spPr>
-          <a:xfrm>
-            <a:off x="2286000" y="2953512"/>
-            <a:ext cx="658368" cy="228600"/>
-          </a:xfrm>
-          <a:prstGeom prst="rect">
-            <a:avLst/>
-          </a:prstGeom>
-          <a:noFill/>
-          <a:ln/>
-        </p:spPr>
-        <p:txBody>
-          <a:bodyPr wrap="square" lIns="0" tIns="0" rIns="0" bIns="0" rtlCol="0" anchor="ctr"/>
-          <a:lstStyle/>
-          <a:p>
-            <a:pPr algn="ctr" indent="0" marL="0">
-              <a:buNone/>
-            </a:pPr>
-            <a:r>
-              <a:rPr lang="en-US" sz="900" b="1" dirty="0">
-                <a:solidFill>
-                  <a:srgbClr val="16A34A"/>
-                </a:solidFill>
-                <a:latin typeface="Arial" pitchFamily="34" charset="0"/>
-                <a:ea typeface="Arial" pitchFamily="34" charset="-122"/>
-                <a:cs typeface="Arial" pitchFamily="34" charset="-120"/>
-              </a:rPr>
-              <a:t>20件+</a:t>
-            </a:r>
-            <a:endParaRPr lang="en-US" sz="900" dirty="0"/>
-          </a:p>
-        </p:txBody>
-      </p:sp>
-      <p:sp>
-        <p:nvSpPr>
-          <p:cNvPr id="30" name="Text 28"/>
-          <p:cNvSpPr/>
-          <p:nvPr/>
-        </p:nvSpPr>
-        <p:spPr>
-          <a:xfrm>
-            <a:off x="594360" y="2953512"/>
-            <a:ext cx="1645920" cy="274320"/>
-          </a:xfrm>
-          <a:prstGeom prst="rect">
-            <a:avLst/>
-          </a:prstGeom>
-          <a:noFill/>
-          <a:ln/>
-        </p:spPr>
-        <p:txBody>
-          <a:bodyPr wrap="square" lIns="0" tIns="0" rIns="0" bIns="0" rtlCol="0" anchor="ctr"/>
-          <a:lstStyle/>
-          <a:p>
-            <a:pPr indent="0" marL="0">
-              <a:buNone/>
-            </a:pPr>
-            <a:r>
-              <a:rPr lang="en-US" sz="1300" b="1" dirty="0">
-                <a:solidFill>
-                  <a:srgbClr val="1A2744"/>
-                </a:solidFill>
-                <a:latin typeface="Arial" pitchFamily="34" charset="0"/>
-                <a:ea typeface="Arial" pitchFamily="34" charset="-122"/>
-                <a:cs typeface="Arial" pitchFamily="34" charset="-120"/>
-              </a:rPr>
-              <a:t>スタッフの対応</a:t>
-            </a:r>
-            <a:endParaRPr lang="en-US" sz="1300" dirty="0"/>
-          </a:p>
-        </p:txBody>
-      </p:sp>
-      <p:sp>
-        <p:nvSpPr>
-          <p:cNvPr id="31" name="Text 29"/>
-          <p:cNvSpPr/>
-          <p:nvPr/>
-        </p:nvSpPr>
-        <p:spPr>
-          <a:xfrm>
-            <a:off x="594360" y="3246120"/>
-            <a:ext cx="2377440" cy="365760"/>
-          </a:xfrm>
-          <a:prstGeom prst="rect">
-            <a:avLst/>
-          </a:prstGeom>
-          <a:noFill/>
-          <a:ln/>
-        </p:spPr>
-        <p:txBody>
-          <a:bodyPr wrap="square" lIns="0" tIns="0" rIns="0" bIns="0" rtlCol="0" anchor="ctr"/>
-          <a:lstStyle/>
-          <a:p>
-            <a:pPr indent="0" marL="0">
-              <a:buNone/>
-            </a:pPr>
-            <a:r>
-              <a:rPr lang="en-US" sz="900" dirty="0">
-                <a:solidFill>
-                  <a:srgbClr val="64748B"/>
-                </a:solidFill>
-                <a:latin typeface="Arial" pitchFamily="34" charset="0"/>
-                <a:ea typeface="Arial" pitchFamily="34" charset="-122"/>
-                <a:cs typeface="Arial" pitchFamily="34" charset="-120"/>
-              </a:rPr>
-              <a:t>com 清潔 受付の対応 受付の対応</a:t>
-            </a:r>
-            <a:endParaRPr lang="en-US" sz="900" dirty="0"/>
-          </a:p>
-        </p:txBody>
-      </p:sp>
-      <p:sp>
-        <p:nvSpPr>
-          <p:cNvPr id="32" name="Text 30"/>
-          <p:cNvSpPr/>
-          <p:nvPr/>
-        </p:nvSpPr>
-        <p:spPr>
-          <a:xfrm>
-            <a:off x="594360" y="3657600"/>
-            <a:ext cx="2377440" cy="640080"/>
-          </a:xfrm>
-          <a:prstGeom prst="rect">
-            <a:avLst/>
-          </a:prstGeom>
-          <a:noFill/>
-          <a:ln/>
-        </p:spPr>
-        <p:txBody>
-          <a:bodyPr wrap="square" lIns="0" tIns="0" rIns="0" bIns="0" rtlCol="0" anchor="ctr"/>
-          <a:lstStyle/>
-          <a:p>
-            <a:pPr indent="0" marL="0">
-              <a:buNone/>
-            </a:pPr>
-            <a:r>
-              <a:rPr lang="en-US" sz="900" i="1" dirty="0">
-                <a:solidFill>
-                  <a:srgbClr val="3B7DD8"/>
-                </a:solidFill>
-                <a:latin typeface="Arial" pitchFamily="34" charset="0"/>
-                <a:ea typeface="Arial" pitchFamily="34" charset="-122"/>
-                <a:cs typeface="Arial" pitchFamily="34" charset="-120"/>
-              </a:rPr>
-              <a:t>「サービス飲料がある」</a:t>
             </a:r>
             <a:endParaRPr lang="en-US" sz="900" dirty="0"/>
           </a:p>

--- a/納品レポート/ホテル別レポート/comment_yokohama_口コミ分析レポート.pptx
+++ b/納品レポート/ホテル別レポート/comment_yokohama_口コミ分析レポート.pptx
@@ -214,13 +214,13 @@
                   <c:v>9.23</c:v>
                 </c:pt>
                 <c:pt idx="2">
-                  <c:v>9.09</c:v>
+                  <c:v>9.17</c:v>
                 </c:pt>
                 <c:pt idx="3">
                   <c:v>9.05</c:v>
                 </c:pt>
                 <c:pt idx="4">
-                  <c:v>8.5</c:v>
+                  <c:v>8.59</c:v>
                 </c:pt>
                 <c:pt idx="5">
                   <c:v>8.21</c:v>
@@ -566,7 +566,7 @@
               <c:numCache>
                 <c:ptCount val="3"/>
                 <c:pt idx="0">
-                  <c:v>87</c:v>
+                  <c:v>90</c:v>
                 </c:pt>
                 <c:pt idx="1">
                   <c:v>17</c:v>
@@ -795,10 +795,10 @@
                 <c:formatCode>General</c:formatCode>
                 <c:ptCount val="7"/>
                 <c:pt idx="0">
-                  <c:v>50</c:v>
+                  <c:v>52</c:v>
                 </c:pt>
                 <c:pt idx="1">
-                  <c:v>16</c:v>
+                  <c:v>17</c:v>
                 </c:pt>
                 <c:pt idx="2">
                   <c:v>21</c:v>
@@ -2764,7 +2764,7 @@
                 <a:ea typeface="Arial" pitchFamily="34" charset="-122"/>
                 <a:cs typeface="Arial" pitchFamily="34" charset="-120"/>
               </a:rPr>
-              <a:t>レビュー総数：105件（6サイト）</a:t>
+              <a:t>レビュー総数：108件（6サイト）</a:t>
             </a:r>
             <a:endParaRPr lang="en-US" sz="1000" dirty="0"/>
           </a:p>
@@ -2784,7 +2784,7 @@
                 <a:ea typeface="Arial" pitchFamily="34" charset="-122"/>
                 <a:cs typeface="Arial" pitchFamily="34" charset="-120"/>
               </a:rPr>
-              <a:t>作成日：2026年3月18日</a:t>
+              <a:t>作成日：2026年3月19日</a:t>
             </a:r>
             <a:endParaRPr lang="en-US" sz="1000" dirty="0"/>
           </a:p>
@@ -3330,7 +3330,7 @@
                           <a:ea typeface="Arial" pitchFamily="34" charset="-122"/>
                           <a:cs typeface="Arial" pitchFamily="34" charset="-120"/>
                         </a:rPr>
-                        <a:t>8.81点</a:t>
+                        <a:t>8.83点</a:t>
                       </a:r>
                       <a:endParaRPr lang="en-US" sz="1000" dirty="0">
                         <a:latin typeface="Arial" charset="0"/>
@@ -3604,7 +3604,7 @@
                           <a:ea typeface="Arial" pitchFamily="34" charset="-122"/>
                           <a:cs typeface="Arial" pitchFamily="34" charset="-120"/>
                         </a:rPr>
-                        <a:t>82.9%</a:t>
+                        <a:t>83.3%</a:t>
                       </a:r>
                       <a:endParaRPr lang="en-US" sz="1000" dirty="0">
                         <a:latin typeface="Arial" charset="0"/>
@@ -3878,7 +3878,7 @@
                           <a:ea typeface="Arial" pitchFamily="34" charset="-122"/>
                           <a:cs typeface="Arial" pitchFamily="34" charset="-120"/>
                         </a:rPr>
-                        <a:t>1.0%</a:t>
+                        <a:t>0.9%</a:t>
                       </a:r>
                       <a:endParaRPr lang="en-US" sz="1000" dirty="0">
                         <a:latin typeface="Arial" charset="0"/>
@@ -5339,7 +5339,7 @@
                 <a:ea typeface="Arial" pitchFamily="34" charset="-122"/>
                 <a:cs typeface="Arial" pitchFamily="34" charset="-120"/>
               </a:rPr>
-              <a:t>8.81</a:t>
+              <a:t>8.83</a:t>
             </a:r>
             <a:endParaRPr lang="en-US" sz="3200" dirty="0"/>
           </a:p>
@@ -5464,7 +5464,7 @@
                 <a:ea typeface="Arial" pitchFamily="34" charset="-122"/>
                 <a:cs typeface="Arial" pitchFamily="34" charset="-120"/>
               </a:rPr>
-              <a:t>82.9%</a:t>
+              <a:t>83.3%</a:t>
             </a:r>
             <a:endParaRPr lang="en-US" sz="3200" dirty="0"/>
           </a:p>
@@ -5589,7 +5589,7 @@
                 <a:ea typeface="Arial" pitchFamily="34" charset="-122"/>
                 <a:cs typeface="Arial" pitchFamily="34" charset="-120"/>
               </a:rPr>
-              <a:t>1.0%</a:t>
+              <a:t>0.9%</a:t>
             </a:r>
             <a:endParaRPr lang="en-US" sz="3200" dirty="0"/>
           </a:p>
@@ -5714,7 +5714,7 @@
                 <a:ea typeface="Arial" pitchFamily="34" charset="-122"/>
                 <a:cs typeface="Arial" pitchFamily="34" charset="-120"/>
               </a:rPr>
-              <a:t>105件</a:t>
+              <a:t>108件</a:t>
             </a:r>
             <a:endParaRPr lang="en-US" sz="3200" dirty="0"/>
           </a:p>
@@ -6523,7 +6523,7 @@
                 <a:ea typeface="Arial" pitchFamily="34" charset="-122"/>
                 <a:cs typeface="Arial" pitchFamily="34" charset="-120"/>
               </a:rPr>
-              <a:t>8.81</a:t>
+              <a:t>8.83</a:t>
             </a:r>
             <a:endParaRPr lang="en-US" sz="3200" dirty="0"/>
           </a:p>
@@ -6648,7 +6648,7 @@
                 <a:ea typeface="Arial" pitchFamily="34" charset="-122"/>
                 <a:cs typeface="Arial" pitchFamily="34" charset="-120"/>
               </a:rPr>
-              <a:t>82.9%</a:t>
+              <a:t>83.3%</a:t>
             </a:r>
             <a:endParaRPr lang="en-US" sz="3200" dirty="0"/>
           </a:p>
@@ -6773,7 +6773,7 @@
                 <a:ea typeface="Arial" pitchFamily="34" charset="-122"/>
                 <a:cs typeface="Arial" pitchFamily="34" charset="-120"/>
               </a:rPr>
-              <a:t>1.0%</a:t>
+              <a:t>0.9%</a:t>
             </a:r>
             <a:endParaRPr lang="en-US" sz="3200" dirty="0"/>
           </a:p>
@@ -6898,7 +6898,7 @@
                 <a:ea typeface="Arial" pitchFamily="34" charset="-122"/>
                 <a:cs typeface="Arial" pitchFamily="34" charset="-120"/>
               </a:rPr>
-              <a:t>105件</a:t>
+              <a:t>108件</a:t>
             </a:r>
             <a:endParaRPr lang="en-US" sz="3200" dirty="0"/>
           </a:p>
@@ -8561,7 +8561,7 @@
                           <a:ea typeface="Arial" pitchFamily="34" charset="-122"/>
                           <a:cs typeface="Arial" pitchFamily="34" charset="-120"/>
                         </a:rPr>
-                        <a:t>11</a:t>
+                        <a:t>12</a:t>
                       </a:r>
                       <a:endParaRPr lang="en-US" sz="900" dirty="0">
                         <a:latin typeface="Arial" charset="0"/>
@@ -8629,7 +8629,7 @@
                           <a:ea typeface="Arial" pitchFamily="34" charset="-122"/>
                           <a:cs typeface="Arial" pitchFamily="34" charset="-120"/>
                         </a:rPr>
-                        <a:t>4.55</a:t>
+                        <a:t>4.58</a:t>
                       </a:r>
                       <a:endParaRPr lang="en-US" sz="900" dirty="0">
                         <a:latin typeface="Arial" charset="0"/>
@@ -8765,7 +8765,7 @@
                           <a:ea typeface="Arial" pitchFamily="34" charset="-122"/>
                           <a:cs typeface="Arial" pitchFamily="34" charset="-120"/>
                         </a:rPr>
-                        <a:t>9.09</a:t>
+                        <a:t>9.17</a:t>
                       </a:r>
                       <a:endParaRPr lang="en-US" sz="900" dirty="0">
                         <a:latin typeface="Arial" charset="0"/>
@@ -9245,7 +9245,7 @@
                           <a:ea typeface="Arial" pitchFamily="34" charset="-122"/>
                           <a:cs typeface="Arial" pitchFamily="34" charset="-120"/>
                         </a:rPr>
-                        <a:t>20</a:t>
+                        <a:t>22</a:t>
                       </a:r>
                       <a:endParaRPr lang="en-US" sz="900" dirty="0">
                         <a:latin typeface="Arial" charset="0"/>
@@ -9313,7 +9313,7 @@
                           <a:ea typeface="Arial" pitchFamily="34" charset="-122"/>
                           <a:cs typeface="Arial" pitchFamily="34" charset="-120"/>
                         </a:rPr>
-                        <a:t>8.5</a:t>
+                        <a:t>8.59</a:t>
                       </a:r>
                       <a:endParaRPr lang="en-US" sz="900" dirty="0">
                         <a:latin typeface="Arial" charset="0"/>
@@ -9449,7 +9449,7 @@
                           <a:ea typeface="Arial" pitchFamily="34" charset="-122"/>
                           <a:cs typeface="Arial" pitchFamily="34" charset="-120"/>
                         </a:rPr>
-                        <a:t>8.5</a:t>
+                        <a:t>8.59</a:t>
                       </a:r>
                       <a:endParaRPr lang="en-US" sz="900" dirty="0">
                         <a:latin typeface="Arial" charset="0"/>
@@ -10199,7 +10199,7 @@
                 <a:ea typeface="Arial" pitchFamily="34" charset="-122"/>
                 <a:cs typeface="Arial" pitchFamily="34" charset="-120"/>
               </a:rPr>
-              <a:t>87件（82.9%）</a:t>
+              <a:t>90件（83.3%）</a:t>
             </a:r>
             <a:endParaRPr lang="en-US" sz="1100" dirty="0"/>
           </a:p>
@@ -10297,7 +10297,7 @@
                 <a:ea typeface="Arial" pitchFamily="34" charset="-122"/>
                 <a:cs typeface="Arial" pitchFamily="34" charset="-120"/>
               </a:rPr>
-              <a:t>17件（16.2%）</a:t>
+              <a:t>17件（15.7%）</a:t>
             </a:r>
             <a:endParaRPr lang="en-US" sz="1100" dirty="0"/>
           </a:p>
@@ -10395,7 +10395,7 @@
                 <a:ea typeface="Arial" pitchFamily="34" charset="-122"/>
                 <a:cs typeface="Arial" pitchFamily="34" charset="-120"/>
               </a:rPr>
-              <a:t>1件（1.0%）</a:t>
+              <a:t>1件（0.9%）</a:t>
             </a:r>
             <a:endParaRPr lang="en-US" sz="1100" dirty="0"/>
           </a:p>
@@ -11292,7 +11292,7 @@
                 <a:ea typeface="Arial" pitchFamily="34" charset="-122"/>
                 <a:cs typeface="Arial" pitchFamily="34" charset="-120"/>
               </a:rPr>
-              <a:t>「アメニティも充実しています」</a:t>
+              <a:t>「部屋は広々としていて、二段ベッドとUSBポートが備え付けられていました」</a:t>
             </a:r>
             <a:endParaRPr lang="en-US" sz="900" dirty="0"/>
           </a:p>
@@ -11476,7 +11476,7 @@
                 <a:ea typeface="Arial" pitchFamily="34" charset="-122"/>
                 <a:cs typeface="Arial" pitchFamily="34" charset="-120"/>
               </a:rPr>
-              <a:t>アカスリがなかったので、フロントにお願いすると、いただけたが、みんなに提供しても良いのでは</a:t>
+              <a:t>com Front desk staff was super nice and helpful with me a...</a:t>
             </a:r>
             <a:endParaRPr lang="en-US" sz="900" dirty="0"/>
           </a:p>
@@ -11515,7 +11515,7 @@
                 <a:ea typeface="Arial" pitchFamily="34" charset="-122"/>
                 <a:cs typeface="Arial" pitchFamily="34" charset="-120"/>
               </a:rPr>
-              <a:t>「com 清潔 受付の対応 受付の対応」</a:t>
+              <a:t>「アカスリがなかったので、フロントにお願いすると、いただけたが、みんなに提供しても良いのでは」</a:t>
             </a:r>
             <a:endParaRPr lang="en-US" sz="900" dirty="0"/>
           </a:p>
@@ -11922,7 +11922,7 @@
                 <a:ea typeface="Arial" pitchFamily="34" charset="-122"/>
                 <a:cs typeface="Arial" pitchFamily="34" charset="-120"/>
               </a:rPr>
-              <a:t>Agoda 残念なのは朝食ブッフェ</a:t>
+              <a:t>朝食は新鮮で種類も豊富で美味しかったです</a:t>
             </a:r>
             <a:endParaRPr lang="en-US" sz="900" dirty="0"/>
           </a:p>
@@ -11961,7 +11961,7 @@
                 <a:ea typeface="Arial" pitchFamily="34" charset="-122"/>
                 <a:cs typeface="Arial" pitchFamily="34" charset="-120"/>
               </a:rPr>
-              <a:t>「朝食も美味しいし種類豊富」</a:t>
+              <a:t>「Agoda 残念なのは朝食ブッフェ」</a:t>
             </a:r>
             <a:endParaRPr lang="en-US" sz="900" dirty="0"/>
           </a:p>

--- a/納品レポート/ホテル別レポート/comment_yokohama_口コミ分析レポート.pptx
+++ b/納品レポート/ホテル別レポート/comment_yokohama_口コミ分析レポート.pptx
@@ -211,19 +211,19 @@
                   <c:v>9.8</c:v>
                 </c:pt>
                 <c:pt idx="1">
-                  <c:v>9.23</c:v>
+                  <c:v>9.2</c:v>
                 </c:pt>
                 <c:pt idx="2">
                   <c:v>9.17</c:v>
                 </c:pt>
                 <c:pt idx="3">
-                  <c:v>9.05</c:v>
+                  <c:v>9.09</c:v>
                 </c:pt>
                 <c:pt idx="4">
                   <c:v>8.59</c:v>
                 </c:pt>
                 <c:pt idx="5">
-                  <c:v>8.21</c:v>
+                  <c:v>8.27</c:v>
                 </c:pt>
               </c:numCache>
             </c:numRef>
@@ -566,7 +566,7 @@
               <c:numCache>
                 <c:ptCount val="3"/>
                 <c:pt idx="0">
-                  <c:v>90</c:v>
+                  <c:v>94</c:v>
                 </c:pt>
                 <c:pt idx="1">
                   <c:v>17</c:v>
@@ -795,13 +795,13 @@
                 <c:formatCode>General</c:formatCode>
                 <c:ptCount val="7"/>
                 <c:pt idx="0">
-                  <c:v>52</c:v>
+                  <c:v>55</c:v>
                 </c:pt>
                 <c:pt idx="1">
                   <c:v>17</c:v>
                 </c:pt>
                 <c:pt idx="2">
-                  <c:v>21</c:v>
+                  <c:v>22</c:v>
                 </c:pt>
                 <c:pt idx="3">
                   <c:v>9</c:v>
@@ -2764,7 +2764,7 @@
                 <a:ea typeface="Arial" pitchFamily="34" charset="-122"/>
                 <a:cs typeface="Arial" pitchFamily="34" charset="-120"/>
               </a:rPr>
-              <a:t>レビュー総数：108件（6サイト）</a:t>
+              <a:t>レビュー総数：112件（6サイト）</a:t>
             </a:r>
             <a:endParaRPr lang="en-US" sz="1000" dirty="0"/>
           </a:p>
@@ -2784,7 +2784,7 @@
                 <a:ea typeface="Arial" pitchFamily="34" charset="-122"/>
                 <a:cs typeface="Arial" pitchFamily="34" charset="-120"/>
               </a:rPr>
-              <a:t>作成日：2026年3月19日</a:t>
+              <a:t>作成日：2026年3月20日</a:t>
             </a:r>
             <a:endParaRPr lang="en-US" sz="1000" dirty="0"/>
           </a:p>
@@ -3330,7 +3330,7 @@
                           <a:ea typeface="Arial" pitchFamily="34" charset="-122"/>
                           <a:cs typeface="Arial" pitchFamily="34" charset="-120"/>
                         </a:rPr>
-                        <a:t>8.83点</a:t>
+                        <a:t>8.86点</a:t>
                       </a:r>
                       <a:endParaRPr lang="en-US" sz="1000" dirty="0">
                         <a:latin typeface="Arial" charset="0"/>
@@ -3398,7 +3398,7 @@
                           <a:ea typeface="Arial" pitchFamily="34" charset="-122"/>
                           <a:cs typeface="Arial" pitchFamily="34" charset="-120"/>
                         </a:rPr>
-                        <a:t>9.1点以上</a:t>
+                        <a:t>9.2点以上</a:t>
                       </a:r>
                       <a:endParaRPr lang="en-US" sz="1000" dirty="0">
                         <a:latin typeface="Arial" charset="0"/>
@@ -3604,7 +3604,7 @@
                           <a:ea typeface="Arial" pitchFamily="34" charset="-122"/>
                           <a:cs typeface="Arial" pitchFamily="34" charset="-120"/>
                         </a:rPr>
-                        <a:t>83.3%</a:t>
+                        <a:t>83.9%</a:t>
                       </a:r>
                       <a:endParaRPr lang="en-US" sz="1000" dirty="0">
                         <a:latin typeface="Arial" charset="0"/>
@@ -3672,7 +3672,7 @@
                           <a:ea typeface="Arial" pitchFamily="34" charset="-122"/>
                           <a:cs typeface="Arial" pitchFamily="34" charset="-120"/>
                         </a:rPr>
-                        <a:t>88%以上</a:t>
+                        <a:t>89%以上</a:t>
                       </a:r>
                       <a:endParaRPr lang="en-US" sz="1000" dirty="0">
                         <a:latin typeface="Arial" charset="0"/>
@@ -4152,7 +4152,7 @@
                           <a:ea typeface="Arial" pitchFamily="34" charset="-122"/>
                           <a:cs typeface="Arial" pitchFamily="34" charset="-120"/>
                         </a:rPr>
-                        <a:t>8.2点</a:t>
+                        <a:t>8.3点</a:t>
                       </a:r>
                       <a:endParaRPr lang="en-US" sz="1000" dirty="0">
                         <a:latin typeface="Arial" charset="0"/>
@@ -4220,7 +4220,7 @@
                           <a:ea typeface="Arial" pitchFamily="34" charset="-122"/>
                           <a:cs typeface="Arial" pitchFamily="34" charset="-120"/>
                         </a:rPr>
-                        <a:t>9.2点以上</a:t>
+                        <a:t>9.3点以上</a:t>
                       </a:r>
                       <a:endParaRPr lang="en-US" sz="1000" dirty="0">
                         <a:latin typeface="Arial" charset="0"/>
@@ -5339,7 +5339,7 @@
                 <a:ea typeface="Arial" pitchFamily="34" charset="-122"/>
                 <a:cs typeface="Arial" pitchFamily="34" charset="-120"/>
               </a:rPr>
-              <a:t>8.83</a:t>
+              <a:t>8.86</a:t>
             </a:r>
             <a:endParaRPr lang="en-US" sz="3200" dirty="0"/>
           </a:p>
@@ -5464,7 +5464,7 @@
                 <a:ea typeface="Arial" pitchFamily="34" charset="-122"/>
                 <a:cs typeface="Arial" pitchFamily="34" charset="-120"/>
               </a:rPr>
-              <a:t>83.3%</a:t>
+              <a:t>83.9%</a:t>
             </a:r>
             <a:endParaRPr lang="en-US" sz="3200" dirty="0"/>
           </a:p>
@@ -5714,7 +5714,7 @@
                 <a:ea typeface="Arial" pitchFamily="34" charset="-122"/>
                 <a:cs typeface="Arial" pitchFamily="34" charset="-120"/>
               </a:rPr>
-              <a:t>108件</a:t>
+              <a:t>112件</a:t>
             </a:r>
             <a:endParaRPr lang="en-US" sz="3200" dirty="0"/>
           </a:p>
@@ -5862,7 +5862,7 @@
                 <a:ea typeface="Arial" pitchFamily="34" charset="-122"/>
                 <a:cs typeface="Arial" pitchFamily="34" charset="-120"/>
               </a:rPr>
-              <a:t>  部屋も清潔で、とにかくシンプルな滞在におすすめです</a:t>
+              <a:t>  ホテル自体もとても清潔で今後も利用したいと思います</a:t>
             </a:r>
             <a:endParaRPr lang="en-US" sz="1100" dirty="0"/>
           </a:p>
@@ -5902,7 +5902,7 @@
                 <a:ea typeface="Arial" pitchFamily="34" charset="-122"/>
                 <a:cs typeface="Arial" pitchFamily="34" charset="-120"/>
               </a:rPr>
-              <a:t>  この近くに来るなら絶対リピしますね 朝食ブッフェは、金額の割にお味噌汁とスープの表記間違えてるし、アイスコーヒーと...</a:t>
+              <a:t>  関内駅から徒歩圏内で行きやすかったです</a:t>
             </a:r>
             <a:endParaRPr lang="en-US" sz="1100" dirty="0"/>
           </a:p>
@@ -5942,7 +5942,7 @@
                 <a:ea typeface="Arial" pitchFamily="34" charset="-122"/>
                 <a:cs typeface="Arial" pitchFamily="34" charset="-120"/>
               </a:rPr>
-              <a:t>  しかし、水も備品も不要という方には快適かもしれません</a:t>
+              <a:t>  静かで快適に過ごすことができました</a:t>
             </a:r>
             <a:endParaRPr lang="en-US" sz="1100" dirty="0"/>
           </a:p>
@@ -6523,7 +6523,7 @@
                 <a:ea typeface="Arial" pitchFamily="34" charset="-122"/>
                 <a:cs typeface="Arial" pitchFamily="34" charset="-120"/>
               </a:rPr>
-              <a:t>8.83</a:t>
+              <a:t>8.86</a:t>
             </a:r>
             <a:endParaRPr lang="en-US" sz="3200" dirty="0"/>
           </a:p>
@@ -6648,7 +6648,7 @@
                 <a:ea typeface="Arial" pitchFamily="34" charset="-122"/>
                 <a:cs typeface="Arial" pitchFamily="34" charset="-120"/>
               </a:rPr>
-              <a:t>83.3%</a:t>
+              <a:t>83.9%</a:t>
             </a:r>
             <a:endParaRPr lang="en-US" sz="3200" dirty="0"/>
           </a:p>
@@ -6898,7 +6898,7 @@
                 <a:ea typeface="Arial" pitchFamily="34" charset="-122"/>
                 <a:cs typeface="Arial" pitchFamily="34" charset="-120"/>
               </a:rPr>
-              <a:t>108件</a:t>
+              <a:t>112件</a:t>
             </a:r>
             <a:endParaRPr lang="en-US" sz="3200" dirty="0"/>
           </a:p>
@@ -7368,7 +7368,7 @@
                 <a:ea typeface="Arial" pitchFamily="34" charset="-122"/>
                 <a:cs typeface="Arial" pitchFamily="34" charset="-120"/>
               </a:rPr>
-              <a:t>Agoda(8.2)が相対的に低い。口コミ返信の強化が急務</a:t>
+              <a:t>Agoda(8.3)が相対的に低い。口コミ返信の強化が急務</a:t>
             </a:r>
             <a:endParaRPr lang="en-US" sz="1100" dirty="0"/>
           </a:p>
@@ -8219,7 +8219,7 @@
                           <a:ea typeface="Arial" pitchFamily="34" charset="-122"/>
                           <a:cs typeface="Arial" pitchFamily="34" charset="-120"/>
                         </a:rPr>
-                        <a:t>13</a:t>
+                        <a:t>15</a:t>
                       </a:r>
                       <a:endParaRPr lang="en-US" sz="900" dirty="0">
                         <a:latin typeface="Arial" charset="0"/>
@@ -8287,7 +8287,7 @@
                           <a:ea typeface="Arial" pitchFamily="34" charset="-122"/>
                           <a:cs typeface="Arial" pitchFamily="34" charset="-120"/>
                         </a:rPr>
-                        <a:t>4.62</a:t>
+                        <a:t>4.6</a:t>
                       </a:r>
                       <a:endParaRPr lang="en-US" sz="900" dirty="0">
                         <a:latin typeface="Arial" charset="0"/>
@@ -8423,7 +8423,7 @@
                           <a:ea typeface="Arial" pitchFamily="34" charset="-122"/>
                           <a:cs typeface="Arial" pitchFamily="34" charset="-120"/>
                         </a:rPr>
-                        <a:t>9.23</a:t>
+                        <a:t>9.2</a:t>
                       </a:r>
                       <a:endParaRPr lang="en-US" sz="900" dirty="0">
                         <a:latin typeface="Arial" charset="0"/>
@@ -8903,7 +8903,7 @@
                           <a:ea typeface="Arial" pitchFamily="34" charset="-122"/>
                           <a:cs typeface="Arial" pitchFamily="34" charset="-120"/>
                         </a:rPr>
-                        <a:t>22</a:t>
+                        <a:t>23</a:t>
                       </a:r>
                       <a:endParaRPr lang="en-US" sz="900" dirty="0">
                         <a:latin typeface="Arial" charset="0"/>
@@ -8971,7 +8971,7 @@
                           <a:ea typeface="Arial" pitchFamily="34" charset="-122"/>
                           <a:cs typeface="Arial" pitchFamily="34" charset="-120"/>
                         </a:rPr>
-                        <a:t>9.05</a:t>
+                        <a:t>9.09</a:t>
                       </a:r>
                       <a:endParaRPr lang="en-US" sz="900" dirty="0">
                         <a:latin typeface="Arial" charset="0"/>
@@ -9107,7 +9107,7 @@
                           <a:ea typeface="Arial" pitchFamily="34" charset="-122"/>
                           <a:cs typeface="Arial" pitchFamily="34" charset="-120"/>
                         </a:rPr>
-                        <a:t>9.05</a:t>
+                        <a:t>9.09</a:t>
                       </a:r>
                       <a:endParaRPr lang="en-US" sz="900" dirty="0">
                         <a:latin typeface="Arial" charset="0"/>
@@ -9587,7 +9587,7 @@
                           <a:ea typeface="Arial" pitchFamily="34" charset="-122"/>
                           <a:cs typeface="Arial" pitchFamily="34" charset="-120"/>
                         </a:rPr>
-                        <a:t>29</a:t>
+                        <a:t>30</a:t>
                       </a:r>
                       <a:endParaRPr lang="en-US" sz="900" dirty="0">
                         <a:latin typeface="Arial" charset="0"/>
@@ -9655,7 +9655,7 @@
                           <a:ea typeface="Arial" pitchFamily="34" charset="-122"/>
                           <a:cs typeface="Arial" pitchFamily="34" charset="-120"/>
                         </a:rPr>
-                        <a:t>8.21</a:t>
+                        <a:t>8.27</a:t>
                       </a:r>
                       <a:endParaRPr lang="en-US" sz="900" dirty="0">
                         <a:latin typeface="Arial" charset="0"/>
@@ -9791,7 +9791,7 @@
                           <a:ea typeface="Arial" pitchFamily="34" charset="-122"/>
                           <a:cs typeface="Arial" pitchFamily="34" charset="-120"/>
                         </a:rPr>
-                        <a:t>8.21</a:t>
+                        <a:t>8.27</a:t>
                       </a:r>
                       <a:endParaRPr lang="en-US" sz="900" dirty="0">
                         <a:latin typeface="Arial" charset="0"/>
@@ -10199,7 +10199,7 @@
                 <a:ea typeface="Arial" pitchFamily="34" charset="-122"/>
                 <a:cs typeface="Arial" pitchFamily="34" charset="-120"/>
               </a:rPr>
-              <a:t>90件（83.3%）</a:t>
+              <a:t>94件（83.9%）</a:t>
             </a:r>
             <a:endParaRPr lang="en-US" sz="1100" dirty="0"/>
           </a:p>
@@ -10297,7 +10297,7 @@
                 <a:ea typeface="Arial" pitchFamily="34" charset="-122"/>
                 <a:cs typeface="Arial" pitchFamily="34" charset="-120"/>
               </a:rPr>
-              <a:t>17件（15.7%）</a:t>
+              <a:t>17件（15.2%）</a:t>
             </a:r>
             <a:endParaRPr lang="en-US" sz="1100" dirty="0"/>
           </a:p>
@@ -10807,7 +10807,7 @@
                 <a:ea typeface="Arial" pitchFamily="34" charset="-122"/>
                 <a:cs typeface="Arial" pitchFamily="34" charset="-120"/>
               </a:rPr>
-              <a:t>部屋も清潔で、とにかくシンプルな滞在におすすめです</a:t>
+              <a:t>ホテル自体もとても清潔で今後も利用したいと思います</a:t>
             </a:r>
             <a:endParaRPr lang="en-US" sz="900" dirty="0"/>
           </a:p>
@@ -10846,7 +10846,7 @@
                 <a:ea typeface="Arial" pitchFamily="34" charset="-122"/>
                 <a:cs typeface="Arial" pitchFamily="34" charset="-120"/>
               </a:rPr>
-              <a:t>「com とても清潔かつ、大浴場も広くサウナも水風呂も付いていて良かったです」</a:t>
+              <a:t>「内装もすてきで清潔感のあるホテルでした」</a:t>
             </a:r>
             <a:endParaRPr lang="en-US" sz="900" dirty="0"/>
           </a:p>
@@ -11030,7 +11030,7 @@
                 <a:ea typeface="Arial" pitchFamily="34" charset="-122"/>
                 <a:cs typeface="Arial" pitchFamily="34" charset="-120"/>
               </a:rPr>
-              <a:t>この近くに来るなら絶対リピしますね 朝食ブッフェは、金額の割にお味噌汁とスープの表記間違えてるし、アイスコーヒーと...</a:t>
+              <a:t>関内駅から徒歩圏内で行きやすかったです</a:t>
             </a:r>
             <a:endParaRPr lang="en-US" sz="900" dirty="0"/>
           </a:p>
@@ -11069,7 +11069,7 @@
                 <a:ea typeface="Arial" pitchFamily="34" charset="-122"/>
                 <a:cs typeface="Arial" pitchFamily="34" charset="-120"/>
               </a:rPr>
-              <a:t>「Google いろんなホテルに泊まりましたが完璧に近いホテルです」</a:t>
+              <a:t>「この近くに来るなら絶対リピしますね 朝食ブッフェは、金額の割にお味噌汁とスープの表記間違えてるし、アイスコーヒーと...」</a:t>
             </a:r>
             <a:endParaRPr lang="en-US" sz="900" dirty="0"/>
           </a:p>
@@ -11253,7 +11253,7 @@
                 <a:ea typeface="Arial" pitchFamily="34" charset="-122"/>
                 <a:cs typeface="Arial" pitchFamily="34" charset="-120"/>
               </a:rPr>
-              <a:t>しかし、水も備品も不要という方には快適かもしれません</a:t>
+              <a:t>静かで快適に過ごすことができました</a:t>
             </a:r>
             <a:endParaRPr lang="en-US" sz="900" dirty="0"/>
           </a:p>
@@ -11292,7 +11292,7 @@
                 <a:ea typeface="Arial" pitchFamily="34" charset="-122"/>
                 <a:cs typeface="Arial" pitchFamily="34" charset="-120"/>
               </a:rPr>
-              <a:t>「部屋は広々としていて、二段ベッドとUSBポートが備え付けられていました」</a:t>
+              <a:t>「ゆったりとしたベッドでぐっすりと眠れました」</a:t>
             </a:r>
             <a:endParaRPr lang="en-US" sz="900" dirty="0"/>
           </a:p>
@@ -11476,7 +11476,7 @@
                 <a:ea typeface="Arial" pitchFamily="34" charset="-122"/>
                 <a:cs typeface="Arial" pitchFamily="34" charset="-120"/>
               </a:rPr>
-              <a:t>com Front desk staff was super nice and helpful with me a...</a:t>
+              <a:t>宿泊前後に荷物を預けさせてもらいましたが、快く対応してくださりありがたかったです</a:t>
             </a:r>
             <a:endParaRPr lang="en-US" sz="900" dirty="0"/>
           </a:p>
@@ -11515,7 +11515,7 @@
                 <a:ea typeface="Arial" pitchFamily="34" charset="-122"/>
                 <a:cs typeface="Arial" pitchFamily="34" charset="-120"/>
               </a:rPr>
-              <a:t>「アカスリがなかったので、フロントにお願いすると、いただけたが、みんなに提供しても良いのでは」</a:t>
+              <a:t>「com Front desk staff was super nice and helpful with me a...」</a:t>
             </a:r>
             <a:endParaRPr lang="en-US" sz="900" dirty="0"/>
           </a:p>
@@ -11922,7 +11922,7 @@
                 <a:ea typeface="Arial" pitchFamily="34" charset="-122"/>
                 <a:cs typeface="Arial" pitchFamily="34" charset="-120"/>
               </a:rPr>
-              <a:t>朝食は新鮮で種類も豊富で美味しかったです</a:t>
+              <a:t>楽天トラベル 朝食バイキングの種類も豊富で、会場も落ち着いた雰囲気で綺麗</a:t>
             </a:r>
             <a:endParaRPr lang="en-US" sz="900" dirty="0"/>
           </a:p>
@@ -11961,7 +11961,7 @@
                 <a:ea typeface="Arial" pitchFamily="34" charset="-122"/>
                 <a:cs typeface="Arial" pitchFamily="34" charset="-120"/>
               </a:rPr>
-              <a:t>「Agoda 残念なのは朝食ブッフェ」</a:t>
+              <a:t>「朝食は新鮮で種類も豊富で美味しかったです」</a:t>
             </a:r>
             <a:endParaRPr lang="en-US" sz="900" dirty="0"/>
           </a:p>
@@ -12993,7 +12993,7 @@
                           <a:ea typeface="Arial" pitchFamily="34" charset="-122"/>
                           <a:cs typeface="Arial" pitchFamily="34" charset="-120"/>
                         </a:rPr>
-                        <a:t>12件</a:t>
+                        <a:t>11件</a:t>
                       </a:r>
                       <a:endParaRPr lang="en-US" sz="900" dirty="0">
                         <a:latin typeface="Arial" charset="0"/>

--- a/納品レポート/ホテル別レポート/comment_yokohama_口コミ分析レポート.pptx
+++ b/納品レポート/ホテル別レポート/comment_yokohama_口コミ分析レポート.pptx
@@ -211,7 +211,7 @@
                   <c:v>9.8</c:v>
                 </c:pt>
                 <c:pt idx="1">
-                  <c:v>9.2</c:v>
+                  <c:v>9.25</c:v>
                 </c:pt>
                 <c:pt idx="2">
                   <c:v>9.17</c:v>
@@ -220,7 +220,7 @@
                   <c:v>9.09</c:v>
                 </c:pt>
                 <c:pt idx="4">
-                  <c:v>8.59</c:v>
+                  <c:v>8.61</c:v>
                 </c:pt>
                 <c:pt idx="5">
                   <c:v>8.27</c:v>
@@ -566,7 +566,7 @@
               <c:numCache>
                 <c:ptCount val="3"/>
                 <c:pt idx="0">
-                  <c:v>94</c:v>
+                  <c:v>96</c:v>
                 </c:pt>
                 <c:pt idx="1">
                   <c:v>17</c:v>
@@ -795,10 +795,10 @@
                 <c:formatCode>General</c:formatCode>
                 <c:ptCount val="7"/>
                 <c:pt idx="0">
-                  <c:v>55</c:v>
+                  <c:v>56</c:v>
                 </c:pt>
                 <c:pt idx="1">
-                  <c:v>17</c:v>
+                  <c:v>18</c:v>
                 </c:pt>
                 <c:pt idx="2">
                   <c:v>22</c:v>
@@ -2764,7 +2764,7 @@
                 <a:ea typeface="Arial" pitchFamily="34" charset="-122"/>
                 <a:cs typeface="Arial" pitchFamily="34" charset="-120"/>
               </a:rPr>
-              <a:t>レビュー総数：112件（6サイト）</a:t>
+              <a:t>レビュー総数：114件（6サイト）</a:t>
             </a:r>
             <a:endParaRPr lang="en-US" sz="1000" dirty="0"/>
           </a:p>
@@ -2784,7 +2784,7 @@
                 <a:ea typeface="Arial" pitchFamily="34" charset="-122"/>
                 <a:cs typeface="Arial" pitchFamily="34" charset="-120"/>
               </a:rPr>
-              <a:t>作成日：2026年3月20日</a:t>
+              <a:t>作成日：2026年3月21日</a:t>
             </a:r>
             <a:endParaRPr lang="en-US" sz="1000" dirty="0"/>
           </a:p>
@@ -3330,7 +3330,7 @@
                           <a:ea typeface="Arial" pitchFamily="34" charset="-122"/>
                           <a:cs typeface="Arial" pitchFamily="34" charset="-120"/>
                         </a:rPr>
-                        <a:t>8.86点</a:t>
+                        <a:t>8.87点</a:t>
                       </a:r>
                       <a:endParaRPr lang="en-US" sz="1000" dirty="0">
                         <a:latin typeface="Arial" charset="0"/>
@@ -3604,7 +3604,7 @@
                           <a:ea typeface="Arial" pitchFamily="34" charset="-122"/>
                           <a:cs typeface="Arial" pitchFamily="34" charset="-120"/>
                         </a:rPr>
-                        <a:t>83.9%</a:t>
+                        <a:t>84.2%</a:t>
                       </a:r>
                       <a:endParaRPr lang="en-US" sz="1000" dirty="0">
                         <a:latin typeface="Arial" charset="0"/>
@@ -5339,7 +5339,7 @@
                 <a:ea typeface="Arial" pitchFamily="34" charset="-122"/>
                 <a:cs typeface="Arial" pitchFamily="34" charset="-120"/>
               </a:rPr>
-              <a:t>8.86</a:t>
+              <a:t>8.87</a:t>
             </a:r>
             <a:endParaRPr lang="en-US" sz="3200" dirty="0"/>
           </a:p>
@@ -5464,7 +5464,7 @@
                 <a:ea typeface="Arial" pitchFamily="34" charset="-122"/>
                 <a:cs typeface="Arial" pitchFamily="34" charset="-120"/>
               </a:rPr>
-              <a:t>83.9%</a:t>
+              <a:t>84.2%</a:t>
             </a:r>
             <a:endParaRPr lang="en-US" sz="3200" dirty="0"/>
           </a:p>
@@ -5714,7 +5714,7 @@
                 <a:ea typeface="Arial" pitchFamily="34" charset="-122"/>
                 <a:cs typeface="Arial" pitchFamily="34" charset="-120"/>
               </a:rPr>
-              <a:t>112件</a:t>
+              <a:t>114件</a:t>
             </a:r>
             <a:endParaRPr lang="en-US" sz="3200" dirty="0"/>
           </a:p>
@@ -5862,7 +5862,7 @@
                 <a:ea typeface="Arial" pitchFamily="34" charset="-122"/>
                 <a:cs typeface="Arial" pitchFamily="34" charset="-120"/>
               </a:rPr>
-              <a:t>  ホテル自体もとても清潔で今後も利用したいと思います</a:t>
+              <a:t>  楽天トラベル とても広くて清潔で子供達も喜んでました</a:t>
             </a:r>
             <a:endParaRPr lang="en-US" sz="1100" dirty="0"/>
           </a:p>
@@ -6523,7 +6523,7 @@
                 <a:ea typeface="Arial" pitchFamily="34" charset="-122"/>
                 <a:cs typeface="Arial" pitchFamily="34" charset="-120"/>
               </a:rPr>
-              <a:t>8.86</a:t>
+              <a:t>8.87</a:t>
             </a:r>
             <a:endParaRPr lang="en-US" sz="3200" dirty="0"/>
           </a:p>
@@ -6648,7 +6648,7 @@
                 <a:ea typeface="Arial" pitchFamily="34" charset="-122"/>
                 <a:cs typeface="Arial" pitchFamily="34" charset="-120"/>
               </a:rPr>
-              <a:t>83.9%</a:t>
+              <a:t>84.2%</a:t>
             </a:r>
             <a:endParaRPr lang="en-US" sz="3200" dirty="0"/>
           </a:p>
@@ -6898,7 +6898,7 @@
                 <a:ea typeface="Arial" pitchFamily="34" charset="-122"/>
                 <a:cs typeface="Arial" pitchFamily="34" charset="-120"/>
               </a:rPr>
-              <a:t>112件</a:t>
+              <a:t>114件</a:t>
             </a:r>
             <a:endParaRPr lang="en-US" sz="3200" dirty="0"/>
           </a:p>
@@ -8219,7 +8219,7 @@
                           <a:ea typeface="Arial" pitchFamily="34" charset="-122"/>
                           <a:cs typeface="Arial" pitchFamily="34" charset="-120"/>
                         </a:rPr>
-                        <a:t>15</a:t>
+                        <a:t>16</a:t>
                       </a:r>
                       <a:endParaRPr lang="en-US" sz="900" dirty="0">
                         <a:latin typeface="Arial" charset="0"/>
@@ -8287,7 +8287,7 @@
                           <a:ea typeface="Arial" pitchFamily="34" charset="-122"/>
                           <a:cs typeface="Arial" pitchFamily="34" charset="-120"/>
                         </a:rPr>
-                        <a:t>4.6</a:t>
+                        <a:t>4.62</a:t>
                       </a:r>
                       <a:endParaRPr lang="en-US" sz="900" dirty="0">
                         <a:latin typeface="Arial" charset="0"/>
@@ -8423,7 +8423,7 @@
                           <a:ea typeface="Arial" pitchFamily="34" charset="-122"/>
                           <a:cs typeface="Arial" pitchFamily="34" charset="-120"/>
                         </a:rPr>
-                        <a:t>9.2</a:t>
+                        <a:t>9.25</a:t>
                       </a:r>
                       <a:endParaRPr lang="en-US" sz="900" dirty="0">
                         <a:latin typeface="Arial" charset="0"/>
@@ -9245,7 +9245,7 @@
                           <a:ea typeface="Arial" pitchFamily="34" charset="-122"/>
                           <a:cs typeface="Arial" pitchFamily="34" charset="-120"/>
                         </a:rPr>
-                        <a:t>22</a:t>
+                        <a:t>23</a:t>
                       </a:r>
                       <a:endParaRPr lang="en-US" sz="900" dirty="0">
                         <a:latin typeface="Arial" charset="0"/>
@@ -9313,7 +9313,7 @@
                           <a:ea typeface="Arial" pitchFamily="34" charset="-122"/>
                           <a:cs typeface="Arial" pitchFamily="34" charset="-120"/>
                         </a:rPr>
-                        <a:t>8.59</a:t>
+                        <a:t>8.61</a:t>
                       </a:r>
                       <a:endParaRPr lang="en-US" sz="900" dirty="0">
                         <a:latin typeface="Arial" charset="0"/>
@@ -9449,7 +9449,7 @@
                           <a:ea typeface="Arial" pitchFamily="34" charset="-122"/>
                           <a:cs typeface="Arial" pitchFamily="34" charset="-120"/>
                         </a:rPr>
-                        <a:t>8.59</a:t>
+                        <a:t>8.61</a:t>
                       </a:r>
                       <a:endParaRPr lang="en-US" sz="900" dirty="0">
                         <a:latin typeface="Arial" charset="0"/>
@@ -10199,7 +10199,7 @@
                 <a:ea typeface="Arial" pitchFamily="34" charset="-122"/>
                 <a:cs typeface="Arial" pitchFamily="34" charset="-120"/>
               </a:rPr>
-              <a:t>94件（83.9%）</a:t>
+              <a:t>96件（84.2%）</a:t>
             </a:r>
             <a:endParaRPr lang="en-US" sz="1100" dirty="0"/>
           </a:p>
@@ -10297,7 +10297,7 @@
                 <a:ea typeface="Arial" pitchFamily="34" charset="-122"/>
                 <a:cs typeface="Arial" pitchFamily="34" charset="-120"/>
               </a:rPr>
-              <a:t>17件（15.2%）</a:t>
+              <a:t>17件（14.9%）</a:t>
             </a:r>
             <a:endParaRPr lang="en-US" sz="1100" dirty="0"/>
           </a:p>
@@ -10807,7 +10807,7 @@
                 <a:ea typeface="Arial" pitchFamily="34" charset="-122"/>
                 <a:cs typeface="Arial" pitchFamily="34" charset="-120"/>
               </a:rPr>
-              <a:t>ホテル自体もとても清潔で今後も利用したいと思います</a:t>
+              <a:t>楽天トラベル とても広くて清潔で子供達も喜んでました</a:t>
             </a:r>
             <a:endParaRPr lang="en-US" sz="900" dirty="0"/>
           </a:p>
@@ -10846,7 +10846,7 @@
                 <a:ea typeface="Arial" pitchFamily="34" charset="-122"/>
                 <a:cs typeface="Arial" pitchFamily="34" charset="-120"/>
               </a:rPr>
-              <a:t>「内装もすてきで清潔感のあるホテルでした」</a:t>
+              <a:t>「ホテル自体もとても清潔で今後も利用したいと思います」</a:t>
             </a:r>
             <a:endParaRPr lang="en-US" sz="900" dirty="0"/>
           </a:p>

--- a/納品レポート/ホテル別レポート/comment_yokohama_口コミ分析レポート.pptx
+++ b/納品レポート/ホテル別レポート/comment_yokohama_口コミ分析レポート.pptx
@@ -208,10 +208,10 @@
                 <c:formatCode>General</c:formatCode>
                 <c:ptCount val="6"/>
                 <c:pt idx="0">
-                  <c:v>9.8</c:v>
+                  <c:v>9.82</c:v>
                 </c:pt>
                 <c:pt idx="1">
-                  <c:v>9.25</c:v>
+                  <c:v>9.29</c:v>
                 </c:pt>
                 <c:pt idx="2">
                   <c:v>9.17</c:v>
@@ -220,10 +220,10 @@
                   <c:v>9.09</c:v>
                 </c:pt>
                 <c:pt idx="4">
-                  <c:v>8.61</c:v>
+                  <c:v>8.58</c:v>
                 </c:pt>
                 <c:pt idx="5">
-                  <c:v>8.27</c:v>
+                  <c:v>8.29</c:v>
                 </c:pt>
               </c:numCache>
             </c:numRef>
@@ -566,7 +566,7 @@
               <c:numCache>
                 <c:ptCount val="3"/>
                 <c:pt idx="0">
-                  <c:v>96</c:v>
+                  <c:v>100</c:v>
                 </c:pt>
                 <c:pt idx="1">
                   <c:v>17</c:v>
@@ -795,13 +795,13 @@
                 <c:formatCode>General</c:formatCode>
                 <c:ptCount val="7"/>
                 <c:pt idx="0">
-                  <c:v>56</c:v>
+                  <c:v>58</c:v>
                 </c:pt>
                 <c:pt idx="1">
-                  <c:v>18</c:v>
+                  <c:v>19</c:v>
                 </c:pt>
                 <c:pt idx="2">
-                  <c:v>22</c:v>
+                  <c:v>23</c:v>
                 </c:pt>
                 <c:pt idx="3">
                   <c:v>9</c:v>
@@ -2764,7 +2764,7 @@
                 <a:ea typeface="Arial" pitchFamily="34" charset="-122"/>
                 <a:cs typeface="Arial" pitchFamily="34" charset="-120"/>
               </a:rPr>
-              <a:t>レビュー総数：114件（6サイト）</a:t>
+              <a:t>レビュー総数：118件（6サイト）</a:t>
             </a:r>
             <a:endParaRPr lang="en-US" sz="1000" dirty="0"/>
           </a:p>
@@ -2784,7 +2784,7 @@
                 <a:ea typeface="Arial" pitchFamily="34" charset="-122"/>
                 <a:cs typeface="Arial" pitchFamily="34" charset="-120"/>
               </a:rPr>
-              <a:t>作成日：2026年3月21日</a:t>
+              <a:t>作成日：2026年3月23日</a:t>
             </a:r>
             <a:endParaRPr lang="en-US" sz="1000" dirty="0"/>
           </a:p>
@@ -3330,7 +3330,7 @@
                           <a:ea typeface="Arial" pitchFamily="34" charset="-122"/>
                           <a:cs typeface="Arial" pitchFamily="34" charset="-120"/>
                         </a:rPr>
-                        <a:t>8.87点</a:t>
+                        <a:t>8.88点</a:t>
                       </a:r>
                       <a:endParaRPr lang="en-US" sz="1000" dirty="0">
                         <a:latin typeface="Arial" charset="0"/>
@@ -3604,7 +3604,7 @@
                           <a:ea typeface="Arial" pitchFamily="34" charset="-122"/>
                           <a:cs typeface="Arial" pitchFamily="34" charset="-120"/>
                         </a:rPr>
-                        <a:t>84.2%</a:t>
+                        <a:t>84.7%</a:t>
                       </a:r>
                       <a:endParaRPr lang="en-US" sz="1000" dirty="0">
                         <a:latin typeface="Arial" charset="0"/>
@@ -3672,7 +3672,7 @@
                           <a:ea typeface="Arial" pitchFamily="34" charset="-122"/>
                           <a:cs typeface="Arial" pitchFamily="34" charset="-120"/>
                         </a:rPr>
-                        <a:t>89%以上</a:t>
+                        <a:t>90%以上</a:t>
                       </a:r>
                       <a:endParaRPr lang="en-US" sz="1000" dirty="0">
                         <a:latin typeface="Arial" charset="0"/>
@@ -3878,7 +3878,7 @@
                           <a:ea typeface="Arial" pitchFamily="34" charset="-122"/>
                           <a:cs typeface="Arial" pitchFamily="34" charset="-120"/>
                         </a:rPr>
-                        <a:t>0.9%</a:t>
+                        <a:t>0.8%</a:t>
                       </a:r>
                       <a:endParaRPr lang="en-US" sz="1000" dirty="0">
                         <a:latin typeface="Arial" charset="0"/>
@@ -5339,7 +5339,7 @@
                 <a:ea typeface="Arial" pitchFamily="34" charset="-122"/>
                 <a:cs typeface="Arial" pitchFamily="34" charset="-120"/>
               </a:rPr>
-              <a:t>8.87</a:t>
+              <a:t>8.88</a:t>
             </a:r>
             <a:endParaRPr lang="en-US" sz="3200" dirty="0"/>
           </a:p>
@@ -5464,7 +5464,7 @@
                 <a:ea typeface="Arial" pitchFamily="34" charset="-122"/>
                 <a:cs typeface="Arial" pitchFamily="34" charset="-120"/>
               </a:rPr>
-              <a:t>84.2%</a:t>
+              <a:t>84.7%</a:t>
             </a:r>
             <a:endParaRPr lang="en-US" sz="3200" dirty="0"/>
           </a:p>
@@ -5589,7 +5589,7 @@
                 <a:ea typeface="Arial" pitchFamily="34" charset="-122"/>
                 <a:cs typeface="Arial" pitchFamily="34" charset="-120"/>
               </a:rPr>
-              <a:t>0.9%</a:t>
+              <a:t>0.8%</a:t>
             </a:r>
             <a:endParaRPr lang="en-US" sz="3200" dirty="0"/>
           </a:p>
@@ -5714,7 +5714,7 @@
                 <a:ea typeface="Arial" pitchFamily="34" charset="-122"/>
                 <a:cs typeface="Arial" pitchFamily="34" charset="-120"/>
               </a:rPr>
-              <a:t>114件</a:t>
+              <a:t>118件</a:t>
             </a:r>
             <a:endParaRPr lang="en-US" sz="3200" dirty="0"/>
           </a:p>
@@ -6523,7 +6523,7 @@
                 <a:ea typeface="Arial" pitchFamily="34" charset="-122"/>
                 <a:cs typeface="Arial" pitchFamily="34" charset="-120"/>
               </a:rPr>
-              <a:t>8.87</a:t>
+              <a:t>8.88</a:t>
             </a:r>
             <a:endParaRPr lang="en-US" sz="3200" dirty="0"/>
           </a:p>
@@ -6648,7 +6648,7 @@
                 <a:ea typeface="Arial" pitchFamily="34" charset="-122"/>
                 <a:cs typeface="Arial" pitchFamily="34" charset="-120"/>
               </a:rPr>
-              <a:t>84.2%</a:t>
+              <a:t>84.7%</a:t>
             </a:r>
             <a:endParaRPr lang="en-US" sz="3200" dirty="0"/>
           </a:p>
@@ -6773,7 +6773,7 @@
                 <a:ea typeface="Arial" pitchFamily="34" charset="-122"/>
                 <a:cs typeface="Arial" pitchFamily="34" charset="-120"/>
               </a:rPr>
-              <a:t>0.9%</a:t>
+              <a:t>0.8%</a:t>
             </a:r>
             <a:endParaRPr lang="en-US" sz="3200" dirty="0"/>
           </a:p>
@@ -6898,7 +6898,7 @@
                 <a:ea typeface="Arial" pitchFamily="34" charset="-122"/>
                 <a:cs typeface="Arial" pitchFamily="34" charset="-120"/>
               </a:rPr>
-              <a:t>114件</a:t>
+              <a:t>118件</a:t>
             </a:r>
             <a:endParaRPr lang="en-US" sz="3200" dirty="0"/>
           </a:p>
@@ -7319,7 +7319,7 @@
                 <a:ea typeface="Arial" pitchFamily="34" charset="-122"/>
                 <a:cs typeface="Arial" pitchFamily="34" charset="-120"/>
               </a:rPr>
-              <a:t>Google(9.80)が最高スコア。</a:t>
+              <a:t>Google(9.82)が最高スコア。</a:t>
             </a:r>
             <a:endParaRPr lang="en-US" sz="1100" dirty="0"/>
           </a:p>
@@ -7877,7 +7877,7 @@
                           <a:ea typeface="Arial" pitchFamily="34" charset="-122"/>
                           <a:cs typeface="Arial" pitchFamily="34" charset="-120"/>
                         </a:rPr>
-                        <a:t>10</a:t>
+                        <a:t>11</a:t>
                       </a:r>
                       <a:endParaRPr lang="en-US" sz="900" dirty="0">
                         <a:latin typeface="Arial" charset="0"/>
@@ -7945,7 +7945,7 @@
                           <a:ea typeface="Arial" pitchFamily="34" charset="-122"/>
                           <a:cs typeface="Arial" pitchFamily="34" charset="-120"/>
                         </a:rPr>
-                        <a:t>4.9</a:t>
+                        <a:t>4.91</a:t>
                       </a:r>
                       <a:endParaRPr lang="en-US" sz="900" dirty="0">
                         <a:latin typeface="Arial" charset="0"/>
@@ -8081,7 +8081,7 @@
                           <a:ea typeface="Arial" pitchFamily="34" charset="-122"/>
                           <a:cs typeface="Arial" pitchFamily="34" charset="-120"/>
                         </a:rPr>
-                        <a:t>9.8</a:t>
+                        <a:t>9.82</a:t>
                       </a:r>
                       <a:endParaRPr lang="en-US" sz="900" dirty="0">
                         <a:latin typeface="Arial" charset="0"/>
@@ -8219,7 +8219,7 @@
                           <a:ea typeface="Arial" pitchFamily="34" charset="-122"/>
                           <a:cs typeface="Arial" pitchFamily="34" charset="-120"/>
                         </a:rPr>
-                        <a:t>16</a:t>
+                        <a:t>17</a:t>
                       </a:r>
                       <a:endParaRPr lang="en-US" sz="900" dirty="0">
                         <a:latin typeface="Arial" charset="0"/>
@@ -8287,7 +8287,7 @@
                           <a:ea typeface="Arial" pitchFamily="34" charset="-122"/>
                           <a:cs typeface="Arial" pitchFamily="34" charset="-120"/>
                         </a:rPr>
-                        <a:t>4.62</a:t>
+                        <a:t>4.65</a:t>
                       </a:r>
                       <a:endParaRPr lang="en-US" sz="900" dirty="0">
                         <a:latin typeface="Arial" charset="0"/>
@@ -8423,7 +8423,7 @@
                           <a:ea typeface="Arial" pitchFamily="34" charset="-122"/>
                           <a:cs typeface="Arial" pitchFamily="34" charset="-120"/>
                         </a:rPr>
-                        <a:t>9.25</a:t>
+                        <a:t>9.29</a:t>
                       </a:r>
                       <a:endParaRPr lang="en-US" sz="900" dirty="0">
                         <a:latin typeface="Arial" charset="0"/>
@@ -9245,7 +9245,7 @@
                           <a:ea typeface="Arial" pitchFamily="34" charset="-122"/>
                           <a:cs typeface="Arial" pitchFamily="34" charset="-120"/>
                         </a:rPr>
-                        <a:t>23</a:t>
+                        <a:t>24</a:t>
                       </a:r>
                       <a:endParaRPr lang="en-US" sz="900" dirty="0">
                         <a:latin typeface="Arial" charset="0"/>
@@ -9313,7 +9313,7 @@
                           <a:ea typeface="Arial" pitchFamily="34" charset="-122"/>
                           <a:cs typeface="Arial" pitchFamily="34" charset="-120"/>
                         </a:rPr>
-                        <a:t>8.61</a:t>
+                        <a:t>8.58</a:t>
                       </a:r>
                       <a:endParaRPr lang="en-US" sz="900" dirty="0">
                         <a:latin typeface="Arial" charset="0"/>
@@ -9449,7 +9449,7 @@
                           <a:ea typeface="Arial" pitchFamily="34" charset="-122"/>
                           <a:cs typeface="Arial" pitchFamily="34" charset="-120"/>
                         </a:rPr>
-                        <a:t>8.61</a:t>
+                        <a:t>8.58</a:t>
                       </a:r>
                       <a:endParaRPr lang="en-US" sz="900" dirty="0">
                         <a:latin typeface="Arial" charset="0"/>
@@ -9587,7 +9587,7 @@
                           <a:ea typeface="Arial" pitchFamily="34" charset="-122"/>
                           <a:cs typeface="Arial" pitchFamily="34" charset="-120"/>
                         </a:rPr>
-                        <a:t>30</a:t>
+                        <a:t>31</a:t>
                       </a:r>
                       <a:endParaRPr lang="en-US" sz="900" dirty="0">
                         <a:latin typeface="Arial" charset="0"/>
@@ -9655,7 +9655,7 @@
                           <a:ea typeface="Arial" pitchFamily="34" charset="-122"/>
                           <a:cs typeface="Arial" pitchFamily="34" charset="-120"/>
                         </a:rPr>
-                        <a:t>8.27</a:t>
+                        <a:t>8.29</a:t>
                       </a:r>
                       <a:endParaRPr lang="en-US" sz="900" dirty="0">
                         <a:latin typeface="Arial" charset="0"/>
@@ -9791,7 +9791,7 @@
                           <a:ea typeface="Arial" pitchFamily="34" charset="-122"/>
                           <a:cs typeface="Arial" pitchFamily="34" charset="-120"/>
                         </a:rPr>
-                        <a:t>8.27</a:t>
+                        <a:t>8.29</a:t>
                       </a:r>
                       <a:endParaRPr lang="en-US" sz="900" dirty="0">
                         <a:latin typeface="Arial" charset="0"/>
@@ -10199,7 +10199,7 @@
                 <a:ea typeface="Arial" pitchFamily="34" charset="-122"/>
                 <a:cs typeface="Arial" pitchFamily="34" charset="-120"/>
               </a:rPr>
-              <a:t>96件（84.2%）</a:t>
+              <a:t>100件（84.7%）</a:t>
             </a:r>
             <a:endParaRPr lang="en-US" sz="1100" dirty="0"/>
           </a:p>
@@ -10297,7 +10297,7 @@
                 <a:ea typeface="Arial" pitchFamily="34" charset="-122"/>
                 <a:cs typeface="Arial" pitchFamily="34" charset="-120"/>
               </a:rPr>
-              <a:t>17件（14.9%）</a:t>
+              <a:t>17件（14.4%）</a:t>
             </a:r>
             <a:endParaRPr lang="en-US" sz="1100" dirty="0"/>
           </a:p>
@@ -10395,7 +10395,7 @@
                 <a:ea typeface="Arial" pitchFamily="34" charset="-122"/>
                 <a:cs typeface="Arial" pitchFamily="34" charset="-120"/>
               </a:rPr>
-              <a:t>1件（0.9%）</a:t>
+              <a:t>1件（0.8%）</a:t>
             </a:r>
             <a:endParaRPr lang="en-US" sz="1100" dirty="0"/>
           </a:p>
@@ -11476,7 +11476,7 @@
                 <a:ea typeface="Arial" pitchFamily="34" charset="-122"/>
                 <a:cs typeface="Arial" pitchFamily="34" charset="-120"/>
               </a:rPr>
-              <a:t>宿泊前後に荷物を預けさせてもらいましたが、快く対応してくださりありがたかったです</a:t>
+              <a:t>Agoda 予約時に子どもの分を忘れてしまっていまたが、当日でもすぐに対応してくださり、泊まることができました</a:t>
             </a:r>
             <a:endParaRPr lang="en-US" sz="900" dirty="0"/>
           </a:p>
@@ -11515,7 +11515,7 @@
                 <a:ea typeface="Arial" pitchFamily="34" charset="-122"/>
                 <a:cs typeface="Arial" pitchFamily="34" charset="-120"/>
               </a:rPr>
-              <a:t>「com Front desk staff was super nice and helpful with me a...」</a:t>
+              <a:t>「宿泊前後に荷物を預けさせてもらいましたが、快く対応してくださりありがたかったです」</a:t>
             </a:r>
             <a:endParaRPr lang="en-US" sz="900" dirty="0"/>
           </a:p>

--- a/納品レポート/ホテル別レポート/comment_yokohama_口コミ分析レポート.pptx
+++ b/納品レポート/ホテル別レポート/comment_yokohama_口コミ分析レポート.pptx
@@ -208,22 +208,22 @@
                 <c:formatCode>General</c:formatCode>
                 <c:ptCount val="6"/>
                 <c:pt idx="0">
-                  <c:v>9.82</c:v>
+                  <c:v>9.83</c:v>
                 </c:pt>
                 <c:pt idx="1">
                   <c:v>9.29</c:v>
                 </c:pt>
                 <c:pt idx="2">
-                  <c:v>9.17</c:v>
+                  <c:v>9.23</c:v>
                 </c:pt>
                 <c:pt idx="3">
-                  <c:v>9.09</c:v>
+                  <c:v>9.12</c:v>
                 </c:pt>
                 <c:pt idx="4">
                   <c:v>8.58</c:v>
                 </c:pt>
                 <c:pt idx="5">
-                  <c:v>8.29</c:v>
+                  <c:v>8.28</c:v>
                 </c:pt>
               </c:numCache>
             </c:numRef>
@@ -566,7 +566,7 @@
               <c:numCache>
                 <c:ptCount val="3"/>
                 <c:pt idx="0">
-                  <c:v>100</c:v>
+                  <c:v>104</c:v>
                 </c:pt>
                 <c:pt idx="1">
                   <c:v>17</c:v>
@@ -795,13 +795,13 @@
                 <c:formatCode>General</c:formatCode>
                 <c:ptCount val="7"/>
                 <c:pt idx="0">
-                  <c:v>58</c:v>
+                  <c:v>61</c:v>
                 </c:pt>
                 <c:pt idx="1">
                   <c:v>19</c:v>
                 </c:pt>
                 <c:pt idx="2">
-                  <c:v>23</c:v>
+                  <c:v>24</c:v>
                 </c:pt>
                 <c:pt idx="3">
                   <c:v>9</c:v>
@@ -2764,7 +2764,7 @@
                 <a:ea typeface="Arial" pitchFamily="34" charset="-122"/>
                 <a:cs typeface="Arial" pitchFamily="34" charset="-120"/>
               </a:rPr>
-              <a:t>レビュー総数：118件（6サイト）</a:t>
+              <a:t>レビュー総数：122件（6サイト）</a:t>
             </a:r>
             <a:endParaRPr lang="en-US" sz="1000" dirty="0"/>
           </a:p>
@@ -2784,7 +2784,7 @@
                 <a:ea typeface="Arial" pitchFamily="34" charset="-122"/>
                 <a:cs typeface="Arial" pitchFamily="34" charset="-120"/>
               </a:rPr>
-              <a:t>作成日：2026年3月23日</a:t>
+              <a:t>作成日：2026年3月24日</a:t>
             </a:r>
             <a:endParaRPr lang="en-US" sz="1000" dirty="0"/>
           </a:p>
@@ -3330,7 +3330,7 @@
                           <a:ea typeface="Arial" pitchFamily="34" charset="-122"/>
                           <a:cs typeface="Arial" pitchFamily="34" charset="-120"/>
                         </a:rPr>
-                        <a:t>8.88点</a:t>
+                        <a:t>8.90点</a:t>
                       </a:r>
                       <a:endParaRPr lang="en-US" sz="1000" dirty="0">
                         <a:latin typeface="Arial" charset="0"/>
@@ -3604,7 +3604,7 @@
                           <a:ea typeface="Arial" pitchFamily="34" charset="-122"/>
                           <a:cs typeface="Arial" pitchFamily="34" charset="-120"/>
                         </a:rPr>
-                        <a:t>84.7%</a:t>
+                        <a:t>85.2%</a:t>
                       </a:r>
                       <a:endParaRPr lang="en-US" sz="1000" dirty="0">
                         <a:latin typeface="Arial" charset="0"/>
@@ -5339,7 +5339,7 @@
                 <a:ea typeface="Arial" pitchFamily="34" charset="-122"/>
                 <a:cs typeface="Arial" pitchFamily="34" charset="-120"/>
               </a:rPr>
-              <a:t>8.88</a:t>
+              <a:t>8.90</a:t>
             </a:r>
             <a:endParaRPr lang="en-US" sz="3200" dirty="0"/>
           </a:p>
@@ -5464,7 +5464,7 @@
                 <a:ea typeface="Arial" pitchFamily="34" charset="-122"/>
                 <a:cs typeface="Arial" pitchFamily="34" charset="-120"/>
               </a:rPr>
-              <a:t>84.7%</a:t>
+              <a:t>85.2%</a:t>
             </a:r>
             <a:endParaRPr lang="en-US" sz="3200" dirty="0"/>
           </a:p>
@@ -5714,7 +5714,7 @@
                 <a:ea typeface="Arial" pitchFamily="34" charset="-122"/>
                 <a:cs typeface="Arial" pitchFamily="34" charset="-120"/>
               </a:rPr>
-              <a:t>118件</a:t>
+              <a:t>122件</a:t>
             </a:r>
             <a:endParaRPr lang="en-US" sz="3200" dirty="0"/>
           </a:p>
@@ -5862,7 +5862,7 @@
                 <a:ea typeface="Arial" pitchFamily="34" charset="-122"/>
                 <a:cs typeface="Arial" pitchFamily="34" charset="-120"/>
               </a:rPr>
-              <a:t>  楽天トラベル とても広くて清潔で子供達も喜んでました</a:t>
+              <a:t>  じゃらん 新しいホテルでおしゃれで綺麗</a:t>
             </a:r>
             <a:endParaRPr lang="en-US" sz="1100" dirty="0"/>
           </a:p>
@@ -5902,7 +5902,7 @@
                 <a:ea typeface="Arial" pitchFamily="34" charset="-122"/>
                 <a:cs typeface="Arial" pitchFamily="34" charset="-120"/>
               </a:rPr>
-              <a:t>  関内駅から徒歩圏内で行きやすかったです</a:t>
+              <a:t>  com 横浜武道館のすぐ隣という最高のロケーションで、地下鉄金内駅から徒歩わずか2～3分です</a:t>
             </a:r>
             <a:endParaRPr lang="en-US" sz="1100" dirty="0"/>
           </a:p>
@@ -5942,7 +5942,7 @@
                 <a:ea typeface="Arial" pitchFamily="34" charset="-122"/>
                 <a:cs typeface="Arial" pitchFamily="34" charset="-120"/>
               </a:rPr>
-              <a:t>  静かで快適に過ごすことができました</a:t>
+              <a:t>  ホテルにはサウナ、温泉、大浴場があり、快適な滞在をお約束します</a:t>
             </a:r>
             <a:endParaRPr lang="en-US" sz="1100" dirty="0"/>
           </a:p>
@@ -6150,7 +6150,7 @@
                 <a:ea typeface="Arial" pitchFamily="34" charset="-122"/>
                 <a:cs typeface="Arial" pitchFamily="34" charset="-120"/>
               </a:rPr>
-              <a:t>対応・サービスの不満 </a:t>
+              <a:t>防音性能 </a:t>
             </a:r>
             <a:endParaRPr lang="en-US" sz="1100" dirty="0"/>
           </a:p>
@@ -6170,7 +6170,7 @@
                 <a:ea typeface="Arial" pitchFamily="34" charset="-122"/>
                 <a:cs typeface="Arial" pitchFamily="34" charset="-120"/>
               </a:rPr>
-              <a:t>  Agoda 残念なのは朝食ブッフェ</a:t>
+              <a:t>  セキュリティがしっかりして部屋も防音性が高い</a:t>
             </a:r>
             <a:endParaRPr lang="en-US" sz="1100" dirty="0"/>
           </a:p>
@@ -6523,7 +6523,7 @@
                 <a:ea typeface="Arial" pitchFamily="34" charset="-122"/>
                 <a:cs typeface="Arial" pitchFamily="34" charset="-120"/>
               </a:rPr>
-              <a:t>8.88</a:t>
+              <a:t>8.90</a:t>
             </a:r>
             <a:endParaRPr lang="en-US" sz="3200" dirty="0"/>
           </a:p>
@@ -6648,7 +6648,7 @@
                 <a:ea typeface="Arial" pitchFamily="34" charset="-122"/>
                 <a:cs typeface="Arial" pitchFamily="34" charset="-120"/>
               </a:rPr>
-              <a:t>84.7%</a:t>
+              <a:t>85.2%</a:t>
             </a:r>
             <a:endParaRPr lang="en-US" sz="3200" dirty="0"/>
           </a:p>
@@ -6898,7 +6898,7 @@
                 <a:ea typeface="Arial" pitchFamily="34" charset="-122"/>
                 <a:cs typeface="Arial" pitchFamily="34" charset="-120"/>
               </a:rPr>
-              <a:t>118件</a:t>
+              <a:t>122件</a:t>
             </a:r>
             <a:endParaRPr lang="en-US" sz="3200" dirty="0"/>
           </a:p>
@@ -7319,7 +7319,7 @@
                 <a:ea typeface="Arial" pitchFamily="34" charset="-122"/>
                 <a:cs typeface="Arial" pitchFamily="34" charset="-120"/>
               </a:rPr>
-              <a:t>Google(9.82)が最高スコア。</a:t>
+              <a:t>Google(9.83)が最高スコア。</a:t>
             </a:r>
             <a:endParaRPr lang="en-US" sz="1100" dirty="0"/>
           </a:p>
@@ -7877,7 +7877,7 @@
                           <a:ea typeface="Arial" pitchFamily="34" charset="-122"/>
                           <a:cs typeface="Arial" pitchFamily="34" charset="-120"/>
                         </a:rPr>
-                        <a:t>11</a:t>
+                        <a:t>12</a:t>
                       </a:r>
                       <a:endParaRPr lang="en-US" sz="900" dirty="0">
                         <a:latin typeface="Arial" charset="0"/>
@@ -7945,7 +7945,7 @@
                           <a:ea typeface="Arial" pitchFamily="34" charset="-122"/>
                           <a:cs typeface="Arial" pitchFamily="34" charset="-120"/>
                         </a:rPr>
-                        <a:t>4.91</a:t>
+                        <a:t>4.92</a:t>
                       </a:r>
                       <a:endParaRPr lang="en-US" sz="900" dirty="0">
                         <a:latin typeface="Arial" charset="0"/>
@@ -8081,7 +8081,7 @@
                           <a:ea typeface="Arial" pitchFamily="34" charset="-122"/>
                           <a:cs typeface="Arial" pitchFamily="34" charset="-120"/>
                         </a:rPr>
-                        <a:t>9.82</a:t>
+                        <a:t>9.83</a:t>
                       </a:r>
                       <a:endParaRPr lang="en-US" sz="900" dirty="0">
                         <a:latin typeface="Arial" charset="0"/>
@@ -8561,7 +8561,7 @@
                           <a:ea typeface="Arial" pitchFamily="34" charset="-122"/>
                           <a:cs typeface="Arial" pitchFamily="34" charset="-120"/>
                         </a:rPr>
-                        <a:t>12</a:t>
+                        <a:t>13</a:t>
                       </a:r>
                       <a:endParaRPr lang="en-US" sz="900" dirty="0">
                         <a:latin typeface="Arial" charset="0"/>
@@ -8629,7 +8629,7 @@
                           <a:ea typeface="Arial" pitchFamily="34" charset="-122"/>
                           <a:cs typeface="Arial" pitchFamily="34" charset="-120"/>
                         </a:rPr>
-                        <a:t>4.58</a:t>
+                        <a:t>4.62</a:t>
                       </a:r>
                       <a:endParaRPr lang="en-US" sz="900" dirty="0">
                         <a:latin typeface="Arial" charset="0"/>
@@ -8765,7 +8765,7 @@
                           <a:ea typeface="Arial" pitchFamily="34" charset="-122"/>
                           <a:cs typeface="Arial" pitchFamily="34" charset="-120"/>
                         </a:rPr>
-                        <a:t>9.17</a:t>
+                        <a:t>9.23</a:t>
                       </a:r>
                       <a:endParaRPr lang="en-US" sz="900" dirty="0">
                         <a:latin typeface="Arial" charset="0"/>
@@ -8903,7 +8903,7 @@
                           <a:ea typeface="Arial" pitchFamily="34" charset="-122"/>
                           <a:cs typeface="Arial" pitchFamily="34" charset="-120"/>
                         </a:rPr>
-                        <a:t>23</a:t>
+                        <a:t>24</a:t>
                       </a:r>
                       <a:endParaRPr lang="en-US" sz="900" dirty="0">
                         <a:latin typeface="Arial" charset="0"/>
@@ -8971,7 +8971,7 @@
                           <a:ea typeface="Arial" pitchFamily="34" charset="-122"/>
                           <a:cs typeface="Arial" pitchFamily="34" charset="-120"/>
                         </a:rPr>
-                        <a:t>9.09</a:t>
+                        <a:t>9.12</a:t>
                       </a:r>
                       <a:endParaRPr lang="en-US" sz="900" dirty="0">
                         <a:latin typeface="Arial" charset="0"/>
@@ -9107,7 +9107,7 @@
                           <a:ea typeface="Arial" pitchFamily="34" charset="-122"/>
                           <a:cs typeface="Arial" pitchFamily="34" charset="-120"/>
                         </a:rPr>
-                        <a:t>9.09</a:t>
+                        <a:t>9.12</a:t>
                       </a:r>
                       <a:endParaRPr lang="en-US" sz="900" dirty="0">
                         <a:latin typeface="Arial" charset="0"/>
@@ -9587,7 +9587,7 @@
                           <a:ea typeface="Arial" pitchFamily="34" charset="-122"/>
                           <a:cs typeface="Arial" pitchFamily="34" charset="-120"/>
                         </a:rPr>
-                        <a:t>31</a:t>
+                        <a:t>32</a:t>
                       </a:r>
                       <a:endParaRPr lang="en-US" sz="900" dirty="0">
                         <a:latin typeface="Arial" charset="0"/>
@@ -9655,7 +9655,7 @@
                           <a:ea typeface="Arial" pitchFamily="34" charset="-122"/>
                           <a:cs typeface="Arial" pitchFamily="34" charset="-120"/>
                         </a:rPr>
-                        <a:t>8.29</a:t>
+                        <a:t>8.28</a:t>
                       </a:r>
                       <a:endParaRPr lang="en-US" sz="900" dirty="0">
                         <a:latin typeface="Arial" charset="0"/>
@@ -9791,7 +9791,7 @@
                           <a:ea typeface="Arial" pitchFamily="34" charset="-122"/>
                           <a:cs typeface="Arial" pitchFamily="34" charset="-120"/>
                         </a:rPr>
-                        <a:t>8.29</a:t>
+                        <a:t>8.28</a:t>
                       </a:r>
                       <a:endParaRPr lang="en-US" sz="900" dirty="0">
                         <a:latin typeface="Arial" charset="0"/>
@@ -10199,7 +10199,7 @@
                 <a:ea typeface="Arial" pitchFamily="34" charset="-122"/>
                 <a:cs typeface="Arial" pitchFamily="34" charset="-120"/>
               </a:rPr>
-              <a:t>100件（84.7%）</a:t>
+              <a:t>104件（85.2%）</a:t>
             </a:r>
             <a:endParaRPr lang="en-US" sz="1100" dirty="0"/>
           </a:p>
@@ -10297,7 +10297,7 @@
                 <a:ea typeface="Arial" pitchFamily="34" charset="-122"/>
                 <a:cs typeface="Arial" pitchFamily="34" charset="-120"/>
               </a:rPr>
-              <a:t>17件（14.4%）</a:t>
+              <a:t>17件（13.9%）</a:t>
             </a:r>
             <a:endParaRPr lang="en-US" sz="1100" dirty="0"/>
           </a:p>
@@ -10729,7 +10729,7 @@
                 <a:ea typeface="Arial" pitchFamily="34" charset="-122"/>
                 <a:cs typeface="Arial" pitchFamily="34" charset="-120"/>
               </a:rPr>
-              <a:t>20件+</a:t>
+              <a:t>50件+</a:t>
             </a:r>
             <a:endParaRPr lang="en-US" sz="900" dirty="0"/>
           </a:p>
@@ -10807,7 +10807,7 @@
                 <a:ea typeface="Arial" pitchFamily="34" charset="-122"/>
                 <a:cs typeface="Arial" pitchFamily="34" charset="-120"/>
               </a:rPr>
-              <a:t>楽天トラベル とても広くて清潔で子供達も喜んでました</a:t>
+              <a:t>じゃらん 新しいホテルでおしゃれで綺麗</a:t>
             </a:r>
             <a:endParaRPr lang="en-US" sz="900" dirty="0"/>
           </a:p>
@@ -10846,7 +10846,7 @@
                 <a:ea typeface="Arial" pitchFamily="34" charset="-122"/>
                 <a:cs typeface="Arial" pitchFamily="34" charset="-120"/>
               </a:rPr>
-              <a:t>「ホテル自体もとても清潔で今後も利用したいと思います」</a:t>
+              <a:t>「Google 築年数が浅くおしゃれできれいです」</a:t>
             </a:r>
             <a:endParaRPr lang="en-US" sz="900" dirty="0"/>
           </a:p>
@@ -11030,7 +11030,7 @@
                 <a:ea typeface="Arial" pitchFamily="34" charset="-122"/>
                 <a:cs typeface="Arial" pitchFamily="34" charset="-120"/>
               </a:rPr>
-              <a:t>関内駅から徒歩圏内で行きやすかったです</a:t>
+              <a:t>com 横浜武道館のすぐ隣という最高のロケーションで、地下鉄金内駅から徒歩わずか2～3分です</a:t>
             </a:r>
             <a:endParaRPr lang="en-US" sz="900" dirty="0"/>
           </a:p>
@@ -11069,7 +11069,7 @@
                 <a:ea typeface="Arial" pitchFamily="34" charset="-122"/>
                 <a:cs typeface="Arial" pitchFamily="34" charset="-120"/>
               </a:rPr>
-              <a:t>「この近くに来るなら絶対リピしますね 朝食ブッフェは、金額の割にお味噌汁とスープの表記間違えてるし、アイスコーヒーと...」</a:t>
+              <a:t>「関内駅から徒歩圏内で行きやすかったです」</a:t>
             </a:r>
             <a:endParaRPr lang="en-US" sz="900" dirty="0"/>
           </a:p>
@@ -11253,7 +11253,7 @@
                 <a:ea typeface="Arial" pitchFamily="34" charset="-122"/>
                 <a:cs typeface="Arial" pitchFamily="34" charset="-120"/>
               </a:rPr>
-              <a:t>静かで快適に過ごすことができました</a:t>
+              <a:t>ホテルにはサウナ、温泉、大浴場があり、快適な滞在をお約束します</a:t>
             </a:r>
             <a:endParaRPr lang="en-US" sz="900" dirty="0"/>
           </a:p>
@@ -11292,7 +11292,7 @@
                 <a:ea typeface="Arial" pitchFamily="34" charset="-122"/>
                 <a:cs typeface="Arial" pitchFamily="34" charset="-120"/>
               </a:rPr>
-              <a:t>「ゆったりとしたベッドでぐっすりと眠れました」</a:t>
+              <a:t>「Agoda とても清潔感があってコンパクトにまとまった感じで2泊でしたがとてもゆっくり快適に宿泊する事が出来ました」</a:t>
             </a:r>
             <a:endParaRPr lang="en-US" sz="900" dirty="0"/>
           </a:p>
@@ -11476,7 +11476,7 @@
                 <a:ea typeface="Arial" pitchFamily="34" charset="-122"/>
                 <a:cs typeface="Arial" pitchFamily="34" charset="-120"/>
               </a:rPr>
-              <a:t>Agoda 予約時に子どもの分を忘れてしまっていまたが、当日でもすぐに対応してくださり、泊まることができました</a:t>
+              <a:t>スタッフの方々もとても優しく丁寧な対応して頂き緊張もほぐれ最高でした</a:t>
             </a:r>
             <a:endParaRPr lang="en-US" sz="900" dirty="0"/>
           </a:p>
@@ -11515,7 +11515,7 @@
                 <a:ea typeface="Arial" pitchFamily="34" charset="-122"/>
                 <a:cs typeface="Arial" pitchFamily="34" charset="-120"/>
               </a:rPr>
-              <a:t>「宿泊前後に荷物を預けさせてもらいましたが、快く対応してくださりありがたかったです」</a:t>
+              <a:t>「Agoda 予約時に子どもの分を忘れてしまっていまたが、当日でもすぐに対応してくださり、泊まることができました」</a:t>
             </a:r>
             <a:endParaRPr lang="en-US" sz="900" dirty="0"/>
           </a:p>
@@ -11597,6 +11597,229 @@
         <p:spPr>
           <a:xfrm>
             <a:off x="5120640" y="2953512"/>
+            <a:ext cx="658368" cy="228600"/>
+          </a:xfrm>
+          <a:prstGeom prst="rect">
+            <a:avLst/>
+          </a:prstGeom>
+          <a:noFill/>
+          <a:ln/>
+        </p:spPr>
+        <p:txBody>
+          <a:bodyPr wrap="square" lIns="0" tIns="0" rIns="0" bIns="0" rtlCol="0" anchor="ctr"/>
+          <a:lstStyle/>
+          <a:p>
+            <a:pPr algn="ctr" indent="0" marL="0">
+              <a:buNone/>
+            </a:pPr>
+            <a:r>
+              <a:rPr lang="en-US" sz="900" b="1" dirty="0">
+                <a:solidFill>
+                  <a:srgbClr val="16A34A"/>
+                </a:solidFill>
+                <a:latin typeface="Arial" pitchFamily="34" charset="0"/>
+                <a:ea typeface="Arial" pitchFamily="34" charset="-122"/>
+                <a:cs typeface="Arial" pitchFamily="34" charset="-120"/>
+              </a:rPr>
+              <a:t>20件+</a:t>
+            </a:r>
+            <a:endParaRPr lang="en-US" sz="900" dirty="0"/>
+          </a:p>
+        </p:txBody>
+      </p:sp>
+      <p:sp>
+        <p:nvSpPr>
+          <p:cNvPr id="37" name="Text 35"/>
+          <p:cNvSpPr/>
+          <p:nvPr/>
+        </p:nvSpPr>
+        <p:spPr>
+          <a:xfrm>
+            <a:off x="3429000" y="2953512"/>
+            <a:ext cx="1645920" cy="274320"/>
+          </a:xfrm>
+          <a:prstGeom prst="rect">
+            <a:avLst/>
+          </a:prstGeom>
+          <a:noFill/>
+          <a:ln/>
+        </p:spPr>
+        <p:txBody>
+          <a:bodyPr wrap="square" lIns="0" tIns="0" rIns="0" bIns="0" rtlCol="0" anchor="ctr"/>
+          <a:lstStyle/>
+          <a:p>
+            <a:pPr indent="0" marL="0">
+              <a:buNone/>
+            </a:pPr>
+            <a:r>
+              <a:rPr lang="en-US" sz="1300" b="1" dirty="0">
+                <a:solidFill>
+                  <a:srgbClr val="1A2744"/>
+                </a:solidFill>
+                <a:latin typeface="Arial" pitchFamily="34" charset="0"/>
+                <a:ea typeface="Arial" pitchFamily="34" charset="-122"/>
+                <a:cs typeface="Arial" pitchFamily="34" charset="-120"/>
+              </a:rPr>
+              <a:t>朝食</a:t>
+            </a:r>
+            <a:endParaRPr lang="en-US" sz="1300" dirty="0"/>
+          </a:p>
+        </p:txBody>
+      </p:sp>
+      <p:sp>
+        <p:nvSpPr>
+          <p:cNvPr id="38" name="Text 36"/>
+          <p:cNvSpPr/>
+          <p:nvPr/>
+        </p:nvSpPr>
+        <p:spPr>
+          <a:xfrm>
+            <a:off x="3429000" y="3246120"/>
+            <a:ext cx="2377440" cy="365760"/>
+          </a:xfrm>
+          <a:prstGeom prst="rect">
+            <a:avLst/>
+          </a:prstGeom>
+          <a:noFill/>
+          <a:ln/>
+        </p:spPr>
+        <p:txBody>
+          <a:bodyPr wrap="square" lIns="0" tIns="0" rIns="0" bIns="0" rtlCol="0" anchor="ctr"/>
+          <a:lstStyle/>
+          <a:p>
+            <a:pPr indent="0" marL="0">
+              <a:buNone/>
+            </a:pPr>
+            <a:r>
+              <a:rPr lang="en-US" sz="900" dirty="0">
+                <a:solidFill>
+                  <a:srgbClr val="64748B"/>
+                </a:solidFill>
+                <a:latin typeface="Arial" pitchFamily="34" charset="0"/>
+                <a:ea typeface="Arial" pitchFamily="34" charset="-122"/>
+                <a:cs typeface="Arial" pitchFamily="34" charset="-120"/>
+              </a:rPr>
+              <a:t>朝食は豆カレーやこんにゃく大福がありヘルシーなメニュー</a:t>
+            </a:r>
+            <a:endParaRPr lang="en-US" sz="900" dirty="0"/>
+          </a:p>
+        </p:txBody>
+      </p:sp>
+      <p:sp>
+        <p:nvSpPr>
+          <p:cNvPr id="39" name="Text 37"/>
+          <p:cNvSpPr/>
+          <p:nvPr/>
+        </p:nvSpPr>
+        <p:spPr>
+          <a:xfrm>
+            <a:off x="3429000" y="3657600"/>
+            <a:ext cx="2377440" cy="640080"/>
+          </a:xfrm>
+          <a:prstGeom prst="rect">
+            <a:avLst/>
+          </a:prstGeom>
+          <a:noFill/>
+          <a:ln/>
+        </p:spPr>
+        <p:txBody>
+          <a:bodyPr wrap="square" lIns="0" tIns="0" rIns="0" bIns="0" rtlCol="0" anchor="ctr"/>
+          <a:lstStyle/>
+          <a:p>
+            <a:pPr indent="0" marL="0">
+              <a:buNone/>
+            </a:pPr>
+            <a:r>
+              <a:rPr lang="en-US" sz="900" i="1" dirty="0">
+                <a:solidFill>
+                  <a:srgbClr val="3B7DD8"/>
+                </a:solidFill>
+                <a:latin typeface="Arial" pitchFamily="34" charset="0"/>
+                <a:ea typeface="Arial" pitchFamily="34" charset="-122"/>
+                <a:cs typeface="Arial" pitchFamily="34" charset="-120"/>
+              </a:rPr>
+              <a:t>「朝食は種類豊富ではないですが、ヘルシーな品揃えです」</a:t>
+            </a:r>
+            <a:endParaRPr lang="en-US" sz="900" dirty="0"/>
+          </a:p>
+        </p:txBody>
+      </p:sp>
+      <p:sp>
+        <p:nvSpPr>
+          <p:cNvPr id="40" name="Shape 38"/>
+          <p:cNvSpPr/>
+          <p:nvPr/>
+        </p:nvSpPr>
+        <p:spPr>
+          <a:xfrm>
+            <a:off x="6126480" y="2880360"/>
+            <a:ext cx="2651760" cy="1600200"/>
+          </a:xfrm>
+          <a:prstGeom prst="rect">
+            <a:avLst/>
+          </a:prstGeom>
+          <a:solidFill>
+            <a:srgbClr val="FFFFFF"/>
+          </a:solidFill>
+          <a:ln/>
+          <a:effectLst>
+            <a:outerShdw sx="100000" sy="100000" kx="0" ky="0" algn="bl" rotWithShape="0" blurRad="50800" dist="25400" dir="8100000">
+              <a:srgbClr val="000000">
+                <a:alpha val="10000"/>
+              </a:srgbClr>
+            </a:outerShdw>
+          </a:effectLst>
+        </p:spPr>
+      </p:sp>
+      <p:sp>
+        <p:nvSpPr>
+          <p:cNvPr id="41" name="Shape 39"/>
+          <p:cNvSpPr/>
+          <p:nvPr/>
+        </p:nvSpPr>
+        <p:spPr>
+          <a:xfrm>
+            <a:off x="6126480" y="2880360"/>
+            <a:ext cx="54864" cy="1600200"/>
+          </a:xfrm>
+          <a:prstGeom prst="rect">
+            <a:avLst/>
+          </a:prstGeom>
+          <a:solidFill>
+            <a:srgbClr val="16A34A"/>
+          </a:solidFill>
+          <a:ln/>
+        </p:spPr>
+      </p:sp>
+      <p:sp>
+        <p:nvSpPr>
+          <p:cNvPr id="42" name="Shape 40"/>
+          <p:cNvSpPr/>
+          <p:nvPr/>
+        </p:nvSpPr>
+        <p:spPr>
+          <a:xfrm>
+            <a:off x="7955280" y="2953512"/>
+            <a:ext cx="658368" cy="228600"/>
+          </a:xfrm>
+          <a:prstGeom prst="rect">
+            <a:avLst/>
+          </a:prstGeom>
+          <a:solidFill>
+            <a:srgbClr val="DCFCE7"/>
+          </a:solidFill>
+          <a:ln/>
+        </p:spPr>
+      </p:sp>
+      <p:sp>
+        <p:nvSpPr>
+          <p:cNvPr id="43" name="Text 41"/>
+          <p:cNvSpPr/>
+          <p:nvPr/>
+        </p:nvSpPr>
+        <p:spPr>
+          <a:xfrm>
+            <a:off x="7955280" y="2953512"/>
             <a:ext cx="658368" cy="228600"/>
           </a:xfrm>
           <a:prstGeom prst="rect">
@@ -11629,13 +11852,13 @@
       </p:sp>
       <p:sp>
         <p:nvSpPr>
-          <p:cNvPr id="37" name="Text 35"/>
-          <p:cNvSpPr/>
-          <p:nvPr/>
-        </p:nvSpPr>
-        <p:spPr>
-          <a:xfrm>
-            <a:off x="3429000" y="2953512"/>
+          <p:cNvPr id="44" name="Text 42"/>
+          <p:cNvSpPr/>
+          <p:nvPr/>
+        </p:nvSpPr>
+        <p:spPr>
+          <a:xfrm>
+            <a:off x="6263640" y="2953512"/>
             <a:ext cx="1645920" cy="274320"/>
           </a:xfrm>
           <a:prstGeom prst="rect">
@@ -11668,13 +11891,13 @@
       </p:sp>
       <p:sp>
         <p:nvSpPr>
-          <p:cNvPr id="38" name="Text 36"/>
-          <p:cNvSpPr/>
-          <p:nvPr/>
-        </p:nvSpPr>
-        <p:spPr>
-          <a:xfrm>
-            <a:off x="3429000" y="3246120"/>
+          <p:cNvPr id="45" name="Text 43"/>
+          <p:cNvSpPr/>
+          <p:nvPr/>
+        </p:nvSpPr>
+        <p:spPr>
+          <a:xfrm>
+            <a:off x="6263640" y="3246120"/>
             <a:ext cx="2377440" cy="365760"/>
           </a:xfrm>
           <a:prstGeom prst="rect">
@@ -11707,13 +11930,13 @@
       </p:sp>
       <p:sp>
         <p:nvSpPr>
-          <p:cNvPr id="39" name="Text 37"/>
-          <p:cNvSpPr/>
-          <p:nvPr/>
-        </p:nvSpPr>
-        <p:spPr>
-          <a:xfrm>
-            <a:off x="3429000" y="3657600"/>
+          <p:cNvPr id="46" name="Text 44"/>
+          <p:cNvSpPr/>
+          <p:nvPr/>
+        </p:nvSpPr>
+        <p:spPr>
+          <a:xfrm>
+            <a:off x="6263640" y="3657600"/>
             <a:ext cx="2377440" cy="640080"/>
           </a:xfrm>
           <a:prstGeom prst="rect">
@@ -11739,229 +11962,6 @@
                 <a:cs typeface="Arial" pitchFamily="34" charset="-120"/>
               </a:rPr>
               <a:t>「com 駅から近く、ホテルの近くにコンビニや飲食店が 多くてよかったです」</a:t>
-            </a:r>
-            <a:endParaRPr lang="en-US" sz="900" dirty="0"/>
-          </a:p>
-        </p:txBody>
-      </p:sp>
-      <p:sp>
-        <p:nvSpPr>
-          <p:cNvPr id="40" name="Shape 38"/>
-          <p:cNvSpPr/>
-          <p:nvPr/>
-        </p:nvSpPr>
-        <p:spPr>
-          <a:xfrm>
-            <a:off x="6126480" y="2880360"/>
-            <a:ext cx="2651760" cy="1600200"/>
-          </a:xfrm>
-          <a:prstGeom prst="rect">
-            <a:avLst/>
-          </a:prstGeom>
-          <a:solidFill>
-            <a:srgbClr val="FFFFFF"/>
-          </a:solidFill>
-          <a:ln/>
-          <a:effectLst>
-            <a:outerShdw sx="100000" sy="100000" kx="0" ky="0" algn="bl" rotWithShape="0" blurRad="50800" dist="25400" dir="8100000">
-              <a:srgbClr val="000000">
-                <a:alpha val="10000"/>
-              </a:srgbClr>
-            </a:outerShdw>
-          </a:effectLst>
-        </p:spPr>
-      </p:sp>
-      <p:sp>
-        <p:nvSpPr>
-          <p:cNvPr id="41" name="Shape 39"/>
-          <p:cNvSpPr/>
-          <p:nvPr/>
-        </p:nvSpPr>
-        <p:spPr>
-          <a:xfrm>
-            <a:off x="6126480" y="2880360"/>
-            <a:ext cx="54864" cy="1600200"/>
-          </a:xfrm>
-          <a:prstGeom prst="rect">
-            <a:avLst/>
-          </a:prstGeom>
-          <a:solidFill>
-            <a:srgbClr val="16A34A"/>
-          </a:solidFill>
-          <a:ln/>
-        </p:spPr>
-      </p:sp>
-      <p:sp>
-        <p:nvSpPr>
-          <p:cNvPr id="42" name="Shape 40"/>
-          <p:cNvSpPr/>
-          <p:nvPr/>
-        </p:nvSpPr>
-        <p:spPr>
-          <a:xfrm>
-            <a:off x="7955280" y="2953512"/>
-            <a:ext cx="658368" cy="228600"/>
-          </a:xfrm>
-          <a:prstGeom prst="rect">
-            <a:avLst/>
-          </a:prstGeom>
-          <a:solidFill>
-            <a:srgbClr val="DCFCE7"/>
-          </a:solidFill>
-          <a:ln/>
-        </p:spPr>
-      </p:sp>
-      <p:sp>
-        <p:nvSpPr>
-          <p:cNvPr id="43" name="Text 41"/>
-          <p:cNvSpPr/>
-          <p:nvPr/>
-        </p:nvSpPr>
-        <p:spPr>
-          <a:xfrm>
-            <a:off x="7955280" y="2953512"/>
-            <a:ext cx="658368" cy="228600"/>
-          </a:xfrm>
-          <a:prstGeom prst="rect">
-            <a:avLst/>
-          </a:prstGeom>
-          <a:noFill/>
-          <a:ln/>
-        </p:spPr>
-        <p:txBody>
-          <a:bodyPr wrap="square" lIns="0" tIns="0" rIns="0" bIns="0" rtlCol="0" anchor="ctr"/>
-          <a:lstStyle/>
-          <a:p>
-            <a:pPr algn="ctr" indent="0" marL="0">
-              <a:buNone/>
-            </a:pPr>
-            <a:r>
-              <a:rPr lang="en-US" sz="900" b="1" dirty="0">
-                <a:solidFill>
-                  <a:srgbClr val="16A34A"/>
-                </a:solidFill>
-                <a:latin typeface="Arial" pitchFamily="34" charset="0"/>
-                <a:ea typeface="Arial" pitchFamily="34" charset="-122"/>
-                <a:cs typeface="Arial" pitchFamily="34" charset="-120"/>
-              </a:rPr>
-              <a:t>10件+</a:t>
-            </a:r>
-            <a:endParaRPr lang="en-US" sz="900" dirty="0"/>
-          </a:p>
-        </p:txBody>
-      </p:sp>
-      <p:sp>
-        <p:nvSpPr>
-          <p:cNvPr id="44" name="Text 42"/>
-          <p:cNvSpPr/>
-          <p:nvPr/>
-        </p:nvSpPr>
-        <p:spPr>
-          <a:xfrm>
-            <a:off x="6263640" y="2953512"/>
-            <a:ext cx="1645920" cy="274320"/>
-          </a:xfrm>
-          <a:prstGeom prst="rect">
-            <a:avLst/>
-          </a:prstGeom>
-          <a:noFill/>
-          <a:ln/>
-        </p:spPr>
-        <p:txBody>
-          <a:bodyPr wrap="square" lIns="0" tIns="0" rIns="0" bIns="0" rtlCol="0" anchor="ctr"/>
-          <a:lstStyle/>
-          <a:p>
-            <a:pPr indent="0" marL="0">
-              <a:buNone/>
-            </a:pPr>
-            <a:r>
-              <a:rPr lang="en-US" sz="1300" b="1" dirty="0">
-                <a:solidFill>
-                  <a:srgbClr val="1A2744"/>
-                </a:solidFill>
-                <a:latin typeface="Arial" pitchFamily="34" charset="0"/>
-                <a:ea typeface="Arial" pitchFamily="34" charset="-122"/>
-                <a:cs typeface="Arial" pitchFamily="34" charset="-120"/>
-              </a:rPr>
-              <a:t>朝食</a:t>
-            </a:r>
-            <a:endParaRPr lang="en-US" sz="1300" dirty="0"/>
-          </a:p>
-        </p:txBody>
-      </p:sp>
-      <p:sp>
-        <p:nvSpPr>
-          <p:cNvPr id="45" name="Text 43"/>
-          <p:cNvSpPr/>
-          <p:nvPr/>
-        </p:nvSpPr>
-        <p:spPr>
-          <a:xfrm>
-            <a:off x="6263640" y="3246120"/>
-            <a:ext cx="2377440" cy="365760"/>
-          </a:xfrm>
-          <a:prstGeom prst="rect">
-            <a:avLst/>
-          </a:prstGeom>
-          <a:noFill/>
-          <a:ln/>
-        </p:spPr>
-        <p:txBody>
-          <a:bodyPr wrap="square" lIns="0" tIns="0" rIns="0" bIns="0" rtlCol="0" anchor="ctr"/>
-          <a:lstStyle/>
-          <a:p>
-            <a:pPr indent="0" marL="0">
-              <a:buNone/>
-            </a:pPr>
-            <a:r>
-              <a:rPr lang="en-US" sz="900" dirty="0">
-                <a:solidFill>
-                  <a:srgbClr val="64748B"/>
-                </a:solidFill>
-                <a:latin typeface="Arial" pitchFamily="34" charset="0"/>
-                <a:ea typeface="Arial" pitchFamily="34" charset="-122"/>
-                <a:cs typeface="Arial" pitchFamily="34" charset="-120"/>
-              </a:rPr>
-              <a:t>楽天トラベル 朝食バイキングの種類も豊富で、会場も落ち着いた雰囲気で綺麗</a:t>
-            </a:r>
-            <a:endParaRPr lang="en-US" sz="900" dirty="0"/>
-          </a:p>
-        </p:txBody>
-      </p:sp>
-      <p:sp>
-        <p:nvSpPr>
-          <p:cNvPr id="46" name="Text 44"/>
-          <p:cNvSpPr/>
-          <p:nvPr/>
-        </p:nvSpPr>
-        <p:spPr>
-          <a:xfrm>
-            <a:off x="6263640" y="3657600"/>
-            <a:ext cx="2377440" cy="640080"/>
-          </a:xfrm>
-          <a:prstGeom prst="rect">
-            <a:avLst/>
-          </a:prstGeom>
-          <a:noFill/>
-          <a:ln/>
-        </p:spPr>
-        <p:txBody>
-          <a:bodyPr wrap="square" lIns="0" tIns="0" rIns="0" bIns="0" rtlCol="0" anchor="ctr"/>
-          <a:lstStyle/>
-          <a:p>
-            <a:pPr indent="0" marL="0">
-              <a:buNone/>
-            </a:pPr>
-            <a:r>
-              <a:rPr lang="en-US" sz="900" i="1" dirty="0">
-                <a:solidFill>
-                  <a:srgbClr val="3B7DD8"/>
-                </a:solidFill>
-                <a:latin typeface="Arial" pitchFamily="34" charset="0"/>
-                <a:ea typeface="Arial" pitchFamily="34" charset="-122"/>
-                <a:cs typeface="Arial" pitchFamily="34" charset="-120"/>
-              </a:rPr>
-              <a:t>「朝食は新鮮で種類も豊富で美味しかったです」</a:t>
             </a:r>
             <a:endParaRPr lang="en-US" sz="900" dirty="0"/>
           </a:p>
@@ -12993,7 +12993,7 @@
                           <a:ea typeface="Arial" pitchFamily="34" charset="-122"/>
                           <a:cs typeface="Arial" pitchFamily="34" charset="-120"/>
                         </a:rPr>
-                        <a:t>11件</a:t>
+                        <a:t>12件</a:t>
                       </a:r>
                       <a:endParaRPr lang="en-US" sz="900" dirty="0">
                         <a:latin typeface="Arial" charset="0"/>
@@ -13131,7 +13131,7 @@
                           <a:ea typeface="Arial" pitchFamily="34" charset="-122"/>
                           <a:cs typeface="Arial" pitchFamily="34" charset="-120"/>
                         </a:rPr>
-                        <a:t>対応・サービスの不満</a:t>
+                        <a:t>防音性能</a:t>
                       </a:r>
                       <a:endParaRPr lang="en-US" sz="900" dirty="0">
                         <a:latin typeface="Arial" charset="0"/>
@@ -13199,7 +13199,7 @@
                           <a:ea typeface="Arial" pitchFamily="34" charset="-122"/>
                           <a:cs typeface="Arial" pitchFamily="34" charset="-120"/>
                         </a:rPr>
-                        <a:t>Agoda 残念なのは朝食ブッフェ</a:t>
+                        <a:t>セキュリティがしっかりして部屋も防音性が高い</a:t>
                       </a:r>
                       <a:endParaRPr lang="en-US" sz="900" dirty="0">
                         <a:latin typeface="Arial" charset="0"/>
@@ -13405,7 +13405,7 @@
                           <a:ea typeface="Arial" pitchFamily="34" charset="-122"/>
                           <a:cs typeface="Arial" pitchFamily="34" charset="-120"/>
                         </a:rPr>
-                        <a:t>臭い・匂い</a:t>
+                        <a:t>対応・サービスの不満</a:t>
                       </a:r>
                       <a:endParaRPr lang="en-US" sz="900" dirty="0">
                         <a:latin typeface="Arial" charset="0"/>
@@ -13473,7 +13473,7 @@
                           <a:ea typeface="Arial" pitchFamily="34" charset="-122"/>
                           <a:cs typeface="Arial" pitchFamily="34" charset="-120"/>
                         </a:rPr>
-                        <a:t>Agoda 部屋がタバコ臭かったのですが、こちらのミスで喫煙室を予約してしまっていたようでした</a:t>
+                        <a:t>Agoda 残念なのは朝食ブッフェ</a:t>
                       </a:r>
                       <a:endParaRPr lang="en-US" sz="900" dirty="0">
                         <a:latin typeface="Arial" charset="0"/>
@@ -13541,7 +13541,7 @@
                           <a:ea typeface="Arial" pitchFamily="34" charset="-122"/>
                           <a:cs typeface="Arial" pitchFamily="34" charset="-120"/>
                         </a:rPr>
-                        <a:t>3件</a:t>
+                        <a:t>4件</a:t>
                       </a:r>
                       <a:endParaRPr lang="en-US" sz="900" dirty="0">
                         <a:latin typeface="Arial" charset="0"/>
@@ -13679,7 +13679,7 @@
                           <a:ea typeface="Arial" pitchFamily="34" charset="-122"/>
                           <a:cs typeface="Arial" pitchFamily="34" charset="-120"/>
                         </a:rPr>
-                        <a:t>窓・採光</a:t>
+                        <a:t>臭い・匂い</a:t>
                       </a:r>
                       <a:endParaRPr lang="en-US" sz="900" dirty="0">
                         <a:latin typeface="Arial" charset="0"/>
@@ -13747,7 +13747,7 @@
                           <a:ea typeface="Arial" pitchFamily="34" charset="-122"/>
                           <a:cs typeface="Arial" pitchFamily="34" charset="-120"/>
                         </a:rPr>
-                        <a:t>ツインルームを利用、お部屋は明るく広くて清潔、洗面所とトイレがそれぞれ独立していたのは使い勝手が良かったです</a:t>
+                        <a:t>Agoda 部屋がタバコ臭かったのですが、こちらのミスで喫煙室を予約してしまっていたようでした</a:t>
                       </a:r>
                       <a:endParaRPr lang="en-US" sz="900" dirty="0">
                         <a:latin typeface="Arial" charset="0"/>
@@ -13953,7 +13953,7 @@
                           <a:ea typeface="Arial" pitchFamily="34" charset="-122"/>
                           <a:cs typeface="Arial" pitchFamily="34" charset="-120"/>
                         </a:rPr>
-                        <a:t>防音性能</a:t>
+                        <a:t>窓・採光</a:t>
                       </a:r>
                       <a:endParaRPr lang="en-US" sz="900" dirty="0">
                         <a:latin typeface="Arial" charset="0"/>
@@ -14021,7 +14021,7 @@
                           <a:ea typeface="Arial" pitchFamily="34" charset="-122"/>
                           <a:cs typeface="Arial" pitchFamily="34" charset="-120"/>
                         </a:rPr>
-                        <a:t>com 綺麗すぎる 騒音があった 騒音があった</a:t>
+                        <a:t>ツインルームを利用、お部屋は明るく広くて清潔、洗面所とトイレがそれぞれ独立していたのは使い勝手が良かったです</a:t>
                       </a:r>
                       <a:endParaRPr lang="en-US" sz="900" dirty="0">
                         <a:latin typeface="Arial" charset="0"/>
@@ -14089,7 +14089,7 @@
                           <a:ea typeface="Arial" pitchFamily="34" charset="-122"/>
                           <a:cs typeface="Arial" pitchFamily="34" charset="-120"/>
                         </a:rPr>
-                        <a:t>2件</a:t>
+                        <a:t>3件</a:t>
                       </a:r>
                       <a:endParaRPr lang="en-US" sz="900" dirty="0">
                         <a:latin typeface="Arial" charset="0"/>
@@ -14227,7 +14227,7 @@
                           <a:ea typeface="Arial" pitchFamily="34" charset="-122"/>
                           <a:cs typeface="Arial" pitchFamily="34" charset="-120"/>
                         </a:rPr>
-                        <a:t>エアコン・空調</a:t>
+                        <a:t>設備の老朽化</a:t>
                       </a:r>
                       <a:endParaRPr lang="en-US" sz="900" dirty="0">
                         <a:latin typeface="Arial" charset="0"/>
@@ -14295,7 +14295,7 @@
                           <a:ea typeface="Arial" pitchFamily="34" charset="-122"/>
                           <a:cs typeface="Arial" pitchFamily="34" charset="-120"/>
                         </a:rPr>
-                        <a:t>com Location, modern The hotel was advertised as having a...</a:t>
+                        <a:t>Google 築年数が浅くおしゃれできれいです</a:t>
                       </a:r>
                       <a:endParaRPr lang="en-US" sz="900" dirty="0">
                         <a:latin typeface="Arial" charset="0"/>
@@ -14411,6 +14411,280 @@
                     </a:lnB>
                     <a:solidFill>
                       <a:srgbClr val="E8EFF8"/>
+                    </a:solidFill>
+                  </a:tcPr>
+                </a:tc>
+              </a:tr>
+              <a:tr h="320040">
+                <a:tc>
+                  <a:txBody>
+                    <a:bodyPr/>
+                    <a:lstStyle/>
+                    <a:p>
+                      <a:pPr algn="ctr" indent="0" marL="0">
+                        <a:buNone/>
+                      </a:pPr>
+                      <a:r>
+                        <a:rPr lang="en-US" sz="1200" b="1" dirty="0">
+                          <a:solidFill>
+                            <a:srgbClr val="94A3B8"/>
+                          </a:solidFill>
+                          <a:latin typeface="Arial" pitchFamily="34" charset="0"/>
+                          <a:ea typeface="Arial" pitchFamily="34" charset="-122"/>
+                          <a:cs typeface="Arial" pitchFamily="34" charset="-120"/>
+                        </a:rPr>
+                        <a:t>C</a:t>
+                      </a:r>
+                      <a:endParaRPr lang="en-US" sz="1200" dirty="0">
+                        <a:latin typeface="Arial" charset="0"/>
+                        <a:ea typeface="Arial" charset="0"/>
+                        <a:cs typeface="Arial" charset="0"/>
+                      </a:endParaRPr>
+                    </a:p>
+                  </a:txBody>
+                  <a:tcPr marL="91440" marR="91440" marT="45720" marB="45720">
+                    <a:lnL w="6350" cap="flat" cmpd="sng" algn="ctr">
+                      <a:solidFill>
+                        <a:srgbClr val="CBD5E1"/>
+                      </a:solidFill>
+                      <a:prstDash val="solid"/>
+                      <a:round/>
+                      <a:headEnd type="none" w="med" len="med"/>
+                      <a:tailEnd type="none" w="med" len="med"/>
+                    </a:lnL>
+                    <a:lnR w="6350" cap="flat" cmpd="sng" algn="ctr">
+                      <a:solidFill>
+                        <a:srgbClr val="CBD5E1"/>
+                      </a:solidFill>
+                      <a:prstDash val="solid"/>
+                      <a:round/>
+                      <a:headEnd type="none" w="med" len="med"/>
+                      <a:tailEnd type="none" w="med" len="med"/>
+                    </a:lnR>
+                    <a:lnT w="6350" cap="flat" cmpd="sng" algn="ctr">
+                      <a:solidFill>
+                        <a:srgbClr val="CBD5E1"/>
+                      </a:solidFill>
+                      <a:prstDash val="solid"/>
+                      <a:round/>
+                      <a:headEnd type="none" w="med" len="med"/>
+                      <a:tailEnd type="none" w="med" len="med"/>
+                    </a:lnT>
+                    <a:lnB w="6350" cap="flat" cmpd="sng" algn="ctr">
+                      <a:solidFill>
+                        <a:srgbClr val="CBD5E1"/>
+                      </a:solidFill>
+                      <a:prstDash val="solid"/>
+                      <a:round/>
+                      <a:headEnd type="none" w="med" len="med"/>
+                      <a:tailEnd type="none" w="med" len="med"/>
+                    </a:lnB>
+                    <a:solidFill>
+                      <a:srgbClr val="FFFFFF"/>
+                    </a:solidFill>
+                  </a:tcPr>
+                </a:tc>
+                <a:tc>
+                  <a:txBody>
+                    <a:bodyPr/>
+                    <a:lstStyle/>
+                    <a:p>
+                      <a:pPr indent="0" marL="0">
+                        <a:buNone/>
+                      </a:pPr>
+                      <a:r>
+                        <a:rPr lang="en-US" sz="900" b="1" dirty="0">
+                          <a:solidFill>
+                            <a:srgbClr val="334155"/>
+                          </a:solidFill>
+                          <a:latin typeface="Arial" pitchFamily="34" charset="0"/>
+                          <a:ea typeface="Arial" pitchFamily="34" charset="-122"/>
+                          <a:cs typeface="Arial" pitchFamily="34" charset="-120"/>
+                        </a:rPr>
+                        <a:t>エアコン・空調</a:t>
+                      </a:r>
+                      <a:endParaRPr lang="en-US" sz="900" dirty="0">
+                        <a:latin typeface="Arial" charset="0"/>
+                        <a:ea typeface="Arial" charset="0"/>
+                        <a:cs typeface="Arial" charset="0"/>
+                      </a:endParaRPr>
+                    </a:p>
+                  </a:txBody>
+                  <a:tcPr marL="91440" marR="91440" marT="45720" marB="45720">
+                    <a:lnL w="6350" cap="flat" cmpd="sng" algn="ctr">
+                      <a:solidFill>
+                        <a:srgbClr val="CBD5E1"/>
+                      </a:solidFill>
+                      <a:prstDash val="solid"/>
+                      <a:round/>
+                      <a:headEnd type="none" w="med" len="med"/>
+                      <a:tailEnd type="none" w="med" len="med"/>
+                    </a:lnL>
+                    <a:lnR w="6350" cap="flat" cmpd="sng" algn="ctr">
+                      <a:solidFill>
+                        <a:srgbClr val="CBD5E1"/>
+                      </a:solidFill>
+                      <a:prstDash val="solid"/>
+                      <a:round/>
+                      <a:headEnd type="none" w="med" len="med"/>
+                      <a:tailEnd type="none" w="med" len="med"/>
+                    </a:lnR>
+                    <a:lnT w="6350" cap="flat" cmpd="sng" algn="ctr">
+                      <a:solidFill>
+                        <a:srgbClr val="CBD5E1"/>
+                      </a:solidFill>
+                      <a:prstDash val="solid"/>
+                      <a:round/>
+                      <a:headEnd type="none" w="med" len="med"/>
+                      <a:tailEnd type="none" w="med" len="med"/>
+                    </a:lnT>
+                    <a:lnB w="6350" cap="flat" cmpd="sng" algn="ctr">
+                      <a:solidFill>
+                        <a:srgbClr val="CBD5E1"/>
+                      </a:solidFill>
+                      <a:prstDash val="solid"/>
+                      <a:round/>
+                      <a:headEnd type="none" w="med" len="med"/>
+                      <a:tailEnd type="none" w="med" len="med"/>
+                    </a:lnB>
+                    <a:solidFill>
+                      <a:srgbClr val="FFFFFF"/>
+                    </a:solidFill>
+                  </a:tcPr>
+                </a:tc>
+                <a:tc>
+                  <a:txBody>
+                    <a:bodyPr/>
+                    <a:lstStyle/>
+                    <a:p>
+                      <a:pPr indent="0" marL="0">
+                        <a:buNone/>
+                      </a:pPr>
+                      <a:r>
+                        <a:rPr lang="en-US" sz="900" dirty="0">
+                          <a:solidFill>
+                            <a:srgbClr val="64748B"/>
+                          </a:solidFill>
+                          <a:latin typeface="Arial" pitchFamily="34" charset="0"/>
+                          <a:ea typeface="Arial" pitchFamily="34" charset="-122"/>
+                          <a:cs typeface="Arial" pitchFamily="34" charset="-120"/>
+                        </a:rPr>
+                        <a:t>com Location, modern The hotel was advertised as having a...</a:t>
+                      </a:r>
+                      <a:endParaRPr lang="en-US" sz="900" dirty="0">
+                        <a:latin typeface="Arial" charset="0"/>
+                        <a:ea typeface="Arial" charset="0"/>
+                        <a:cs typeface="Arial" charset="0"/>
+                      </a:endParaRPr>
+                    </a:p>
+                  </a:txBody>
+                  <a:tcPr marL="91440" marR="91440" marT="45720" marB="45720">
+                    <a:lnL w="6350" cap="flat" cmpd="sng" algn="ctr">
+                      <a:solidFill>
+                        <a:srgbClr val="CBD5E1"/>
+                      </a:solidFill>
+                      <a:prstDash val="solid"/>
+                      <a:round/>
+                      <a:headEnd type="none" w="med" len="med"/>
+                      <a:tailEnd type="none" w="med" len="med"/>
+                    </a:lnL>
+                    <a:lnR w="6350" cap="flat" cmpd="sng" algn="ctr">
+                      <a:solidFill>
+                        <a:srgbClr val="CBD5E1"/>
+                      </a:solidFill>
+                      <a:prstDash val="solid"/>
+                      <a:round/>
+                      <a:headEnd type="none" w="med" len="med"/>
+                      <a:tailEnd type="none" w="med" len="med"/>
+                    </a:lnR>
+                    <a:lnT w="6350" cap="flat" cmpd="sng" algn="ctr">
+                      <a:solidFill>
+                        <a:srgbClr val="CBD5E1"/>
+                      </a:solidFill>
+                      <a:prstDash val="solid"/>
+                      <a:round/>
+                      <a:headEnd type="none" w="med" len="med"/>
+                      <a:tailEnd type="none" w="med" len="med"/>
+                    </a:lnT>
+                    <a:lnB w="6350" cap="flat" cmpd="sng" algn="ctr">
+                      <a:solidFill>
+                        <a:srgbClr val="CBD5E1"/>
+                      </a:solidFill>
+                      <a:prstDash val="solid"/>
+                      <a:round/>
+                      <a:headEnd type="none" w="med" len="med"/>
+                      <a:tailEnd type="none" w="med" len="med"/>
+                    </a:lnB>
+                    <a:solidFill>
+                      <a:srgbClr val="FFFFFF"/>
+                    </a:solidFill>
+                  </a:tcPr>
+                </a:tc>
+                <a:tc>
+                  <a:txBody>
+                    <a:bodyPr/>
+                    <a:lstStyle/>
+                    <a:p>
+                      <a:pPr algn="ctr" indent="0" marL="0">
+                        <a:buNone/>
+                      </a:pPr>
+                      <a:r>
+                        <a:rPr lang="en-US" sz="900" dirty="0">
+                          <a:solidFill>
+                            <a:srgbClr val="334155"/>
+                          </a:solidFill>
+                          <a:latin typeface="Arial" pitchFamily="34" charset="0"/>
+                          <a:ea typeface="Arial" pitchFamily="34" charset="-122"/>
+                          <a:cs typeface="Arial" pitchFamily="34" charset="-120"/>
+                        </a:rPr>
+                        <a:t>1件</a:t>
+                      </a:r>
+                      <a:endParaRPr lang="en-US" sz="900" dirty="0">
+                        <a:latin typeface="Arial" charset="0"/>
+                        <a:ea typeface="Arial" charset="0"/>
+                        <a:cs typeface="Arial" charset="0"/>
+                      </a:endParaRPr>
+                    </a:p>
+                  </a:txBody>
+                  <a:tcPr marL="91440" marR="91440" marT="45720" marB="45720">
+                    <a:lnL w="6350" cap="flat" cmpd="sng" algn="ctr">
+                      <a:solidFill>
+                        <a:srgbClr val="CBD5E1"/>
+                      </a:solidFill>
+                      <a:prstDash val="solid"/>
+                      <a:round/>
+                      <a:headEnd type="none" w="med" len="med"/>
+                      <a:tailEnd type="none" w="med" len="med"/>
+                    </a:lnL>
+                    <a:lnR w="6350" cap="flat" cmpd="sng" algn="ctr">
+                      <a:solidFill>
+                        <a:srgbClr val="CBD5E1"/>
+                      </a:solidFill>
+                      <a:prstDash val="solid"/>
+                      <a:round/>
+                      <a:headEnd type="none" w="med" len="med"/>
+                      <a:tailEnd type="none" w="med" len="med"/>
+                    </a:lnR>
+                    <a:lnT w="6350" cap="flat" cmpd="sng" algn="ctr">
+                      <a:solidFill>
+                        <a:srgbClr val="CBD5E1"/>
+                      </a:solidFill>
+                      <a:prstDash val="solid"/>
+                      <a:round/>
+                      <a:headEnd type="none" w="med" len="med"/>
+                      <a:tailEnd type="none" w="med" len="med"/>
+                    </a:lnT>
+                    <a:lnB w="6350" cap="flat" cmpd="sng" algn="ctr">
+                      <a:solidFill>
+                        <a:srgbClr val="CBD5E1"/>
+                      </a:solidFill>
+                      <a:prstDash val="solid"/>
+                      <a:round/>
+                      <a:headEnd type="none" w="med" len="med"/>
+                      <a:tailEnd type="none" w="med" len="med"/>
+                    </a:lnB>
+                    <a:solidFill>
+                      <a:srgbClr val="FFFFFF"/>
                     </a:solidFill>
                   </a:tcPr>
                 </a:tc>
@@ -16141,7 +16415,7 @@
                 <a:ea typeface="Arial" pitchFamily="34" charset="-122"/>
                 <a:cs typeface="Arial" pitchFamily="34" charset="-120"/>
               </a:rPr>
-              <a:t>客室設備のアップグレード</a:t>
+              <a:t>客室リニューアル計画</a:t>
             </a:r>
             <a:endParaRPr lang="en-US" sz="1000" dirty="0"/>
           </a:p>
@@ -16184,7 +16458,7 @@
                 <a:ea typeface="Arial" pitchFamily="34" charset="-122"/>
                 <a:cs typeface="Arial" pitchFamily="34" charset="-120"/>
               </a:rPr>
-              <a:t>内装の定期的なリフレッシュ計画の策定</a:t>
+              <a:t>壁紙・カーペットの張替えによる「古さ」印象の払拭</a:t>
             </a:r>
             <a:endParaRPr lang="en-US" sz="900" dirty="0"/>
           </a:p>
@@ -16205,7 +16479,7 @@
                 <a:ea typeface="Arial" pitchFamily="34" charset="-122"/>
                 <a:cs typeface="Arial" pitchFamily="34" charset="-120"/>
               </a:rPr>
-              <a:t>照明・電源周りの設備更新</a:t>
+              <a:t>照明のLED化・調光機能の追加で客室の雰囲気向上</a:t>
             </a:r>
             <a:endParaRPr lang="en-US" sz="900" dirty="0"/>
           </a:p>
@@ -16226,7 +16500,7 @@
                 <a:ea typeface="Arial" pitchFamily="34" charset="-122"/>
                 <a:cs typeface="Arial" pitchFamily="34" charset="-120"/>
               </a:rPr>
-              <a:t>快適性向上のための設備投資計画の立案</a:t>
+              <a:t>USB充電ポート付きコンセントの設置</a:t>
             </a:r>
             <a:endParaRPr lang="en-US" sz="900" dirty="0"/>
           </a:p>

--- a/納品レポート/ホテル別レポート/comment_yokohama_口コミ分析レポート.pptx
+++ b/納品レポート/ホテル別レポート/comment_yokohama_口コミ分析レポート.pptx
@@ -208,7 +208,7 @@
                 <c:formatCode>General</c:formatCode>
                 <c:ptCount val="6"/>
                 <c:pt idx="0">
-                  <c:v>9.83</c:v>
+                  <c:v>9.85</c:v>
                 </c:pt>
                 <c:pt idx="1">
                   <c:v>9.29</c:v>
@@ -220,10 +220,10 @@
                   <c:v>9.12</c:v>
                 </c:pt>
                 <c:pt idx="4">
-                  <c:v>8.58</c:v>
+                  <c:v>8.56</c:v>
                 </c:pt>
                 <c:pt idx="5">
-                  <c:v>8.28</c:v>
+                  <c:v>8.23</c:v>
                 </c:pt>
               </c:numCache>
             </c:numRef>
@@ -566,10 +566,10 @@
               <c:numCache>
                 <c:ptCount val="3"/>
                 <c:pt idx="0">
-                  <c:v>104</c:v>
+                  <c:v>107</c:v>
                 </c:pt>
                 <c:pt idx="1">
-                  <c:v>17</c:v>
+                  <c:v>19</c:v>
                 </c:pt>
                 <c:pt idx="2">
                   <c:v>1</c:v>
@@ -795,16 +795,16 @@
                 <c:formatCode>General</c:formatCode>
                 <c:ptCount val="7"/>
                 <c:pt idx="0">
-                  <c:v>61</c:v>
+                  <c:v>62</c:v>
                 </c:pt>
                 <c:pt idx="1">
-                  <c:v>19</c:v>
+                  <c:v>20</c:v>
                 </c:pt>
                 <c:pt idx="2">
-                  <c:v>24</c:v>
+                  <c:v>25</c:v>
                 </c:pt>
                 <c:pt idx="3">
-                  <c:v>9</c:v>
+                  <c:v>11</c:v>
                 </c:pt>
                 <c:pt idx="4">
                   <c:v>7</c:v>
@@ -2764,7 +2764,7 @@
                 <a:ea typeface="Arial" pitchFamily="34" charset="-122"/>
                 <a:cs typeface="Arial" pitchFamily="34" charset="-120"/>
               </a:rPr>
-              <a:t>レビュー総数：122件（6サイト）</a:t>
+              <a:t>レビュー総数：127件（6サイト）</a:t>
             </a:r>
             <a:endParaRPr lang="en-US" sz="1000" dirty="0"/>
           </a:p>
@@ -2784,7 +2784,7 @@
                 <a:ea typeface="Arial" pitchFamily="34" charset="-122"/>
                 <a:cs typeface="Arial" pitchFamily="34" charset="-120"/>
               </a:rPr>
-              <a:t>作成日：2026年3月24日</a:t>
+              <a:t>作成日：2026年3月25日</a:t>
             </a:r>
             <a:endParaRPr lang="en-US" sz="1000" dirty="0"/>
           </a:p>
@@ -3330,7 +3330,7 @@
                           <a:ea typeface="Arial" pitchFamily="34" charset="-122"/>
                           <a:cs typeface="Arial" pitchFamily="34" charset="-120"/>
                         </a:rPr>
-                        <a:t>8.90点</a:t>
+                        <a:t>8.87点</a:t>
                       </a:r>
                       <a:endParaRPr lang="en-US" sz="1000" dirty="0">
                         <a:latin typeface="Arial" charset="0"/>
@@ -3604,7 +3604,7 @@
                           <a:ea typeface="Arial" pitchFamily="34" charset="-122"/>
                           <a:cs typeface="Arial" pitchFamily="34" charset="-120"/>
                         </a:rPr>
-                        <a:t>85.2%</a:t>
+                        <a:t>84.3%</a:t>
                       </a:r>
                       <a:endParaRPr lang="en-US" sz="1000" dirty="0">
                         <a:latin typeface="Arial" charset="0"/>
@@ -3672,7 +3672,7 @@
                           <a:ea typeface="Arial" pitchFamily="34" charset="-122"/>
                           <a:cs typeface="Arial" pitchFamily="34" charset="-120"/>
                         </a:rPr>
-                        <a:t>90%以上</a:t>
+                        <a:t>89%以上</a:t>
                       </a:r>
                       <a:endParaRPr lang="en-US" sz="1000" dirty="0">
                         <a:latin typeface="Arial" charset="0"/>
@@ -4152,7 +4152,7 @@
                           <a:ea typeface="Arial" pitchFamily="34" charset="-122"/>
                           <a:cs typeface="Arial" pitchFamily="34" charset="-120"/>
                         </a:rPr>
-                        <a:t>8.3点</a:t>
+                        <a:t>8.2点</a:t>
                       </a:r>
                       <a:endParaRPr lang="en-US" sz="1000" dirty="0">
                         <a:latin typeface="Arial" charset="0"/>
@@ -4220,7 +4220,7 @@
                           <a:ea typeface="Arial" pitchFamily="34" charset="-122"/>
                           <a:cs typeface="Arial" pitchFamily="34" charset="-120"/>
                         </a:rPr>
-                        <a:t>9.3点以上</a:t>
+                        <a:t>9.2点以上</a:t>
                       </a:r>
                       <a:endParaRPr lang="en-US" sz="1000" dirty="0">
                         <a:latin typeface="Arial" charset="0"/>
@@ -5339,7 +5339,7 @@
                 <a:ea typeface="Arial" pitchFamily="34" charset="-122"/>
                 <a:cs typeface="Arial" pitchFamily="34" charset="-120"/>
               </a:rPr>
-              <a:t>8.90</a:t>
+              <a:t>8.87</a:t>
             </a:r>
             <a:endParaRPr lang="en-US" sz="3200" dirty="0"/>
           </a:p>
@@ -5464,7 +5464,7 @@
                 <a:ea typeface="Arial" pitchFamily="34" charset="-122"/>
                 <a:cs typeface="Arial" pitchFamily="34" charset="-120"/>
               </a:rPr>
-              <a:t>85.2%</a:t>
+              <a:t>84.3%</a:t>
             </a:r>
             <a:endParaRPr lang="en-US" sz="3200" dirty="0"/>
           </a:p>
@@ -5714,7 +5714,7 @@
                 <a:ea typeface="Arial" pitchFamily="34" charset="-122"/>
                 <a:cs typeface="Arial" pitchFamily="34" charset="-120"/>
               </a:rPr>
-              <a:t>122件</a:t>
+              <a:t>127件</a:t>
             </a:r>
             <a:endParaRPr lang="en-US" sz="3200" dirty="0"/>
           </a:p>
@@ -5862,7 +5862,7 @@
                 <a:ea typeface="Arial" pitchFamily="34" charset="-122"/>
                 <a:cs typeface="Arial" pitchFamily="34" charset="-120"/>
               </a:rPr>
-              <a:t>  じゃらん 新しいホテルでおしゃれで綺麗</a:t>
+              <a:t>  Agoda 便利で、部屋も小さいながら清潔</a:t>
             </a:r>
             <a:endParaRPr lang="en-US" sz="1100" dirty="0"/>
           </a:p>
@@ -5902,7 +5902,7 @@
                 <a:ea typeface="Arial" pitchFamily="34" charset="-122"/>
                 <a:cs typeface="Arial" pitchFamily="34" charset="-120"/>
               </a:rPr>
-              <a:t>  com 横浜武道館のすぐ隣という最高のロケーションで、地下鉄金内駅から徒歩わずか2～3分です</a:t>
+              <a:t>  Agoda ぴあアリーナMMでのLIVE参加の為利用させて頂きました 立地は会場迄徒歩圏内で関内駅も近いが、喧騒エ...</a:t>
             </a:r>
             <a:endParaRPr lang="en-US" sz="1100" dirty="0"/>
           </a:p>
@@ -6130,7 +6130,7 @@
                 <a:ea typeface="Arial" pitchFamily="34" charset="-122"/>
                 <a:cs typeface="Arial" pitchFamily="34" charset="-120"/>
               </a:rPr>
-              <a:t>  アメニティもDHCだし、シャワーのお湯も水圧も良かったし、2人なら狭いかもだけど、ゆったり過ごせました</a:t>
+              <a:t>  Agoda 便利で、部屋も小さいながら清潔</a:t>
             </a:r>
             <a:endParaRPr lang="en-US" sz="1100" dirty="0"/>
           </a:p>
@@ -6523,7 +6523,7 @@
                 <a:ea typeface="Arial" pitchFamily="34" charset="-122"/>
                 <a:cs typeface="Arial" pitchFamily="34" charset="-120"/>
               </a:rPr>
-              <a:t>8.90</a:t>
+              <a:t>8.87</a:t>
             </a:r>
             <a:endParaRPr lang="en-US" sz="3200" dirty="0"/>
           </a:p>
@@ -6648,7 +6648,7 @@
                 <a:ea typeface="Arial" pitchFamily="34" charset="-122"/>
                 <a:cs typeface="Arial" pitchFamily="34" charset="-120"/>
               </a:rPr>
-              <a:t>85.2%</a:t>
+              <a:t>84.3%</a:t>
             </a:r>
             <a:endParaRPr lang="en-US" sz="3200" dirty="0"/>
           </a:p>
@@ -6898,7 +6898,7 @@
                 <a:ea typeface="Arial" pitchFamily="34" charset="-122"/>
                 <a:cs typeface="Arial" pitchFamily="34" charset="-120"/>
               </a:rPr>
-              <a:t>122件</a:t>
+              <a:t>127件</a:t>
             </a:r>
             <a:endParaRPr lang="en-US" sz="3200" dirty="0"/>
           </a:p>
@@ -7319,7 +7319,7 @@
                 <a:ea typeface="Arial" pitchFamily="34" charset="-122"/>
                 <a:cs typeface="Arial" pitchFamily="34" charset="-120"/>
               </a:rPr>
-              <a:t>Google(9.83)が最高スコア。</a:t>
+              <a:t>Google(9.85)が最高スコア。</a:t>
             </a:r>
             <a:endParaRPr lang="en-US" sz="1100" dirty="0"/>
           </a:p>
@@ -7368,7 +7368,7 @@
                 <a:ea typeface="Arial" pitchFamily="34" charset="-122"/>
                 <a:cs typeface="Arial" pitchFamily="34" charset="-120"/>
               </a:rPr>
-              <a:t>Agoda(8.3)が相対的に低い。口コミ返信の強化が急務</a:t>
+              <a:t>Agoda(8.2)が相対的に低い。口コミ返信の強化が急務</a:t>
             </a:r>
             <a:endParaRPr lang="en-US" sz="1100" dirty="0"/>
           </a:p>
@@ -7877,7 +7877,7 @@
                           <a:ea typeface="Arial" pitchFamily="34" charset="-122"/>
                           <a:cs typeface="Arial" pitchFamily="34" charset="-120"/>
                         </a:rPr>
-                        <a:t>12</a:t>
+                        <a:t>13</a:t>
                       </a:r>
                       <a:endParaRPr lang="en-US" sz="900" dirty="0">
                         <a:latin typeface="Arial" charset="0"/>
@@ -8081,7 +8081,7 @@
                           <a:ea typeface="Arial" pitchFamily="34" charset="-122"/>
                           <a:cs typeface="Arial" pitchFamily="34" charset="-120"/>
                         </a:rPr>
-                        <a:t>9.83</a:t>
+                        <a:t>9.85</a:t>
                       </a:r>
                       <a:endParaRPr lang="en-US" sz="900" dirty="0">
                         <a:latin typeface="Arial" charset="0"/>
@@ -9245,7 +9245,7 @@
                           <a:ea typeface="Arial" pitchFamily="34" charset="-122"/>
                           <a:cs typeface="Arial" pitchFamily="34" charset="-120"/>
                         </a:rPr>
-                        <a:t>24</a:t>
+                        <a:t>25</a:t>
                       </a:r>
                       <a:endParaRPr lang="en-US" sz="900" dirty="0">
                         <a:latin typeface="Arial" charset="0"/>
@@ -9313,7 +9313,7 @@
                           <a:ea typeface="Arial" pitchFamily="34" charset="-122"/>
                           <a:cs typeface="Arial" pitchFamily="34" charset="-120"/>
                         </a:rPr>
-                        <a:t>8.58</a:t>
+                        <a:t>8.56</a:t>
                       </a:r>
                       <a:endParaRPr lang="en-US" sz="900" dirty="0">
                         <a:latin typeface="Arial" charset="0"/>
@@ -9449,7 +9449,7 @@
                           <a:ea typeface="Arial" pitchFamily="34" charset="-122"/>
                           <a:cs typeface="Arial" pitchFamily="34" charset="-120"/>
                         </a:rPr>
-                        <a:t>8.58</a:t>
+                        <a:t>8.56</a:t>
                       </a:r>
                       <a:endParaRPr lang="en-US" sz="900" dirty="0">
                         <a:latin typeface="Arial" charset="0"/>
@@ -9587,7 +9587,7 @@
                           <a:ea typeface="Arial" pitchFamily="34" charset="-122"/>
                           <a:cs typeface="Arial" pitchFamily="34" charset="-120"/>
                         </a:rPr>
-                        <a:t>32</a:t>
+                        <a:t>35</a:t>
                       </a:r>
                       <a:endParaRPr lang="en-US" sz="900" dirty="0">
                         <a:latin typeface="Arial" charset="0"/>
@@ -9655,7 +9655,7 @@
                           <a:ea typeface="Arial" pitchFamily="34" charset="-122"/>
                           <a:cs typeface="Arial" pitchFamily="34" charset="-120"/>
                         </a:rPr>
-                        <a:t>8.28</a:t>
+                        <a:t>8.23</a:t>
                       </a:r>
                       <a:endParaRPr lang="en-US" sz="900" dirty="0">
                         <a:latin typeface="Arial" charset="0"/>
@@ -9791,7 +9791,7 @@
                           <a:ea typeface="Arial" pitchFamily="34" charset="-122"/>
                           <a:cs typeface="Arial" pitchFamily="34" charset="-120"/>
                         </a:rPr>
-                        <a:t>8.28</a:t>
+                        <a:t>8.23</a:t>
                       </a:r>
                       <a:endParaRPr lang="en-US" sz="900" dirty="0">
                         <a:latin typeface="Arial" charset="0"/>
@@ -10199,7 +10199,7 @@
                 <a:ea typeface="Arial" pitchFamily="34" charset="-122"/>
                 <a:cs typeface="Arial" pitchFamily="34" charset="-120"/>
               </a:rPr>
-              <a:t>104件（85.2%）</a:t>
+              <a:t>107件（84.3%）</a:t>
             </a:r>
             <a:endParaRPr lang="en-US" sz="1100" dirty="0"/>
           </a:p>
@@ -10297,7 +10297,7 @@
                 <a:ea typeface="Arial" pitchFamily="34" charset="-122"/>
                 <a:cs typeface="Arial" pitchFamily="34" charset="-120"/>
               </a:rPr>
-              <a:t>17件（13.9%）</a:t>
+              <a:t>19件（15.0%）</a:t>
             </a:r>
             <a:endParaRPr lang="en-US" sz="1100" dirty="0"/>
           </a:p>
@@ -10807,7 +10807,7 @@
                 <a:ea typeface="Arial" pitchFamily="34" charset="-122"/>
                 <a:cs typeface="Arial" pitchFamily="34" charset="-120"/>
               </a:rPr>
-              <a:t>じゃらん 新しいホテルでおしゃれで綺麗</a:t>
+              <a:t>Agoda 便利で、部屋も小さいながら清潔</a:t>
             </a:r>
             <a:endParaRPr lang="en-US" sz="900" dirty="0"/>
           </a:p>
@@ -10846,7 +10846,7 @@
                 <a:ea typeface="Arial" pitchFamily="34" charset="-122"/>
                 <a:cs typeface="Arial" pitchFamily="34" charset="-120"/>
               </a:rPr>
-              <a:t>「Google 築年数が浅くおしゃれできれいです」</a:t>
+              <a:t>「部屋も清掃が行き届いておりよかったです」</a:t>
             </a:r>
             <a:endParaRPr lang="en-US" sz="900" dirty="0"/>
           </a:p>
@@ -11030,7 +11030,7 @@
                 <a:ea typeface="Arial" pitchFamily="34" charset="-122"/>
                 <a:cs typeface="Arial" pitchFamily="34" charset="-120"/>
               </a:rPr>
-              <a:t>com 横浜武道館のすぐ隣という最高のロケーションで、地下鉄金内駅から徒歩わずか2～3分です</a:t>
+              <a:t>Agoda ぴあアリーナMMでのLIVE参加の為利用させて頂きました 立地は会場迄徒歩圏内で関内駅も近いが、喧騒エ...</a:t>
             </a:r>
             <a:endParaRPr lang="en-US" sz="900" dirty="0"/>
           </a:p>
@@ -11069,7 +11069,7 @@
                 <a:ea typeface="Arial" pitchFamily="34" charset="-122"/>
                 <a:cs typeface="Arial" pitchFamily="34" charset="-120"/>
               </a:rPr>
-              <a:t>「関内駅から徒歩圏内で行きやすかったです」</a:t>
+              <a:t>「Agoda 便利で、部屋も小さいながら清潔」</a:t>
             </a:r>
             <a:endParaRPr lang="en-US" sz="900" dirty="0"/>
           </a:p>
@@ -11476,7 +11476,7 @@
                 <a:ea typeface="Arial" pitchFamily="34" charset="-122"/>
                 <a:cs typeface="Arial" pitchFamily="34" charset="-120"/>
               </a:rPr>
-              <a:t>スタッフの方々もとても優しく丁寧な対応して頂き緊張もほぐれ最高でした</a:t>
+              <a:t>Agoda ぴあアリーナMMでのLIVE参加の為利用させて頂きました 立地は会場迄徒歩圏内で関内駅も近いが、喧騒エ...</a:t>
             </a:r>
             <a:endParaRPr lang="en-US" sz="900" dirty="0"/>
           </a:p>
@@ -11515,7 +11515,7 @@
                 <a:ea typeface="Arial" pitchFamily="34" charset="-122"/>
                 <a:cs typeface="Arial" pitchFamily="34" charset="-120"/>
               </a:rPr>
-              <a:t>「Agoda 予約時に子どもの分を忘れてしまっていまたが、当日でもすぐに対応してくださり、泊まることができました」</a:t>
+              <a:t>「気持ちのよい接客、綺麗でオシャレな施設、便利な立地」</a:t>
             </a:r>
             <a:endParaRPr lang="en-US" sz="900" dirty="0"/>
           </a:p>
@@ -12925,7 +12925,7 @@
                           <a:ea typeface="Arial" pitchFamily="34" charset="-122"/>
                           <a:cs typeface="Arial" pitchFamily="34" charset="-120"/>
                         </a:rPr>
-                        <a:t>アメニティもDHCだし、シャワーのお湯も水圧も良かったし、2人なら狭いかもだけど、ゆったり過ごせました</a:t>
+                        <a:t>Agoda 便利で、部屋も小さいながら清潔</a:t>
                       </a:r>
                       <a:endParaRPr lang="en-US" sz="900" dirty="0">
                         <a:latin typeface="Arial" charset="0"/>
@@ -12993,7 +12993,7 @@
                           <a:ea typeface="Arial" pitchFamily="34" charset="-122"/>
                           <a:cs typeface="Arial" pitchFamily="34" charset="-120"/>
                         </a:rPr>
-                        <a:t>12件</a:t>
+                        <a:t>13件</a:t>
                       </a:r>
                       <a:endParaRPr lang="en-US" sz="900" dirty="0">
                         <a:latin typeface="Arial" charset="0"/>

--- a/納品レポート/ホテル別レポート/comment_yokohama_口コミ分析レポート.pptx
+++ b/納品レポート/ホテル別レポート/comment_yokohama_口コミ分析レポート.pptx
@@ -211,7 +211,7 @@
                   <c:v>9.85</c:v>
                 </c:pt>
                 <c:pt idx="1">
-                  <c:v>9.29</c:v>
+                  <c:v>9.33</c:v>
                 </c:pt>
                 <c:pt idx="2">
                   <c:v>9.23</c:v>
@@ -220,7 +220,7 @@
                   <c:v>9.12</c:v>
                 </c:pt>
                 <c:pt idx="4">
-                  <c:v>8.56</c:v>
+                  <c:v>8.54</c:v>
                 </c:pt>
                 <c:pt idx="5">
                   <c:v>8.23</c:v>
@@ -566,7 +566,7 @@
               <c:numCache>
                 <c:ptCount val="3"/>
                 <c:pt idx="0">
-                  <c:v>107</c:v>
+                  <c:v>109</c:v>
                 </c:pt>
                 <c:pt idx="1">
                   <c:v>19</c:v>
@@ -795,13 +795,13 @@
                 <c:formatCode>General</c:formatCode>
                 <c:ptCount val="7"/>
                 <c:pt idx="0">
-                  <c:v>62</c:v>
+                  <c:v>63</c:v>
                 </c:pt>
                 <c:pt idx="1">
                   <c:v>20</c:v>
                 </c:pt>
                 <c:pt idx="2">
-                  <c:v>25</c:v>
+                  <c:v>26</c:v>
                 </c:pt>
                 <c:pt idx="3">
                   <c:v>11</c:v>
@@ -2764,7 +2764,7 @@
                 <a:ea typeface="Arial" pitchFamily="34" charset="-122"/>
                 <a:cs typeface="Arial" pitchFamily="34" charset="-120"/>
               </a:rPr>
-              <a:t>レビュー総数：127件（6サイト）</a:t>
+              <a:t>レビュー総数：129件（6サイト）</a:t>
             </a:r>
             <a:endParaRPr lang="en-US" sz="1000" dirty="0"/>
           </a:p>
@@ -2784,7 +2784,7 @@
                 <a:ea typeface="Arial" pitchFamily="34" charset="-122"/>
                 <a:cs typeface="Arial" pitchFamily="34" charset="-120"/>
               </a:rPr>
-              <a:t>作成日：2026年3月25日</a:t>
+              <a:t>作成日：2026年3月26日</a:t>
             </a:r>
             <a:endParaRPr lang="en-US" sz="1000" dirty="0"/>
           </a:p>
@@ -3330,7 +3330,7 @@
                           <a:ea typeface="Arial" pitchFamily="34" charset="-122"/>
                           <a:cs typeface="Arial" pitchFamily="34" charset="-120"/>
                         </a:rPr>
-                        <a:t>8.87点</a:t>
+                        <a:t>8.88点</a:t>
                       </a:r>
                       <a:endParaRPr lang="en-US" sz="1000" dirty="0">
                         <a:latin typeface="Arial" charset="0"/>
@@ -3604,7 +3604,7 @@
                           <a:ea typeface="Arial" pitchFamily="34" charset="-122"/>
                           <a:cs typeface="Arial" pitchFamily="34" charset="-120"/>
                         </a:rPr>
-                        <a:t>84.3%</a:t>
+                        <a:t>84.5%</a:t>
                       </a:r>
                       <a:endParaRPr lang="en-US" sz="1000" dirty="0">
                         <a:latin typeface="Arial" charset="0"/>
@@ -3672,7 +3672,7 @@
                           <a:ea typeface="Arial" pitchFamily="34" charset="-122"/>
                           <a:cs typeface="Arial" pitchFamily="34" charset="-120"/>
                         </a:rPr>
-                        <a:t>89%以上</a:t>
+                        <a:t>90%以上</a:t>
                       </a:r>
                       <a:endParaRPr lang="en-US" sz="1000" dirty="0">
                         <a:latin typeface="Arial" charset="0"/>
@@ -5339,7 +5339,7 @@
                 <a:ea typeface="Arial" pitchFamily="34" charset="-122"/>
                 <a:cs typeface="Arial" pitchFamily="34" charset="-120"/>
               </a:rPr>
-              <a:t>8.87</a:t>
+              <a:t>8.88</a:t>
             </a:r>
             <a:endParaRPr lang="en-US" sz="3200" dirty="0"/>
           </a:p>
@@ -5464,7 +5464,7 @@
                 <a:ea typeface="Arial" pitchFamily="34" charset="-122"/>
                 <a:cs typeface="Arial" pitchFamily="34" charset="-120"/>
               </a:rPr>
-              <a:t>84.3%</a:t>
+              <a:t>84.5%</a:t>
             </a:r>
             <a:endParaRPr lang="en-US" sz="3200" dirty="0"/>
           </a:p>
@@ -5714,7 +5714,7 @@
                 <a:ea typeface="Arial" pitchFamily="34" charset="-122"/>
                 <a:cs typeface="Arial" pitchFamily="34" charset="-120"/>
               </a:rPr>
-              <a:t>127件</a:t>
+              <a:t>129件</a:t>
             </a:r>
             <a:endParaRPr lang="en-US" sz="3200" dirty="0"/>
           </a:p>
@@ -5942,7 +5942,7 @@
                 <a:ea typeface="Arial" pitchFamily="34" charset="-122"/>
                 <a:cs typeface="Arial" pitchFamily="34" charset="-120"/>
               </a:rPr>
-              <a:t>  ホテルにはサウナ、温泉、大浴場があり、快適な滞在をお約束します</a:t>
+              <a:t>  部屋はおまかせのプランで、バンクベッド（2段ベッド）の部屋でしたが、想像していたよりずっと広く使えるレイアウトにな...</a:t>
             </a:r>
             <a:endParaRPr lang="en-US" sz="1100" dirty="0"/>
           </a:p>
@@ -6523,7 +6523,7 @@
                 <a:ea typeface="Arial" pitchFamily="34" charset="-122"/>
                 <a:cs typeface="Arial" pitchFamily="34" charset="-120"/>
               </a:rPr>
-              <a:t>8.87</a:t>
+              <a:t>8.88</a:t>
             </a:r>
             <a:endParaRPr lang="en-US" sz="3200" dirty="0"/>
           </a:p>
@@ -6648,7 +6648,7 @@
                 <a:ea typeface="Arial" pitchFamily="34" charset="-122"/>
                 <a:cs typeface="Arial" pitchFamily="34" charset="-120"/>
               </a:rPr>
-              <a:t>84.3%</a:t>
+              <a:t>84.5%</a:t>
             </a:r>
             <a:endParaRPr lang="en-US" sz="3200" dirty="0"/>
           </a:p>
@@ -6898,7 +6898,7 @@
                 <a:ea typeface="Arial" pitchFamily="34" charset="-122"/>
                 <a:cs typeface="Arial" pitchFamily="34" charset="-120"/>
               </a:rPr>
-              <a:t>127件</a:t>
+              <a:t>129件</a:t>
             </a:r>
             <a:endParaRPr lang="en-US" sz="3200" dirty="0"/>
           </a:p>
@@ -8219,7 +8219,7 @@
                           <a:ea typeface="Arial" pitchFamily="34" charset="-122"/>
                           <a:cs typeface="Arial" pitchFamily="34" charset="-120"/>
                         </a:rPr>
-                        <a:t>17</a:t>
+                        <a:t>18</a:t>
                       </a:r>
                       <a:endParaRPr lang="en-US" sz="900" dirty="0">
                         <a:latin typeface="Arial" charset="0"/>
@@ -8287,7 +8287,7 @@
                           <a:ea typeface="Arial" pitchFamily="34" charset="-122"/>
                           <a:cs typeface="Arial" pitchFamily="34" charset="-120"/>
                         </a:rPr>
-                        <a:t>4.65</a:t>
+                        <a:t>4.67</a:t>
                       </a:r>
                       <a:endParaRPr lang="en-US" sz="900" dirty="0">
                         <a:latin typeface="Arial" charset="0"/>
@@ -8423,7 +8423,7 @@
                           <a:ea typeface="Arial" pitchFamily="34" charset="-122"/>
                           <a:cs typeface="Arial" pitchFamily="34" charset="-120"/>
                         </a:rPr>
-                        <a:t>9.29</a:t>
+                        <a:t>9.33</a:t>
                       </a:r>
                       <a:endParaRPr lang="en-US" sz="900" dirty="0">
                         <a:latin typeface="Arial" charset="0"/>
@@ -9245,7 +9245,7 @@
                           <a:ea typeface="Arial" pitchFamily="34" charset="-122"/>
                           <a:cs typeface="Arial" pitchFamily="34" charset="-120"/>
                         </a:rPr>
-                        <a:t>25</a:t>
+                        <a:t>26</a:t>
                       </a:r>
                       <a:endParaRPr lang="en-US" sz="900" dirty="0">
                         <a:latin typeface="Arial" charset="0"/>
@@ -9313,7 +9313,7 @@
                           <a:ea typeface="Arial" pitchFamily="34" charset="-122"/>
                           <a:cs typeface="Arial" pitchFamily="34" charset="-120"/>
                         </a:rPr>
-                        <a:t>8.56</a:t>
+                        <a:t>8.54</a:t>
                       </a:r>
                       <a:endParaRPr lang="en-US" sz="900" dirty="0">
                         <a:latin typeface="Arial" charset="0"/>
@@ -9449,7 +9449,7 @@
                           <a:ea typeface="Arial" pitchFamily="34" charset="-122"/>
                           <a:cs typeface="Arial" pitchFamily="34" charset="-120"/>
                         </a:rPr>
-                        <a:t>8.56</a:t>
+                        <a:t>8.54</a:t>
                       </a:r>
                       <a:endParaRPr lang="en-US" sz="900" dirty="0">
                         <a:latin typeface="Arial" charset="0"/>
@@ -10199,7 +10199,7 @@
                 <a:ea typeface="Arial" pitchFamily="34" charset="-122"/>
                 <a:cs typeface="Arial" pitchFamily="34" charset="-120"/>
               </a:rPr>
-              <a:t>107件（84.3%）</a:t>
+              <a:t>109件（84.5%）</a:t>
             </a:r>
             <a:endParaRPr lang="en-US" sz="1100" dirty="0"/>
           </a:p>
@@ -10297,7 +10297,7 @@
                 <a:ea typeface="Arial" pitchFamily="34" charset="-122"/>
                 <a:cs typeface="Arial" pitchFamily="34" charset="-120"/>
               </a:rPr>
-              <a:t>19件（15.0%）</a:t>
+              <a:t>19件（14.7%）</a:t>
             </a:r>
             <a:endParaRPr lang="en-US" sz="1100" dirty="0"/>
           </a:p>
@@ -10846,7 +10846,7 @@
                 <a:ea typeface="Arial" pitchFamily="34" charset="-122"/>
                 <a:cs typeface="Arial" pitchFamily="34" charset="-120"/>
               </a:rPr>
-              <a:t>「部屋も清掃が行き届いておりよかったです」</a:t>
+              <a:t>「com 綺麗です 特になし 特になし」</a:t>
             </a:r>
             <a:endParaRPr lang="en-US" sz="900" dirty="0"/>
           </a:p>
@@ -11253,7 +11253,7 @@
                 <a:ea typeface="Arial" pitchFamily="34" charset="-122"/>
                 <a:cs typeface="Arial" pitchFamily="34" charset="-120"/>
               </a:rPr>
-              <a:t>ホテルにはサウナ、温泉、大浴場があり、快適な滞在をお約束します</a:t>
+              <a:t>部屋はおまかせのプランで、バンクベッド（2段ベッド）の部屋でしたが、想像していたよりずっと広く使えるレイアウトにな...</a:t>
             </a:r>
             <a:endParaRPr lang="en-US" sz="900" dirty="0"/>
           </a:p>
@@ -11292,7 +11292,7 @@
                 <a:ea typeface="Arial" pitchFamily="34" charset="-122"/>
                 <a:cs typeface="Arial" pitchFamily="34" charset="-120"/>
               </a:rPr>
-              <a:t>「Agoda とても清潔感があってコンパクトにまとまった感じで2泊でしたがとてもゆっくり快適に宿泊する事が出来ました」</a:t>
+              <a:t>「ホテルにはサウナ、温泉、大浴場があり、快適な滞在をお約束します」</a:t>
             </a:r>
             <a:endParaRPr lang="en-US" sz="900" dirty="0"/>
           </a:p>
@@ -12993,7 +12993,7 @@
                           <a:ea typeface="Arial" pitchFamily="34" charset="-122"/>
                           <a:cs typeface="Arial" pitchFamily="34" charset="-120"/>
                         </a:rPr>
-                        <a:t>13件</a:t>
+                        <a:t>12件</a:t>
                       </a:r>
                       <a:endParaRPr lang="en-US" sz="900" dirty="0">
                         <a:latin typeface="Arial" charset="0"/>

--- a/納品レポート/ホテル別レポート/comment_yokohama_口コミ分析レポート.pptx
+++ b/納品レポート/ホテル別レポート/comment_yokohama_口コミ分析レポート.pptx
@@ -211,7 +211,7 @@
                   <c:v>9.85</c:v>
                 </c:pt>
                 <c:pt idx="1">
-                  <c:v>9.33</c:v>
+                  <c:v>9.38</c:v>
                 </c:pt>
                 <c:pt idx="2">
                   <c:v>9.23</c:v>
@@ -220,7 +220,7 @@
                   <c:v>9.12</c:v>
                 </c:pt>
                 <c:pt idx="4">
-                  <c:v>8.54</c:v>
+                  <c:v>8.56</c:v>
                 </c:pt>
                 <c:pt idx="5">
                   <c:v>8.23</c:v>
@@ -566,7 +566,7 @@
               <c:numCache>
                 <c:ptCount val="3"/>
                 <c:pt idx="0">
-                  <c:v>109</c:v>
+                  <c:v>108</c:v>
                 </c:pt>
                 <c:pt idx="1">
                   <c:v>19</c:v>
@@ -795,13 +795,13 @@
                 <c:formatCode>General</c:formatCode>
                 <c:ptCount val="7"/>
                 <c:pt idx="0">
-                  <c:v>63</c:v>
+                  <c:v>62</c:v>
                 </c:pt>
                 <c:pt idx="1">
-                  <c:v>20</c:v>
+                  <c:v>21</c:v>
                 </c:pt>
                 <c:pt idx="2">
-                  <c:v>26</c:v>
+                  <c:v>25</c:v>
                 </c:pt>
                 <c:pt idx="3">
                   <c:v>11</c:v>
@@ -2764,7 +2764,7 @@
                 <a:ea typeface="Arial" pitchFamily="34" charset="-122"/>
                 <a:cs typeface="Arial" pitchFamily="34" charset="-120"/>
               </a:rPr>
-              <a:t>レビュー総数：129件（6サイト）</a:t>
+              <a:t>レビュー総数：128件（6サイト）</a:t>
             </a:r>
             <a:endParaRPr lang="en-US" sz="1000" dirty="0"/>
           </a:p>
@@ -2784,7 +2784,7 @@
                 <a:ea typeface="Arial" pitchFamily="34" charset="-122"/>
                 <a:cs typeface="Arial" pitchFamily="34" charset="-120"/>
               </a:rPr>
-              <a:t>作成日：2026年3月26日</a:t>
+              <a:t>作成日：2026年3月27日</a:t>
             </a:r>
             <a:endParaRPr lang="en-US" sz="1000" dirty="0"/>
           </a:p>
@@ -3604,7 +3604,7 @@
                           <a:ea typeface="Arial" pitchFamily="34" charset="-122"/>
                           <a:cs typeface="Arial" pitchFamily="34" charset="-120"/>
                         </a:rPr>
-                        <a:t>84.5%</a:t>
+                        <a:t>84.4%</a:t>
                       </a:r>
                       <a:endParaRPr lang="en-US" sz="1000" dirty="0">
                         <a:latin typeface="Arial" charset="0"/>
@@ -3672,7 +3672,7 @@
                           <a:ea typeface="Arial" pitchFamily="34" charset="-122"/>
                           <a:cs typeface="Arial" pitchFamily="34" charset="-120"/>
                         </a:rPr>
-                        <a:t>90%以上</a:t>
+                        <a:t>89%以上</a:t>
                       </a:r>
                       <a:endParaRPr lang="en-US" sz="1000" dirty="0">
                         <a:latin typeface="Arial" charset="0"/>
@@ -4700,7 +4700,7 @@
                           <a:ea typeface="Arial" pitchFamily="34" charset="-122"/>
                           <a:cs typeface="Arial" pitchFamily="34" charset="-120"/>
                         </a:rPr>
-                        <a:t>約17件/期間</a:t>
+                        <a:t>約15件/期間</a:t>
                       </a:r>
                       <a:endParaRPr lang="en-US" sz="1000" dirty="0">
                         <a:latin typeface="Arial" charset="0"/>
@@ -4768,7 +4768,7 @@
                           <a:ea typeface="Arial" pitchFamily="34" charset="-122"/>
                           <a:cs typeface="Arial" pitchFamily="34" charset="-120"/>
                         </a:rPr>
-                        <a:t>8件以下</a:t>
+                        <a:t>7件以下</a:t>
                       </a:r>
                       <a:endParaRPr lang="en-US" sz="1000" dirty="0">
                         <a:latin typeface="Arial" charset="0"/>
@@ -5464,7 +5464,7 @@
                 <a:ea typeface="Arial" pitchFamily="34" charset="-122"/>
                 <a:cs typeface="Arial" pitchFamily="34" charset="-120"/>
               </a:rPr>
-              <a:t>84.5%</a:t>
+              <a:t>84.4%</a:t>
             </a:r>
             <a:endParaRPr lang="en-US" sz="3200" dirty="0"/>
           </a:p>
@@ -5714,7 +5714,7 @@
                 <a:ea typeface="Arial" pitchFamily="34" charset="-122"/>
                 <a:cs typeface="Arial" pitchFamily="34" charset="-120"/>
               </a:rPr>
-              <a:t>129件</a:t>
+              <a:t>128件</a:t>
             </a:r>
             <a:endParaRPr lang="en-US" sz="3200" dirty="0"/>
           </a:p>
@@ -6648,7 +6648,7 @@
                 <a:ea typeface="Arial" pitchFamily="34" charset="-122"/>
                 <a:cs typeface="Arial" pitchFamily="34" charset="-120"/>
               </a:rPr>
-              <a:t>84.5%</a:t>
+              <a:t>84.4%</a:t>
             </a:r>
             <a:endParaRPr lang="en-US" sz="3200" dirty="0"/>
           </a:p>
@@ -6898,7 +6898,7 @@
                 <a:ea typeface="Arial" pitchFamily="34" charset="-122"/>
                 <a:cs typeface="Arial" pitchFamily="34" charset="-120"/>
               </a:rPr>
-              <a:t>129件</a:t>
+              <a:t>128件</a:t>
             </a:r>
             <a:endParaRPr lang="en-US" sz="3200" dirty="0"/>
           </a:p>
@@ -8219,7 +8219,7 @@
                           <a:ea typeface="Arial" pitchFamily="34" charset="-122"/>
                           <a:cs typeface="Arial" pitchFamily="34" charset="-120"/>
                         </a:rPr>
-                        <a:t>18</a:t>
+                        <a:t>16</a:t>
                       </a:r>
                       <a:endParaRPr lang="en-US" sz="900" dirty="0">
                         <a:latin typeface="Arial" charset="0"/>
@@ -8287,7 +8287,7 @@
                           <a:ea typeface="Arial" pitchFamily="34" charset="-122"/>
                           <a:cs typeface="Arial" pitchFamily="34" charset="-120"/>
                         </a:rPr>
-                        <a:t>4.67</a:t>
+                        <a:t>4.69</a:t>
                       </a:r>
                       <a:endParaRPr lang="en-US" sz="900" dirty="0">
                         <a:latin typeface="Arial" charset="0"/>
@@ -8423,7 +8423,7 @@
                           <a:ea typeface="Arial" pitchFamily="34" charset="-122"/>
                           <a:cs typeface="Arial" pitchFamily="34" charset="-120"/>
                         </a:rPr>
-                        <a:t>9.33</a:t>
+                        <a:t>9.38</a:t>
                       </a:r>
                       <a:endParaRPr lang="en-US" sz="900" dirty="0">
                         <a:latin typeface="Arial" charset="0"/>
@@ -9245,7 +9245,7 @@
                           <a:ea typeface="Arial" pitchFamily="34" charset="-122"/>
                           <a:cs typeface="Arial" pitchFamily="34" charset="-120"/>
                         </a:rPr>
-                        <a:t>26</a:t>
+                        <a:t>27</a:t>
                       </a:r>
                       <a:endParaRPr lang="en-US" sz="900" dirty="0">
                         <a:latin typeface="Arial" charset="0"/>
@@ -9313,7 +9313,7 @@
                           <a:ea typeface="Arial" pitchFamily="34" charset="-122"/>
                           <a:cs typeface="Arial" pitchFamily="34" charset="-120"/>
                         </a:rPr>
-                        <a:t>8.54</a:t>
+                        <a:t>8.56</a:t>
                       </a:r>
                       <a:endParaRPr lang="en-US" sz="900" dirty="0">
                         <a:latin typeface="Arial" charset="0"/>
@@ -9449,7 +9449,7 @@
                           <a:ea typeface="Arial" pitchFamily="34" charset="-122"/>
                           <a:cs typeface="Arial" pitchFamily="34" charset="-120"/>
                         </a:rPr>
-                        <a:t>8.54</a:t>
+                        <a:t>8.56</a:t>
                       </a:r>
                       <a:endParaRPr lang="en-US" sz="900" dirty="0">
                         <a:latin typeface="Arial" charset="0"/>
@@ -10199,7 +10199,7 @@
                 <a:ea typeface="Arial" pitchFamily="34" charset="-122"/>
                 <a:cs typeface="Arial" pitchFamily="34" charset="-120"/>
               </a:rPr>
-              <a:t>109件（84.5%）</a:t>
+              <a:t>108件（84.4%）</a:t>
             </a:r>
             <a:endParaRPr lang="en-US" sz="1100" dirty="0"/>
           </a:p>
@@ -10297,7 +10297,7 @@
                 <a:ea typeface="Arial" pitchFamily="34" charset="-122"/>
                 <a:cs typeface="Arial" pitchFamily="34" charset="-120"/>
               </a:rPr>
-              <a:t>19件（14.7%）</a:t>
+              <a:t>19件（14.8%）</a:t>
             </a:r>
             <a:endParaRPr lang="en-US" sz="1100" dirty="0"/>
           </a:p>
@@ -12719,7 +12719,7 @@
                           <a:ea typeface="Arial" pitchFamily="34" charset="-122"/>
                           <a:cs typeface="Arial" pitchFamily="34" charset="-120"/>
                         </a:rPr>
-                        <a:t>17件</a:t>
+                        <a:t>15件</a:t>
                       </a:r>
                       <a:endParaRPr lang="en-US" sz="900" dirty="0">
                         <a:latin typeface="Arial" charset="0"/>
@@ -12993,7 +12993,7 @@
                           <a:ea typeface="Arial" pitchFamily="34" charset="-122"/>
                           <a:cs typeface="Arial" pitchFamily="34" charset="-120"/>
                         </a:rPr>
-                        <a:t>12件</a:t>
+                        <a:t>11件</a:t>
                       </a:r>
                       <a:endParaRPr lang="en-US" sz="900" dirty="0">
                         <a:latin typeface="Arial" charset="0"/>
@@ -13405,7 +13405,7 @@
                           <a:ea typeface="Arial" pitchFamily="34" charset="-122"/>
                           <a:cs typeface="Arial" pitchFamily="34" charset="-120"/>
                         </a:rPr>
-                        <a:t>対応・サービスの不満</a:t>
+                        <a:t>臭い・匂い</a:t>
                       </a:r>
                       <a:endParaRPr lang="en-US" sz="900" dirty="0">
                         <a:latin typeface="Arial" charset="0"/>
@@ -13473,7 +13473,7 @@
                           <a:ea typeface="Arial" pitchFamily="34" charset="-122"/>
                           <a:cs typeface="Arial" pitchFamily="34" charset="-120"/>
                         </a:rPr>
-                        <a:t>Agoda 残念なのは朝食ブッフェ</a:t>
+                        <a:t>Agoda 部屋がタバコ臭かったのですが、こちらのミスで喫煙室を予約してしまっていたようでした</a:t>
                       </a:r>
                       <a:endParaRPr lang="en-US" sz="900" dirty="0">
                         <a:latin typeface="Arial" charset="0"/>
@@ -13541,7 +13541,7 @@
                           <a:ea typeface="Arial" pitchFamily="34" charset="-122"/>
                           <a:cs typeface="Arial" pitchFamily="34" charset="-120"/>
                         </a:rPr>
-                        <a:t>4件</a:t>
+                        <a:t>3件</a:t>
                       </a:r>
                       <a:endParaRPr lang="en-US" sz="900" dirty="0">
                         <a:latin typeface="Arial" charset="0"/>
@@ -13679,7 +13679,7 @@
                           <a:ea typeface="Arial" pitchFamily="34" charset="-122"/>
                           <a:cs typeface="Arial" pitchFamily="34" charset="-120"/>
                         </a:rPr>
-                        <a:t>臭い・匂い</a:t>
+                        <a:t>窓・採光</a:t>
                       </a:r>
                       <a:endParaRPr lang="en-US" sz="900" dirty="0">
                         <a:latin typeface="Arial" charset="0"/>
@@ -13747,7 +13747,7 @@
                           <a:ea typeface="Arial" pitchFamily="34" charset="-122"/>
                           <a:cs typeface="Arial" pitchFamily="34" charset="-120"/>
                         </a:rPr>
-                        <a:t>Agoda 部屋がタバコ臭かったのですが、こちらのミスで喫煙室を予約してしまっていたようでした</a:t>
+                        <a:t>ツインルームを利用、お部屋は明るく広くて清潔、洗面所とトイレがそれぞれ独立していたのは使い勝手が良かったです</a:t>
                       </a:r>
                       <a:endParaRPr lang="en-US" sz="900" dirty="0">
                         <a:latin typeface="Arial" charset="0"/>
@@ -13953,7 +13953,7 @@
                           <a:ea typeface="Arial" pitchFamily="34" charset="-122"/>
                           <a:cs typeface="Arial" pitchFamily="34" charset="-120"/>
                         </a:rPr>
-                        <a:t>窓・採光</a:t>
+                        <a:t>対応・サービスの不満</a:t>
                       </a:r>
                       <a:endParaRPr lang="en-US" sz="900" dirty="0">
                         <a:latin typeface="Arial" charset="0"/>
@@ -14021,7 +14021,7 @@
                           <a:ea typeface="Arial" pitchFamily="34" charset="-122"/>
                           <a:cs typeface="Arial" pitchFamily="34" charset="-120"/>
                         </a:rPr>
-                        <a:t>ツインルームを利用、お部屋は明るく広くて清潔、洗面所とトイレがそれぞれ独立していたのは使い勝手が良かったです</a:t>
+                        <a:t>Agoda 残念なのは朝食ブッフェ</a:t>
                       </a:r>
                       <a:endParaRPr lang="en-US" sz="900" dirty="0">
                         <a:latin typeface="Arial" charset="0"/>

--- a/納品レポート/ホテル別レポート/comment_yokohama_口コミ分析レポート.pptx
+++ b/納品レポート/ホテル別レポート/comment_yokohama_口コミ分析レポート.pptx
@@ -208,7 +208,7 @@
                 <c:formatCode>General</c:formatCode>
                 <c:ptCount val="6"/>
                 <c:pt idx="0">
-                  <c:v>9.85</c:v>
+                  <c:v>9.86</c:v>
                 </c:pt>
                 <c:pt idx="1">
                   <c:v>9.38</c:v>
@@ -223,7 +223,7 @@
                   <c:v>8.56</c:v>
                 </c:pt>
                 <c:pt idx="5">
-                  <c:v>8.23</c:v>
+                  <c:v>8.18</c:v>
                 </c:pt>
               </c:numCache>
             </c:numRef>
@@ -2784,7 +2784,7 @@
                 <a:ea typeface="Arial" pitchFamily="34" charset="-122"/>
                 <a:cs typeface="Arial" pitchFamily="34" charset="-120"/>
               </a:rPr>
-              <a:t>作成日：2026年3月27日</a:t>
+              <a:t>作成日：2026年3月28日</a:t>
             </a:r>
             <a:endParaRPr lang="en-US" sz="1000" dirty="0"/>
           </a:p>
@@ -4700,7 +4700,7 @@
                           <a:ea typeface="Arial" pitchFamily="34" charset="-122"/>
                           <a:cs typeface="Arial" pitchFamily="34" charset="-120"/>
                         </a:rPr>
-                        <a:t>約15件/期間</a:t>
+                        <a:t>約16件/期間</a:t>
                       </a:r>
                       <a:endParaRPr lang="en-US" sz="1000" dirty="0">
                         <a:latin typeface="Arial" charset="0"/>
@@ -4768,7 +4768,7 @@
                           <a:ea typeface="Arial" pitchFamily="34" charset="-122"/>
                           <a:cs typeface="Arial" pitchFamily="34" charset="-120"/>
                         </a:rPr>
-                        <a:t>7件以下</a:t>
+                        <a:t>8件以下</a:t>
                       </a:r>
                       <a:endParaRPr lang="en-US" sz="1000" dirty="0">
                         <a:latin typeface="Arial" charset="0"/>
@@ -5902,7 +5902,7 @@
                 <a:ea typeface="Arial" pitchFamily="34" charset="-122"/>
                 <a:cs typeface="Arial" pitchFamily="34" charset="-120"/>
               </a:rPr>
-              <a:t>  Agoda ぴあアリーナMMでのLIVE参加の為利用させて頂きました 立地は会場迄徒歩圏内で関内駅も近いが、喧騒エ...</a:t>
+              <a:t>  Google 立地：最高</a:t>
             </a:r>
             <a:endParaRPr lang="en-US" sz="1100" dirty="0"/>
           </a:p>
@@ -6090,7 +6090,7 @@
                 <a:ea typeface="Arial" pitchFamily="34" charset="-122"/>
                 <a:cs typeface="Arial" pitchFamily="34" charset="-120"/>
               </a:rPr>
-              <a:t>  アメニティもDHCだし、シャワーのお湯も水圧も良かったし、2人なら狭いかもだけど、ゆったり過ごせました</a:t>
+              <a:t>  ロビーのレイアウトも考え抜かれており、パジャマ姿で浴室に行く際にロビーやトイレ、ドリンクコーナーを通らずに済みます</a:t>
             </a:r>
             <a:endParaRPr lang="en-US" sz="1100" dirty="0"/>
           </a:p>
@@ -6130,7 +6130,7 @@
                 <a:ea typeface="Arial" pitchFamily="34" charset="-122"/>
                 <a:cs typeface="Arial" pitchFamily="34" charset="-120"/>
               </a:rPr>
-              <a:t>  Agoda 便利で、部屋も小さいながら清潔</a:t>
+              <a:t>  シングルルームは少し狭いですが、内装は素晴らしく、東京の桜シーズンと比べると料金もリーズナブルです</a:t>
             </a:r>
             <a:endParaRPr lang="en-US" sz="1100" dirty="0"/>
           </a:p>
@@ -7319,7 +7319,7 @@
                 <a:ea typeface="Arial" pitchFamily="34" charset="-122"/>
                 <a:cs typeface="Arial" pitchFamily="34" charset="-120"/>
               </a:rPr>
-              <a:t>Google(9.85)が最高スコア。</a:t>
+              <a:t>Google(9.86)が最高スコア。</a:t>
             </a:r>
             <a:endParaRPr lang="en-US" sz="1100" dirty="0"/>
           </a:p>
@@ -7877,7 +7877,7 @@
                           <a:ea typeface="Arial" pitchFamily="34" charset="-122"/>
                           <a:cs typeface="Arial" pitchFamily="34" charset="-120"/>
                         </a:rPr>
-                        <a:t>13</a:t>
+                        <a:t>14</a:t>
                       </a:r>
                       <a:endParaRPr lang="en-US" sz="900" dirty="0">
                         <a:latin typeface="Arial" charset="0"/>
@@ -7945,7 +7945,7 @@
                           <a:ea typeface="Arial" pitchFamily="34" charset="-122"/>
                           <a:cs typeface="Arial" pitchFamily="34" charset="-120"/>
                         </a:rPr>
-                        <a:t>4.92</a:t>
+                        <a:t>4.93</a:t>
                       </a:r>
                       <a:endParaRPr lang="en-US" sz="900" dirty="0">
                         <a:latin typeface="Arial" charset="0"/>
@@ -8081,7 +8081,7 @@
                           <a:ea typeface="Arial" pitchFamily="34" charset="-122"/>
                           <a:cs typeface="Arial" pitchFamily="34" charset="-120"/>
                         </a:rPr>
-                        <a:t>9.85</a:t>
+                        <a:t>9.86</a:t>
                       </a:r>
                       <a:endParaRPr lang="en-US" sz="900" dirty="0">
                         <a:latin typeface="Arial" charset="0"/>
@@ -9587,7 +9587,7 @@
                           <a:ea typeface="Arial" pitchFamily="34" charset="-122"/>
                           <a:cs typeface="Arial" pitchFamily="34" charset="-120"/>
                         </a:rPr>
-                        <a:t>35</a:t>
+                        <a:t>34</a:t>
                       </a:r>
                       <a:endParaRPr lang="en-US" sz="900" dirty="0">
                         <a:latin typeface="Arial" charset="0"/>
@@ -9655,7 +9655,7 @@
                           <a:ea typeface="Arial" pitchFamily="34" charset="-122"/>
                           <a:cs typeface="Arial" pitchFamily="34" charset="-120"/>
                         </a:rPr>
-                        <a:t>8.23</a:t>
+                        <a:t>8.18</a:t>
                       </a:r>
                       <a:endParaRPr lang="en-US" sz="900" dirty="0">
                         <a:latin typeface="Arial" charset="0"/>
@@ -9791,7 +9791,7 @@
                           <a:ea typeface="Arial" pitchFamily="34" charset="-122"/>
                           <a:cs typeface="Arial" pitchFamily="34" charset="-120"/>
                         </a:rPr>
-                        <a:t>8.23</a:t>
+                        <a:t>8.18</a:t>
                       </a:r>
                       <a:endParaRPr lang="en-US" sz="900" dirty="0">
                         <a:latin typeface="Arial" charset="0"/>
@@ -11030,7 +11030,7 @@
                 <a:ea typeface="Arial" pitchFamily="34" charset="-122"/>
                 <a:cs typeface="Arial" pitchFamily="34" charset="-120"/>
               </a:rPr>
-              <a:t>Agoda ぴあアリーナMMでのLIVE参加の為利用させて頂きました 立地は会場迄徒歩圏内で関内駅も近いが、喧騒エ...</a:t>
+              <a:t>Google 立地：最高</a:t>
             </a:r>
             <a:endParaRPr lang="en-US" sz="900" dirty="0"/>
           </a:p>
@@ -11069,7 +11069,7 @@
                 <a:ea typeface="Arial" pitchFamily="34" charset="-122"/>
                 <a:cs typeface="Arial" pitchFamily="34" charset="-120"/>
               </a:rPr>
-              <a:t>「Agoda 便利で、部屋も小さいながら清潔」</a:t>
+              <a:t>「Agoda ぴあアリーナMMでのLIVE参加の為利用させて頂きました 立地は会場迄徒歩圏内で関内駅も近いが、喧騒エ...」</a:t>
             </a:r>
             <a:endParaRPr lang="en-US" sz="900" dirty="0"/>
           </a:p>
@@ -11476,7 +11476,7 @@
                 <a:ea typeface="Arial" pitchFamily="34" charset="-122"/>
                 <a:cs typeface="Arial" pitchFamily="34" charset="-120"/>
               </a:rPr>
-              <a:t>Agoda ぴあアリーナMMでのLIVE参加の為利用させて頂きました 立地は会場迄徒歩圏内で関内駅も近いが、喧騒エ...</a:t>
+              <a:t>ホテルスタッフは親切で丁寧です</a:t>
             </a:r>
             <a:endParaRPr lang="en-US" sz="900" dirty="0"/>
           </a:p>
@@ -11515,7 +11515,7 @@
                 <a:ea typeface="Arial" pitchFamily="34" charset="-122"/>
                 <a:cs typeface="Arial" pitchFamily="34" charset="-120"/>
               </a:rPr>
-              <a:t>「気持ちのよい接客、綺麗でオシャレな施設、便利な立地」</a:t>
+              <a:t>「Agoda ぴあアリーナMMでのLIVE参加の為利用させて頂きました 立地は会場迄徒歩圏内で関内駅も近いが、喧騒エ...」</a:t>
             </a:r>
             <a:endParaRPr lang="en-US" sz="900" dirty="0"/>
           </a:p>
@@ -11699,7 +11699,7 @@
                 <a:ea typeface="Arial" pitchFamily="34" charset="-122"/>
                 <a:cs typeface="Arial" pitchFamily="34" charset="-120"/>
               </a:rPr>
-              <a:t>朝食は豆カレーやこんにゃく大福がありヘルシーなメニュー</a:t>
+              <a:t>荷物預かりサービスがあり、朝食は館内で購入できます</a:t>
             </a:r>
             <a:endParaRPr lang="en-US" sz="900" dirty="0"/>
           </a:p>
@@ -11738,7 +11738,7 @@
                 <a:ea typeface="Arial" pitchFamily="34" charset="-122"/>
                 <a:cs typeface="Arial" pitchFamily="34" charset="-120"/>
               </a:rPr>
-              <a:t>「朝食は種類豊富ではないですが、ヘルシーな品揃えです」</a:t>
+              <a:t>「朝食は豆カレーやこんにゃく大福がありヘルシーなメニュー」</a:t>
             </a:r>
             <a:endParaRPr lang="en-US" sz="900" dirty="0"/>
           </a:p>
@@ -11922,7 +11922,7 @@
                 <a:ea typeface="Arial" pitchFamily="34" charset="-122"/>
                 <a:cs typeface="Arial" pitchFamily="34" charset="-120"/>
               </a:rPr>
-              <a:t>近くにコンビニやまいばすけっとがあり、飲み屋もそこそこある</a:t>
+              <a:t>正門南口から徒歩5分、ローソンの向かいに位置し、ドン・キホーテのショッピング街まで徒歩12分以内です</a:t>
             </a:r>
             <a:endParaRPr lang="en-US" sz="900" dirty="0"/>
           </a:p>
@@ -11961,7 +11961,7 @@
                 <a:ea typeface="Arial" pitchFamily="34" charset="-122"/>
                 <a:cs typeface="Arial" pitchFamily="34" charset="-120"/>
               </a:rPr>
-              <a:t>「com 駅から近く、ホテルの近くにコンビニや飲食店が 多くてよかったです」</a:t>
+              <a:t>「近くにコンビニやまいばすけっとがあり、飲み屋もそこそこある」</a:t>
             </a:r>
             <a:endParaRPr lang="en-US" sz="900" dirty="0"/>
           </a:p>
@@ -12651,7 +12651,7 @@
                           <a:ea typeface="Arial" pitchFamily="34" charset="-122"/>
                           <a:cs typeface="Arial" pitchFamily="34" charset="-120"/>
                         </a:rPr>
-                        <a:t>アメニティもDHCだし、シャワーのお湯も水圧も良かったし、2人なら狭いかもだけど、ゆったり過ごせました</a:t>
+                        <a:t>ロビーのレイアウトも考え抜かれており、パジャマ姿で浴室に行く際にロビーやトイレ、ドリンクコーナーを通らずに済みます</a:t>
                       </a:r>
                       <a:endParaRPr lang="en-US" sz="900" dirty="0">
                         <a:latin typeface="Arial" charset="0"/>
@@ -12719,7 +12719,7 @@
                           <a:ea typeface="Arial" pitchFamily="34" charset="-122"/>
                           <a:cs typeface="Arial" pitchFamily="34" charset="-120"/>
                         </a:rPr>
-                        <a:t>15件</a:t>
+                        <a:t>16件</a:t>
                       </a:r>
                       <a:endParaRPr lang="en-US" sz="900" dirty="0">
                         <a:latin typeface="Arial" charset="0"/>
@@ -12925,7 +12925,7 @@
                           <a:ea typeface="Arial" pitchFamily="34" charset="-122"/>
                           <a:cs typeface="Arial" pitchFamily="34" charset="-120"/>
                         </a:rPr>
-                        <a:t>Agoda 便利で、部屋も小さいながら清潔</a:t>
+                        <a:t>シングルルームは少し狭いですが、内装は素晴らしく、東京の桜シーズンと比べると料金もリーズナブルです</a:t>
                       </a:r>
                       <a:endParaRPr lang="en-US" sz="900" dirty="0">
                         <a:latin typeface="Arial" charset="0"/>
@@ -12993,7 +12993,7 @@
                           <a:ea typeface="Arial" pitchFamily="34" charset="-122"/>
                           <a:cs typeface="Arial" pitchFamily="34" charset="-120"/>
                         </a:rPr>
-                        <a:t>11件</a:t>
+                        <a:t>13件</a:t>
                       </a:r>
                       <a:endParaRPr lang="en-US" sz="900" dirty="0">
                         <a:latin typeface="Arial" charset="0"/>

--- a/納品レポート/ホテル別レポート/comment_yokohama_口コミ分析レポート.pptx
+++ b/納品レポート/ホテル別レポート/comment_yokohama_口コミ分析レポート.pptx
@@ -277,7 +277,7 @@
                   <c:v>9.86</c:v>
                 </c:pt>
                 <c:pt idx="1">
-                  <c:v>9.38</c:v>
+                  <c:v>9.25</c:v>
                 </c:pt>
                 <c:pt idx="2">
                   <c:v>9.23</c:v>
@@ -286,10 +286,10 @@
                   <c:v>9.12</c:v>
                 </c:pt>
                 <c:pt idx="4">
-                  <c:v>8.56</c:v>
+                  <c:v>8.67</c:v>
                 </c:pt>
                 <c:pt idx="5">
-                  <c:v>8.18</c:v>
+                  <c:v>8.12</c:v>
                 </c:pt>
               </c:numCache>
             </c:numRef>
@@ -614,16 +614,16 @@
                 <c:formatCode>General</c:formatCode>
                 <c:ptCount val="7"/>
                 <c:pt idx="0">
-                  <c:v>62</c:v>
+                  <c:v>61</c:v>
                 </c:pt>
                 <c:pt idx="1">
-                  <c:v>21</c:v>
+                  <c:v>23</c:v>
                 </c:pt>
                 <c:pt idx="2">
-                  <c:v>25</c:v>
+                  <c:v>27</c:v>
                 </c:pt>
                 <c:pt idx="3">
-                  <c:v>11</c:v>
+                  <c:v>10</c:v>
                 </c:pt>
                 <c:pt idx="4">
                   <c:v>7</c:v>
@@ -2520,7 +2520,7 @@
                 <a:ea typeface="Arial" pitchFamily="34" charset="-122"/>
                 <a:cs typeface="Arial" pitchFamily="34" charset="-120"/>
               </a:rPr>
-              <a:t>レビュー総数：128件</a:t>
+              <a:t>レビュー総数：130件</a:t>
             </a:r>
             <a:endParaRPr lang="en-US" sz="1000" dirty="0"/>
           </a:p>
@@ -2800,7 +2800,7 @@
                 <a:ea typeface="Arial" pitchFamily="34" charset="-122"/>
                 <a:cs typeface="Arial" pitchFamily="34" charset="-120"/>
               </a:rPr>
-              <a:t>ホテルコメント横浜関内は全体平均8.88点（10pt換算）、高評価率84.4%を達成しています。本レポートで示した改善施策を段階的に実施することで、さらなる顧客満足度向上が期待できます。</a:t>
+              <a:t>ホテルコメント横浜関内は全体平均8.87点（10pt換算）、高評価率85.4%を達成しています。本レポートで示した改善施策を段階的に実施することで、さらなる顧客満足度向上が期待できます。</a:t>
             </a:r>
             <a:endParaRPr lang="en-US" sz="1200" dirty="0"/>
           </a:p>
@@ -3237,7 +3237,7 @@
                 <a:ea typeface="Arial" pitchFamily="34" charset="-122"/>
                 <a:cs typeface="Arial" pitchFamily="34" charset="-120"/>
               </a:rPr>
-              <a:t>8.88</a:t>
+              <a:t>8.87</a:t>
             </a:r>
             <a:endParaRPr lang="en-US" sz="2800" dirty="0"/>
           </a:p>
@@ -3355,7 +3355,7 @@
                 <a:ea typeface="Arial" pitchFamily="34" charset="-122"/>
                 <a:cs typeface="Arial" pitchFamily="34" charset="-120"/>
               </a:rPr>
-              <a:t>84.4%</a:t>
+              <a:t>85.4%</a:t>
             </a:r>
             <a:endParaRPr lang="en-US" sz="2800" dirty="0"/>
           </a:p>
@@ -3591,7 +3591,7 @@
                 <a:ea typeface="Arial" pitchFamily="34" charset="-122"/>
                 <a:cs typeface="Arial" pitchFamily="34" charset="-120"/>
               </a:rPr>
-              <a:t>128件</a:t>
+              <a:t>130件</a:t>
             </a:r>
             <a:endParaRPr lang="en-US" sz="2800" dirty="0"/>
           </a:p>
@@ -4740,7 +4740,7 @@
                           <a:ea typeface="Arial" pitchFamily="34" charset="-122"/>
                           <a:cs typeface="Arial" pitchFamily="34" charset="-120"/>
                         </a:rPr>
-                        <a:t>4.69/5</a:t>
+                        <a:t>4.62/5</a:t>
                       </a:r>
                       <a:endParaRPr lang="en-US" sz="800" dirty="0">
                         <a:latin typeface="Arial" charset="0"/>
@@ -4808,7 +4808,7 @@
                           <a:ea typeface="Arial" pitchFamily="34" charset="-122"/>
                           <a:cs typeface="Arial" pitchFamily="34" charset="-120"/>
                         </a:rPr>
-                        <a:t>9.38</a:t>
+                        <a:t>9.25</a:t>
                       </a:r>
                       <a:endParaRPr lang="en-US" sz="800" dirty="0">
                         <a:latin typeface="Arial" charset="0"/>
@@ -5698,7 +5698,7 @@
                           <a:ea typeface="Arial" pitchFamily="34" charset="-122"/>
                           <a:cs typeface="Arial" pitchFamily="34" charset="-120"/>
                         </a:rPr>
-                        <a:t>27</a:t>
+                        <a:t>30</a:t>
                       </a:r>
                       <a:endParaRPr lang="en-US" sz="800" dirty="0">
                         <a:latin typeface="Arial" charset="0"/>
@@ -5766,7 +5766,7 @@
                           <a:ea typeface="Arial" pitchFamily="34" charset="-122"/>
                           <a:cs typeface="Arial" pitchFamily="34" charset="-120"/>
                         </a:rPr>
-                        <a:t>8.56/10</a:t>
+                        <a:t>8.67/10</a:t>
                       </a:r>
                       <a:endParaRPr lang="en-US" sz="800" dirty="0">
                         <a:latin typeface="Arial" charset="0"/>
@@ -5834,7 +5834,7 @@
                           <a:ea typeface="Arial" pitchFamily="34" charset="-122"/>
                           <a:cs typeface="Arial" pitchFamily="34" charset="-120"/>
                         </a:rPr>
-                        <a:t>8.56</a:t>
+                        <a:t>8.67</a:t>
                       </a:r>
                       <a:endParaRPr lang="en-US" sz="800" dirty="0">
                         <a:latin typeface="Arial" charset="0"/>
@@ -6040,7 +6040,7 @@
                           <a:ea typeface="Arial" pitchFamily="34" charset="-122"/>
                           <a:cs typeface="Arial" pitchFamily="34" charset="-120"/>
                         </a:rPr>
-                        <a:t>34</a:t>
+                        <a:t>33</a:t>
                       </a:r>
                       <a:endParaRPr lang="en-US" sz="800" dirty="0">
                         <a:latin typeface="Arial" charset="0"/>
@@ -6108,7 +6108,7 @@
                           <a:ea typeface="Arial" pitchFamily="34" charset="-122"/>
                           <a:cs typeface="Arial" pitchFamily="34" charset="-120"/>
                         </a:rPr>
-                        <a:t>8.18/10</a:t>
+                        <a:t>8.12/10</a:t>
                       </a:r>
                       <a:endParaRPr lang="en-US" sz="800" dirty="0">
                         <a:latin typeface="Arial" charset="0"/>
@@ -6176,7 +6176,7 @@
                           <a:ea typeface="Arial" pitchFamily="34" charset="-122"/>
                           <a:cs typeface="Arial" pitchFamily="34" charset="-120"/>
                         </a:rPr>
-                        <a:t>8.18</a:t>
+                        <a:t>8.12</a:t>
                       </a:r>
                       <a:endParaRPr lang="en-US" sz="800" dirty="0">
                         <a:latin typeface="Arial" charset="0"/>
@@ -6629,7 +6629,7 @@
                 <a:ea typeface="Arial" pitchFamily="34" charset="-122"/>
                 <a:cs typeface="Arial" pitchFamily="34" charset="-120"/>
               </a:rPr>
-              <a:t>108件（84.4%）</a:t>
+              <a:t>111件（85.4%）</a:t>
             </a:r>
             <a:endParaRPr lang="en-US" sz="1600" dirty="0"/>
           </a:p>
@@ -6727,7 +6727,7 @@
                 <a:ea typeface="Arial" pitchFamily="34" charset="-122"/>
                 <a:cs typeface="Arial" pitchFamily="34" charset="-120"/>
               </a:rPr>
-              <a:t>19件（14.8%）</a:t>
+              <a:t>18件（13.8%）</a:t>
             </a:r>
             <a:endParaRPr lang="en-US" sz="1600" dirty="0"/>
           </a:p>
@@ -6987,7 +6987,7 @@
                 <a:ea typeface="Arial" pitchFamily="34" charset="-122"/>
                 <a:cs typeface="Arial" pitchFamily="34" charset="-120"/>
               </a:rPr>
-              <a:t>高評価レビュー（8-10点: 108件）の分析から、主要な強みテーマを抽出しています。立地・アクセス、客室清潔感、スタッフ対応が高評価の中心的テーマです。</a:t>
+              <a:t>高評価レビュー（8-10点: 111件）の分析から、主要な強みテーマを抽出しています。立地・アクセス、客室清潔感、スタッフ対応が高評価の中心的テーマです。</a:t>
             </a:r>
             <a:endParaRPr lang="en-US" sz="1200" dirty="0"/>
           </a:p>
@@ -7247,7 +7247,7 @@
                 <a:ea typeface="Arial" pitchFamily="34" charset="-122"/>
                 <a:cs typeface="Arial" pitchFamily="34" charset="-120"/>
               </a:rPr>
-              <a:t>低評価・中評価レビュー（20件）から改善課題を優先度別に整理しています。S/A/B/Cの4段階で優先度を設定し、計画的な改善を推進します。</a:t>
+              <a:t>低評価・中評価レビュー（19件）から改善課題を優先度別に整理しています。S/A/B/Cの4段階で優先度を設定し、計画的な改善を推進します。</a:t>
             </a:r>
             <a:endParaRPr lang="en-US" sz="1200" dirty="0"/>
           </a:p>
@@ -8027,7 +8027,7 @@
                 <a:ea typeface="Arial" pitchFamily="34" charset="-122"/>
                 <a:cs typeface="Arial" pitchFamily="34" charset="-120"/>
               </a:rPr>
-              <a:t>全体平均 8.88点 → 目標 9.38点</a:t>
+              <a:t>全体平均 8.87点 → 目標 9.37点</a:t>
             </a:r>
             <a:endParaRPr lang="en-US" sz="1200" dirty="0"/>
           </a:p>
@@ -8044,7 +8044,7 @@
                 <a:ea typeface="Arial" pitchFamily="34" charset="-122"/>
                 <a:cs typeface="Arial" pitchFamily="34" charset="-120"/>
               </a:rPr>
-              <a:t>高評価率 84.4% → 目標 89.4%</a:t>
+              <a:t>高評価率 85.4% → 目標 90.4%</a:t>
             </a:r>
             <a:endParaRPr lang="en-US" sz="1200" dirty="0"/>
           </a:p>

--- a/納品レポート/ホテル別レポート/comment_yokohama_口コミ分析レポート.pptx
+++ b/納品レポート/ホテル別レポート/comment_yokohama_口コミ分析レポート.pptx
@@ -249,10 +249,10 @@
                     <c:v>Google</c:v>
                   </c:pt>
                   <c:pt idx="1">
-                    <c:v>楽天トラベル</c:v>
+                    <c:v>じゃらん</c:v>
                   </c:pt>
                   <c:pt idx="2">
-                    <c:v>じゃらん</c:v>
+                    <c:v>楽天トラベル</c:v>
                   </c:pt>
                   <c:pt idx="3">
                     <c:v>Trip.com</c:v>
@@ -274,13 +274,13 @@
                 <c:formatCode>General</c:formatCode>
                 <c:ptCount val="6"/>
                 <c:pt idx="0">
-                  <c:v>9.86</c:v>
+                  <c:v>9.87</c:v>
                 </c:pt>
                 <c:pt idx="1">
-                  <c:v>9.25</c:v>
+                  <c:v>9.27</c:v>
                 </c:pt>
                 <c:pt idx="2">
-                  <c:v>9.23</c:v>
+                  <c:v>9.22</c:v>
                 </c:pt>
                 <c:pt idx="3">
                   <c:v>9.12</c:v>
@@ -614,7 +614,7 @@
                 <c:formatCode>General</c:formatCode>
                 <c:ptCount val="7"/>
                 <c:pt idx="0">
-                  <c:v>61</c:v>
+                  <c:v>62</c:v>
                 </c:pt>
                 <c:pt idx="1">
                   <c:v>23</c:v>
@@ -2520,7 +2520,7 @@
                 <a:ea typeface="Arial" pitchFamily="34" charset="-122"/>
                 <a:cs typeface="Arial" pitchFamily="34" charset="-120"/>
               </a:rPr>
-              <a:t>レビュー総数：130件</a:t>
+              <a:t>レビュー総数：131件</a:t>
             </a:r>
             <a:endParaRPr lang="en-US" sz="1000" dirty="0"/>
           </a:p>
@@ -2800,7 +2800,7 @@
                 <a:ea typeface="Arial" pitchFamily="34" charset="-122"/>
                 <a:cs typeface="Arial" pitchFamily="34" charset="-120"/>
               </a:rPr>
-              <a:t>ホテルコメント横浜関内は全体平均8.87点（10pt換算）、高評価率85.4%を達成しています。本レポートで示した改善施策を段階的に実施することで、さらなる顧客満足度向上が期待できます。</a:t>
+              <a:t>ホテルコメント横浜関内は全体平均8.88点（10pt換算）、高評価率85.5%を達成しています。本レポートで示した改善施策を段階的に実施することで、さらなる顧客満足度向上が期待できます。</a:t>
             </a:r>
             <a:endParaRPr lang="en-US" sz="1200" dirty="0"/>
           </a:p>
@@ -3237,7 +3237,7 @@
                 <a:ea typeface="Arial" pitchFamily="34" charset="-122"/>
                 <a:cs typeface="Arial" pitchFamily="34" charset="-120"/>
               </a:rPr>
-              <a:t>8.87</a:t>
+              <a:t>8.88</a:t>
             </a:r>
             <a:endParaRPr lang="en-US" sz="2800" dirty="0"/>
           </a:p>
@@ -3355,7 +3355,7 @@
                 <a:ea typeface="Arial" pitchFamily="34" charset="-122"/>
                 <a:cs typeface="Arial" pitchFamily="34" charset="-120"/>
               </a:rPr>
-              <a:t>85.4%</a:t>
+              <a:t>85.5%</a:t>
             </a:r>
             <a:endParaRPr lang="en-US" sz="2800" dirty="0"/>
           </a:p>
@@ -3591,7 +3591,7 @@
                 <a:ea typeface="Arial" pitchFamily="34" charset="-122"/>
                 <a:cs typeface="Arial" pitchFamily="34" charset="-120"/>
               </a:rPr>
-              <a:t>130件</a:t>
+              <a:t>131件</a:t>
             </a:r>
             <a:endParaRPr lang="en-US" sz="2800" dirty="0"/>
           </a:p>
@@ -4330,7 +4330,7 @@
                           <a:ea typeface="Arial" pitchFamily="34" charset="-122"/>
                           <a:cs typeface="Arial" pitchFamily="34" charset="-120"/>
                         </a:rPr>
-                        <a:t>14</a:t>
+                        <a:t>15</a:t>
                       </a:r>
                       <a:endParaRPr lang="en-US" sz="800" dirty="0">
                         <a:latin typeface="Arial" charset="0"/>
@@ -4466,7 +4466,349 @@
                           <a:ea typeface="Arial" pitchFamily="34" charset="-122"/>
                           <a:cs typeface="Arial" pitchFamily="34" charset="-120"/>
                         </a:rPr>
-                        <a:t>9.86</a:t>
+                        <a:t>9.87</a:t>
+                      </a:r>
+                      <a:endParaRPr lang="en-US" sz="800" dirty="0">
+                        <a:latin typeface="Arial" charset="0"/>
+                        <a:ea typeface="Arial" charset="0"/>
+                        <a:cs typeface="Arial" charset="0"/>
+                      </a:endParaRPr>
+                    </a:p>
+                  </a:txBody>
+                  <a:tcPr marL="91440" marR="91440" marT="45720" marB="45720">
+                    <a:lnL w="6350" cap="flat" cmpd="sng" algn="ctr">
+                      <a:solidFill>
+                        <a:srgbClr val="CCCCCC"/>
+                      </a:solidFill>
+                      <a:prstDash val="solid"/>
+                      <a:round/>
+                      <a:headEnd type="none" w="med" len="med"/>
+                      <a:tailEnd type="none" w="med" len="med"/>
+                    </a:lnL>
+                    <a:lnR w="6350" cap="flat" cmpd="sng" algn="ctr">
+                      <a:solidFill>
+                        <a:srgbClr val="CCCCCC"/>
+                      </a:solidFill>
+                      <a:prstDash val="solid"/>
+                      <a:round/>
+                      <a:headEnd type="none" w="med" len="med"/>
+                      <a:tailEnd type="none" w="med" len="med"/>
+                    </a:lnR>
+                    <a:lnT w="6350" cap="flat" cmpd="sng" algn="ctr">
+                      <a:solidFill>
+                        <a:srgbClr val="CCCCCC"/>
+                      </a:solidFill>
+                      <a:prstDash val="solid"/>
+                      <a:round/>
+                      <a:headEnd type="none" w="med" len="med"/>
+                      <a:tailEnd type="none" w="med" len="med"/>
+                    </a:lnT>
+                    <a:lnB w="6350" cap="flat" cmpd="sng" algn="ctr">
+                      <a:solidFill>
+                        <a:srgbClr val="CCCCCC"/>
+                      </a:solidFill>
+                      <a:prstDash val="solid"/>
+                      <a:round/>
+                      <a:headEnd type="none" w="med" len="med"/>
+                      <a:tailEnd type="none" w="med" len="med"/>
+                    </a:lnB>
+                    <a:solidFill>
+                      <a:srgbClr val="FFFFFF"/>
+                    </a:solidFill>
+                  </a:tcPr>
+                </a:tc>
+                <a:tc>
+                  <a:txBody>
+                    <a:bodyPr/>
+                    <a:lstStyle/>
+                    <a:p>
+                      <a:pPr algn="ctr" indent="0" marL="0">
+                        <a:buNone/>
+                      </a:pPr>
+                      <a:r>
+                        <a:rPr lang="en-US" sz="800" dirty="0">
+                          <a:solidFill>
+                            <a:srgbClr val="000000"/>
+                          </a:solidFill>
+                          <a:latin typeface="Arial" pitchFamily="34" charset="0"/>
+                          <a:ea typeface="Arial" pitchFamily="34" charset="-122"/>
+                          <a:cs typeface="Arial" pitchFamily="34" charset="-120"/>
+                        </a:rPr>
+                        <a:t>優秀</a:t>
+                      </a:r>
+                      <a:endParaRPr lang="en-US" sz="800" dirty="0">
+                        <a:latin typeface="Arial" charset="0"/>
+                        <a:ea typeface="Arial" charset="0"/>
+                        <a:cs typeface="Arial" charset="0"/>
+                      </a:endParaRPr>
+                    </a:p>
+                  </a:txBody>
+                  <a:tcPr marL="91440" marR="91440" marT="45720" marB="45720">
+                    <a:lnL w="6350" cap="flat" cmpd="sng" algn="ctr">
+                      <a:solidFill>
+                        <a:srgbClr val="CCCCCC"/>
+                      </a:solidFill>
+                      <a:prstDash val="solid"/>
+                      <a:round/>
+                      <a:headEnd type="none" w="med" len="med"/>
+                      <a:tailEnd type="none" w="med" len="med"/>
+                    </a:lnL>
+                    <a:lnR w="6350" cap="flat" cmpd="sng" algn="ctr">
+                      <a:solidFill>
+                        <a:srgbClr val="CCCCCC"/>
+                      </a:solidFill>
+                      <a:prstDash val="solid"/>
+                      <a:round/>
+                      <a:headEnd type="none" w="med" len="med"/>
+                      <a:tailEnd type="none" w="med" len="med"/>
+                    </a:lnR>
+                    <a:lnT w="6350" cap="flat" cmpd="sng" algn="ctr">
+                      <a:solidFill>
+                        <a:srgbClr val="CCCCCC"/>
+                      </a:solidFill>
+                      <a:prstDash val="solid"/>
+                      <a:round/>
+                      <a:headEnd type="none" w="med" len="med"/>
+                      <a:tailEnd type="none" w="med" len="med"/>
+                    </a:lnT>
+                    <a:lnB w="6350" cap="flat" cmpd="sng" algn="ctr">
+                      <a:solidFill>
+                        <a:srgbClr val="CCCCCC"/>
+                      </a:solidFill>
+                      <a:prstDash val="solid"/>
+                      <a:round/>
+                      <a:headEnd type="none" w="med" len="med"/>
+                      <a:tailEnd type="none" w="med" len="med"/>
+                    </a:lnB>
+                    <a:solidFill>
+                      <a:srgbClr val="FFFFFF"/>
+                    </a:solidFill>
+                  </a:tcPr>
+                </a:tc>
+              </a:tr>
+              <a:tr h="0">
+                <a:tc>
+                  <a:txBody>
+                    <a:bodyPr/>
+                    <a:lstStyle/>
+                    <a:p>
+                      <a:pPr algn="ctr" indent="0" marL="0">
+                        <a:buNone/>
+                      </a:pPr>
+                      <a:r>
+                        <a:rPr lang="en-US" sz="800" dirty="0">
+                          <a:solidFill>
+                            <a:srgbClr val="000000"/>
+                          </a:solidFill>
+                          <a:latin typeface="Arial" pitchFamily="34" charset="0"/>
+                          <a:ea typeface="Arial" pitchFamily="34" charset="-122"/>
+                          <a:cs typeface="Arial" pitchFamily="34" charset="-120"/>
+                        </a:rPr>
+                        <a:t>じゃらん</a:t>
+                      </a:r>
+                      <a:endParaRPr lang="en-US" sz="800" dirty="0">
+                        <a:latin typeface="Arial" charset="0"/>
+                        <a:ea typeface="Arial" charset="0"/>
+                        <a:cs typeface="Arial" charset="0"/>
+                      </a:endParaRPr>
+                    </a:p>
+                  </a:txBody>
+                  <a:tcPr marL="91440" marR="91440" marT="45720" marB="45720">
+                    <a:lnL w="6350" cap="flat" cmpd="sng" algn="ctr">
+                      <a:solidFill>
+                        <a:srgbClr val="CCCCCC"/>
+                      </a:solidFill>
+                      <a:prstDash val="solid"/>
+                      <a:round/>
+                      <a:headEnd type="none" w="med" len="med"/>
+                      <a:tailEnd type="none" w="med" len="med"/>
+                    </a:lnL>
+                    <a:lnR w="6350" cap="flat" cmpd="sng" algn="ctr">
+                      <a:solidFill>
+                        <a:srgbClr val="CCCCCC"/>
+                      </a:solidFill>
+                      <a:prstDash val="solid"/>
+                      <a:round/>
+                      <a:headEnd type="none" w="med" len="med"/>
+                      <a:tailEnd type="none" w="med" len="med"/>
+                    </a:lnR>
+                    <a:lnT w="6350" cap="flat" cmpd="sng" algn="ctr">
+                      <a:solidFill>
+                        <a:srgbClr val="CCCCCC"/>
+                      </a:solidFill>
+                      <a:prstDash val="solid"/>
+                      <a:round/>
+                      <a:headEnd type="none" w="med" len="med"/>
+                      <a:tailEnd type="none" w="med" len="med"/>
+                    </a:lnT>
+                    <a:lnB w="6350" cap="flat" cmpd="sng" algn="ctr">
+                      <a:solidFill>
+                        <a:srgbClr val="CCCCCC"/>
+                      </a:solidFill>
+                      <a:prstDash val="solid"/>
+                      <a:round/>
+                      <a:headEnd type="none" w="med" len="med"/>
+                      <a:tailEnd type="none" w="med" len="med"/>
+                    </a:lnB>
+                    <a:solidFill>
+                      <a:srgbClr val="FFFFFF"/>
+                    </a:solidFill>
+                  </a:tcPr>
+                </a:tc>
+                <a:tc>
+                  <a:txBody>
+                    <a:bodyPr/>
+                    <a:lstStyle/>
+                    <a:p>
+                      <a:pPr algn="ctr" indent="0" marL="0">
+                        <a:buNone/>
+                      </a:pPr>
+                      <a:r>
+                        <a:rPr lang="en-US" sz="800" dirty="0">
+                          <a:solidFill>
+                            <a:srgbClr val="000000"/>
+                          </a:solidFill>
+                          <a:latin typeface="Arial" pitchFamily="34" charset="0"/>
+                          <a:ea typeface="Arial" pitchFamily="34" charset="-122"/>
+                          <a:cs typeface="Arial" pitchFamily="34" charset="-120"/>
+                        </a:rPr>
+                        <a:t>11</a:t>
+                      </a:r>
+                      <a:endParaRPr lang="en-US" sz="800" dirty="0">
+                        <a:latin typeface="Arial" charset="0"/>
+                        <a:ea typeface="Arial" charset="0"/>
+                        <a:cs typeface="Arial" charset="0"/>
+                      </a:endParaRPr>
+                    </a:p>
+                  </a:txBody>
+                  <a:tcPr marL="91440" marR="91440" marT="45720" marB="45720">
+                    <a:lnL w="6350" cap="flat" cmpd="sng" algn="ctr">
+                      <a:solidFill>
+                        <a:srgbClr val="CCCCCC"/>
+                      </a:solidFill>
+                      <a:prstDash val="solid"/>
+                      <a:round/>
+                      <a:headEnd type="none" w="med" len="med"/>
+                      <a:tailEnd type="none" w="med" len="med"/>
+                    </a:lnL>
+                    <a:lnR w="6350" cap="flat" cmpd="sng" algn="ctr">
+                      <a:solidFill>
+                        <a:srgbClr val="CCCCCC"/>
+                      </a:solidFill>
+                      <a:prstDash val="solid"/>
+                      <a:round/>
+                      <a:headEnd type="none" w="med" len="med"/>
+                      <a:tailEnd type="none" w="med" len="med"/>
+                    </a:lnR>
+                    <a:lnT w="6350" cap="flat" cmpd="sng" algn="ctr">
+                      <a:solidFill>
+                        <a:srgbClr val="CCCCCC"/>
+                      </a:solidFill>
+                      <a:prstDash val="solid"/>
+                      <a:round/>
+                      <a:headEnd type="none" w="med" len="med"/>
+                      <a:tailEnd type="none" w="med" len="med"/>
+                    </a:lnT>
+                    <a:lnB w="6350" cap="flat" cmpd="sng" algn="ctr">
+                      <a:solidFill>
+                        <a:srgbClr val="CCCCCC"/>
+                      </a:solidFill>
+                      <a:prstDash val="solid"/>
+                      <a:round/>
+                      <a:headEnd type="none" w="med" len="med"/>
+                      <a:tailEnd type="none" w="med" len="med"/>
+                    </a:lnB>
+                    <a:solidFill>
+                      <a:srgbClr val="FFFFFF"/>
+                    </a:solidFill>
+                  </a:tcPr>
+                </a:tc>
+                <a:tc>
+                  <a:txBody>
+                    <a:bodyPr/>
+                    <a:lstStyle/>
+                    <a:p>
+                      <a:pPr algn="ctr" indent="0" marL="0">
+                        <a:buNone/>
+                      </a:pPr>
+                      <a:r>
+                        <a:rPr lang="en-US" sz="800" dirty="0">
+                          <a:solidFill>
+                            <a:srgbClr val="000000"/>
+                          </a:solidFill>
+                          <a:latin typeface="Arial" pitchFamily="34" charset="0"/>
+                          <a:ea typeface="Arial" pitchFamily="34" charset="-122"/>
+                          <a:cs typeface="Arial" pitchFamily="34" charset="-120"/>
+                        </a:rPr>
+                        <a:t>4.64/5</a:t>
+                      </a:r>
+                      <a:endParaRPr lang="en-US" sz="800" dirty="0">
+                        <a:latin typeface="Arial" charset="0"/>
+                        <a:ea typeface="Arial" charset="0"/>
+                        <a:cs typeface="Arial" charset="0"/>
+                      </a:endParaRPr>
+                    </a:p>
+                  </a:txBody>
+                  <a:tcPr marL="91440" marR="91440" marT="45720" marB="45720">
+                    <a:lnL w="6350" cap="flat" cmpd="sng" algn="ctr">
+                      <a:solidFill>
+                        <a:srgbClr val="CCCCCC"/>
+                      </a:solidFill>
+                      <a:prstDash val="solid"/>
+                      <a:round/>
+                      <a:headEnd type="none" w="med" len="med"/>
+                      <a:tailEnd type="none" w="med" len="med"/>
+                    </a:lnL>
+                    <a:lnR w="6350" cap="flat" cmpd="sng" algn="ctr">
+                      <a:solidFill>
+                        <a:srgbClr val="CCCCCC"/>
+                      </a:solidFill>
+                      <a:prstDash val="solid"/>
+                      <a:round/>
+                      <a:headEnd type="none" w="med" len="med"/>
+                      <a:tailEnd type="none" w="med" len="med"/>
+                    </a:lnR>
+                    <a:lnT w="6350" cap="flat" cmpd="sng" algn="ctr">
+                      <a:solidFill>
+                        <a:srgbClr val="CCCCCC"/>
+                      </a:solidFill>
+                      <a:prstDash val="solid"/>
+                      <a:round/>
+                      <a:headEnd type="none" w="med" len="med"/>
+                      <a:tailEnd type="none" w="med" len="med"/>
+                    </a:lnT>
+                    <a:lnB w="6350" cap="flat" cmpd="sng" algn="ctr">
+                      <a:solidFill>
+                        <a:srgbClr val="CCCCCC"/>
+                      </a:solidFill>
+                      <a:prstDash val="solid"/>
+                      <a:round/>
+                      <a:headEnd type="none" w="med" len="med"/>
+                      <a:tailEnd type="none" w="med" len="med"/>
+                    </a:lnB>
+                    <a:solidFill>
+                      <a:srgbClr val="FFFFFF"/>
+                    </a:solidFill>
+                  </a:tcPr>
+                </a:tc>
+                <a:tc>
+                  <a:txBody>
+                    <a:bodyPr/>
+                    <a:lstStyle/>
+                    <a:p>
+                      <a:pPr algn="ctr" indent="0" marL="0">
+                        <a:buNone/>
+                      </a:pPr>
+                      <a:r>
+                        <a:rPr lang="en-US" sz="800" dirty="0">
+                          <a:solidFill>
+                            <a:srgbClr val="000000"/>
+                          </a:solidFill>
+                          <a:latin typeface="Arial" pitchFamily="34" charset="0"/>
+                          <a:ea typeface="Arial" pitchFamily="34" charset="-122"/>
+                          <a:cs typeface="Arial" pitchFamily="34" charset="-120"/>
+                        </a:rPr>
+                        <a:t>9.27</a:t>
                       </a:r>
                       <a:endParaRPr lang="en-US" sz="800" dirty="0">
                         <a:latin typeface="Arial" charset="0"/>
@@ -4672,7 +5014,7 @@
                           <a:ea typeface="Arial" pitchFamily="34" charset="-122"/>
                           <a:cs typeface="Arial" pitchFamily="34" charset="-120"/>
                         </a:rPr>
-                        <a:t>16</a:t>
+                        <a:t>18</a:t>
                       </a:r>
                       <a:endParaRPr lang="en-US" sz="800" dirty="0">
                         <a:latin typeface="Arial" charset="0"/>
@@ -4740,7 +5082,7 @@
                           <a:ea typeface="Arial" pitchFamily="34" charset="-122"/>
                           <a:cs typeface="Arial" pitchFamily="34" charset="-120"/>
                         </a:rPr>
-                        <a:t>4.62/5</a:t>
+                        <a:t>4.61/5</a:t>
                       </a:r>
                       <a:endParaRPr lang="en-US" sz="800" dirty="0">
                         <a:latin typeface="Arial" charset="0"/>
@@ -4808,349 +5150,7 @@
                           <a:ea typeface="Arial" pitchFamily="34" charset="-122"/>
                           <a:cs typeface="Arial" pitchFamily="34" charset="-120"/>
                         </a:rPr>
-                        <a:t>9.25</a:t>
-                      </a:r>
-                      <a:endParaRPr lang="en-US" sz="800" dirty="0">
-                        <a:latin typeface="Arial" charset="0"/>
-                        <a:ea typeface="Arial" charset="0"/>
-                        <a:cs typeface="Arial" charset="0"/>
-                      </a:endParaRPr>
-                    </a:p>
-                  </a:txBody>
-                  <a:tcPr marL="91440" marR="91440" marT="45720" marB="45720">
-                    <a:lnL w="6350" cap="flat" cmpd="sng" algn="ctr">
-                      <a:solidFill>
-                        <a:srgbClr val="CCCCCC"/>
-                      </a:solidFill>
-                      <a:prstDash val="solid"/>
-                      <a:round/>
-                      <a:headEnd type="none" w="med" len="med"/>
-                      <a:tailEnd type="none" w="med" len="med"/>
-                    </a:lnL>
-                    <a:lnR w="6350" cap="flat" cmpd="sng" algn="ctr">
-                      <a:solidFill>
-                        <a:srgbClr val="CCCCCC"/>
-                      </a:solidFill>
-                      <a:prstDash val="solid"/>
-                      <a:round/>
-                      <a:headEnd type="none" w="med" len="med"/>
-                      <a:tailEnd type="none" w="med" len="med"/>
-                    </a:lnR>
-                    <a:lnT w="6350" cap="flat" cmpd="sng" algn="ctr">
-                      <a:solidFill>
-                        <a:srgbClr val="CCCCCC"/>
-                      </a:solidFill>
-                      <a:prstDash val="solid"/>
-                      <a:round/>
-                      <a:headEnd type="none" w="med" len="med"/>
-                      <a:tailEnd type="none" w="med" len="med"/>
-                    </a:lnT>
-                    <a:lnB w="6350" cap="flat" cmpd="sng" algn="ctr">
-                      <a:solidFill>
-                        <a:srgbClr val="CCCCCC"/>
-                      </a:solidFill>
-                      <a:prstDash val="solid"/>
-                      <a:round/>
-                      <a:headEnd type="none" w="med" len="med"/>
-                      <a:tailEnd type="none" w="med" len="med"/>
-                    </a:lnB>
-                    <a:solidFill>
-                      <a:srgbClr val="FFFFFF"/>
-                    </a:solidFill>
-                  </a:tcPr>
-                </a:tc>
-                <a:tc>
-                  <a:txBody>
-                    <a:bodyPr/>
-                    <a:lstStyle/>
-                    <a:p>
-                      <a:pPr algn="ctr" indent="0" marL="0">
-                        <a:buNone/>
-                      </a:pPr>
-                      <a:r>
-                        <a:rPr lang="en-US" sz="800" dirty="0">
-                          <a:solidFill>
-                            <a:srgbClr val="000000"/>
-                          </a:solidFill>
-                          <a:latin typeface="Arial" pitchFamily="34" charset="0"/>
-                          <a:ea typeface="Arial" pitchFamily="34" charset="-122"/>
-                          <a:cs typeface="Arial" pitchFamily="34" charset="-120"/>
-                        </a:rPr>
-                        <a:t>優秀</a:t>
-                      </a:r>
-                      <a:endParaRPr lang="en-US" sz="800" dirty="0">
-                        <a:latin typeface="Arial" charset="0"/>
-                        <a:ea typeface="Arial" charset="0"/>
-                        <a:cs typeface="Arial" charset="0"/>
-                      </a:endParaRPr>
-                    </a:p>
-                  </a:txBody>
-                  <a:tcPr marL="91440" marR="91440" marT="45720" marB="45720">
-                    <a:lnL w="6350" cap="flat" cmpd="sng" algn="ctr">
-                      <a:solidFill>
-                        <a:srgbClr val="CCCCCC"/>
-                      </a:solidFill>
-                      <a:prstDash val="solid"/>
-                      <a:round/>
-                      <a:headEnd type="none" w="med" len="med"/>
-                      <a:tailEnd type="none" w="med" len="med"/>
-                    </a:lnL>
-                    <a:lnR w="6350" cap="flat" cmpd="sng" algn="ctr">
-                      <a:solidFill>
-                        <a:srgbClr val="CCCCCC"/>
-                      </a:solidFill>
-                      <a:prstDash val="solid"/>
-                      <a:round/>
-                      <a:headEnd type="none" w="med" len="med"/>
-                      <a:tailEnd type="none" w="med" len="med"/>
-                    </a:lnR>
-                    <a:lnT w="6350" cap="flat" cmpd="sng" algn="ctr">
-                      <a:solidFill>
-                        <a:srgbClr val="CCCCCC"/>
-                      </a:solidFill>
-                      <a:prstDash val="solid"/>
-                      <a:round/>
-                      <a:headEnd type="none" w="med" len="med"/>
-                      <a:tailEnd type="none" w="med" len="med"/>
-                    </a:lnT>
-                    <a:lnB w="6350" cap="flat" cmpd="sng" algn="ctr">
-                      <a:solidFill>
-                        <a:srgbClr val="CCCCCC"/>
-                      </a:solidFill>
-                      <a:prstDash val="solid"/>
-                      <a:round/>
-                      <a:headEnd type="none" w="med" len="med"/>
-                      <a:tailEnd type="none" w="med" len="med"/>
-                    </a:lnB>
-                    <a:solidFill>
-                      <a:srgbClr val="FFFFFF"/>
-                    </a:solidFill>
-                  </a:tcPr>
-                </a:tc>
-              </a:tr>
-              <a:tr h="0">
-                <a:tc>
-                  <a:txBody>
-                    <a:bodyPr/>
-                    <a:lstStyle/>
-                    <a:p>
-                      <a:pPr algn="ctr" indent="0" marL="0">
-                        <a:buNone/>
-                      </a:pPr>
-                      <a:r>
-                        <a:rPr lang="en-US" sz="800" dirty="0">
-                          <a:solidFill>
-                            <a:srgbClr val="000000"/>
-                          </a:solidFill>
-                          <a:latin typeface="Arial" pitchFamily="34" charset="0"/>
-                          <a:ea typeface="Arial" pitchFamily="34" charset="-122"/>
-                          <a:cs typeface="Arial" pitchFamily="34" charset="-120"/>
-                        </a:rPr>
-                        <a:t>じゃらん</a:t>
-                      </a:r>
-                      <a:endParaRPr lang="en-US" sz="800" dirty="0">
-                        <a:latin typeface="Arial" charset="0"/>
-                        <a:ea typeface="Arial" charset="0"/>
-                        <a:cs typeface="Arial" charset="0"/>
-                      </a:endParaRPr>
-                    </a:p>
-                  </a:txBody>
-                  <a:tcPr marL="91440" marR="91440" marT="45720" marB="45720">
-                    <a:lnL w="6350" cap="flat" cmpd="sng" algn="ctr">
-                      <a:solidFill>
-                        <a:srgbClr val="CCCCCC"/>
-                      </a:solidFill>
-                      <a:prstDash val="solid"/>
-                      <a:round/>
-                      <a:headEnd type="none" w="med" len="med"/>
-                      <a:tailEnd type="none" w="med" len="med"/>
-                    </a:lnL>
-                    <a:lnR w="6350" cap="flat" cmpd="sng" algn="ctr">
-                      <a:solidFill>
-                        <a:srgbClr val="CCCCCC"/>
-                      </a:solidFill>
-                      <a:prstDash val="solid"/>
-                      <a:round/>
-                      <a:headEnd type="none" w="med" len="med"/>
-                      <a:tailEnd type="none" w="med" len="med"/>
-                    </a:lnR>
-                    <a:lnT w="6350" cap="flat" cmpd="sng" algn="ctr">
-                      <a:solidFill>
-                        <a:srgbClr val="CCCCCC"/>
-                      </a:solidFill>
-                      <a:prstDash val="solid"/>
-                      <a:round/>
-                      <a:headEnd type="none" w="med" len="med"/>
-                      <a:tailEnd type="none" w="med" len="med"/>
-                    </a:lnT>
-                    <a:lnB w="6350" cap="flat" cmpd="sng" algn="ctr">
-                      <a:solidFill>
-                        <a:srgbClr val="CCCCCC"/>
-                      </a:solidFill>
-                      <a:prstDash val="solid"/>
-                      <a:round/>
-                      <a:headEnd type="none" w="med" len="med"/>
-                      <a:tailEnd type="none" w="med" len="med"/>
-                    </a:lnB>
-                    <a:solidFill>
-                      <a:srgbClr val="FFFFFF"/>
-                    </a:solidFill>
-                  </a:tcPr>
-                </a:tc>
-                <a:tc>
-                  <a:txBody>
-                    <a:bodyPr/>
-                    <a:lstStyle/>
-                    <a:p>
-                      <a:pPr algn="ctr" indent="0" marL="0">
-                        <a:buNone/>
-                      </a:pPr>
-                      <a:r>
-                        <a:rPr lang="en-US" sz="800" dirty="0">
-                          <a:solidFill>
-                            <a:srgbClr val="000000"/>
-                          </a:solidFill>
-                          <a:latin typeface="Arial" pitchFamily="34" charset="0"/>
-                          <a:ea typeface="Arial" pitchFamily="34" charset="-122"/>
-                          <a:cs typeface="Arial" pitchFamily="34" charset="-120"/>
-                        </a:rPr>
-                        <a:t>13</a:t>
-                      </a:r>
-                      <a:endParaRPr lang="en-US" sz="800" dirty="0">
-                        <a:latin typeface="Arial" charset="0"/>
-                        <a:ea typeface="Arial" charset="0"/>
-                        <a:cs typeface="Arial" charset="0"/>
-                      </a:endParaRPr>
-                    </a:p>
-                  </a:txBody>
-                  <a:tcPr marL="91440" marR="91440" marT="45720" marB="45720">
-                    <a:lnL w="6350" cap="flat" cmpd="sng" algn="ctr">
-                      <a:solidFill>
-                        <a:srgbClr val="CCCCCC"/>
-                      </a:solidFill>
-                      <a:prstDash val="solid"/>
-                      <a:round/>
-                      <a:headEnd type="none" w="med" len="med"/>
-                      <a:tailEnd type="none" w="med" len="med"/>
-                    </a:lnL>
-                    <a:lnR w="6350" cap="flat" cmpd="sng" algn="ctr">
-                      <a:solidFill>
-                        <a:srgbClr val="CCCCCC"/>
-                      </a:solidFill>
-                      <a:prstDash val="solid"/>
-                      <a:round/>
-                      <a:headEnd type="none" w="med" len="med"/>
-                      <a:tailEnd type="none" w="med" len="med"/>
-                    </a:lnR>
-                    <a:lnT w="6350" cap="flat" cmpd="sng" algn="ctr">
-                      <a:solidFill>
-                        <a:srgbClr val="CCCCCC"/>
-                      </a:solidFill>
-                      <a:prstDash val="solid"/>
-                      <a:round/>
-                      <a:headEnd type="none" w="med" len="med"/>
-                      <a:tailEnd type="none" w="med" len="med"/>
-                    </a:lnT>
-                    <a:lnB w="6350" cap="flat" cmpd="sng" algn="ctr">
-                      <a:solidFill>
-                        <a:srgbClr val="CCCCCC"/>
-                      </a:solidFill>
-                      <a:prstDash val="solid"/>
-                      <a:round/>
-                      <a:headEnd type="none" w="med" len="med"/>
-                      <a:tailEnd type="none" w="med" len="med"/>
-                    </a:lnB>
-                    <a:solidFill>
-                      <a:srgbClr val="FFFFFF"/>
-                    </a:solidFill>
-                  </a:tcPr>
-                </a:tc>
-                <a:tc>
-                  <a:txBody>
-                    <a:bodyPr/>
-                    <a:lstStyle/>
-                    <a:p>
-                      <a:pPr algn="ctr" indent="0" marL="0">
-                        <a:buNone/>
-                      </a:pPr>
-                      <a:r>
-                        <a:rPr lang="en-US" sz="800" dirty="0">
-                          <a:solidFill>
-                            <a:srgbClr val="000000"/>
-                          </a:solidFill>
-                          <a:latin typeface="Arial" pitchFamily="34" charset="0"/>
-                          <a:ea typeface="Arial" pitchFamily="34" charset="-122"/>
-                          <a:cs typeface="Arial" pitchFamily="34" charset="-120"/>
-                        </a:rPr>
-                        <a:t>4.62/5</a:t>
-                      </a:r>
-                      <a:endParaRPr lang="en-US" sz="800" dirty="0">
-                        <a:latin typeface="Arial" charset="0"/>
-                        <a:ea typeface="Arial" charset="0"/>
-                        <a:cs typeface="Arial" charset="0"/>
-                      </a:endParaRPr>
-                    </a:p>
-                  </a:txBody>
-                  <a:tcPr marL="91440" marR="91440" marT="45720" marB="45720">
-                    <a:lnL w="6350" cap="flat" cmpd="sng" algn="ctr">
-                      <a:solidFill>
-                        <a:srgbClr val="CCCCCC"/>
-                      </a:solidFill>
-                      <a:prstDash val="solid"/>
-                      <a:round/>
-                      <a:headEnd type="none" w="med" len="med"/>
-                      <a:tailEnd type="none" w="med" len="med"/>
-                    </a:lnL>
-                    <a:lnR w="6350" cap="flat" cmpd="sng" algn="ctr">
-                      <a:solidFill>
-                        <a:srgbClr val="CCCCCC"/>
-                      </a:solidFill>
-                      <a:prstDash val="solid"/>
-                      <a:round/>
-                      <a:headEnd type="none" w="med" len="med"/>
-                      <a:tailEnd type="none" w="med" len="med"/>
-                    </a:lnR>
-                    <a:lnT w="6350" cap="flat" cmpd="sng" algn="ctr">
-                      <a:solidFill>
-                        <a:srgbClr val="CCCCCC"/>
-                      </a:solidFill>
-                      <a:prstDash val="solid"/>
-                      <a:round/>
-                      <a:headEnd type="none" w="med" len="med"/>
-                      <a:tailEnd type="none" w="med" len="med"/>
-                    </a:lnT>
-                    <a:lnB w="6350" cap="flat" cmpd="sng" algn="ctr">
-                      <a:solidFill>
-                        <a:srgbClr val="CCCCCC"/>
-                      </a:solidFill>
-                      <a:prstDash val="solid"/>
-                      <a:round/>
-                      <a:headEnd type="none" w="med" len="med"/>
-                      <a:tailEnd type="none" w="med" len="med"/>
-                    </a:lnB>
-                    <a:solidFill>
-                      <a:srgbClr val="FFFFFF"/>
-                    </a:solidFill>
-                  </a:tcPr>
-                </a:tc>
-                <a:tc>
-                  <a:txBody>
-                    <a:bodyPr/>
-                    <a:lstStyle/>
-                    <a:p>
-                      <a:pPr algn="ctr" indent="0" marL="0">
-                        <a:buNone/>
-                      </a:pPr>
-                      <a:r>
-                        <a:rPr lang="en-US" sz="800" dirty="0">
-                          <a:solidFill>
-                            <a:srgbClr val="000000"/>
-                          </a:solidFill>
-                          <a:latin typeface="Arial" pitchFamily="34" charset="0"/>
-                          <a:ea typeface="Arial" pitchFamily="34" charset="-122"/>
-                          <a:cs typeface="Arial" pitchFamily="34" charset="-120"/>
-                        </a:rPr>
-                        <a:t>9.23</a:t>
+                        <a:t>9.22</a:t>
                       </a:r>
                       <a:endParaRPr lang="en-US" sz="800" dirty="0">
                         <a:latin typeface="Arial" charset="0"/>
@@ -6629,7 +6629,7 @@
                 <a:ea typeface="Arial" pitchFamily="34" charset="-122"/>
                 <a:cs typeface="Arial" pitchFamily="34" charset="-120"/>
               </a:rPr>
-              <a:t>111件（85.4%）</a:t>
+              <a:t>112件（85.5%）</a:t>
             </a:r>
             <a:endParaRPr lang="en-US" sz="1600" dirty="0"/>
           </a:p>
@@ -6727,7 +6727,7 @@
                 <a:ea typeface="Arial" pitchFamily="34" charset="-122"/>
                 <a:cs typeface="Arial" pitchFamily="34" charset="-120"/>
               </a:rPr>
-              <a:t>18件（13.8%）</a:t>
+              <a:t>18件（13.7%）</a:t>
             </a:r>
             <a:endParaRPr lang="en-US" sz="1600" dirty="0"/>
           </a:p>
@@ -6987,7 +6987,7 @@
                 <a:ea typeface="Arial" pitchFamily="34" charset="-122"/>
                 <a:cs typeface="Arial" pitchFamily="34" charset="-120"/>
               </a:rPr>
-              <a:t>高評価レビュー（8-10点: 111件）の分析から、主要な強みテーマを抽出しています。立地・アクセス、客室清潔感、スタッフ対応が高評価の中心的テーマです。</a:t>
+              <a:t>高評価レビュー（8-10点: 112件）の分析から、主要な強みテーマを抽出しています。立地・アクセス、客室清潔感、スタッフ対応が高評価の中心的テーマです。</a:t>
             </a:r>
             <a:endParaRPr lang="en-US" sz="1200" dirty="0"/>
           </a:p>
@@ -8027,7 +8027,7 @@
                 <a:ea typeface="Arial" pitchFamily="34" charset="-122"/>
                 <a:cs typeface="Arial" pitchFamily="34" charset="-120"/>
               </a:rPr>
-              <a:t>全体平均 8.87点 → 目標 9.37点</a:t>
+              <a:t>全体平均 8.88点 → 目標 9.38点</a:t>
             </a:r>
             <a:endParaRPr lang="en-US" sz="1200" dirty="0"/>
           </a:p>
@@ -8044,7 +8044,7 @@
                 <a:ea typeface="Arial" pitchFamily="34" charset="-122"/>
                 <a:cs typeface="Arial" pitchFamily="34" charset="-120"/>
               </a:rPr>
-              <a:t>高評価率 85.4% → 目標 90.4%</a:t>
+              <a:t>高評価率 85.5% → 目標 90.5%</a:t>
             </a:r>
             <a:endParaRPr lang="en-US" sz="1200" dirty="0"/>
           </a:p>

--- a/納品レポート/ホテル別レポート/comment_yokohama_口コミ分析レポート.pptx
+++ b/納品レポート/ホテル別レポート/comment_yokohama_口コミ分析レポート.pptx
@@ -274,7 +274,7 @@
                 <c:formatCode>General</c:formatCode>
                 <c:ptCount val="6"/>
                 <c:pt idx="0">
-                  <c:v>9.87</c:v>
+                  <c:v>9.62</c:v>
                 </c:pt>
                 <c:pt idx="1">
                   <c:v>9.27</c:v>
@@ -286,10 +286,10 @@
                   <c:v>9.12</c:v>
                 </c:pt>
                 <c:pt idx="4">
-                  <c:v>8.67</c:v>
+                  <c:v>8.7</c:v>
                 </c:pt>
                 <c:pt idx="5">
-                  <c:v>8.12</c:v>
+                  <c:v>8</c:v>
                 </c:pt>
               </c:numCache>
             </c:numRef>
@@ -617,19 +617,19 @@
                   <c:v>62</c:v>
                 </c:pt>
                 <c:pt idx="1">
-                  <c:v>23</c:v>
+                  <c:v>22</c:v>
                 </c:pt>
                 <c:pt idx="2">
                   <c:v>27</c:v>
                 </c:pt>
                 <c:pt idx="3">
-                  <c:v>10</c:v>
+                  <c:v>11</c:v>
                 </c:pt>
                 <c:pt idx="4">
                   <c:v>7</c:v>
                 </c:pt>
                 <c:pt idx="5">
-                  <c:v>1</c:v>
+                  <c:v>2</c:v>
                 </c:pt>
                 <c:pt idx="6">
                   <c:v>1</c:v>
@@ -2520,7 +2520,7 @@
                 <a:ea typeface="Arial" pitchFamily="34" charset="-122"/>
                 <a:cs typeface="Arial" pitchFamily="34" charset="-120"/>
               </a:rPr>
-              <a:t>レビュー総数：131件</a:t>
+              <a:t>レビュー総数：132件</a:t>
             </a:r>
             <a:endParaRPr lang="en-US" sz="1000" dirty="0"/>
           </a:p>
@@ -2800,7 +2800,7 @@
                 <a:ea typeface="Arial" pitchFamily="34" charset="-122"/>
                 <a:cs typeface="Arial" pitchFamily="34" charset="-120"/>
               </a:rPr>
-              <a:t>ホテルコメント横浜関内は全体平均8.88点（10pt換算）、高評価率85.5%を達成しています。本レポートで示した改善施策を段階的に実施することで、さらなる顧客満足度向上が期待できます。</a:t>
+              <a:t>ホテルコメント横浜関内は全体平均8.83点（10pt換算）、高評価率84.1%を達成しています。本レポートで示した改善施策を段階的に実施することで、さらなる顧客満足度向上が期待できます。</a:t>
             </a:r>
             <a:endParaRPr lang="en-US" sz="1200" dirty="0"/>
           </a:p>
@@ -3237,7 +3237,7 @@
                 <a:ea typeface="Arial" pitchFamily="34" charset="-122"/>
                 <a:cs typeface="Arial" pitchFamily="34" charset="-120"/>
               </a:rPr>
-              <a:t>8.88</a:t>
+              <a:t>8.83</a:t>
             </a:r>
             <a:endParaRPr lang="en-US" sz="2800" dirty="0"/>
           </a:p>
@@ -3355,7 +3355,7 @@
                 <a:ea typeface="Arial" pitchFamily="34" charset="-122"/>
                 <a:cs typeface="Arial" pitchFamily="34" charset="-120"/>
               </a:rPr>
-              <a:t>85.5%</a:t>
+              <a:t>84.1%</a:t>
             </a:r>
             <a:endParaRPr lang="en-US" sz="2800" dirty="0"/>
           </a:p>
@@ -3591,7 +3591,7 @@
                 <a:ea typeface="Arial" pitchFamily="34" charset="-122"/>
                 <a:cs typeface="Arial" pitchFamily="34" charset="-120"/>
               </a:rPr>
-              <a:t>131件</a:t>
+              <a:t>132件</a:t>
             </a:r>
             <a:endParaRPr lang="en-US" sz="2800" dirty="0"/>
           </a:p>
@@ -4330,7 +4330,7 @@
                           <a:ea typeface="Arial" pitchFamily="34" charset="-122"/>
                           <a:cs typeface="Arial" pitchFamily="34" charset="-120"/>
                         </a:rPr>
-                        <a:t>15</a:t>
+                        <a:t>16</a:t>
                       </a:r>
                       <a:endParaRPr lang="en-US" sz="800" dirty="0">
                         <a:latin typeface="Arial" charset="0"/>
@@ -4398,7 +4398,7 @@
                           <a:ea typeface="Arial" pitchFamily="34" charset="-122"/>
                           <a:cs typeface="Arial" pitchFamily="34" charset="-120"/>
                         </a:rPr>
-                        <a:t>4.93/5</a:t>
+                        <a:t>4.81/5</a:t>
                       </a:r>
                       <a:endParaRPr lang="en-US" sz="800" dirty="0">
                         <a:latin typeface="Arial" charset="0"/>
@@ -4466,7 +4466,7 @@
                           <a:ea typeface="Arial" pitchFamily="34" charset="-122"/>
                           <a:cs typeface="Arial" pitchFamily="34" charset="-120"/>
                         </a:rPr>
-                        <a:t>9.87</a:t>
+                        <a:t>9.62</a:t>
                       </a:r>
                       <a:endParaRPr lang="en-US" sz="800" dirty="0">
                         <a:latin typeface="Arial" charset="0"/>
@@ -5766,7 +5766,7 @@
                           <a:ea typeface="Arial" pitchFamily="34" charset="-122"/>
                           <a:cs typeface="Arial" pitchFamily="34" charset="-120"/>
                         </a:rPr>
-                        <a:t>8.67/10</a:t>
+                        <a:t>8.70/10</a:t>
                       </a:r>
                       <a:endParaRPr lang="en-US" sz="800" dirty="0">
                         <a:latin typeface="Arial" charset="0"/>
@@ -5834,7 +5834,7 @@
                           <a:ea typeface="Arial" pitchFamily="34" charset="-122"/>
                           <a:cs typeface="Arial" pitchFamily="34" charset="-120"/>
                         </a:rPr>
-                        <a:t>8.67</a:t>
+                        <a:t>8.70</a:t>
                       </a:r>
                       <a:endParaRPr lang="en-US" sz="800" dirty="0">
                         <a:latin typeface="Arial" charset="0"/>
@@ -6108,7 +6108,7 @@
                           <a:ea typeface="Arial" pitchFamily="34" charset="-122"/>
                           <a:cs typeface="Arial" pitchFamily="34" charset="-120"/>
                         </a:rPr>
-                        <a:t>8.12/10</a:t>
+                        <a:t>8.00/10</a:t>
                       </a:r>
                       <a:endParaRPr lang="en-US" sz="800" dirty="0">
                         <a:latin typeface="Arial" charset="0"/>
@@ -6176,7 +6176,7 @@
                           <a:ea typeface="Arial" pitchFamily="34" charset="-122"/>
                           <a:cs typeface="Arial" pitchFamily="34" charset="-120"/>
                         </a:rPr>
-                        <a:t>8.12</a:t>
+                        <a:t>8.00</a:t>
                       </a:r>
                       <a:endParaRPr lang="en-US" sz="800" dirty="0">
                         <a:latin typeface="Arial" charset="0"/>
@@ -6629,7 +6629,7 @@
                 <a:ea typeface="Arial" pitchFamily="34" charset="-122"/>
                 <a:cs typeface="Arial" pitchFamily="34" charset="-120"/>
               </a:rPr>
-              <a:t>112件（85.5%）</a:t>
+              <a:t>111件（84.1%）</a:t>
             </a:r>
             <a:endParaRPr lang="en-US" sz="1600" dirty="0"/>
           </a:p>
@@ -6727,7 +6727,7 @@
                 <a:ea typeface="Arial" pitchFamily="34" charset="-122"/>
                 <a:cs typeface="Arial" pitchFamily="34" charset="-120"/>
               </a:rPr>
-              <a:t>18件（13.7%）</a:t>
+              <a:t>20件（15.2%）</a:t>
             </a:r>
             <a:endParaRPr lang="en-US" sz="1600" dirty="0"/>
           </a:p>
@@ -6987,7 +6987,7 @@
                 <a:ea typeface="Arial" pitchFamily="34" charset="-122"/>
                 <a:cs typeface="Arial" pitchFamily="34" charset="-120"/>
               </a:rPr>
-              <a:t>高評価レビュー（8-10点: 112件）の分析から、主要な強みテーマを抽出しています。立地・アクセス、客室清潔感、スタッフ対応が高評価の中心的テーマです。</a:t>
+              <a:t>高評価レビュー（8-10点: 111件）の分析から、主要な強みテーマを抽出しています。立地・アクセス、客室清潔感、スタッフ対応が高評価の中心的テーマです。</a:t>
             </a:r>
             <a:endParaRPr lang="en-US" sz="1200" dirty="0"/>
           </a:p>
@@ -7247,7 +7247,7 @@
                 <a:ea typeface="Arial" pitchFamily="34" charset="-122"/>
                 <a:cs typeface="Arial" pitchFamily="34" charset="-120"/>
               </a:rPr>
-              <a:t>低評価・中評価レビュー（19件）から改善課題を優先度別に整理しています。S/A/B/Cの4段階で優先度を設定し、計画的な改善を推進します。</a:t>
+              <a:t>低評価・中評価レビュー（21件）から改善課題を優先度別に整理しています。S/A/B/Cの4段階で優先度を設定し、計画的な改善を推進します。</a:t>
             </a:r>
             <a:endParaRPr lang="en-US" sz="1200" dirty="0"/>
           </a:p>
@@ -8027,7 +8027,7 @@
                 <a:ea typeface="Arial" pitchFamily="34" charset="-122"/>
                 <a:cs typeface="Arial" pitchFamily="34" charset="-120"/>
               </a:rPr>
-              <a:t>全体平均 8.88点 → 目標 9.38点</a:t>
+              <a:t>全体平均 8.83点 → 目標 9.33点</a:t>
             </a:r>
             <a:endParaRPr lang="en-US" sz="1200" dirty="0"/>
           </a:p>
@@ -8044,7 +8044,7 @@
                 <a:ea typeface="Arial" pitchFamily="34" charset="-122"/>
                 <a:cs typeface="Arial" pitchFamily="34" charset="-120"/>
               </a:rPr>
-              <a:t>高評価率 85.5% → 目標 90.5%</a:t>
+              <a:t>高評価率 84.1% → 目標 89.1%</a:t>
             </a:r>
             <a:endParaRPr lang="en-US" sz="1200" dirty="0"/>
           </a:p>

--- a/納品レポート/ホテル別レポート/comment_yokohama_口コミ分析レポート.pptx
+++ b/納品レポート/ホテル別レポート/comment_yokohama_口コミ分析レポート.pptx
@@ -183,10 +183,10 @@
                     <c:v>じゃらん</c:v>
                   </c:pt>
                   <c:pt idx="1">
-                    <c:v>楽天トラベル</c:v>
+                    <c:v>Google</c:v>
                   </c:pt>
                   <c:pt idx="2">
-                    <c:v>Google</c:v>
+                    <c:v>楽天トラベル</c:v>
                   </c:pt>
                   <c:pt idx="3">
                     <c:v>Trip.com</c:v>
@@ -211,16 +211,16 @@
                   <c:v>9.5</c:v>
                 </c:pt>
                 <c:pt idx="1">
-                  <c:v>9.45</c:v>
+                  <c:v>9.43</c:v>
                 </c:pt>
                 <c:pt idx="2">
-                  <c:v>9.43</c:v>
+                  <c:v>9.33</c:v>
                 </c:pt>
                 <c:pt idx="3">
                   <c:v>9</c:v>
                 </c:pt>
                 <c:pt idx="4">
-                  <c:v>8.76</c:v>
+                  <c:v>8.85</c:v>
                 </c:pt>
                 <c:pt idx="5">
                   <c:v>7.88</c:v>
@@ -566,7 +566,7 @@
               <c:numCache>
                 <c:ptCount val="3"/>
                 <c:pt idx="0">
-                  <c:v>58</c:v>
+                  <c:v>62</c:v>
                 </c:pt>
                 <c:pt idx="1">
                   <c:v>8</c:v>
@@ -795,13 +795,13 @@
                 <c:formatCode>General</c:formatCode>
                 <c:ptCount val="7"/>
                 <c:pt idx="0">
-                  <c:v>31</c:v>
+                  <c:v>33</c:v>
                 </c:pt>
                 <c:pt idx="1">
                   <c:v>12</c:v>
                 </c:pt>
                 <c:pt idx="2">
-                  <c:v>15</c:v>
+                  <c:v>17</c:v>
                 </c:pt>
                 <c:pt idx="3">
                   <c:v>4</c:v>
@@ -2764,7 +2764,7 @@
                 <a:ea typeface="Arial" pitchFamily="34" charset="-122"/>
                 <a:cs typeface="Arial" pitchFamily="34" charset="-120"/>
               </a:rPr>
-              <a:t>レビュー総数：67件（6サイト）</a:t>
+              <a:t>レビュー総数：71件（6サイト）</a:t>
             </a:r>
             <a:endParaRPr lang="en-US" sz="1000" dirty="0"/>
           </a:p>
@@ -2784,7 +2784,7 @@
                 <a:ea typeface="Arial" pitchFamily="34" charset="-122"/>
                 <a:cs typeface="Arial" pitchFamily="34" charset="-120"/>
               </a:rPr>
-              <a:t>作成日：2026年4月2日</a:t>
+              <a:t>作成日：2026年4月5日</a:t>
             </a:r>
             <a:endParaRPr lang="en-US" sz="1000" dirty="0"/>
           </a:p>
@@ -3330,7 +3330,7 @@
                           <a:ea typeface="Arial" pitchFamily="34" charset="-122"/>
                           <a:cs typeface="Arial" pitchFamily="34" charset="-120"/>
                         </a:rPr>
-                        <a:t>8.82点</a:t>
+                        <a:t>8.83点</a:t>
                       </a:r>
                       <a:endParaRPr lang="en-US" sz="1000" dirty="0">
                         <a:latin typeface="Arial" charset="0"/>
@@ -3604,7 +3604,7 @@
                           <a:ea typeface="Arial" pitchFamily="34" charset="-122"/>
                           <a:cs typeface="Arial" pitchFamily="34" charset="-120"/>
                         </a:rPr>
-                        <a:t>86.6%</a:t>
+                        <a:t>87.3%</a:t>
                       </a:r>
                       <a:endParaRPr lang="en-US" sz="1000" dirty="0">
                         <a:latin typeface="Arial" charset="0"/>
@@ -3878,7 +3878,7 @@
                           <a:ea typeface="Arial" pitchFamily="34" charset="-122"/>
                           <a:cs typeface="Arial" pitchFamily="34" charset="-120"/>
                         </a:rPr>
-                        <a:t>1.5%</a:t>
+                        <a:t>1.4%</a:t>
                       </a:r>
                       <a:endParaRPr lang="en-US" sz="1000" dirty="0">
                         <a:latin typeface="Arial" charset="0"/>
@@ -4632,7 +4632,7 @@
                           <a:ea typeface="Arial" pitchFamily="34" charset="-122"/>
                           <a:cs typeface="Arial" pitchFamily="34" charset="-120"/>
                         </a:rPr>
-                        <a:t>浴室・水回りクレーム</a:t>
+                        <a:t>部屋の狭さクレーム</a:t>
                       </a:r>
                       <a:endParaRPr lang="en-US" sz="1000" dirty="0">
                         <a:latin typeface="Arial" charset="0"/>
@@ -4700,7 +4700,7 @@
                           <a:ea typeface="Arial" pitchFamily="34" charset="-122"/>
                           <a:cs typeface="Arial" pitchFamily="34" charset="-120"/>
                         </a:rPr>
-                        <a:t>約8件/期間</a:t>
+                        <a:t>約9件/期間</a:t>
                       </a:r>
                       <a:endParaRPr lang="en-US" sz="1000" dirty="0">
                         <a:latin typeface="Arial" charset="0"/>
@@ -5339,7 +5339,7 @@
                 <a:ea typeface="Arial" pitchFamily="34" charset="-122"/>
                 <a:cs typeface="Arial" pitchFamily="34" charset="-120"/>
               </a:rPr>
-              <a:t>8.82</a:t>
+              <a:t>8.83</a:t>
             </a:r>
             <a:endParaRPr lang="en-US" sz="3200" dirty="0"/>
           </a:p>
@@ -5464,7 +5464,7 @@
                 <a:ea typeface="Arial" pitchFamily="34" charset="-122"/>
                 <a:cs typeface="Arial" pitchFamily="34" charset="-120"/>
               </a:rPr>
-              <a:t>86.6%</a:t>
+              <a:t>87.3%</a:t>
             </a:r>
             <a:endParaRPr lang="en-US" sz="3200" dirty="0"/>
           </a:p>
@@ -5589,7 +5589,7 @@
                 <a:ea typeface="Arial" pitchFamily="34" charset="-122"/>
                 <a:cs typeface="Arial" pitchFamily="34" charset="-120"/>
               </a:rPr>
-              <a:t>1.5%</a:t>
+              <a:t>1.4%</a:t>
             </a:r>
             <a:endParaRPr lang="en-US" sz="3200" dirty="0"/>
           </a:p>
@@ -5714,7 +5714,7 @@
                 <a:ea typeface="Arial" pitchFamily="34" charset="-122"/>
                 <a:cs typeface="Arial" pitchFamily="34" charset="-120"/>
               </a:rPr>
-              <a:t>67件</a:t>
+              <a:t>71件</a:t>
             </a:r>
             <a:endParaRPr lang="en-US" sz="3200" dirty="0"/>
           </a:p>
@@ -5862,7 +5862,47 @@
                 <a:ea typeface="Arial" pitchFamily="34" charset="-122"/>
                 <a:cs typeface="Arial" pitchFamily="34" charset="-120"/>
               </a:rPr>
-              <a:t>  ただ、一部の部屋はかなり不衛生だった</a:t>
+              <a:t>  狭い部屋だけど2段ベットでワクワクした 綺麗 特にない 特にない</a:t>
+            </a:r>
+            <a:endParaRPr lang="en-US" sz="1100" dirty="0"/>
+          </a:p>
+          <a:p>
+            <a:pPr indent="0" marL="0">
+              <a:spcAft>
+                <a:spcPts val="200"/>
+              </a:spcAft>
+              <a:buNone/>
+            </a:pPr>
+            <a:r>
+              <a:rPr lang="en-US" sz="1100" b="1" dirty="0">
+                <a:solidFill>
+                  <a:srgbClr val="334155"/>
+                </a:solidFill>
+                <a:latin typeface="Arial" pitchFamily="34" charset="0"/>
+                <a:ea typeface="Arial" pitchFamily="34" charset="-122"/>
+                <a:cs typeface="Arial" pitchFamily="34" charset="-120"/>
+              </a:rPr>
+              <a:t>快適さ・設備 </a:t>
+            </a:r>
+            <a:endParaRPr lang="en-US" sz="1100" dirty="0"/>
+          </a:p>
+          <a:p>
+            <a:pPr indent="0" marL="0">
+              <a:spcAft>
+                <a:spcPts val="200"/>
+              </a:spcAft>
+              <a:buNone/>
+            </a:pPr>
+            <a:r>
+              <a:rPr lang="en-US" sz="900" dirty="0">
+                <a:solidFill>
+                  <a:srgbClr val="64748B"/>
+                </a:solidFill>
+                <a:latin typeface="Arial" pitchFamily="34" charset="0"/>
+                <a:ea typeface="Arial" pitchFamily="34" charset="-122"/>
+                <a:cs typeface="Arial" pitchFamily="34" charset="-120"/>
+              </a:rPr>
+              <a:t>  com アメニティーとスープとお茶</a:t>
             </a:r>
             <a:endParaRPr lang="en-US" sz="1100" dirty="0"/>
           </a:p>
@@ -5906,6 +5946,114 @@
             </a:r>
             <a:endParaRPr lang="en-US" sz="1100" dirty="0"/>
           </a:p>
+        </p:txBody>
+      </p:sp>
+      <p:sp>
+        <p:nvSpPr>
+          <p:cNvPr id="25" name="Shape 23"/>
+          <p:cNvSpPr/>
+          <p:nvPr/>
+        </p:nvSpPr>
+        <p:spPr>
+          <a:xfrm>
+            <a:off x="4754880" y="2286000"/>
+            <a:ext cx="3931920" cy="2286000"/>
+          </a:xfrm>
+          <a:prstGeom prst="rect">
+            <a:avLst/>
+          </a:prstGeom>
+          <a:solidFill>
+            <a:srgbClr val="FFFFFF"/>
+          </a:solidFill>
+          <a:ln/>
+          <a:effectLst>
+            <a:outerShdw sx="100000" sy="100000" kx="0" ky="0" algn="bl" rotWithShape="0" blurRad="50800" dist="25400" dir="8100000">
+              <a:srgbClr val="000000">
+                <a:alpha val="10000"/>
+              </a:srgbClr>
+            </a:outerShdw>
+          </a:effectLst>
+        </p:spPr>
+      </p:sp>
+      <p:sp>
+        <p:nvSpPr>
+          <p:cNvPr id="26" name="Shape 24"/>
+          <p:cNvSpPr/>
+          <p:nvPr/>
+        </p:nvSpPr>
+        <p:spPr>
+          <a:xfrm>
+            <a:off x="4754880" y="2286000"/>
+            <a:ext cx="3931920" cy="45720"/>
+          </a:xfrm>
+          <a:prstGeom prst="rect">
+            <a:avLst/>
+          </a:prstGeom>
+          <a:solidFill>
+            <a:srgbClr val="DC2626"/>
+          </a:solidFill>
+          <a:ln/>
+        </p:spPr>
+      </p:sp>
+      <p:sp>
+        <p:nvSpPr>
+          <p:cNvPr id="27" name="Text 25"/>
+          <p:cNvSpPr/>
+          <p:nvPr/>
+        </p:nvSpPr>
+        <p:spPr>
+          <a:xfrm>
+            <a:off x="4937760" y="2377440"/>
+            <a:ext cx="2743200" cy="320040"/>
+          </a:xfrm>
+          <a:prstGeom prst="rect">
+            <a:avLst/>
+          </a:prstGeom>
+          <a:noFill/>
+          <a:ln/>
+        </p:spPr>
+        <p:txBody>
+          <a:bodyPr wrap="square" lIns="0" tIns="0" rIns="0" bIns="0" rtlCol="0" anchor="ctr"/>
+          <a:lstStyle/>
+          <a:p>
+            <a:pPr indent="0" marL="0">
+              <a:buNone/>
+            </a:pPr>
+            <a:r>
+              <a:rPr lang="en-US" sz="1400" b="1" dirty="0">
+                <a:solidFill>
+                  <a:srgbClr val="DC2626"/>
+                </a:solidFill>
+                <a:latin typeface="Arial" pitchFamily="34" charset="0"/>
+                <a:ea typeface="Arial" pitchFamily="34" charset="-122"/>
+                <a:cs typeface="Arial" pitchFamily="34" charset="-120"/>
+              </a:rPr>
+              <a:t>Weaknesses</a:t>
+            </a:r>
+            <a:endParaRPr lang="en-US" sz="1400" dirty="0"/>
+          </a:p>
+        </p:txBody>
+      </p:sp>
+      <p:sp>
+        <p:nvSpPr>
+          <p:cNvPr id="28" name="Text 26"/>
+          <p:cNvSpPr/>
+          <p:nvPr/>
+        </p:nvSpPr>
+        <p:spPr>
+          <a:xfrm>
+            <a:off x="4937760" y="2743200"/>
+            <a:ext cx="3474720" cy="1645920"/>
+          </a:xfrm>
+          <a:prstGeom prst="rect">
+            <a:avLst/>
+          </a:prstGeom>
+          <a:noFill/>
+          <a:ln/>
+        </p:spPr>
+        <p:txBody>
+          <a:bodyPr wrap="square" lIns="0" tIns="0" rIns="0" bIns="0" rtlCol="0" anchor="ctr"/>
+          <a:lstStyle/>
           <a:p>
             <a:pPr indent="0" marL="0">
               <a:spcAft>
@@ -5922,7 +6070,7 @@
                 <a:ea typeface="Arial" pitchFamily="34" charset="-122"/>
                 <a:cs typeface="Arial" pitchFamily="34" charset="-120"/>
               </a:rPr>
-              <a:t>快適さ・設備 </a:t>
+              <a:t>部屋の狭さ </a:t>
             </a:r>
             <a:endParaRPr lang="en-US" sz="1100" dirty="0"/>
           </a:p>
@@ -5942,118 +6090,10 @@
                 <a:ea typeface="Arial" pitchFamily="34" charset="-122"/>
                 <a:cs typeface="Arial" pitchFamily="34" charset="-120"/>
               </a:rPr>
-              <a:t>  com ホテルには近代的な設備、快適な浴場があり、近隣には様々なコンビニエンスストアもあります</a:t>
+              <a:t>  狭い部屋だけど2段ベットでワクワクした 綺麗 特にない 特にない</a:t>
             </a:r>
             <a:endParaRPr lang="en-US" sz="1100" dirty="0"/>
           </a:p>
-        </p:txBody>
-      </p:sp>
-      <p:sp>
-        <p:nvSpPr>
-          <p:cNvPr id="25" name="Shape 23"/>
-          <p:cNvSpPr/>
-          <p:nvPr/>
-        </p:nvSpPr>
-        <p:spPr>
-          <a:xfrm>
-            <a:off x="4754880" y="2286000"/>
-            <a:ext cx="3931920" cy="2286000"/>
-          </a:xfrm>
-          <a:prstGeom prst="rect">
-            <a:avLst/>
-          </a:prstGeom>
-          <a:solidFill>
-            <a:srgbClr val="FFFFFF"/>
-          </a:solidFill>
-          <a:ln/>
-          <a:effectLst>
-            <a:outerShdw sx="100000" sy="100000" kx="0" ky="0" algn="bl" rotWithShape="0" blurRad="50800" dist="25400" dir="8100000">
-              <a:srgbClr val="000000">
-                <a:alpha val="10000"/>
-              </a:srgbClr>
-            </a:outerShdw>
-          </a:effectLst>
-        </p:spPr>
-      </p:sp>
-      <p:sp>
-        <p:nvSpPr>
-          <p:cNvPr id="26" name="Shape 24"/>
-          <p:cNvSpPr/>
-          <p:nvPr/>
-        </p:nvSpPr>
-        <p:spPr>
-          <a:xfrm>
-            <a:off x="4754880" y="2286000"/>
-            <a:ext cx="3931920" cy="45720"/>
-          </a:xfrm>
-          <a:prstGeom prst="rect">
-            <a:avLst/>
-          </a:prstGeom>
-          <a:solidFill>
-            <a:srgbClr val="DC2626"/>
-          </a:solidFill>
-          <a:ln/>
-        </p:spPr>
-      </p:sp>
-      <p:sp>
-        <p:nvSpPr>
-          <p:cNvPr id="27" name="Text 25"/>
-          <p:cNvSpPr/>
-          <p:nvPr/>
-        </p:nvSpPr>
-        <p:spPr>
-          <a:xfrm>
-            <a:off x="4937760" y="2377440"/>
-            <a:ext cx="2743200" cy="320040"/>
-          </a:xfrm>
-          <a:prstGeom prst="rect">
-            <a:avLst/>
-          </a:prstGeom>
-          <a:noFill/>
-          <a:ln/>
-        </p:spPr>
-        <p:txBody>
-          <a:bodyPr wrap="square" lIns="0" tIns="0" rIns="0" bIns="0" rtlCol="0" anchor="ctr"/>
-          <a:lstStyle/>
-          <a:p>
-            <a:pPr indent="0" marL="0">
-              <a:buNone/>
-            </a:pPr>
-            <a:r>
-              <a:rPr lang="en-US" sz="1400" b="1" dirty="0">
-                <a:solidFill>
-                  <a:srgbClr val="DC2626"/>
-                </a:solidFill>
-                <a:latin typeface="Arial" pitchFamily="34" charset="0"/>
-                <a:ea typeface="Arial" pitchFamily="34" charset="-122"/>
-                <a:cs typeface="Arial" pitchFamily="34" charset="-120"/>
-              </a:rPr>
-              <a:t>Weaknesses</a:t>
-            </a:r>
-            <a:endParaRPr lang="en-US" sz="1400" dirty="0"/>
-          </a:p>
-        </p:txBody>
-      </p:sp>
-      <p:sp>
-        <p:nvSpPr>
-          <p:cNvPr id="28" name="Text 26"/>
-          <p:cNvSpPr/>
-          <p:nvPr/>
-        </p:nvSpPr>
-        <p:spPr>
-          <a:xfrm>
-            <a:off x="4937760" y="2743200"/>
-            <a:ext cx="3474720" cy="1645920"/>
-          </a:xfrm>
-          <a:prstGeom prst="rect">
-            <a:avLst/>
-          </a:prstGeom>
-          <a:noFill/>
-          <a:ln/>
-        </p:spPr>
-        <p:txBody>
-          <a:bodyPr wrap="square" lIns="0" tIns="0" rIns="0" bIns="0" rtlCol="0" anchor="ctr"/>
-          <a:lstStyle/>
           <a:p>
             <a:pPr indent="0" marL="0">
               <a:spcAft>
@@ -6090,47 +6130,7 @@
                 <a:ea typeface="Arial" pitchFamily="34" charset="-122"/>
                 <a:cs typeface="Arial" pitchFamily="34" charset="-120"/>
               </a:rPr>
-              <a:t>  例えば、枕に足跡がついていたり、バスルームに短い髪の毛が落ちていたりした</a:t>
-            </a:r>
-            <a:endParaRPr lang="en-US" sz="1100" dirty="0"/>
-          </a:p>
-          <a:p>
-            <a:pPr indent="0" marL="0">
-              <a:spcAft>
-                <a:spcPts val="200"/>
-              </a:spcAft>
-              <a:buNone/>
-            </a:pPr>
-            <a:r>
-              <a:rPr lang="en-US" sz="1100" b="1" dirty="0">
-                <a:solidFill>
-                  <a:srgbClr val="334155"/>
-                </a:solidFill>
-                <a:latin typeface="Arial" pitchFamily="34" charset="0"/>
-                <a:ea typeface="Arial" pitchFamily="34" charset="-122"/>
-                <a:cs typeface="Arial" pitchFamily="34" charset="-120"/>
-              </a:rPr>
-              <a:t>部屋の狭さ </a:t>
-            </a:r>
-            <a:endParaRPr lang="en-US" sz="1100" dirty="0"/>
-          </a:p>
-          <a:p>
-            <a:pPr indent="0" marL="0">
-              <a:spcAft>
-                <a:spcPts val="200"/>
-              </a:spcAft>
-              <a:buNone/>
-            </a:pPr>
-            <a:r>
-              <a:rPr lang="en-US" sz="900" dirty="0">
-                <a:solidFill>
-                  <a:srgbClr val="64748B"/>
-                </a:solidFill>
-                <a:latin typeface="Arial" pitchFamily="34" charset="0"/>
-                <a:ea typeface="Arial" pitchFamily="34" charset="-122"/>
-                <a:cs typeface="Arial" pitchFamily="34" charset="-120"/>
-              </a:rPr>
-              <a:t>  部屋は狭いけど(キャリーケースを広げたら通れない)新しいからキレイ</a:t>
+              <a:t>  大きな折りたたみ物干しがあったのはいいけど、パウダールームもシャワールームもトイレの壁もオシャレにシンプルすぎて、...</a:t>
             </a:r>
             <a:endParaRPr lang="en-US" sz="1100" dirty="0"/>
           </a:p>
@@ -6523,7 +6523,7 @@
                 <a:ea typeface="Arial" pitchFamily="34" charset="-122"/>
                 <a:cs typeface="Arial" pitchFamily="34" charset="-120"/>
               </a:rPr>
-              <a:t>8.82</a:t>
+              <a:t>8.83</a:t>
             </a:r>
             <a:endParaRPr lang="en-US" sz="3200" dirty="0"/>
           </a:p>
@@ -6648,7 +6648,7 @@
                 <a:ea typeface="Arial" pitchFamily="34" charset="-122"/>
                 <a:cs typeface="Arial" pitchFamily="34" charset="-120"/>
               </a:rPr>
-              <a:t>86.6%</a:t>
+              <a:t>87.3%</a:t>
             </a:r>
             <a:endParaRPr lang="en-US" sz="3200" dirty="0"/>
           </a:p>
@@ -6773,7 +6773,7 @@
                 <a:ea typeface="Arial" pitchFamily="34" charset="-122"/>
                 <a:cs typeface="Arial" pitchFamily="34" charset="-120"/>
               </a:rPr>
-              <a:t>1.5%</a:t>
+              <a:t>1.4%</a:t>
             </a:r>
             <a:endParaRPr lang="en-US" sz="3200" dirty="0"/>
           </a:p>
@@ -6898,7 +6898,7 @@
                 <a:ea typeface="Arial" pitchFamily="34" charset="-122"/>
                 <a:cs typeface="Arial" pitchFamily="34" charset="-120"/>
               </a:rPr>
-              <a:t>67件</a:t>
+              <a:t>71件</a:t>
             </a:r>
             <a:endParaRPr lang="en-US" sz="3200" dirty="0"/>
           </a:p>
@@ -8151,7 +8151,7 @@
                           <a:ea typeface="Arial" pitchFamily="34" charset="-122"/>
                           <a:cs typeface="Arial" pitchFamily="34" charset="-120"/>
                         </a:rPr>
-                        <a:t>楽天トラベル</a:t>
+                        <a:t>Google</a:t>
                       </a:r>
                       <a:endParaRPr lang="en-US" sz="900" dirty="0">
                         <a:latin typeface="Arial" charset="0"/>
@@ -8219,7 +8219,7 @@
                           <a:ea typeface="Arial" pitchFamily="34" charset="-122"/>
                           <a:cs typeface="Arial" pitchFamily="34" charset="-120"/>
                         </a:rPr>
-                        <a:t>11</a:t>
+                        <a:t>7</a:t>
                       </a:r>
                       <a:endParaRPr lang="en-US" sz="900" dirty="0">
                         <a:latin typeface="Arial" charset="0"/>
@@ -8287,7 +8287,7 @@
                           <a:ea typeface="Arial" pitchFamily="34" charset="-122"/>
                           <a:cs typeface="Arial" pitchFamily="34" charset="-120"/>
                         </a:rPr>
-                        <a:t>4.73</a:t>
+                        <a:t>4.71</a:t>
                       </a:r>
                       <a:endParaRPr lang="en-US" sz="900" dirty="0">
                         <a:latin typeface="Arial" charset="0"/>
@@ -8423,7 +8423,7 @@
                           <a:ea typeface="Arial" pitchFamily="34" charset="-122"/>
                           <a:cs typeface="Arial" pitchFamily="34" charset="-120"/>
                         </a:rPr>
-                        <a:t>9.45</a:t>
+                        <a:t>9.43</a:t>
                       </a:r>
                       <a:endParaRPr lang="en-US" sz="900" dirty="0">
                         <a:latin typeface="Arial" charset="0"/>
@@ -8493,7 +8493,7 @@
                           <a:ea typeface="Arial" pitchFamily="34" charset="-122"/>
                           <a:cs typeface="Arial" pitchFamily="34" charset="-120"/>
                         </a:rPr>
-                        <a:t>Google</a:t>
+                        <a:t>楽天トラベル</a:t>
                       </a:r>
                       <a:endParaRPr lang="en-US" sz="900" dirty="0">
                         <a:latin typeface="Arial" charset="0"/>
@@ -8561,7 +8561,7 @@
                           <a:ea typeface="Arial" pitchFamily="34" charset="-122"/>
                           <a:cs typeface="Arial" pitchFamily="34" charset="-120"/>
                         </a:rPr>
-                        <a:t>7</a:t>
+                        <a:t>12</a:t>
                       </a:r>
                       <a:endParaRPr lang="en-US" sz="900" dirty="0">
                         <a:latin typeface="Arial" charset="0"/>
@@ -8629,7 +8629,7 @@
                           <a:ea typeface="Arial" pitchFamily="34" charset="-122"/>
                           <a:cs typeface="Arial" pitchFamily="34" charset="-120"/>
                         </a:rPr>
-                        <a:t>4.71</a:t>
+                        <a:t>4.67</a:t>
                       </a:r>
                       <a:endParaRPr lang="en-US" sz="900" dirty="0">
                         <a:latin typeface="Arial" charset="0"/>
@@ -8765,7 +8765,7 @@
                           <a:ea typeface="Arial" pitchFamily="34" charset="-122"/>
                           <a:cs typeface="Arial" pitchFamily="34" charset="-120"/>
                         </a:rPr>
-                        <a:t>9.43</a:t>
+                        <a:t>9.33</a:t>
                       </a:r>
                       <a:endParaRPr lang="en-US" sz="900" dirty="0">
                         <a:latin typeface="Arial" charset="0"/>
@@ -9245,7 +9245,7 @@
                           <a:ea typeface="Arial" pitchFamily="34" charset="-122"/>
                           <a:cs typeface="Arial" pitchFamily="34" charset="-120"/>
                         </a:rPr>
-                        <a:t>17</a:t>
+                        <a:t>20</a:t>
                       </a:r>
                       <a:endParaRPr lang="en-US" sz="900" dirty="0">
                         <a:latin typeface="Arial" charset="0"/>
@@ -9313,7 +9313,7 @@
                           <a:ea typeface="Arial" pitchFamily="34" charset="-122"/>
                           <a:cs typeface="Arial" pitchFamily="34" charset="-120"/>
                         </a:rPr>
-                        <a:t>8.76</a:t>
+                        <a:t>8.85</a:t>
                       </a:r>
                       <a:endParaRPr lang="en-US" sz="900" dirty="0">
                         <a:latin typeface="Arial" charset="0"/>
@@ -9449,7 +9449,7 @@
                           <a:ea typeface="Arial" pitchFamily="34" charset="-122"/>
                           <a:cs typeface="Arial" pitchFamily="34" charset="-120"/>
                         </a:rPr>
-                        <a:t>8.76</a:t>
+                        <a:t>8.85</a:t>
                       </a:r>
                       <a:endParaRPr lang="en-US" sz="900" dirty="0">
                         <a:latin typeface="Arial" charset="0"/>
@@ -10199,7 +10199,7 @@
                 <a:ea typeface="Arial" pitchFamily="34" charset="-122"/>
                 <a:cs typeface="Arial" pitchFamily="34" charset="-120"/>
               </a:rPr>
-              <a:t>58件（86.6%）</a:t>
+              <a:t>62件（87.3%）</a:t>
             </a:r>
             <a:endParaRPr lang="en-US" sz="1100" dirty="0"/>
           </a:p>
@@ -10297,7 +10297,7 @@
                 <a:ea typeface="Arial" pitchFamily="34" charset="-122"/>
                 <a:cs typeface="Arial" pitchFamily="34" charset="-120"/>
               </a:rPr>
-              <a:t>8件（11.9%）</a:t>
+              <a:t>8件（11.3%）</a:t>
             </a:r>
             <a:endParaRPr lang="en-US" sz="1100" dirty="0"/>
           </a:p>
@@ -10395,7 +10395,7 @@
                 <a:ea typeface="Arial" pitchFamily="34" charset="-122"/>
                 <a:cs typeface="Arial" pitchFamily="34" charset="-120"/>
               </a:rPr>
-              <a:t>1件（1.5%）</a:t>
+              <a:t>1件（1.4%）</a:t>
             </a:r>
             <a:endParaRPr lang="en-US" sz="1100" dirty="0"/>
           </a:p>
@@ -10807,7 +10807,7 @@
                 <a:ea typeface="Arial" pitchFamily="34" charset="-122"/>
                 <a:cs typeface="Arial" pitchFamily="34" charset="-120"/>
               </a:rPr>
-              <a:t>ただ、一部の部屋はかなり不衛生だった</a:t>
+              <a:t>狭い部屋だけど2段ベットでワクワクした 綺麗 特にない 特にない</a:t>
             </a:r>
             <a:endParaRPr lang="en-US" sz="900" dirty="0"/>
           </a:p>
@@ -10846,7 +10846,7 @@
                 <a:ea typeface="Arial" pitchFamily="34" charset="-122"/>
                 <a:cs typeface="Arial" pitchFamily="34" charset="-120"/>
               </a:rPr>
-              <a:t>「com 清潔、タオルがふわふわ、タオルの用意がたくさんある、布団が寝やすい、ドライヤーがリファ、アメニティに無料ス...」</a:t>
+              <a:t>「部屋もキレイでとても快適に過ごす事が出来ました」</a:t>
             </a:r>
             <a:endParaRPr lang="en-US" sz="900" dirty="0"/>
           </a:p>
@@ -10991,6 +10991,229 @@
                 <a:ea typeface="Arial" pitchFamily="34" charset="-122"/>
                 <a:cs typeface="Arial" pitchFamily="34" charset="-120"/>
               </a:rPr>
+              <a:t>快適さ・設備</a:t>
+            </a:r>
+            <a:endParaRPr lang="en-US" sz="1300" dirty="0"/>
+          </a:p>
+        </p:txBody>
+      </p:sp>
+      <p:sp>
+        <p:nvSpPr>
+          <p:cNvPr id="17" name="Text 15"/>
+          <p:cNvSpPr/>
+          <p:nvPr/>
+        </p:nvSpPr>
+        <p:spPr>
+          <a:xfrm>
+            <a:off x="3429000" y="1417320"/>
+            <a:ext cx="2377440" cy="365760"/>
+          </a:xfrm>
+          <a:prstGeom prst="rect">
+            <a:avLst/>
+          </a:prstGeom>
+          <a:noFill/>
+          <a:ln/>
+        </p:spPr>
+        <p:txBody>
+          <a:bodyPr wrap="square" lIns="0" tIns="0" rIns="0" bIns="0" rtlCol="0" anchor="ctr"/>
+          <a:lstStyle/>
+          <a:p>
+            <a:pPr indent="0" marL="0">
+              <a:buNone/>
+            </a:pPr>
+            <a:r>
+              <a:rPr lang="en-US" sz="900" dirty="0">
+                <a:solidFill>
+                  <a:srgbClr val="64748B"/>
+                </a:solidFill>
+                <a:latin typeface="Arial" pitchFamily="34" charset="0"/>
+                <a:ea typeface="Arial" pitchFamily="34" charset="-122"/>
+                <a:cs typeface="Arial" pitchFamily="34" charset="-120"/>
+              </a:rPr>
+              <a:t>com アメニティーとスープとお茶</a:t>
+            </a:r>
+            <a:endParaRPr lang="en-US" sz="900" dirty="0"/>
+          </a:p>
+        </p:txBody>
+      </p:sp>
+      <p:sp>
+        <p:nvSpPr>
+          <p:cNvPr id="18" name="Text 16"/>
+          <p:cNvSpPr/>
+          <p:nvPr/>
+        </p:nvSpPr>
+        <p:spPr>
+          <a:xfrm>
+            <a:off x="3429000" y="1828800"/>
+            <a:ext cx="2377440" cy="640080"/>
+          </a:xfrm>
+          <a:prstGeom prst="rect">
+            <a:avLst/>
+          </a:prstGeom>
+          <a:noFill/>
+          <a:ln/>
+        </p:spPr>
+        <p:txBody>
+          <a:bodyPr wrap="square" lIns="0" tIns="0" rIns="0" bIns="0" rtlCol="0" anchor="ctr"/>
+          <a:lstStyle/>
+          <a:p>
+            <a:pPr indent="0" marL="0">
+              <a:buNone/>
+            </a:pPr>
+            <a:r>
+              <a:rPr lang="en-US" sz="900" i="1" dirty="0">
+                <a:solidFill>
+                  <a:srgbClr val="3B7DD8"/>
+                </a:solidFill>
+                <a:latin typeface="Arial" pitchFamily="34" charset="0"/>
+                <a:ea typeface="Arial" pitchFamily="34" charset="-122"/>
+                <a:cs typeface="Arial" pitchFamily="34" charset="-120"/>
+              </a:rPr>
+              <a:t>「部屋もキレイでとても快適に過ごす事が出来ました」</a:t>
+            </a:r>
+            <a:endParaRPr lang="en-US" sz="900" dirty="0"/>
+          </a:p>
+        </p:txBody>
+      </p:sp>
+      <p:sp>
+        <p:nvSpPr>
+          <p:cNvPr id="19" name="Shape 17"/>
+          <p:cNvSpPr/>
+          <p:nvPr/>
+        </p:nvSpPr>
+        <p:spPr>
+          <a:xfrm>
+            <a:off x="6126480" y="1051560"/>
+            <a:ext cx="2651760" cy="1600200"/>
+          </a:xfrm>
+          <a:prstGeom prst="rect">
+            <a:avLst/>
+          </a:prstGeom>
+          <a:solidFill>
+            <a:srgbClr val="FFFFFF"/>
+          </a:solidFill>
+          <a:ln/>
+          <a:effectLst>
+            <a:outerShdw sx="100000" sy="100000" kx="0" ky="0" algn="bl" rotWithShape="0" blurRad="50800" dist="25400" dir="8100000">
+              <a:srgbClr val="000000">
+                <a:alpha val="10000"/>
+              </a:srgbClr>
+            </a:outerShdw>
+          </a:effectLst>
+        </p:spPr>
+      </p:sp>
+      <p:sp>
+        <p:nvSpPr>
+          <p:cNvPr id="20" name="Shape 18"/>
+          <p:cNvSpPr/>
+          <p:nvPr/>
+        </p:nvSpPr>
+        <p:spPr>
+          <a:xfrm>
+            <a:off x="6126480" y="1051560"/>
+            <a:ext cx="54864" cy="1600200"/>
+          </a:xfrm>
+          <a:prstGeom prst="rect">
+            <a:avLst/>
+          </a:prstGeom>
+          <a:solidFill>
+            <a:srgbClr val="16A34A"/>
+          </a:solidFill>
+          <a:ln/>
+        </p:spPr>
+      </p:sp>
+      <p:sp>
+        <p:nvSpPr>
+          <p:cNvPr id="21" name="Shape 19"/>
+          <p:cNvSpPr/>
+          <p:nvPr/>
+        </p:nvSpPr>
+        <p:spPr>
+          <a:xfrm>
+            <a:off x="7955280" y="1124712"/>
+            <a:ext cx="658368" cy="228600"/>
+          </a:xfrm>
+          <a:prstGeom prst="rect">
+            <a:avLst/>
+          </a:prstGeom>
+          <a:solidFill>
+            <a:srgbClr val="DCFCE7"/>
+          </a:solidFill>
+          <a:ln/>
+        </p:spPr>
+      </p:sp>
+      <p:sp>
+        <p:nvSpPr>
+          <p:cNvPr id="22" name="Text 20"/>
+          <p:cNvSpPr/>
+          <p:nvPr/>
+        </p:nvSpPr>
+        <p:spPr>
+          <a:xfrm>
+            <a:off x="7955280" y="1124712"/>
+            <a:ext cx="658368" cy="228600"/>
+          </a:xfrm>
+          <a:prstGeom prst="rect">
+            <a:avLst/>
+          </a:prstGeom>
+          <a:noFill/>
+          <a:ln/>
+        </p:spPr>
+        <p:txBody>
+          <a:bodyPr wrap="square" lIns="0" tIns="0" rIns="0" bIns="0" rtlCol="0" anchor="ctr"/>
+          <a:lstStyle/>
+          <a:p>
+            <a:pPr algn="ctr" indent="0" marL="0">
+              <a:buNone/>
+            </a:pPr>
+            <a:r>
+              <a:rPr lang="en-US" sz="900" b="1" dirty="0">
+                <a:solidFill>
+                  <a:srgbClr val="16A34A"/>
+                </a:solidFill>
+                <a:latin typeface="Arial" pitchFamily="34" charset="0"/>
+                <a:ea typeface="Arial" pitchFamily="34" charset="-122"/>
+                <a:cs typeface="Arial" pitchFamily="34" charset="-120"/>
+              </a:rPr>
+              <a:t>20件+</a:t>
+            </a:r>
+            <a:endParaRPr lang="en-US" sz="900" dirty="0"/>
+          </a:p>
+        </p:txBody>
+      </p:sp>
+      <p:sp>
+        <p:nvSpPr>
+          <p:cNvPr id="23" name="Text 21"/>
+          <p:cNvSpPr/>
+          <p:nvPr/>
+        </p:nvSpPr>
+        <p:spPr>
+          <a:xfrm>
+            <a:off x="6263640" y="1124712"/>
+            <a:ext cx="1645920" cy="274320"/>
+          </a:xfrm>
+          <a:prstGeom prst="rect">
+            <a:avLst/>
+          </a:prstGeom>
+          <a:noFill/>
+          <a:ln/>
+        </p:spPr>
+        <p:txBody>
+          <a:bodyPr wrap="square" lIns="0" tIns="0" rIns="0" bIns="0" rtlCol="0" anchor="ctr"/>
+          <a:lstStyle/>
+          <a:p>
+            <a:pPr indent="0" marL="0">
+              <a:buNone/>
+            </a:pPr>
+            <a:r>
+              <a:rPr lang="en-US" sz="1300" b="1" dirty="0">
+                <a:solidFill>
+                  <a:srgbClr val="1A2744"/>
+                </a:solidFill>
+                <a:latin typeface="Arial" pitchFamily="34" charset="0"/>
+                <a:ea typeface="Arial" pitchFamily="34" charset="-122"/>
+                <a:cs typeface="Arial" pitchFamily="34" charset="-120"/>
+              </a:rPr>
               <a:t>立地・アクセス</a:t>
             </a:r>
             <a:endParaRPr lang="en-US" sz="1300" dirty="0"/>
@@ -10999,13 +11222,13 @@
       </p:sp>
       <p:sp>
         <p:nvSpPr>
-          <p:cNvPr id="17" name="Text 15"/>
-          <p:cNvSpPr/>
-          <p:nvPr/>
-        </p:nvSpPr>
-        <p:spPr>
-          <a:xfrm>
-            <a:off x="3429000" y="1417320"/>
+          <p:cNvPr id="24" name="Text 22"/>
+          <p:cNvSpPr/>
+          <p:nvPr/>
+        </p:nvSpPr>
+        <p:spPr>
+          <a:xfrm>
+            <a:off x="6263640" y="1417320"/>
             <a:ext cx="2377440" cy="365760"/>
           </a:xfrm>
           <a:prstGeom prst="rect">
@@ -11038,13 +11261,13 @@
       </p:sp>
       <p:sp>
         <p:nvSpPr>
-          <p:cNvPr id="18" name="Text 16"/>
-          <p:cNvSpPr/>
-          <p:nvPr/>
-        </p:nvSpPr>
-        <p:spPr>
-          <a:xfrm>
-            <a:off x="3429000" y="1828800"/>
+          <p:cNvPr id="25" name="Text 23"/>
+          <p:cNvSpPr/>
+          <p:nvPr/>
+        </p:nvSpPr>
+        <p:spPr>
+          <a:xfrm>
+            <a:off x="6263640" y="1828800"/>
             <a:ext cx="2377440" cy="640080"/>
           </a:xfrm>
           <a:prstGeom prst="rect">
@@ -11077,229 +11300,6 @@
       </p:sp>
       <p:sp>
         <p:nvSpPr>
-          <p:cNvPr id="19" name="Shape 17"/>
-          <p:cNvSpPr/>
-          <p:nvPr/>
-        </p:nvSpPr>
-        <p:spPr>
-          <a:xfrm>
-            <a:off x="6126480" y="1051560"/>
-            <a:ext cx="2651760" cy="1600200"/>
-          </a:xfrm>
-          <a:prstGeom prst="rect">
-            <a:avLst/>
-          </a:prstGeom>
-          <a:solidFill>
-            <a:srgbClr val="FFFFFF"/>
-          </a:solidFill>
-          <a:ln/>
-          <a:effectLst>
-            <a:outerShdw sx="100000" sy="100000" kx="0" ky="0" algn="bl" rotWithShape="0" blurRad="50800" dist="25400" dir="8100000">
-              <a:srgbClr val="000000">
-                <a:alpha val="10000"/>
-              </a:srgbClr>
-            </a:outerShdw>
-          </a:effectLst>
-        </p:spPr>
-      </p:sp>
-      <p:sp>
-        <p:nvSpPr>
-          <p:cNvPr id="20" name="Shape 18"/>
-          <p:cNvSpPr/>
-          <p:nvPr/>
-        </p:nvSpPr>
-        <p:spPr>
-          <a:xfrm>
-            <a:off x="6126480" y="1051560"/>
-            <a:ext cx="54864" cy="1600200"/>
-          </a:xfrm>
-          <a:prstGeom prst="rect">
-            <a:avLst/>
-          </a:prstGeom>
-          <a:solidFill>
-            <a:srgbClr val="16A34A"/>
-          </a:solidFill>
-          <a:ln/>
-        </p:spPr>
-      </p:sp>
-      <p:sp>
-        <p:nvSpPr>
-          <p:cNvPr id="21" name="Shape 19"/>
-          <p:cNvSpPr/>
-          <p:nvPr/>
-        </p:nvSpPr>
-        <p:spPr>
-          <a:xfrm>
-            <a:off x="7955280" y="1124712"/>
-            <a:ext cx="658368" cy="228600"/>
-          </a:xfrm>
-          <a:prstGeom prst="rect">
-            <a:avLst/>
-          </a:prstGeom>
-          <a:solidFill>
-            <a:srgbClr val="DCFCE7"/>
-          </a:solidFill>
-          <a:ln/>
-        </p:spPr>
-      </p:sp>
-      <p:sp>
-        <p:nvSpPr>
-          <p:cNvPr id="22" name="Text 20"/>
-          <p:cNvSpPr/>
-          <p:nvPr/>
-        </p:nvSpPr>
-        <p:spPr>
-          <a:xfrm>
-            <a:off x="7955280" y="1124712"/>
-            <a:ext cx="658368" cy="228600"/>
-          </a:xfrm>
-          <a:prstGeom prst="rect">
-            <a:avLst/>
-          </a:prstGeom>
-          <a:noFill/>
-          <a:ln/>
-        </p:spPr>
-        <p:txBody>
-          <a:bodyPr wrap="square" lIns="0" tIns="0" rIns="0" bIns="0" rtlCol="0" anchor="ctr"/>
-          <a:lstStyle/>
-          <a:p>
-            <a:pPr algn="ctr" indent="0" marL="0">
-              <a:buNone/>
-            </a:pPr>
-            <a:r>
-              <a:rPr lang="en-US" sz="900" b="1" dirty="0">
-                <a:solidFill>
-                  <a:srgbClr val="16A34A"/>
-                </a:solidFill>
-                <a:latin typeface="Arial" pitchFamily="34" charset="0"/>
-                <a:ea typeface="Arial" pitchFamily="34" charset="-122"/>
-                <a:cs typeface="Arial" pitchFamily="34" charset="-120"/>
-              </a:rPr>
-              <a:t>20件+</a:t>
-            </a:r>
-            <a:endParaRPr lang="en-US" sz="900" dirty="0"/>
-          </a:p>
-        </p:txBody>
-      </p:sp>
-      <p:sp>
-        <p:nvSpPr>
-          <p:cNvPr id="23" name="Text 21"/>
-          <p:cNvSpPr/>
-          <p:nvPr/>
-        </p:nvSpPr>
-        <p:spPr>
-          <a:xfrm>
-            <a:off x="6263640" y="1124712"/>
-            <a:ext cx="1645920" cy="274320"/>
-          </a:xfrm>
-          <a:prstGeom prst="rect">
-            <a:avLst/>
-          </a:prstGeom>
-          <a:noFill/>
-          <a:ln/>
-        </p:spPr>
-        <p:txBody>
-          <a:bodyPr wrap="square" lIns="0" tIns="0" rIns="0" bIns="0" rtlCol="0" anchor="ctr"/>
-          <a:lstStyle/>
-          <a:p>
-            <a:pPr indent="0" marL="0">
-              <a:buNone/>
-            </a:pPr>
-            <a:r>
-              <a:rPr lang="en-US" sz="1300" b="1" dirty="0">
-                <a:solidFill>
-                  <a:srgbClr val="1A2744"/>
-                </a:solidFill>
-                <a:latin typeface="Arial" pitchFamily="34" charset="0"/>
-                <a:ea typeface="Arial" pitchFamily="34" charset="-122"/>
-                <a:cs typeface="Arial" pitchFamily="34" charset="-120"/>
-              </a:rPr>
-              <a:t>快適さ・設備</a:t>
-            </a:r>
-            <a:endParaRPr lang="en-US" sz="1300" dirty="0"/>
-          </a:p>
-        </p:txBody>
-      </p:sp>
-      <p:sp>
-        <p:nvSpPr>
-          <p:cNvPr id="24" name="Text 22"/>
-          <p:cNvSpPr/>
-          <p:nvPr/>
-        </p:nvSpPr>
-        <p:spPr>
-          <a:xfrm>
-            <a:off x="6263640" y="1417320"/>
-            <a:ext cx="2377440" cy="365760"/>
-          </a:xfrm>
-          <a:prstGeom prst="rect">
-            <a:avLst/>
-          </a:prstGeom>
-          <a:noFill/>
-          <a:ln/>
-        </p:spPr>
-        <p:txBody>
-          <a:bodyPr wrap="square" lIns="0" tIns="0" rIns="0" bIns="0" rtlCol="0" anchor="ctr"/>
-          <a:lstStyle/>
-          <a:p>
-            <a:pPr indent="0" marL="0">
-              <a:buNone/>
-            </a:pPr>
-            <a:r>
-              <a:rPr lang="en-US" sz="900" dirty="0">
-                <a:solidFill>
-                  <a:srgbClr val="64748B"/>
-                </a:solidFill>
-                <a:latin typeface="Arial" pitchFamily="34" charset="0"/>
-                <a:ea typeface="Arial" pitchFamily="34" charset="-122"/>
-                <a:cs typeface="Arial" pitchFamily="34" charset="-120"/>
-              </a:rPr>
-              <a:t>com ホテルには近代的な設備、快適な浴場があり、近隣には様々なコンビニエンスストアもあります</a:t>
-            </a:r>
-            <a:endParaRPr lang="en-US" sz="900" dirty="0"/>
-          </a:p>
-        </p:txBody>
-      </p:sp>
-      <p:sp>
-        <p:nvSpPr>
-          <p:cNvPr id="25" name="Text 23"/>
-          <p:cNvSpPr/>
-          <p:nvPr/>
-        </p:nvSpPr>
-        <p:spPr>
-          <a:xfrm>
-            <a:off x="6263640" y="1828800"/>
-            <a:ext cx="2377440" cy="640080"/>
-          </a:xfrm>
-          <a:prstGeom prst="rect">
-            <a:avLst/>
-          </a:prstGeom>
-          <a:noFill/>
-          <a:ln/>
-        </p:spPr>
-        <p:txBody>
-          <a:bodyPr wrap="square" lIns="0" tIns="0" rIns="0" bIns="0" rtlCol="0" anchor="ctr"/>
-          <a:lstStyle/>
-          <a:p>
-            <a:pPr indent="0" marL="0">
-              <a:buNone/>
-            </a:pPr>
-            <a:r>
-              <a:rPr lang="en-US" sz="900" i="1" dirty="0">
-                <a:solidFill>
-                  <a:srgbClr val="3B7DD8"/>
-                </a:solidFill>
-                <a:latin typeface="Arial" pitchFamily="34" charset="0"/>
-                <a:ea typeface="Arial" pitchFamily="34" charset="-122"/>
-                <a:cs typeface="Arial" pitchFamily="34" charset="-120"/>
-              </a:rPr>
-              <a:t>「com 清潔、タオルがふわふわ、タオルの用意がたくさんある、布団が寝やすい、ドライヤーがリファ、アメニティに無料ス...」</a:t>
-            </a:r>
-            <a:endParaRPr lang="en-US" sz="900" dirty="0"/>
-          </a:p>
-        </p:txBody>
-      </p:sp>
-      <p:sp>
-        <p:nvSpPr>
           <p:cNvPr id="26" name="Shape 24"/>
           <p:cNvSpPr/>
           <p:nvPr/>
@@ -11476,7 +11476,7 @@
                 <a:ea typeface="Arial" pitchFamily="34" charset="-122"/>
                 <a:cs typeface="Arial" pitchFamily="34" charset="-120"/>
               </a:rPr>
-              <a:t>（フロントのスタッフは枕に足跡がついているのを見ても気にせず、そのまま元の場所に戻していた😂）</a:t>
+              <a:t>ホテルスタッフは皆さん素晴らしいです</a:t>
             </a:r>
             <a:endParaRPr lang="en-US" sz="900" dirty="0"/>
           </a:p>
@@ -11515,7 +11515,7 @@
                 <a:ea typeface="Arial" pitchFamily="34" charset="-122"/>
                 <a:cs typeface="Arial" pitchFamily="34" charset="-120"/>
               </a:rPr>
-              <a:t>「ホテルのスタッフはいつも親切でフレンドリーなので、全体的に満足のいく滞在となるでしょう」</a:t>
+              <a:t>「（フロントのスタッフは枕に足跡がついているのを見ても気にせず、そのまま元の場所に戻していた😂）」</a:t>
             </a:r>
             <a:endParaRPr lang="en-US" sz="900" dirty="0"/>
           </a:p>
@@ -11699,7 +11699,7 @@
                 <a:ea typeface="Arial" pitchFamily="34" charset="-122"/>
                 <a:cs typeface="Arial" pitchFamily="34" charset="-120"/>
               </a:rPr>
-              <a:t>の飲みものがおいてあり美味しかった</a:t>
+              <a:t>朝食バイキングは開放的なレストランでゆっくりと食事できるので、オススメです</a:t>
             </a:r>
             <a:endParaRPr lang="en-US" sz="900" dirty="0"/>
           </a:p>
@@ -11738,7 +11738,7 @@
                 <a:ea typeface="Arial" pitchFamily="34" charset="-122"/>
                 <a:cs typeface="Arial" pitchFamily="34" charset="-120"/>
               </a:rPr>
-              <a:t>「楽天トラベル 駅からのアクセスが良く、朝食も美味しかったです」</a:t>
+              <a:t>「の飲みものがおいてあり美味しかった」</a:t>
             </a:r>
             <a:endParaRPr lang="en-US" sz="900" dirty="0"/>
           </a:p>
@@ -12583,7 +12583,7 @@
                           <a:ea typeface="Arial" pitchFamily="34" charset="-122"/>
                           <a:cs typeface="Arial" pitchFamily="34" charset="-120"/>
                         </a:rPr>
-                        <a:t>浴室・水回り</a:t>
+                        <a:t>部屋の狭さ</a:t>
                       </a:r>
                       <a:endParaRPr lang="en-US" sz="900" dirty="0">
                         <a:latin typeface="Arial" charset="0"/>
@@ -12651,7 +12651,7 @@
                           <a:ea typeface="Arial" pitchFamily="34" charset="-122"/>
                           <a:cs typeface="Arial" pitchFamily="34" charset="-120"/>
                         </a:rPr>
-                        <a:t>例えば、枕に足跡がついていたり、バスルームに短い髪の毛が落ちていたりした</a:t>
+                        <a:t>狭い部屋だけど2段ベットでワクワクした 綺麗 特にない 特にない</a:t>
                       </a:r>
                       <a:endParaRPr lang="en-US" sz="900" dirty="0">
                         <a:latin typeface="Arial" charset="0"/>
@@ -12719,7 +12719,7 @@
                           <a:ea typeface="Arial" pitchFamily="34" charset="-122"/>
                           <a:cs typeface="Arial" pitchFamily="34" charset="-120"/>
                         </a:rPr>
-                        <a:t>8件</a:t>
+                        <a:t>9件</a:t>
                       </a:r>
                       <a:endParaRPr lang="en-US" sz="900" dirty="0">
                         <a:latin typeface="Arial" charset="0"/>
@@ -12857,7 +12857,7 @@
                           <a:ea typeface="Arial" pitchFamily="34" charset="-122"/>
                           <a:cs typeface="Arial" pitchFamily="34" charset="-120"/>
                         </a:rPr>
-                        <a:t>部屋の狭さ</a:t>
+                        <a:t>浴室・水回り</a:t>
                       </a:r>
                       <a:endParaRPr lang="en-US" sz="900" dirty="0">
                         <a:latin typeface="Arial" charset="0"/>
@@ -12925,7 +12925,7 @@
                           <a:ea typeface="Arial" pitchFamily="34" charset="-122"/>
                           <a:cs typeface="Arial" pitchFamily="34" charset="-120"/>
                         </a:rPr>
-                        <a:t>部屋は狭いけど(キャリーケースを広げたら通れない)新しいからキレイ</a:t>
+                        <a:t>大きな折りたたみ物干しがあったのはいいけど、パウダールームもシャワールームもトイレの壁もオシャレにシンプルすぎて、...</a:t>
                       </a:r>
                       <a:endParaRPr lang="en-US" sz="900" dirty="0">
                         <a:latin typeface="Arial" charset="0"/>
@@ -12993,7 +12993,7 @@
                           <a:ea typeface="Arial" pitchFamily="34" charset="-122"/>
                           <a:cs typeface="Arial" pitchFamily="34" charset="-120"/>
                         </a:rPr>
-                        <a:t>6件</a:t>
+                        <a:t>9件</a:t>
                       </a:r>
                       <a:endParaRPr lang="en-US" sz="900" dirty="0">
                         <a:latin typeface="Arial" charset="0"/>

--- a/納品レポート/ホテル別レポート/comment_yokohama_口コミ分析レポート.pptx
+++ b/納品レポート/ホテル別レポート/comment_yokohama_口コミ分析レポート.pptx
@@ -208,10 +208,10 @@
                 <c:formatCode>General</c:formatCode>
                 <c:ptCount val="6"/>
                 <c:pt idx="0">
-                  <c:v>9.5</c:v>
+                  <c:v>9.6</c:v>
                 </c:pt>
                 <c:pt idx="1">
-                  <c:v>9.43</c:v>
+                  <c:v>9.5</c:v>
                 </c:pt>
                 <c:pt idx="2">
                   <c:v>9.33</c:v>
@@ -220,7 +220,7 @@
                   <c:v>9</c:v>
                 </c:pt>
                 <c:pt idx="4">
-                  <c:v>8.85</c:v>
+                  <c:v>8.67</c:v>
                 </c:pt>
                 <c:pt idx="5">
                   <c:v>7.88</c:v>
@@ -566,10 +566,10 @@
               <c:numCache>
                 <c:ptCount val="3"/>
                 <c:pt idx="0">
-                  <c:v>62</c:v>
+                  <c:v>64</c:v>
                 </c:pt>
                 <c:pt idx="1">
-                  <c:v>8</c:v>
+                  <c:v>9</c:v>
                 </c:pt>
                 <c:pt idx="2">
                   <c:v>1</c:v>
@@ -795,7 +795,7 @@
                 <c:formatCode>General</c:formatCode>
                 <c:ptCount val="7"/>
                 <c:pt idx="0">
-                  <c:v>33</c:v>
+                  <c:v>35</c:v>
                 </c:pt>
                 <c:pt idx="1">
                   <c:v>12</c:v>
@@ -810,7 +810,7 @@
                   <c:v>2</c:v>
                 </c:pt>
                 <c:pt idx="5">
-                  <c:v>2</c:v>
+                  <c:v>3</c:v>
                 </c:pt>
                 <c:pt idx="6">
                   <c:v>1</c:v>
@@ -2764,7 +2764,7 @@
                 <a:ea typeface="Arial" pitchFamily="34" charset="-122"/>
                 <a:cs typeface="Arial" pitchFamily="34" charset="-120"/>
               </a:rPr>
-              <a:t>レビュー総数：71件（6サイト）</a:t>
+              <a:t>レビュー総数：74件（6サイト）</a:t>
             </a:r>
             <a:endParaRPr lang="en-US" sz="1000" dirty="0"/>
           </a:p>
@@ -3330,7 +3330,7 @@
                           <a:ea typeface="Arial" pitchFamily="34" charset="-122"/>
                           <a:cs typeface="Arial" pitchFamily="34" charset="-120"/>
                         </a:rPr>
-                        <a:t>8.83点</a:t>
+                        <a:t>8.81点</a:t>
                       </a:r>
                       <a:endParaRPr lang="en-US" sz="1000" dirty="0">
                         <a:latin typeface="Arial" charset="0"/>
@@ -3604,7 +3604,7 @@
                           <a:ea typeface="Arial" pitchFamily="34" charset="-122"/>
                           <a:cs typeface="Arial" pitchFamily="34" charset="-120"/>
                         </a:rPr>
-                        <a:t>87.3%</a:t>
+                        <a:t>86.5%</a:t>
                       </a:r>
                       <a:endParaRPr lang="en-US" sz="1000" dirty="0">
                         <a:latin typeface="Arial" charset="0"/>
@@ -5339,7 +5339,7 @@
                 <a:ea typeface="Arial" pitchFamily="34" charset="-122"/>
                 <a:cs typeface="Arial" pitchFamily="34" charset="-120"/>
               </a:rPr>
-              <a:t>8.83</a:t>
+              <a:t>8.81</a:t>
             </a:r>
             <a:endParaRPr lang="en-US" sz="3200" dirty="0"/>
           </a:p>
@@ -5464,7 +5464,7 @@
                 <a:ea typeface="Arial" pitchFamily="34" charset="-122"/>
                 <a:cs typeface="Arial" pitchFamily="34" charset="-120"/>
               </a:rPr>
-              <a:t>87.3%</a:t>
+              <a:t>86.5%</a:t>
             </a:r>
             <a:endParaRPr lang="en-US" sz="3200" dirty="0"/>
           </a:p>
@@ -5714,7 +5714,7 @@
                 <a:ea typeface="Arial" pitchFamily="34" charset="-122"/>
                 <a:cs typeface="Arial" pitchFamily="34" charset="-120"/>
               </a:rPr>
-              <a:t>71件</a:t>
+              <a:t>74件</a:t>
             </a:r>
             <a:endParaRPr lang="en-US" sz="3200" dirty="0"/>
           </a:p>
@@ -5862,7 +5862,7 @@
                 <a:ea typeface="Arial" pitchFamily="34" charset="-122"/>
                 <a:cs typeface="Arial" pitchFamily="34" charset="-120"/>
               </a:rPr>
-              <a:t>  狭い部屋だけど2段ベットでワクワクした 綺麗 特にない 特にない</a:t>
+              <a:t>  Google ホテルは綺麗で駅から近い</a:t>
             </a:r>
             <a:endParaRPr lang="en-US" sz="1100" dirty="0"/>
           </a:p>
@@ -5942,7 +5942,7 @@
                 <a:ea typeface="Arial" pitchFamily="34" charset="-122"/>
                 <a:cs typeface="Arial" pitchFamily="34" charset="-120"/>
               </a:rPr>
-              <a:t>  楽天トラベル 駅からのアクセスが良く、朝食も美味しかったです</a:t>
+              <a:t>  Google ホテルは綺麗で駅から近い</a:t>
             </a:r>
             <a:endParaRPr lang="en-US" sz="1100" dirty="0"/>
           </a:p>
@@ -6523,7 +6523,7 @@
                 <a:ea typeface="Arial" pitchFamily="34" charset="-122"/>
                 <a:cs typeface="Arial" pitchFamily="34" charset="-120"/>
               </a:rPr>
-              <a:t>8.83</a:t>
+              <a:t>8.81</a:t>
             </a:r>
             <a:endParaRPr lang="en-US" sz="3200" dirty="0"/>
           </a:p>
@@ -6648,7 +6648,7 @@
                 <a:ea typeface="Arial" pitchFamily="34" charset="-122"/>
                 <a:cs typeface="Arial" pitchFamily="34" charset="-120"/>
               </a:rPr>
-              <a:t>87.3%</a:t>
+              <a:t>86.5%</a:t>
             </a:r>
             <a:endParaRPr lang="en-US" sz="3200" dirty="0"/>
           </a:p>
@@ -6898,7 +6898,7 @@
                 <a:ea typeface="Arial" pitchFamily="34" charset="-122"/>
                 <a:cs typeface="Arial" pitchFamily="34" charset="-120"/>
               </a:rPr>
-              <a:t>71件</a:t>
+              <a:t>74件</a:t>
             </a:r>
             <a:endParaRPr lang="en-US" sz="3200" dirty="0"/>
           </a:p>
@@ -7319,7 +7319,7 @@
                 <a:ea typeface="Arial" pitchFamily="34" charset="-122"/>
                 <a:cs typeface="Arial" pitchFamily="34" charset="-120"/>
               </a:rPr>
-              <a:t>じゃらん(9.50)が最高スコア。</a:t>
+              <a:t>じゃらん(9.60)が最高スコア。</a:t>
             </a:r>
             <a:endParaRPr lang="en-US" sz="1100" dirty="0"/>
           </a:p>
@@ -7877,7 +7877,7 @@
                           <a:ea typeface="Arial" pitchFamily="34" charset="-122"/>
                           <a:cs typeface="Arial" pitchFamily="34" charset="-120"/>
                         </a:rPr>
-                        <a:t>4</a:t>
+                        <a:t>5</a:t>
                       </a:r>
                       <a:endParaRPr lang="en-US" sz="900" dirty="0">
                         <a:latin typeface="Arial" charset="0"/>
@@ -7945,7 +7945,7 @@
                           <a:ea typeface="Arial" pitchFamily="34" charset="-122"/>
                           <a:cs typeface="Arial" pitchFamily="34" charset="-120"/>
                         </a:rPr>
-                        <a:t>4.75</a:t>
+                        <a:t>4.8</a:t>
                       </a:r>
                       <a:endParaRPr lang="en-US" sz="900" dirty="0">
                         <a:latin typeface="Arial" charset="0"/>
@@ -8081,7 +8081,7 @@
                           <a:ea typeface="Arial" pitchFamily="34" charset="-122"/>
                           <a:cs typeface="Arial" pitchFamily="34" charset="-120"/>
                         </a:rPr>
-                        <a:t>9.5</a:t>
+                        <a:t>9.6</a:t>
                       </a:r>
                       <a:endParaRPr lang="en-US" sz="900" dirty="0">
                         <a:latin typeface="Arial" charset="0"/>
@@ -8219,7 +8219,7 @@
                           <a:ea typeface="Arial" pitchFamily="34" charset="-122"/>
                           <a:cs typeface="Arial" pitchFamily="34" charset="-120"/>
                         </a:rPr>
-                        <a:t>7</a:t>
+                        <a:t>8</a:t>
                       </a:r>
                       <a:endParaRPr lang="en-US" sz="900" dirty="0">
                         <a:latin typeface="Arial" charset="0"/>
@@ -8287,7 +8287,7 @@
                           <a:ea typeface="Arial" pitchFamily="34" charset="-122"/>
                           <a:cs typeface="Arial" pitchFamily="34" charset="-120"/>
                         </a:rPr>
-                        <a:t>4.71</a:t>
+                        <a:t>4.75</a:t>
                       </a:r>
                       <a:endParaRPr lang="en-US" sz="900" dirty="0">
                         <a:latin typeface="Arial" charset="0"/>
@@ -8423,7 +8423,7 @@
                           <a:ea typeface="Arial" pitchFamily="34" charset="-122"/>
                           <a:cs typeface="Arial" pitchFamily="34" charset="-120"/>
                         </a:rPr>
-                        <a:t>9.43</a:t>
+                        <a:t>9.5</a:t>
                       </a:r>
                       <a:endParaRPr lang="en-US" sz="900" dirty="0">
                         <a:latin typeface="Arial" charset="0"/>
@@ -9245,7 +9245,7 @@
                           <a:ea typeface="Arial" pitchFamily="34" charset="-122"/>
                           <a:cs typeface="Arial" pitchFamily="34" charset="-120"/>
                         </a:rPr>
-                        <a:t>20</a:t>
+                        <a:t>21</a:t>
                       </a:r>
                       <a:endParaRPr lang="en-US" sz="900" dirty="0">
                         <a:latin typeface="Arial" charset="0"/>
@@ -9313,7 +9313,7 @@
                           <a:ea typeface="Arial" pitchFamily="34" charset="-122"/>
                           <a:cs typeface="Arial" pitchFamily="34" charset="-120"/>
                         </a:rPr>
-                        <a:t>8.85</a:t>
+                        <a:t>8.67</a:t>
                       </a:r>
                       <a:endParaRPr lang="en-US" sz="900" dirty="0">
                         <a:latin typeface="Arial" charset="0"/>
@@ -9449,7 +9449,7 @@
                           <a:ea typeface="Arial" pitchFamily="34" charset="-122"/>
                           <a:cs typeface="Arial" pitchFamily="34" charset="-120"/>
                         </a:rPr>
-                        <a:t>8.85</a:t>
+                        <a:t>8.67</a:t>
                       </a:r>
                       <a:endParaRPr lang="en-US" sz="900" dirty="0">
                         <a:latin typeface="Arial" charset="0"/>
@@ -10199,7 +10199,7 @@
                 <a:ea typeface="Arial" pitchFamily="34" charset="-122"/>
                 <a:cs typeface="Arial" pitchFamily="34" charset="-120"/>
               </a:rPr>
-              <a:t>62件（87.3%）</a:t>
+              <a:t>64件（86.5%）</a:t>
             </a:r>
             <a:endParaRPr lang="en-US" sz="1100" dirty="0"/>
           </a:p>
@@ -10297,7 +10297,7 @@
                 <a:ea typeface="Arial" pitchFamily="34" charset="-122"/>
                 <a:cs typeface="Arial" pitchFamily="34" charset="-120"/>
               </a:rPr>
-              <a:t>8件（11.3%）</a:t>
+              <a:t>9件（12.2%）</a:t>
             </a:r>
             <a:endParaRPr lang="en-US" sz="1100" dirty="0"/>
           </a:p>
@@ -10807,7 +10807,7 @@
                 <a:ea typeface="Arial" pitchFamily="34" charset="-122"/>
                 <a:cs typeface="Arial" pitchFamily="34" charset="-120"/>
               </a:rPr>
-              <a:t>狭い部屋だけど2段ベットでワクワクした 綺麗 特にない 特にない</a:t>
+              <a:t>Google ホテルは綺麗で駅から近い</a:t>
             </a:r>
             <a:endParaRPr lang="en-US" sz="900" dirty="0"/>
           </a:p>
@@ -10822,6 +10822,229 @@
         <p:spPr>
           <a:xfrm>
             <a:off x="594360" y="1828800"/>
+            <a:ext cx="2377440" cy="640080"/>
+          </a:xfrm>
+          <a:prstGeom prst="rect">
+            <a:avLst/>
+          </a:prstGeom>
+          <a:noFill/>
+          <a:ln/>
+        </p:spPr>
+        <p:txBody>
+          <a:bodyPr wrap="square" lIns="0" tIns="0" rIns="0" bIns="0" rtlCol="0" anchor="ctr"/>
+          <a:lstStyle/>
+          <a:p>
+            <a:pPr indent="0" marL="0">
+              <a:buNone/>
+            </a:pPr>
+            <a:r>
+              <a:rPr lang="en-US" sz="900" i="1" dirty="0">
+                <a:solidFill>
+                  <a:srgbClr val="3B7DD8"/>
+                </a:solidFill>
+                <a:latin typeface="Arial" pitchFamily="34" charset="0"/>
+                <a:ea typeface="Arial" pitchFamily="34" charset="-122"/>
+                <a:cs typeface="Arial" pitchFamily="34" charset="-120"/>
+              </a:rPr>
+              <a:t>「狭い部屋だけど2段ベットでワクワクした 綺麗 特にない 特にない」</a:t>
+            </a:r>
+            <a:endParaRPr lang="en-US" sz="900" dirty="0"/>
+          </a:p>
+        </p:txBody>
+      </p:sp>
+      <p:sp>
+        <p:nvSpPr>
+          <p:cNvPr id="12" name="Shape 10"/>
+          <p:cNvSpPr/>
+          <p:nvPr/>
+        </p:nvSpPr>
+        <p:spPr>
+          <a:xfrm>
+            <a:off x="3291840" y="1051560"/>
+            <a:ext cx="2651760" cy="1600200"/>
+          </a:xfrm>
+          <a:prstGeom prst="rect">
+            <a:avLst/>
+          </a:prstGeom>
+          <a:solidFill>
+            <a:srgbClr val="FFFFFF"/>
+          </a:solidFill>
+          <a:ln/>
+          <a:effectLst>
+            <a:outerShdw sx="100000" sy="100000" kx="0" ky="0" algn="bl" rotWithShape="0" blurRad="50800" dist="25400" dir="8100000">
+              <a:srgbClr val="000000">
+                <a:alpha val="10000"/>
+              </a:srgbClr>
+            </a:outerShdw>
+          </a:effectLst>
+        </p:spPr>
+      </p:sp>
+      <p:sp>
+        <p:nvSpPr>
+          <p:cNvPr id="13" name="Shape 11"/>
+          <p:cNvSpPr/>
+          <p:nvPr/>
+        </p:nvSpPr>
+        <p:spPr>
+          <a:xfrm>
+            <a:off x="3291840" y="1051560"/>
+            <a:ext cx="54864" cy="1600200"/>
+          </a:xfrm>
+          <a:prstGeom prst="rect">
+            <a:avLst/>
+          </a:prstGeom>
+          <a:solidFill>
+            <a:srgbClr val="16A34A"/>
+          </a:solidFill>
+          <a:ln/>
+        </p:spPr>
+      </p:sp>
+      <p:sp>
+        <p:nvSpPr>
+          <p:cNvPr id="14" name="Shape 12"/>
+          <p:cNvSpPr/>
+          <p:nvPr/>
+        </p:nvSpPr>
+        <p:spPr>
+          <a:xfrm>
+            <a:off x="5120640" y="1124712"/>
+            <a:ext cx="658368" cy="228600"/>
+          </a:xfrm>
+          <a:prstGeom prst="rect">
+            <a:avLst/>
+          </a:prstGeom>
+          <a:solidFill>
+            <a:srgbClr val="DCFCE7"/>
+          </a:solidFill>
+          <a:ln/>
+        </p:spPr>
+      </p:sp>
+      <p:sp>
+        <p:nvSpPr>
+          <p:cNvPr id="15" name="Text 13"/>
+          <p:cNvSpPr/>
+          <p:nvPr/>
+        </p:nvSpPr>
+        <p:spPr>
+          <a:xfrm>
+            <a:off x="5120640" y="1124712"/>
+            <a:ext cx="658368" cy="228600"/>
+          </a:xfrm>
+          <a:prstGeom prst="rect">
+            <a:avLst/>
+          </a:prstGeom>
+          <a:noFill/>
+          <a:ln/>
+        </p:spPr>
+        <p:txBody>
+          <a:bodyPr wrap="square" lIns="0" tIns="0" rIns="0" bIns="0" rtlCol="0" anchor="ctr"/>
+          <a:lstStyle/>
+          <a:p>
+            <a:pPr algn="ctr" indent="0" marL="0">
+              <a:buNone/>
+            </a:pPr>
+            <a:r>
+              <a:rPr lang="en-US" sz="900" b="1" dirty="0">
+                <a:solidFill>
+                  <a:srgbClr val="16A34A"/>
+                </a:solidFill>
+                <a:latin typeface="Arial" pitchFamily="34" charset="0"/>
+                <a:ea typeface="Arial" pitchFamily="34" charset="-122"/>
+                <a:cs typeface="Arial" pitchFamily="34" charset="-120"/>
+              </a:rPr>
+              <a:t>20件+</a:t>
+            </a:r>
+            <a:endParaRPr lang="en-US" sz="900" dirty="0"/>
+          </a:p>
+        </p:txBody>
+      </p:sp>
+      <p:sp>
+        <p:nvSpPr>
+          <p:cNvPr id="16" name="Text 14"/>
+          <p:cNvSpPr/>
+          <p:nvPr/>
+        </p:nvSpPr>
+        <p:spPr>
+          <a:xfrm>
+            <a:off x="3429000" y="1124712"/>
+            <a:ext cx="1645920" cy="274320"/>
+          </a:xfrm>
+          <a:prstGeom prst="rect">
+            <a:avLst/>
+          </a:prstGeom>
+          <a:noFill/>
+          <a:ln/>
+        </p:spPr>
+        <p:txBody>
+          <a:bodyPr wrap="square" lIns="0" tIns="0" rIns="0" bIns="0" rtlCol="0" anchor="ctr"/>
+          <a:lstStyle/>
+          <a:p>
+            <a:pPr indent="0" marL="0">
+              <a:buNone/>
+            </a:pPr>
+            <a:r>
+              <a:rPr lang="en-US" sz="1300" b="1" dirty="0">
+                <a:solidFill>
+                  <a:srgbClr val="1A2744"/>
+                </a:solidFill>
+                <a:latin typeface="Arial" pitchFamily="34" charset="0"/>
+                <a:ea typeface="Arial" pitchFamily="34" charset="-122"/>
+                <a:cs typeface="Arial" pitchFamily="34" charset="-120"/>
+              </a:rPr>
+              <a:t>快適さ・設備</a:t>
+            </a:r>
+            <a:endParaRPr lang="en-US" sz="1300" dirty="0"/>
+          </a:p>
+        </p:txBody>
+      </p:sp>
+      <p:sp>
+        <p:nvSpPr>
+          <p:cNvPr id="17" name="Text 15"/>
+          <p:cNvSpPr/>
+          <p:nvPr/>
+        </p:nvSpPr>
+        <p:spPr>
+          <a:xfrm>
+            <a:off x="3429000" y="1417320"/>
+            <a:ext cx="2377440" cy="365760"/>
+          </a:xfrm>
+          <a:prstGeom prst="rect">
+            <a:avLst/>
+          </a:prstGeom>
+          <a:noFill/>
+          <a:ln/>
+        </p:spPr>
+        <p:txBody>
+          <a:bodyPr wrap="square" lIns="0" tIns="0" rIns="0" bIns="0" rtlCol="0" anchor="ctr"/>
+          <a:lstStyle/>
+          <a:p>
+            <a:pPr indent="0" marL="0">
+              <a:buNone/>
+            </a:pPr>
+            <a:r>
+              <a:rPr lang="en-US" sz="900" dirty="0">
+                <a:solidFill>
+                  <a:srgbClr val="64748B"/>
+                </a:solidFill>
+                <a:latin typeface="Arial" pitchFamily="34" charset="0"/>
+                <a:ea typeface="Arial" pitchFamily="34" charset="-122"/>
+                <a:cs typeface="Arial" pitchFamily="34" charset="-120"/>
+              </a:rPr>
+              <a:t>com アメニティーとスープとお茶</a:t>
+            </a:r>
+            <a:endParaRPr lang="en-US" sz="900" dirty="0"/>
+          </a:p>
+        </p:txBody>
+      </p:sp>
+      <p:sp>
+        <p:nvSpPr>
+          <p:cNvPr id="18" name="Text 16"/>
+          <p:cNvSpPr/>
+          <p:nvPr/>
+        </p:nvSpPr>
+        <p:spPr>
+          <a:xfrm>
+            <a:off x="3429000" y="1828800"/>
             <a:ext cx="2377440" cy="640080"/>
           </a:xfrm>
           <a:prstGeom prst="rect">
@@ -10854,13 +11077,13 @@
       </p:sp>
       <p:sp>
         <p:nvSpPr>
-          <p:cNvPr id="12" name="Shape 10"/>
-          <p:cNvSpPr/>
-          <p:nvPr/>
-        </p:nvSpPr>
-        <p:spPr>
-          <a:xfrm>
-            <a:off x="3291840" y="1051560"/>
+          <p:cNvPr id="19" name="Shape 17"/>
+          <p:cNvSpPr/>
+          <p:nvPr/>
+        </p:nvSpPr>
+        <p:spPr>
+          <a:xfrm>
+            <a:off x="6126480" y="1051560"/>
             <a:ext cx="2651760" cy="1600200"/>
           </a:xfrm>
           <a:prstGeom prst="rect">
@@ -10881,13 +11104,13 @@
       </p:sp>
       <p:sp>
         <p:nvSpPr>
-          <p:cNvPr id="13" name="Shape 11"/>
-          <p:cNvSpPr/>
-          <p:nvPr/>
-        </p:nvSpPr>
-        <p:spPr>
-          <a:xfrm>
-            <a:off x="3291840" y="1051560"/>
+          <p:cNvPr id="20" name="Shape 18"/>
+          <p:cNvSpPr/>
+          <p:nvPr/>
+        </p:nvSpPr>
+        <p:spPr>
+          <a:xfrm>
+            <a:off x="6126480" y="1051560"/>
             <a:ext cx="54864" cy="1600200"/>
           </a:xfrm>
           <a:prstGeom prst="rect">
@@ -10901,13 +11124,13 @@
       </p:sp>
       <p:sp>
         <p:nvSpPr>
-          <p:cNvPr id="14" name="Shape 12"/>
-          <p:cNvSpPr/>
-          <p:nvPr/>
-        </p:nvSpPr>
-        <p:spPr>
-          <a:xfrm>
-            <a:off x="5120640" y="1124712"/>
+          <p:cNvPr id="21" name="Shape 19"/>
+          <p:cNvSpPr/>
+          <p:nvPr/>
+        </p:nvSpPr>
+        <p:spPr>
+          <a:xfrm>
+            <a:off x="7955280" y="1124712"/>
             <a:ext cx="658368" cy="228600"/>
           </a:xfrm>
           <a:prstGeom prst="rect">
@@ -10921,13 +11144,13 @@
       </p:sp>
       <p:sp>
         <p:nvSpPr>
-          <p:cNvPr id="15" name="Text 13"/>
-          <p:cNvSpPr/>
-          <p:nvPr/>
-        </p:nvSpPr>
-        <p:spPr>
-          <a:xfrm>
-            <a:off x="5120640" y="1124712"/>
+          <p:cNvPr id="22" name="Text 20"/>
+          <p:cNvSpPr/>
+          <p:nvPr/>
+        </p:nvSpPr>
+        <p:spPr>
+          <a:xfrm>
+            <a:off x="7955280" y="1124712"/>
             <a:ext cx="658368" cy="228600"/>
           </a:xfrm>
           <a:prstGeom prst="rect">
@@ -10960,229 +11183,6 @@
       </p:sp>
       <p:sp>
         <p:nvSpPr>
-          <p:cNvPr id="16" name="Text 14"/>
-          <p:cNvSpPr/>
-          <p:nvPr/>
-        </p:nvSpPr>
-        <p:spPr>
-          <a:xfrm>
-            <a:off x="3429000" y="1124712"/>
-            <a:ext cx="1645920" cy="274320"/>
-          </a:xfrm>
-          <a:prstGeom prst="rect">
-            <a:avLst/>
-          </a:prstGeom>
-          <a:noFill/>
-          <a:ln/>
-        </p:spPr>
-        <p:txBody>
-          <a:bodyPr wrap="square" lIns="0" tIns="0" rIns="0" bIns="0" rtlCol="0" anchor="ctr"/>
-          <a:lstStyle/>
-          <a:p>
-            <a:pPr indent="0" marL="0">
-              <a:buNone/>
-            </a:pPr>
-            <a:r>
-              <a:rPr lang="en-US" sz="1300" b="1" dirty="0">
-                <a:solidFill>
-                  <a:srgbClr val="1A2744"/>
-                </a:solidFill>
-                <a:latin typeface="Arial" pitchFamily="34" charset="0"/>
-                <a:ea typeface="Arial" pitchFamily="34" charset="-122"/>
-                <a:cs typeface="Arial" pitchFamily="34" charset="-120"/>
-              </a:rPr>
-              <a:t>快適さ・設備</a:t>
-            </a:r>
-            <a:endParaRPr lang="en-US" sz="1300" dirty="0"/>
-          </a:p>
-        </p:txBody>
-      </p:sp>
-      <p:sp>
-        <p:nvSpPr>
-          <p:cNvPr id="17" name="Text 15"/>
-          <p:cNvSpPr/>
-          <p:nvPr/>
-        </p:nvSpPr>
-        <p:spPr>
-          <a:xfrm>
-            <a:off x="3429000" y="1417320"/>
-            <a:ext cx="2377440" cy="365760"/>
-          </a:xfrm>
-          <a:prstGeom prst="rect">
-            <a:avLst/>
-          </a:prstGeom>
-          <a:noFill/>
-          <a:ln/>
-        </p:spPr>
-        <p:txBody>
-          <a:bodyPr wrap="square" lIns="0" tIns="0" rIns="0" bIns="0" rtlCol="0" anchor="ctr"/>
-          <a:lstStyle/>
-          <a:p>
-            <a:pPr indent="0" marL="0">
-              <a:buNone/>
-            </a:pPr>
-            <a:r>
-              <a:rPr lang="en-US" sz="900" dirty="0">
-                <a:solidFill>
-                  <a:srgbClr val="64748B"/>
-                </a:solidFill>
-                <a:latin typeface="Arial" pitchFamily="34" charset="0"/>
-                <a:ea typeface="Arial" pitchFamily="34" charset="-122"/>
-                <a:cs typeface="Arial" pitchFamily="34" charset="-120"/>
-              </a:rPr>
-              <a:t>com アメニティーとスープとお茶</a:t>
-            </a:r>
-            <a:endParaRPr lang="en-US" sz="900" dirty="0"/>
-          </a:p>
-        </p:txBody>
-      </p:sp>
-      <p:sp>
-        <p:nvSpPr>
-          <p:cNvPr id="18" name="Text 16"/>
-          <p:cNvSpPr/>
-          <p:nvPr/>
-        </p:nvSpPr>
-        <p:spPr>
-          <a:xfrm>
-            <a:off x="3429000" y="1828800"/>
-            <a:ext cx="2377440" cy="640080"/>
-          </a:xfrm>
-          <a:prstGeom prst="rect">
-            <a:avLst/>
-          </a:prstGeom>
-          <a:noFill/>
-          <a:ln/>
-        </p:spPr>
-        <p:txBody>
-          <a:bodyPr wrap="square" lIns="0" tIns="0" rIns="0" bIns="0" rtlCol="0" anchor="ctr"/>
-          <a:lstStyle/>
-          <a:p>
-            <a:pPr indent="0" marL="0">
-              <a:buNone/>
-            </a:pPr>
-            <a:r>
-              <a:rPr lang="en-US" sz="900" i="1" dirty="0">
-                <a:solidFill>
-                  <a:srgbClr val="3B7DD8"/>
-                </a:solidFill>
-                <a:latin typeface="Arial" pitchFamily="34" charset="0"/>
-                <a:ea typeface="Arial" pitchFamily="34" charset="-122"/>
-                <a:cs typeface="Arial" pitchFamily="34" charset="-120"/>
-              </a:rPr>
-              <a:t>「部屋もキレイでとても快適に過ごす事が出来ました」</a:t>
-            </a:r>
-            <a:endParaRPr lang="en-US" sz="900" dirty="0"/>
-          </a:p>
-        </p:txBody>
-      </p:sp>
-      <p:sp>
-        <p:nvSpPr>
-          <p:cNvPr id="19" name="Shape 17"/>
-          <p:cNvSpPr/>
-          <p:nvPr/>
-        </p:nvSpPr>
-        <p:spPr>
-          <a:xfrm>
-            <a:off x="6126480" y="1051560"/>
-            <a:ext cx="2651760" cy="1600200"/>
-          </a:xfrm>
-          <a:prstGeom prst="rect">
-            <a:avLst/>
-          </a:prstGeom>
-          <a:solidFill>
-            <a:srgbClr val="FFFFFF"/>
-          </a:solidFill>
-          <a:ln/>
-          <a:effectLst>
-            <a:outerShdw sx="100000" sy="100000" kx="0" ky="0" algn="bl" rotWithShape="0" blurRad="50800" dist="25400" dir="8100000">
-              <a:srgbClr val="000000">
-                <a:alpha val="10000"/>
-              </a:srgbClr>
-            </a:outerShdw>
-          </a:effectLst>
-        </p:spPr>
-      </p:sp>
-      <p:sp>
-        <p:nvSpPr>
-          <p:cNvPr id="20" name="Shape 18"/>
-          <p:cNvSpPr/>
-          <p:nvPr/>
-        </p:nvSpPr>
-        <p:spPr>
-          <a:xfrm>
-            <a:off x="6126480" y="1051560"/>
-            <a:ext cx="54864" cy="1600200"/>
-          </a:xfrm>
-          <a:prstGeom prst="rect">
-            <a:avLst/>
-          </a:prstGeom>
-          <a:solidFill>
-            <a:srgbClr val="16A34A"/>
-          </a:solidFill>
-          <a:ln/>
-        </p:spPr>
-      </p:sp>
-      <p:sp>
-        <p:nvSpPr>
-          <p:cNvPr id="21" name="Shape 19"/>
-          <p:cNvSpPr/>
-          <p:nvPr/>
-        </p:nvSpPr>
-        <p:spPr>
-          <a:xfrm>
-            <a:off x="7955280" y="1124712"/>
-            <a:ext cx="658368" cy="228600"/>
-          </a:xfrm>
-          <a:prstGeom prst="rect">
-            <a:avLst/>
-          </a:prstGeom>
-          <a:solidFill>
-            <a:srgbClr val="DCFCE7"/>
-          </a:solidFill>
-          <a:ln/>
-        </p:spPr>
-      </p:sp>
-      <p:sp>
-        <p:nvSpPr>
-          <p:cNvPr id="22" name="Text 20"/>
-          <p:cNvSpPr/>
-          <p:nvPr/>
-        </p:nvSpPr>
-        <p:spPr>
-          <a:xfrm>
-            <a:off x="7955280" y="1124712"/>
-            <a:ext cx="658368" cy="228600"/>
-          </a:xfrm>
-          <a:prstGeom prst="rect">
-            <a:avLst/>
-          </a:prstGeom>
-          <a:noFill/>
-          <a:ln/>
-        </p:spPr>
-        <p:txBody>
-          <a:bodyPr wrap="square" lIns="0" tIns="0" rIns="0" bIns="0" rtlCol="0" anchor="ctr"/>
-          <a:lstStyle/>
-          <a:p>
-            <a:pPr algn="ctr" indent="0" marL="0">
-              <a:buNone/>
-            </a:pPr>
-            <a:r>
-              <a:rPr lang="en-US" sz="900" b="1" dirty="0">
-                <a:solidFill>
-                  <a:srgbClr val="16A34A"/>
-                </a:solidFill>
-                <a:latin typeface="Arial" pitchFamily="34" charset="0"/>
-                <a:ea typeface="Arial" pitchFamily="34" charset="-122"/>
-                <a:cs typeface="Arial" pitchFamily="34" charset="-120"/>
-              </a:rPr>
-              <a:t>20件+</a:t>
-            </a:r>
-            <a:endParaRPr lang="en-US" sz="900" dirty="0"/>
-          </a:p>
-        </p:txBody>
-      </p:sp>
-      <p:sp>
-        <p:nvSpPr>
           <p:cNvPr id="23" name="Text 21"/>
           <p:cNvSpPr/>
           <p:nvPr/>
@@ -11253,7 +11253,7 @@
                 <a:ea typeface="Arial" pitchFamily="34" charset="-122"/>
                 <a:cs typeface="Arial" pitchFamily="34" charset="-120"/>
               </a:rPr>
-              <a:t>楽天トラベル 駅からのアクセスが良く、朝食も美味しかったです</a:t>
+              <a:t>Google ホテルは綺麗で駅から近い</a:t>
             </a:r>
             <a:endParaRPr lang="en-US" sz="900" dirty="0"/>
           </a:p>
@@ -11292,7 +11292,7 @@
                 <a:ea typeface="Arial" pitchFamily="34" charset="-122"/>
                 <a:cs typeface="Arial" pitchFamily="34" charset="-120"/>
               </a:rPr>
-              <a:t>「Google 孫の卒業記念(祝い）と、関内駅前のベースゲート見学を兼ね、宿泊しました」</a:t>
+              <a:t>「楽天トラベル 駅からのアクセスが良く、朝食も美味しかったです」</a:t>
             </a:r>
             <a:endParaRPr lang="en-US" sz="900" dirty="0"/>
           </a:p>
@@ -11699,7 +11699,7 @@
                 <a:ea typeface="Arial" pitchFamily="34" charset="-122"/>
                 <a:cs typeface="Arial" pitchFamily="34" charset="-120"/>
               </a:rPr>
-              <a:t>朝食バイキングは開放的なレストランでゆっくりと食事できるので、オススメです</a:t>
+              <a:t>朝食ブッフェは和洋完璧で全て美味しい</a:t>
             </a:r>
             <a:endParaRPr lang="en-US" sz="900" dirty="0"/>
           </a:p>
@@ -11738,7 +11738,7 @@
                 <a:ea typeface="Arial" pitchFamily="34" charset="-122"/>
                 <a:cs typeface="Arial" pitchFamily="34" charset="-120"/>
               </a:rPr>
-              <a:t>「の飲みものがおいてあり美味しかった」</a:t>
+              <a:t>「朝食も色んな美味しいものがバイキング形式で選べて最高でした」</a:t>
             </a:r>
             <a:endParaRPr lang="en-US" sz="900" dirty="0"/>
           </a:p>

--- a/納品レポート/ホテル別レポート/comment_yokohama_口コミ分析レポート.pptx
+++ b/納品レポート/ホテル別レポート/comment_yokohama_口コミ分析レポート.pptx
@@ -180,10 +180,10 @@
                 <c:ptCount val="6"/>
                 <c:lvl>
                   <c:pt idx="0">
-                    <c:v>じゃらん</c:v>
+                    <c:v>Google</c:v>
                   </c:pt>
                   <c:pt idx="1">
-                    <c:v>Google</c:v>
+                    <c:v>じゃらん</c:v>
                   </c:pt>
                   <c:pt idx="2">
                     <c:v>楽天トラベル</c:v>
@@ -208,22 +208,22 @@
                 <c:formatCode>General</c:formatCode>
                 <c:ptCount val="6"/>
                 <c:pt idx="0">
-                  <c:v>9.6</c:v>
+                  <c:v>9.62</c:v>
                 </c:pt>
                 <c:pt idx="1">
-                  <c:v>9.5</c:v>
+                  <c:v>9.27</c:v>
                 </c:pt>
                 <c:pt idx="2">
-                  <c:v>9.38</c:v>
+                  <c:v>9.22</c:v>
                 </c:pt>
                 <c:pt idx="3">
-                  <c:v>9</c:v>
+                  <c:v>9.12</c:v>
                 </c:pt>
                 <c:pt idx="4">
-                  <c:v>8.67</c:v>
+                  <c:v>8.7</c:v>
                 </c:pt>
                 <c:pt idx="5">
-                  <c:v>7.88</c:v>
+                  <c:v>8</c:v>
                 </c:pt>
               </c:numCache>
             </c:numRef>
@@ -566,10 +566,10 @@
               <c:numCache>
                 <c:ptCount val="3"/>
                 <c:pt idx="0">
-                  <c:v>65</c:v>
+                  <c:v>111</c:v>
                 </c:pt>
                 <c:pt idx="1">
-                  <c:v>9</c:v>
+                  <c:v>20</c:v>
                 </c:pt>
                 <c:pt idx="2">
                   <c:v>1</c:v>
@@ -795,22 +795,22 @@
                 <c:formatCode>General</c:formatCode>
                 <c:ptCount val="7"/>
                 <c:pt idx="0">
-                  <c:v>36</c:v>
+                  <c:v>62</c:v>
                 </c:pt>
                 <c:pt idx="1">
-                  <c:v>12</c:v>
+                  <c:v>22</c:v>
                 </c:pt>
                 <c:pt idx="2">
-                  <c:v>17</c:v>
+                  <c:v>27</c:v>
                 </c:pt>
                 <c:pt idx="3">
-                  <c:v>4</c:v>
+                  <c:v>11</c:v>
                 </c:pt>
                 <c:pt idx="4">
-                  <c:v>2</c:v>
+                  <c:v>7</c:v>
                 </c:pt>
                 <c:pt idx="5">
-                  <c:v>3</c:v>
+                  <c:v>2</c:v>
                 </c:pt>
                 <c:pt idx="6">
                   <c:v>1</c:v>
@@ -2744,7 +2744,7 @@
                 <a:ea typeface="Arial" pitchFamily="34" charset="-122"/>
                 <a:cs typeface="Arial" pitchFamily="34" charset="-120"/>
               </a:rPr>
-              <a:t>分析対象期間：2026年3月〜4月</a:t>
+              <a:t>分析対象期間：2026年2月〜3月</a:t>
             </a:r>
             <a:endParaRPr lang="en-US" sz="1000" dirty="0"/>
           </a:p>
@@ -2764,7 +2764,7 @@
                 <a:ea typeface="Arial" pitchFamily="34" charset="-122"/>
                 <a:cs typeface="Arial" pitchFamily="34" charset="-120"/>
               </a:rPr>
-              <a:t>レビュー総数：75件（6サイト）</a:t>
+              <a:t>レビュー総数：132件（6サイト）</a:t>
             </a:r>
             <a:endParaRPr lang="en-US" sz="1000" dirty="0"/>
           </a:p>
@@ -2784,7 +2784,7 @@
                 <a:ea typeface="Arial" pitchFamily="34" charset="-122"/>
                 <a:cs typeface="Arial" pitchFamily="34" charset="-120"/>
               </a:rPr>
-              <a:t>作成日：2026年4月6日</a:t>
+              <a:t>作成日：2026年4月7日</a:t>
             </a:r>
             <a:endParaRPr lang="en-US" sz="1000" dirty="0"/>
           </a:p>
@@ -3604,7 +3604,7 @@
                           <a:ea typeface="Arial" pitchFamily="34" charset="-122"/>
                           <a:cs typeface="Arial" pitchFamily="34" charset="-120"/>
                         </a:rPr>
-                        <a:t>86.7%</a:t>
+                        <a:t>84.1%</a:t>
                       </a:r>
                       <a:endParaRPr lang="en-US" sz="1000" dirty="0">
                         <a:latin typeface="Arial" charset="0"/>
@@ -3672,7 +3672,7 @@
                           <a:ea typeface="Arial" pitchFamily="34" charset="-122"/>
                           <a:cs typeface="Arial" pitchFamily="34" charset="-120"/>
                         </a:rPr>
-                        <a:t>92%以上</a:t>
+                        <a:t>89%以上</a:t>
                       </a:r>
                       <a:endParaRPr lang="en-US" sz="1000" dirty="0">
                         <a:latin typeface="Arial" charset="0"/>
@@ -3878,7 +3878,7 @@
                           <a:ea typeface="Arial" pitchFamily="34" charset="-122"/>
                           <a:cs typeface="Arial" pitchFamily="34" charset="-120"/>
                         </a:rPr>
-                        <a:t>1.3%</a:t>
+                        <a:t>0.8%</a:t>
                       </a:r>
                       <a:endParaRPr lang="en-US" sz="1000" dirty="0">
                         <a:latin typeface="Arial" charset="0"/>
@@ -4152,7 +4152,7 @@
                           <a:ea typeface="Arial" pitchFamily="34" charset="-122"/>
                           <a:cs typeface="Arial" pitchFamily="34" charset="-120"/>
                         </a:rPr>
-                        <a:t>7.9点</a:t>
+                        <a:t>8.0点</a:t>
                       </a:r>
                       <a:endParaRPr lang="en-US" sz="1000" dirty="0">
                         <a:latin typeface="Arial" charset="0"/>
@@ -4220,7 +4220,7 @@
                           <a:ea typeface="Arial" pitchFamily="34" charset="-122"/>
                           <a:cs typeface="Arial" pitchFamily="34" charset="-120"/>
                         </a:rPr>
-                        <a:t>8.9点以上</a:t>
+                        <a:t>9.0点以上</a:t>
                       </a:r>
                       <a:endParaRPr lang="en-US" sz="1000" dirty="0">
                         <a:latin typeface="Arial" charset="0"/>
@@ -4632,7 +4632,7 @@
                           <a:ea typeface="Arial" pitchFamily="34" charset="-122"/>
                           <a:cs typeface="Arial" pitchFamily="34" charset="-120"/>
                         </a:rPr>
-                        <a:t>部屋の狭さクレーム</a:t>
+                        <a:t>浴室・水回りクレーム</a:t>
                       </a:r>
                       <a:endParaRPr lang="en-US" sz="1000" dirty="0">
                         <a:latin typeface="Arial" charset="0"/>
@@ -4700,7 +4700,7 @@
                           <a:ea typeface="Arial" pitchFamily="34" charset="-122"/>
                           <a:cs typeface="Arial" pitchFamily="34" charset="-120"/>
                         </a:rPr>
-                        <a:t>約9件/期間</a:t>
+                        <a:t>約16件/期間</a:t>
                       </a:r>
                       <a:endParaRPr lang="en-US" sz="1000" dirty="0">
                         <a:latin typeface="Arial" charset="0"/>
@@ -4768,7 +4768,7 @@
                           <a:ea typeface="Arial" pitchFamily="34" charset="-122"/>
                           <a:cs typeface="Arial" pitchFamily="34" charset="-120"/>
                         </a:rPr>
-                        <a:t>4件以下</a:t>
+                        <a:t>8件以下</a:t>
                       </a:r>
                       <a:endParaRPr lang="en-US" sz="1000" dirty="0">
                         <a:latin typeface="Arial" charset="0"/>
@@ -5464,7 +5464,7 @@
                 <a:ea typeface="Arial" pitchFamily="34" charset="-122"/>
                 <a:cs typeface="Arial" pitchFamily="34" charset="-120"/>
               </a:rPr>
-              <a:t>86.7%</a:t>
+              <a:t>84.1%</a:t>
             </a:r>
             <a:endParaRPr lang="en-US" sz="3200" dirty="0"/>
           </a:p>
@@ -5589,7 +5589,7 @@
                 <a:ea typeface="Arial" pitchFamily="34" charset="-122"/>
                 <a:cs typeface="Arial" pitchFamily="34" charset="-120"/>
               </a:rPr>
-              <a:t>1.3%</a:t>
+              <a:t>0.8%</a:t>
             </a:r>
             <a:endParaRPr lang="en-US" sz="3200" dirty="0"/>
           </a:p>
@@ -5714,7 +5714,7 @@
                 <a:ea typeface="Arial" pitchFamily="34" charset="-122"/>
                 <a:cs typeface="Arial" pitchFamily="34" charset="-120"/>
               </a:rPr>
-              <a:t>75件</a:t>
+              <a:t>132件</a:t>
             </a:r>
             <a:endParaRPr lang="en-US" sz="3200" dirty="0"/>
           </a:p>
@@ -5862,7 +5862,47 @@
                 <a:ea typeface="Arial" pitchFamily="34" charset="-122"/>
                 <a:cs typeface="Arial" pitchFamily="34" charset="-120"/>
               </a:rPr>
-              <a:t>  Google ホテルは綺麗で駅から近い</a:t>
+              <a:t>  com 清潔、タオルがふわふわ、タオルの用意がたくさんある、布団が寝やすい、ドライヤーがリファ、アメニティに無料ス...</a:t>
+            </a:r>
+            <a:endParaRPr lang="en-US" sz="1100" dirty="0"/>
+          </a:p>
+          <a:p>
+            <a:pPr indent="0" marL="0">
+              <a:spcAft>
+                <a:spcPts val="200"/>
+              </a:spcAft>
+              <a:buNone/>
+            </a:pPr>
+            <a:r>
+              <a:rPr lang="en-US" sz="1100" b="1" dirty="0">
+                <a:solidFill>
+                  <a:srgbClr val="334155"/>
+                </a:solidFill>
+                <a:latin typeface="Arial" pitchFamily="34" charset="0"/>
+                <a:ea typeface="Arial" pitchFamily="34" charset="-122"/>
+                <a:cs typeface="Arial" pitchFamily="34" charset="-120"/>
+              </a:rPr>
+              <a:t>立地・アクセス </a:t>
+            </a:r>
+            <a:endParaRPr lang="en-US" sz="1100" dirty="0"/>
+          </a:p>
+          <a:p>
+            <a:pPr indent="0" marL="0">
+              <a:spcAft>
+                <a:spcPts val="200"/>
+              </a:spcAft>
+              <a:buNone/>
+            </a:pPr>
+            <a:r>
+              <a:rPr lang="en-US" sz="900" dirty="0">
+                <a:solidFill>
+                  <a:srgbClr val="64748B"/>
+                </a:solidFill>
+                <a:latin typeface="Arial" pitchFamily="34" charset="0"/>
+                <a:ea typeface="Arial" pitchFamily="34" charset="-122"/>
+                <a:cs typeface="Arial" pitchFamily="34" charset="-120"/>
+              </a:rPr>
+              <a:t>  楽天トラベル 駅からのアクセスが良く、朝食も美味しかったです</a:t>
             </a:r>
             <a:endParaRPr lang="en-US" sz="1100" dirty="0"/>
           </a:p>
@@ -5902,10 +5942,118 @@
                 <a:ea typeface="Arial" pitchFamily="34" charset="-122"/>
                 <a:cs typeface="Arial" pitchFamily="34" charset="-120"/>
               </a:rPr>
-              <a:t>  楽天トラベル 子ども達憧れの2段ベッドに大満足</a:t>
+              <a:t>  com ホテルには近代的な設備、快適な浴場があり、近隣には様々なコンビニエンスストアもあります</a:t>
             </a:r>
             <a:endParaRPr lang="en-US" sz="1100" dirty="0"/>
           </a:p>
+        </p:txBody>
+      </p:sp>
+      <p:sp>
+        <p:nvSpPr>
+          <p:cNvPr id="25" name="Shape 23"/>
+          <p:cNvSpPr/>
+          <p:nvPr/>
+        </p:nvSpPr>
+        <p:spPr>
+          <a:xfrm>
+            <a:off x="4754880" y="2286000"/>
+            <a:ext cx="3931920" cy="2286000"/>
+          </a:xfrm>
+          <a:prstGeom prst="rect">
+            <a:avLst/>
+          </a:prstGeom>
+          <a:solidFill>
+            <a:srgbClr val="FFFFFF"/>
+          </a:solidFill>
+          <a:ln/>
+          <a:effectLst>
+            <a:outerShdw sx="100000" sy="100000" kx="0" ky="0" algn="bl" rotWithShape="0" blurRad="50800" dist="25400" dir="8100000">
+              <a:srgbClr val="000000">
+                <a:alpha val="10000"/>
+              </a:srgbClr>
+            </a:outerShdw>
+          </a:effectLst>
+        </p:spPr>
+      </p:sp>
+      <p:sp>
+        <p:nvSpPr>
+          <p:cNvPr id="26" name="Shape 24"/>
+          <p:cNvSpPr/>
+          <p:nvPr/>
+        </p:nvSpPr>
+        <p:spPr>
+          <a:xfrm>
+            <a:off x="4754880" y="2286000"/>
+            <a:ext cx="3931920" cy="45720"/>
+          </a:xfrm>
+          <a:prstGeom prst="rect">
+            <a:avLst/>
+          </a:prstGeom>
+          <a:solidFill>
+            <a:srgbClr val="DC2626"/>
+          </a:solidFill>
+          <a:ln/>
+        </p:spPr>
+      </p:sp>
+      <p:sp>
+        <p:nvSpPr>
+          <p:cNvPr id="27" name="Text 25"/>
+          <p:cNvSpPr/>
+          <p:nvPr/>
+        </p:nvSpPr>
+        <p:spPr>
+          <a:xfrm>
+            <a:off x="4937760" y="2377440"/>
+            <a:ext cx="2743200" cy="320040"/>
+          </a:xfrm>
+          <a:prstGeom prst="rect">
+            <a:avLst/>
+          </a:prstGeom>
+          <a:noFill/>
+          <a:ln/>
+        </p:spPr>
+        <p:txBody>
+          <a:bodyPr wrap="square" lIns="0" tIns="0" rIns="0" bIns="0" rtlCol="0" anchor="ctr"/>
+          <a:lstStyle/>
+          <a:p>
+            <a:pPr indent="0" marL="0">
+              <a:buNone/>
+            </a:pPr>
+            <a:r>
+              <a:rPr lang="en-US" sz="1400" b="1" dirty="0">
+                <a:solidFill>
+                  <a:srgbClr val="DC2626"/>
+                </a:solidFill>
+                <a:latin typeface="Arial" pitchFamily="34" charset="0"/>
+                <a:ea typeface="Arial" pitchFamily="34" charset="-122"/>
+                <a:cs typeface="Arial" pitchFamily="34" charset="-120"/>
+              </a:rPr>
+              <a:t>Weaknesses</a:t>
+            </a:r>
+            <a:endParaRPr lang="en-US" sz="1400" dirty="0"/>
+          </a:p>
+        </p:txBody>
+      </p:sp>
+      <p:sp>
+        <p:nvSpPr>
+          <p:cNvPr id="28" name="Text 26"/>
+          <p:cNvSpPr/>
+          <p:nvPr/>
+        </p:nvSpPr>
+        <p:spPr>
+          <a:xfrm>
+            <a:off x="4937760" y="2743200"/>
+            <a:ext cx="3474720" cy="1645920"/>
+          </a:xfrm>
+          <a:prstGeom prst="rect">
+            <a:avLst/>
+          </a:prstGeom>
+          <a:noFill/>
+          <a:ln/>
+        </p:spPr>
+        <p:txBody>
+          <a:bodyPr wrap="square" lIns="0" tIns="0" rIns="0" bIns="0" rtlCol="0" anchor="ctr"/>
+          <a:lstStyle/>
           <a:p>
             <a:pPr indent="0" marL="0">
               <a:spcAft>
@@ -5922,7 +6070,7 @@
                 <a:ea typeface="Arial" pitchFamily="34" charset="-122"/>
                 <a:cs typeface="Arial" pitchFamily="34" charset="-120"/>
               </a:rPr>
-              <a:t>立地・アクセス </a:t>
+              <a:t>浴室・水回り </a:t>
             </a:r>
             <a:endParaRPr lang="en-US" sz="1100" dirty="0"/>
           </a:p>
@@ -5942,118 +6090,10 @@
                 <a:ea typeface="Arial" pitchFamily="34" charset="-122"/>
                 <a:cs typeface="Arial" pitchFamily="34" charset="-120"/>
               </a:rPr>
-              <a:t>  Google ホテルは綺麗で駅から近い</a:t>
+              <a:t>  大浴場のシャワーが少なく、空くのを待たないといけないのが残念でした</a:t>
             </a:r>
             <a:endParaRPr lang="en-US" sz="1100" dirty="0"/>
           </a:p>
-        </p:txBody>
-      </p:sp>
-      <p:sp>
-        <p:nvSpPr>
-          <p:cNvPr id="25" name="Shape 23"/>
-          <p:cNvSpPr/>
-          <p:nvPr/>
-        </p:nvSpPr>
-        <p:spPr>
-          <a:xfrm>
-            <a:off x="4754880" y="2286000"/>
-            <a:ext cx="3931920" cy="2286000"/>
-          </a:xfrm>
-          <a:prstGeom prst="rect">
-            <a:avLst/>
-          </a:prstGeom>
-          <a:solidFill>
-            <a:srgbClr val="FFFFFF"/>
-          </a:solidFill>
-          <a:ln/>
-          <a:effectLst>
-            <a:outerShdw sx="100000" sy="100000" kx="0" ky="0" algn="bl" rotWithShape="0" blurRad="50800" dist="25400" dir="8100000">
-              <a:srgbClr val="000000">
-                <a:alpha val="10000"/>
-              </a:srgbClr>
-            </a:outerShdw>
-          </a:effectLst>
-        </p:spPr>
-      </p:sp>
-      <p:sp>
-        <p:nvSpPr>
-          <p:cNvPr id="26" name="Shape 24"/>
-          <p:cNvSpPr/>
-          <p:nvPr/>
-        </p:nvSpPr>
-        <p:spPr>
-          <a:xfrm>
-            <a:off x="4754880" y="2286000"/>
-            <a:ext cx="3931920" cy="45720"/>
-          </a:xfrm>
-          <a:prstGeom prst="rect">
-            <a:avLst/>
-          </a:prstGeom>
-          <a:solidFill>
-            <a:srgbClr val="DC2626"/>
-          </a:solidFill>
-          <a:ln/>
-        </p:spPr>
-      </p:sp>
-      <p:sp>
-        <p:nvSpPr>
-          <p:cNvPr id="27" name="Text 25"/>
-          <p:cNvSpPr/>
-          <p:nvPr/>
-        </p:nvSpPr>
-        <p:spPr>
-          <a:xfrm>
-            <a:off x="4937760" y="2377440"/>
-            <a:ext cx="2743200" cy="320040"/>
-          </a:xfrm>
-          <a:prstGeom prst="rect">
-            <a:avLst/>
-          </a:prstGeom>
-          <a:noFill/>
-          <a:ln/>
-        </p:spPr>
-        <p:txBody>
-          <a:bodyPr wrap="square" lIns="0" tIns="0" rIns="0" bIns="0" rtlCol="0" anchor="ctr"/>
-          <a:lstStyle/>
-          <a:p>
-            <a:pPr indent="0" marL="0">
-              <a:buNone/>
-            </a:pPr>
-            <a:r>
-              <a:rPr lang="en-US" sz="1400" b="1" dirty="0">
-                <a:solidFill>
-                  <a:srgbClr val="DC2626"/>
-                </a:solidFill>
-                <a:latin typeface="Arial" pitchFamily="34" charset="0"/>
-                <a:ea typeface="Arial" pitchFamily="34" charset="-122"/>
-                <a:cs typeface="Arial" pitchFamily="34" charset="-120"/>
-              </a:rPr>
-              <a:t>Weaknesses</a:t>
-            </a:r>
-            <a:endParaRPr lang="en-US" sz="1400" dirty="0"/>
-          </a:p>
-        </p:txBody>
-      </p:sp>
-      <p:sp>
-        <p:nvSpPr>
-          <p:cNvPr id="28" name="Text 26"/>
-          <p:cNvSpPr/>
-          <p:nvPr/>
-        </p:nvSpPr>
-        <p:spPr>
-          <a:xfrm>
-            <a:off x="4937760" y="2743200"/>
-            <a:ext cx="3474720" cy="1645920"/>
-          </a:xfrm>
-          <a:prstGeom prst="rect">
-            <a:avLst/>
-          </a:prstGeom>
-          <a:noFill/>
-          <a:ln/>
-        </p:spPr>
-        <p:txBody>
-          <a:bodyPr wrap="square" lIns="0" tIns="0" rIns="0" bIns="0" rtlCol="0" anchor="ctr"/>
-          <a:lstStyle/>
           <a:p>
             <a:pPr indent="0" marL="0">
               <a:spcAft>
@@ -6090,47 +6130,7 @@
                 <a:ea typeface="Arial" pitchFamily="34" charset="-122"/>
                 <a:cs typeface="Arial" pitchFamily="34" charset="-120"/>
               </a:rPr>
-              <a:t>  狭い部屋だけど2段ベットでワクワクした 綺麗 特にない 特にない</a:t>
-            </a:r>
-            <a:endParaRPr lang="en-US" sz="1100" dirty="0"/>
-          </a:p>
-          <a:p>
-            <a:pPr indent="0" marL="0">
-              <a:spcAft>
-                <a:spcPts val="200"/>
-              </a:spcAft>
-              <a:buNone/>
-            </a:pPr>
-            <a:r>
-              <a:rPr lang="en-US" sz="1100" b="1" dirty="0">
-                <a:solidFill>
-                  <a:srgbClr val="334155"/>
-                </a:solidFill>
-                <a:latin typeface="Arial" pitchFamily="34" charset="0"/>
-                <a:ea typeface="Arial" pitchFamily="34" charset="-122"/>
-                <a:cs typeface="Arial" pitchFamily="34" charset="-120"/>
-              </a:rPr>
-              <a:t>浴室・水回り </a:t>
-            </a:r>
-            <a:endParaRPr lang="en-US" sz="1100" dirty="0"/>
-          </a:p>
-          <a:p>
-            <a:pPr indent="0" marL="0">
-              <a:spcAft>
-                <a:spcPts val="200"/>
-              </a:spcAft>
-              <a:buNone/>
-            </a:pPr>
-            <a:r>
-              <a:rPr lang="en-US" sz="900" dirty="0">
-                <a:solidFill>
-                  <a:srgbClr val="64748B"/>
-                </a:solidFill>
-                <a:latin typeface="Arial" pitchFamily="34" charset="0"/>
-                <a:ea typeface="Arial" pitchFamily="34" charset="-122"/>
-                <a:cs typeface="Arial" pitchFamily="34" charset="-120"/>
-              </a:rPr>
-              <a:t>  大きな折りたたみ物干しがあったのはいいけど、パウダールームもシャワールームもトイレの壁もオシャレにシンプルすぎて、...</a:t>
+              <a:t>  部屋は狭いけど(キャリーケースを広げたら通れない)新しいからキレイ</a:t>
             </a:r>
             <a:endParaRPr lang="en-US" sz="1100" dirty="0"/>
           </a:p>
@@ -6648,7 +6648,7 @@
                 <a:ea typeface="Arial" pitchFamily="34" charset="-122"/>
                 <a:cs typeface="Arial" pitchFamily="34" charset="-120"/>
               </a:rPr>
-              <a:t>86.7%</a:t>
+              <a:t>84.1%</a:t>
             </a:r>
             <a:endParaRPr lang="en-US" sz="3200" dirty="0"/>
           </a:p>
@@ -6773,7 +6773,7 @@
                 <a:ea typeface="Arial" pitchFamily="34" charset="-122"/>
                 <a:cs typeface="Arial" pitchFamily="34" charset="-120"/>
               </a:rPr>
-              <a:t>1.3%</a:t>
+              <a:t>0.8%</a:t>
             </a:r>
             <a:endParaRPr lang="en-US" sz="3200" dirty="0"/>
           </a:p>
@@ -6898,7 +6898,7 @@
                 <a:ea typeface="Arial" pitchFamily="34" charset="-122"/>
                 <a:cs typeface="Arial" pitchFamily="34" charset="-120"/>
               </a:rPr>
-              <a:t>75件</a:t>
+              <a:t>132件</a:t>
             </a:r>
             <a:endParaRPr lang="en-US" sz="3200" dirty="0"/>
           </a:p>
@@ -7319,7 +7319,7 @@
                 <a:ea typeface="Arial" pitchFamily="34" charset="-122"/>
                 <a:cs typeface="Arial" pitchFamily="34" charset="-120"/>
               </a:rPr>
-              <a:t>じゃらん(9.60)が最高スコア。</a:t>
+              <a:t>Google(9.62)が最高スコア。</a:t>
             </a:r>
             <a:endParaRPr lang="en-US" sz="1100" dirty="0"/>
           </a:p>
@@ -7368,7 +7368,7 @@
                 <a:ea typeface="Arial" pitchFamily="34" charset="-122"/>
                 <a:cs typeface="Arial" pitchFamily="34" charset="-120"/>
               </a:rPr>
-              <a:t>Agoda(7.9)が相対的に低い。口コミ返信の強化が急務</a:t>
+              <a:t>Agoda(8.0)が相対的に低い。口コミ返信の強化が急務</a:t>
             </a:r>
             <a:endParaRPr lang="en-US" sz="1100" dirty="0"/>
           </a:p>
@@ -7809,7 +7809,7 @@
                           <a:ea typeface="Arial" pitchFamily="34" charset="-122"/>
                           <a:cs typeface="Arial" pitchFamily="34" charset="-120"/>
                         </a:rPr>
-                        <a:t>じゃらん</a:t>
+                        <a:t>Google</a:t>
                       </a:r>
                       <a:endParaRPr lang="en-US" sz="900" dirty="0">
                         <a:latin typeface="Arial" charset="0"/>
@@ -7877,7 +7877,7 @@
                           <a:ea typeface="Arial" pitchFamily="34" charset="-122"/>
                           <a:cs typeface="Arial" pitchFamily="34" charset="-120"/>
                         </a:rPr>
-                        <a:t>5</a:t>
+                        <a:t>16</a:t>
                       </a:r>
                       <a:endParaRPr lang="en-US" sz="900" dirty="0">
                         <a:latin typeface="Arial" charset="0"/>
@@ -7945,7 +7945,7 @@
                           <a:ea typeface="Arial" pitchFamily="34" charset="-122"/>
                           <a:cs typeface="Arial" pitchFamily="34" charset="-120"/>
                         </a:rPr>
-                        <a:t>4.8</a:t>
+                        <a:t>4.81</a:t>
                       </a:r>
                       <a:endParaRPr lang="en-US" sz="900" dirty="0">
                         <a:latin typeface="Arial" charset="0"/>
@@ -8081,7 +8081,7 @@
                           <a:ea typeface="Arial" pitchFamily="34" charset="-122"/>
                           <a:cs typeface="Arial" pitchFamily="34" charset="-120"/>
                         </a:rPr>
-                        <a:t>9.6</a:t>
+                        <a:t>9.62</a:t>
                       </a:r>
                       <a:endParaRPr lang="en-US" sz="900" dirty="0">
                         <a:latin typeface="Arial" charset="0"/>
@@ -8151,7 +8151,7 @@
                           <a:ea typeface="Arial" pitchFamily="34" charset="-122"/>
                           <a:cs typeface="Arial" pitchFamily="34" charset="-120"/>
                         </a:rPr>
-                        <a:t>Google</a:t>
+                        <a:t>じゃらん</a:t>
                       </a:r>
                       <a:endParaRPr lang="en-US" sz="900" dirty="0">
                         <a:latin typeface="Arial" charset="0"/>
@@ -8219,7 +8219,7 @@
                           <a:ea typeface="Arial" pitchFamily="34" charset="-122"/>
                           <a:cs typeface="Arial" pitchFamily="34" charset="-120"/>
                         </a:rPr>
-                        <a:t>8</a:t>
+                        <a:t>11</a:t>
                       </a:r>
                       <a:endParaRPr lang="en-US" sz="900" dirty="0">
                         <a:latin typeface="Arial" charset="0"/>
@@ -8287,7 +8287,7 @@
                           <a:ea typeface="Arial" pitchFamily="34" charset="-122"/>
                           <a:cs typeface="Arial" pitchFamily="34" charset="-120"/>
                         </a:rPr>
-                        <a:t>4.75</a:t>
+                        <a:t>4.64</a:t>
                       </a:r>
                       <a:endParaRPr lang="en-US" sz="900" dirty="0">
                         <a:latin typeface="Arial" charset="0"/>
@@ -8423,7 +8423,7 @@
                           <a:ea typeface="Arial" pitchFamily="34" charset="-122"/>
                           <a:cs typeface="Arial" pitchFamily="34" charset="-120"/>
                         </a:rPr>
-                        <a:t>9.5</a:t>
+                        <a:t>9.27</a:t>
                       </a:r>
                       <a:endParaRPr lang="en-US" sz="900" dirty="0">
                         <a:latin typeface="Arial" charset="0"/>
@@ -8561,7 +8561,7 @@
                           <a:ea typeface="Arial" pitchFamily="34" charset="-122"/>
                           <a:cs typeface="Arial" pitchFamily="34" charset="-120"/>
                         </a:rPr>
-                        <a:t>13</a:t>
+                        <a:t>18</a:t>
                       </a:r>
                       <a:endParaRPr lang="en-US" sz="900" dirty="0">
                         <a:latin typeface="Arial" charset="0"/>
@@ -8629,7 +8629,7 @@
                           <a:ea typeface="Arial" pitchFamily="34" charset="-122"/>
                           <a:cs typeface="Arial" pitchFamily="34" charset="-120"/>
                         </a:rPr>
-                        <a:t>4.69</a:t>
+                        <a:t>4.61</a:t>
                       </a:r>
                       <a:endParaRPr lang="en-US" sz="900" dirty="0">
                         <a:latin typeface="Arial" charset="0"/>
@@ -8765,7 +8765,7 @@
                           <a:ea typeface="Arial" pitchFamily="34" charset="-122"/>
                           <a:cs typeface="Arial" pitchFamily="34" charset="-120"/>
                         </a:rPr>
-                        <a:t>9.38</a:t>
+                        <a:t>9.22</a:t>
                       </a:r>
                       <a:endParaRPr lang="en-US" sz="900" dirty="0">
                         <a:latin typeface="Arial" charset="0"/>
@@ -8903,7 +8903,7 @@
                           <a:ea typeface="Arial" pitchFamily="34" charset="-122"/>
                           <a:cs typeface="Arial" pitchFamily="34" charset="-120"/>
                         </a:rPr>
-                        <a:t>12</a:t>
+                        <a:t>24</a:t>
                       </a:r>
                       <a:endParaRPr lang="en-US" sz="900" dirty="0">
                         <a:latin typeface="Arial" charset="0"/>
@@ -8971,7 +8971,7 @@
                           <a:ea typeface="Arial" pitchFamily="34" charset="-122"/>
                           <a:cs typeface="Arial" pitchFamily="34" charset="-120"/>
                         </a:rPr>
-                        <a:t>9</a:t>
+                        <a:t>9.12</a:t>
                       </a:r>
                       <a:endParaRPr lang="en-US" sz="900" dirty="0">
                         <a:latin typeface="Arial" charset="0"/>
@@ -9107,7 +9107,7 @@
                           <a:ea typeface="Arial" pitchFamily="34" charset="-122"/>
                           <a:cs typeface="Arial" pitchFamily="34" charset="-120"/>
                         </a:rPr>
-                        <a:t>9</a:t>
+                        <a:t>9.12</a:t>
                       </a:r>
                       <a:endParaRPr lang="en-US" sz="900" dirty="0">
                         <a:latin typeface="Arial" charset="0"/>
@@ -9245,7 +9245,7 @@
                           <a:ea typeface="Arial" pitchFamily="34" charset="-122"/>
                           <a:cs typeface="Arial" pitchFamily="34" charset="-120"/>
                         </a:rPr>
-                        <a:t>21</a:t>
+                        <a:t>30</a:t>
                       </a:r>
                       <a:endParaRPr lang="en-US" sz="900" dirty="0">
                         <a:latin typeface="Arial" charset="0"/>
@@ -9313,7 +9313,7 @@
                           <a:ea typeface="Arial" pitchFamily="34" charset="-122"/>
                           <a:cs typeface="Arial" pitchFamily="34" charset="-120"/>
                         </a:rPr>
-                        <a:t>8.67</a:t>
+                        <a:t>8.7</a:t>
                       </a:r>
                       <a:endParaRPr lang="en-US" sz="900" dirty="0">
                         <a:latin typeface="Arial" charset="0"/>
@@ -9449,7 +9449,7 @@
                           <a:ea typeface="Arial" pitchFamily="34" charset="-122"/>
                           <a:cs typeface="Arial" pitchFamily="34" charset="-120"/>
                         </a:rPr>
-                        <a:t>8.67</a:t>
+                        <a:t>8.7</a:t>
                       </a:r>
                       <a:endParaRPr lang="en-US" sz="900" dirty="0">
                         <a:latin typeface="Arial" charset="0"/>
@@ -9587,7 +9587,7 @@
                           <a:ea typeface="Arial" pitchFamily="34" charset="-122"/>
                           <a:cs typeface="Arial" pitchFamily="34" charset="-120"/>
                         </a:rPr>
-                        <a:t>16</a:t>
+                        <a:t>33</a:t>
                       </a:r>
                       <a:endParaRPr lang="en-US" sz="900" dirty="0">
                         <a:latin typeface="Arial" charset="0"/>
@@ -9655,7 +9655,7 @@
                           <a:ea typeface="Arial" pitchFamily="34" charset="-122"/>
                           <a:cs typeface="Arial" pitchFamily="34" charset="-120"/>
                         </a:rPr>
-                        <a:t>7.88</a:t>
+                        <a:t>8</a:t>
                       </a:r>
                       <a:endParaRPr lang="en-US" sz="900" dirty="0">
                         <a:latin typeface="Arial" charset="0"/>
@@ -9791,7 +9791,7 @@
                           <a:ea typeface="Arial" pitchFamily="34" charset="-122"/>
                           <a:cs typeface="Arial" pitchFamily="34" charset="-120"/>
                         </a:rPr>
-                        <a:t>7.88</a:t>
+                        <a:t>8</a:t>
                       </a:r>
                       <a:endParaRPr lang="en-US" sz="900" dirty="0">
                         <a:latin typeface="Arial" charset="0"/>
@@ -10199,7 +10199,7 @@
                 <a:ea typeface="Arial" pitchFamily="34" charset="-122"/>
                 <a:cs typeface="Arial" pitchFamily="34" charset="-120"/>
               </a:rPr>
-              <a:t>65件（86.7%）</a:t>
+              <a:t>111件（84.1%）</a:t>
             </a:r>
             <a:endParaRPr lang="en-US" sz="1100" dirty="0"/>
           </a:p>
@@ -10297,7 +10297,7 @@
                 <a:ea typeface="Arial" pitchFamily="34" charset="-122"/>
                 <a:cs typeface="Arial" pitchFamily="34" charset="-120"/>
               </a:rPr>
-              <a:t>9件（12.0%）</a:t>
+              <a:t>20件（15.2%）</a:t>
             </a:r>
             <a:endParaRPr lang="en-US" sz="1100" dirty="0"/>
           </a:p>
@@ -10395,7 +10395,7 @@
                 <a:ea typeface="Arial" pitchFamily="34" charset="-122"/>
                 <a:cs typeface="Arial" pitchFamily="34" charset="-120"/>
               </a:rPr>
-              <a:t>1件（1.3%）</a:t>
+              <a:t>1件（0.8%）</a:t>
             </a:r>
             <a:endParaRPr lang="en-US" sz="1100" dirty="0"/>
           </a:p>
@@ -10729,7 +10729,7 @@
                 <a:ea typeface="Arial" pitchFamily="34" charset="-122"/>
                 <a:cs typeface="Arial" pitchFamily="34" charset="-120"/>
               </a:rPr>
-              <a:t>20件+</a:t>
+              <a:t>50件+</a:t>
             </a:r>
             <a:endParaRPr lang="en-US" sz="900" dirty="0"/>
           </a:p>
@@ -10807,7 +10807,7 @@
                 <a:ea typeface="Arial" pitchFamily="34" charset="-122"/>
                 <a:cs typeface="Arial" pitchFamily="34" charset="-120"/>
               </a:rPr>
-              <a:t>Google ホテルは綺麗で駅から近い</a:t>
+              <a:t>com 清潔、タオルがふわふわ、タオルの用意がたくさんある、布団が寝やすい、ドライヤーがリファ、アメニティに無料ス...</a:t>
             </a:r>
             <a:endParaRPr lang="en-US" sz="900" dirty="0"/>
           </a:p>
@@ -10846,7 +10846,7 @@
                 <a:ea typeface="Arial" pitchFamily="34" charset="-122"/>
                 <a:cs typeface="Arial" pitchFamily="34" charset="-120"/>
               </a:rPr>
-              <a:t>「とても綺麗なホテルでした」</a:t>
+              <a:t>「Google 綺麗なホテルで部屋も雰囲気が良かった」</a:t>
             </a:r>
             <a:endParaRPr lang="en-US" sz="900" dirty="0"/>
           </a:p>
@@ -10928,6 +10928,229 @@
         <p:spPr>
           <a:xfrm>
             <a:off x="5120640" y="1124712"/>
+            <a:ext cx="658368" cy="228600"/>
+          </a:xfrm>
+          <a:prstGeom prst="rect">
+            <a:avLst/>
+          </a:prstGeom>
+          <a:noFill/>
+          <a:ln/>
+        </p:spPr>
+        <p:txBody>
+          <a:bodyPr wrap="square" lIns="0" tIns="0" rIns="0" bIns="0" rtlCol="0" anchor="ctr"/>
+          <a:lstStyle/>
+          <a:p>
+            <a:pPr algn="ctr" indent="0" marL="0">
+              <a:buNone/>
+            </a:pPr>
+            <a:r>
+              <a:rPr lang="en-US" sz="900" b="1" dirty="0">
+                <a:solidFill>
+                  <a:srgbClr val="16A34A"/>
+                </a:solidFill>
+                <a:latin typeface="Arial" pitchFamily="34" charset="0"/>
+                <a:ea typeface="Arial" pitchFamily="34" charset="-122"/>
+                <a:cs typeface="Arial" pitchFamily="34" charset="-120"/>
+              </a:rPr>
+              <a:t>50件+</a:t>
+            </a:r>
+            <a:endParaRPr lang="en-US" sz="900" dirty="0"/>
+          </a:p>
+        </p:txBody>
+      </p:sp>
+      <p:sp>
+        <p:nvSpPr>
+          <p:cNvPr id="16" name="Text 14"/>
+          <p:cNvSpPr/>
+          <p:nvPr/>
+        </p:nvSpPr>
+        <p:spPr>
+          <a:xfrm>
+            <a:off x="3429000" y="1124712"/>
+            <a:ext cx="1645920" cy="274320"/>
+          </a:xfrm>
+          <a:prstGeom prst="rect">
+            <a:avLst/>
+          </a:prstGeom>
+          <a:noFill/>
+          <a:ln/>
+        </p:spPr>
+        <p:txBody>
+          <a:bodyPr wrap="square" lIns="0" tIns="0" rIns="0" bIns="0" rtlCol="0" anchor="ctr"/>
+          <a:lstStyle/>
+          <a:p>
+            <a:pPr indent="0" marL="0">
+              <a:buNone/>
+            </a:pPr>
+            <a:r>
+              <a:rPr lang="en-US" sz="1300" b="1" dirty="0">
+                <a:solidFill>
+                  <a:srgbClr val="1A2744"/>
+                </a:solidFill>
+                <a:latin typeface="Arial" pitchFamily="34" charset="0"/>
+                <a:ea typeface="Arial" pitchFamily="34" charset="-122"/>
+                <a:cs typeface="Arial" pitchFamily="34" charset="-120"/>
+              </a:rPr>
+              <a:t>立地・アクセス</a:t>
+            </a:r>
+            <a:endParaRPr lang="en-US" sz="1300" dirty="0"/>
+          </a:p>
+        </p:txBody>
+      </p:sp>
+      <p:sp>
+        <p:nvSpPr>
+          <p:cNvPr id="17" name="Text 15"/>
+          <p:cNvSpPr/>
+          <p:nvPr/>
+        </p:nvSpPr>
+        <p:spPr>
+          <a:xfrm>
+            <a:off x="3429000" y="1417320"/>
+            <a:ext cx="2377440" cy="365760"/>
+          </a:xfrm>
+          <a:prstGeom prst="rect">
+            <a:avLst/>
+          </a:prstGeom>
+          <a:noFill/>
+          <a:ln/>
+        </p:spPr>
+        <p:txBody>
+          <a:bodyPr wrap="square" lIns="0" tIns="0" rIns="0" bIns="0" rtlCol="0" anchor="ctr"/>
+          <a:lstStyle/>
+          <a:p>
+            <a:pPr indent="0" marL="0">
+              <a:buNone/>
+            </a:pPr>
+            <a:r>
+              <a:rPr lang="en-US" sz="900" dirty="0">
+                <a:solidFill>
+                  <a:srgbClr val="64748B"/>
+                </a:solidFill>
+                <a:latin typeface="Arial" pitchFamily="34" charset="0"/>
+                <a:ea typeface="Arial" pitchFamily="34" charset="-122"/>
+                <a:cs typeface="Arial" pitchFamily="34" charset="-120"/>
+              </a:rPr>
+              <a:t>楽天トラベル 駅からのアクセスが良く、朝食も美味しかったです</a:t>
+            </a:r>
+            <a:endParaRPr lang="en-US" sz="900" dirty="0"/>
+          </a:p>
+        </p:txBody>
+      </p:sp>
+      <p:sp>
+        <p:nvSpPr>
+          <p:cNvPr id="18" name="Text 16"/>
+          <p:cNvSpPr/>
+          <p:nvPr/>
+        </p:nvSpPr>
+        <p:spPr>
+          <a:xfrm>
+            <a:off x="3429000" y="1828800"/>
+            <a:ext cx="2377440" cy="640080"/>
+          </a:xfrm>
+          <a:prstGeom prst="rect">
+            <a:avLst/>
+          </a:prstGeom>
+          <a:noFill/>
+          <a:ln/>
+        </p:spPr>
+        <p:txBody>
+          <a:bodyPr wrap="square" lIns="0" tIns="0" rIns="0" bIns="0" rtlCol="0" anchor="ctr"/>
+          <a:lstStyle/>
+          <a:p>
+            <a:pPr indent="0" marL="0">
+              <a:buNone/>
+            </a:pPr>
+            <a:r>
+              <a:rPr lang="en-US" sz="900" i="1" dirty="0">
+                <a:solidFill>
+                  <a:srgbClr val="3B7DD8"/>
+                </a:solidFill>
+                <a:latin typeface="Arial" pitchFamily="34" charset="0"/>
+                <a:ea typeface="Arial" pitchFamily="34" charset="-122"/>
+                <a:cs typeface="Arial" pitchFamily="34" charset="-120"/>
+              </a:rPr>
+              <a:t>「Google 孫の卒業記念(祝い）と、関内駅前のベースゲート見学を兼ね、宿泊しました」</a:t>
+            </a:r>
+            <a:endParaRPr lang="en-US" sz="900" dirty="0"/>
+          </a:p>
+        </p:txBody>
+      </p:sp>
+      <p:sp>
+        <p:nvSpPr>
+          <p:cNvPr id="19" name="Shape 17"/>
+          <p:cNvSpPr/>
+          <p:nvPr/>
+        </p:nvSpPr>
+        <p:spPr>
+          <a:xfrm>
+            <a:off x="6126480" y="1051560"/>
+            <a:ext cx="2651760" cy="1600200"/>
+          </a:xfrm>
+          <a:prstGeom prst="rect">
+            <a:avLst/>
+          </a:prstGeom>
+          <a:solidFill>
+            <a:srgbClr val="FFFFFF"/>
+          </a:solidFill>
+          <a:ln/>
+          <a:effectLst>
+            <a:outerShdw sx="100000" sy="100000" kx="0" ky="0" algn="bl" rotWithShape="0" blurRad="50800" dist="25400" dir="8100000">
+              <a:srgbClr val="000000">
+                <a:alpha val="10000"/>
+              </a:srgbClr>
+            </a:outerShdw>
+          </a:effectLst>
+        </p:spPr>
+      </p:sp>
+      <p:sp>
+        <p:nvSpPr>
+          <p:cNvPr id="20" name="Shape 18"/>
+          <p:cNvSpPr/>
+          <p:nvPr/>
+        </p:nvSpPr>
+        <p:spPr>
+          <a:xfrm>
+            <a:off x="6126480" y="1051560"/>
+            <a:ext cx="54864" cy="1600200"/>
+          </a:xfrm>
+          <a:prstGeom prst="rect">
+            <a:avLst/>
+          </a:prstGeom>
+          <a:solidFill>
+            <a:srgbClr val="16A34A"/>
+          </a:solidFill>
+          <a:ln/>
+        </p:spPr>
+      </p:sp>
+      <p:sp>
+        <p:nvSpPr>
+          <p:cNvPr id="21" name="Shape 19"/>
+          <p:cNvSpPr/>
+          <p:nvPr/>
+        </p:nvSpPr>
+        <p:spPr>
+          <a:xfrm>
+            <a:off x="7955280" y="1124712"/>
+            <a:ext cx="658368" cy="228600"/>
+          </a:xfrm>
+          <a:prstGeom prst="rect">
+            <a:avLst/>
+          </a:prstGeom>
+          <a:solidFill>
+            <a:srgbClr val="DCFCE7"/>
+          </a:solidFill>
+          <a:ln/>
+        </p:spPr>
+      </p:sp>
+      <p:sp>
+        <p:nvSpPr>
+          <p:cNvPr id="22" name="Text 20"/>
+          <p:cNvSpPr/>
+          <p:nvPr/>
+        </p:nvSpPr>
+        <p:spPr>
+          <a:xfrm>
+            <a:off x="7955280" y="1124712"/>
             <a:ext cx="658368" cy="228600"/>
           </a:xfrm>
           <a:prstGeom prst="rect">
@@ -10960,13 +11183,13 @@
       </p:sp>
       <p:sp>
         <p:nvSpPr>
-          <p:cNvPr id="16" name="Text 14"/>
-          <p:cNvSpPr/>
-          <p:nvPr/>
-        </p:nvSpPr>
-        <p:spPr>
-          <a:xfrm>
-            <a:off x="3429000" y="1124712"/>
+          <p:cNvPr id="23" name="Text 21"/>
+          <p:cNvSpPr/>
+          <p:nvPr/>
+        </p:nvSpPr>
+        <p:spPr>
+          <a:xfrm>
+            <a:off x="6263640" y="1124712"/>
             <a:ext cx="1645920" cy="274320"/>
           </a:xfrm>
           <a:prstGeom prst="rect">
@@ -10999,13 +11222,13 @@
       </p:sp>
       <p:sp>
         <p:nvSpPr>
-          <p:cNvPr id="17" name="Text 15"/>
-          <p:cNvSpPr/>
-          <p:nvPr/>
-        </p:nvSpPr>
-        <p:spPr>
-          <a:xfrm>
-            <a:off x="3429000" y="1417320"/>
+          <p:cNvPr id="24" name="Text 22"/>
+          <p:cNvSpPr/>
+          <p:nvPr/>
+        </p:nvSpPr>
+        <p:spPr>
+          <a:xfrm>
+            <a:off x="6263640" y="1417320"/>
             <a:ext cx="2377440" cy="365760"/>
           </a:xfrm>
           <a:prstGeom prst="rect">
@@ -11030,7 +11253,7 @@
                 <a:ea typeface="Arial" pitchFamily="34" charset="-122"/>
                 <a:cs typeface="Arial" pitchFamily="34" charset="-120"/>
               </a:rPr>
-              <a:t>楽天トラベル 子ども達憧れの2段ベッドに大満足</a:t>
+              <a:t>com ホテルには近代的な設備、快適な浴場があり、近隣には様々なコンビニエンスストアもあります</a:t>
             </a:r>
             <a:endParaRPr lang="en-US" sz="900" dirty="0"/>
           </a:p>
@@ -11038,13 +11261,13 @@
       </p:sp>
       <p:sp>
         <p:nvSpPr>
-          <p:cNvPr id="18" name="Text 16"/>
-          <p:cNvSpPr/>
-          <p:nvPr/>
-        </p:nvSpPr>
-        <p:spPr>
-          <a:xfrm>
-            <a:off x="3429000" y="1828800"/>
+          <p:cNvPr id="25" name="Text 23"/>
+          <p:cNvSpPr/>
+          <p:nvPr/>
+        </p:nvSpPr>
+        <p:spPr>
+          <a:xfrm>
+            <a:off x="6263640" y="1828800"/>
             <a:ext cx="2377440" cy="640080"/>
           </a:xfrm>
           <a:prstGeom prst="rect">
@@ -11069,7 +11292,7 @@
                 <a:ea typeface="Arial" pitchFamily="34" charset="-122"/>
                 <a:cs typeface="Arial" pitchFamily="34" charset="-120"/>
               </a:rPr>
-              <a:t>「com アメニティーとスープとお茶」</a:t>
+              <a:t>「com 清潔、タオルがふわふわ、タオルの用意がたくさんある、布団が寝やすい、ドライヤーがリファ、アメニティに無料ス...」</a:t>
             </a:r>
             <a:endParaRPr lang="en-US" sz="900" dirty="0"/>
           </a:p>
@@ -11077,13 +11300,13 @@
       </p:sp>
       <p:sp>
         <p:nvSpPr>
-          <p:cNvPr id="19" name="Shape 17"/>
-          <p:cNvSpPr/>
-          <p:nvPr/>
-        </p:nvSpPr>
-        <p:spPr>
-          <a:xfrm>
-            <a:off x="6126480" y="1051560"/>
+          <p:cNvPr id="26" name="Shape 24"/>
+          <p:cNvSpPr/>
+          <p:nvPr/>
+        </p:nvSpPr>
+        <p:spPr>
+          <a:xfrm>
+            <a:off x="457200" y="2880360"/>
             <a:ext cx="2651760" cy="1600200"/>
           </a:xfrm>
           <a:prstGeom prst="rect">
@@ -11104,13 +11327,13 @@
       </p:sp>
       <p:sp>
         <p:nvSpPr>
-          <p:cNvPr id="20" name="Shape 18"/>
-          <p:cNvSpPr/>
-          <p:nvPr/>
-        </p:nvSpPr>
-        <p:spPr>
-          <a:xfrm>
-            <a:off x="6126480" y="1051560"/>
+          <p:cNvPr id="27" name="Shape 25"/>
+          <p:cNvSpPr/>
+          <p:nvPr/>
+        </p:nvSpPr>
+        <p:spPr>
+          <a:xfrm>
+            <a:off x="457200" y="2880360"/>
             <a:ext cx="54864" cy="1600200"/>
           </a:xfrm>
           <a:prstGeom prst="rect">
@@ -11124,13 +11347,13 @@
       </p:sp>
       <p:sp>
         <p:nvSpPr>
-          <p:cNvPr id="21" name="Shape 19"/>
-          <p:cNvSpPr/>
-          <p:nvPr/>
-        </p:nvSpPr>
-        <p:spPr>
-          <a:xfrm>
-            <a:off x="7955280" y="1124712"/>
+          <p:cNvPr id="28" name="Shape 26"/>
+          <p:cNvSpPr/>
+          <p:nvPr/>
+        </p:nvSpPr>
+        <p:spPr>
+          <a:xfrm>
+            <a:off x="2286000" y="2953512"/>
             <a:ext cx="658368" cy="228600"/>
           </a:xfrm>
           <a:prstGeom prst="rect">
@@ -11144,13 +11367,13 @@
       </p:sp>
       <p:sp>
         <p:nvSpPr>
-          <p:cNvPr id="22" name="Text 20"/>
-          <p:cNvSpPr/>
-          <p:nvPr/>
-        </p:nvSpPr>
-        <p:spPr>
-          <a:xfrm>
-            <a:off x="7955280" y="1124712"/>
+          <p:cNvPr id="29" name="Text 27"/>
+          <p:cNvSpPr/>
+          <p:nvPr/>
+        </p:nvSpPr>
+        <p:spPr>
+          <a:xfrm>
+            <a:off x="2286000" y="2953512"/>
             <a:ext cx="658368" cy="228600"/>
           </a:xfrm>
           <a:prstGeom prst="rect">
@@ -11183,13 +11406,13 @@
       </p:sp>
       <p:sp>
         <p:nvSpPr>
-          <p:cNvPr id="23" name="Text 21"/>
-          <p:cNvSpPr/>
-          <p:nvPr/>
-        </p:nvSpPr>
-        <p:spPr>
-          <a:xfrm>
-            <a:off x="6263640" y="1124712"/>
+          <p:cNvPr id="30" name="Text 28"/>
+          <p:cNvSpPr/>
+          <p:nvPr/>
+        </p:nvSpPr>
+        <p:spPr>
+          <a:xfrm>
+            <a:off x="594360" y="2953512"/>
             <a:ext cx="1645920" cy="274320"/>
           </a:xfrm>
           <a:prstGeom prst="rect">
@@ -11214,7 +11437,7 @@
                 <a:ea typeface="Arial" pitchFamily="34" charset="-122"/>
                 <a:cs typeface="Arial" pitchFamily="34" charset="-120"/>
               </a:rPr>
-              <a:t>立地・アクセス</a:t>
+              <a:t>スタッフの対応</a:t>
             </a:r>
             <a:endParaRPr lang="en-US" sz="1300" dirty="0"/>
           </a:p>
@@ -11222,13 +11445,13 @@
       </p:sp>
       <p:sp>
         <p:nvSpPr>
-          <p:cNvPr id="24" name="Text 22"/>
-          <p:cNvSpPr/>
-          <p:nvPr/>
-        </p:nvSpPr>
-        <p:spPr>
-          <a:xfrm>
-            <a:off x="6263640" y="1417320"/>
+          <p:cNvPr id="31" name="Text 29"/>
+          <p:cNvSpPr/>
+          <p:nvPr/>
+        </p:nvSpPr>
+        <p:spPr>
+          <a:xfrm>
+            <a:off x="594360" y="3246120"/>
             <a:ext cx="2377440" cy="365760"/>
           </a:xfrm>
           <a:prstGeom prst="rect">
@@ -11253,7 +11476,7 @@
                 <a:ea typeface="Arial" pitchFamily="34" charset="-122"/>
                 <a:cs typeface="Arial" pitchFamily="34" charset="-120"/>
               </a:rPr>
-              <a:t>Google ホテルは綺麗で駅から近い</a:t>
+              <a:t>ホテルのスタッフはいつも親切でフレンドリーなので、全体的に満足のいく滞在となるでしょう</a:t>
             </a:r>
             <a:endParaRPr lang="en-US" sz="900" dirty="0"/>
           </a:p>
@@ -11261,13 +11484,236 @@
       </p:sp>
       <p:sp>
         <p:nvSpPr>
-          <p:cNvPr id="25" name="Text 23"/>
-          <p:cNvSpPr/>
-          <p:nvPr/>
-        </p:nvSpPr>
-        <p:spPr>
-          <a:xfrm>
-            <a:off x="6263640" y="1828800"/>
+          <p:cNvPr id="32" name="Text 30"/>
+          <p:cNvSpPr/>
+          <p:nvPr/>
+        </p:nvSpPr>
+        <p:spPr>
+          <a:xfrm>
+            <a:off x="594360" y="3657600"/>
+            <a:ext cx="2377440" cy="640080"/>
+          </a:xfrm>
+          <a:prstGeom prst="rect">
+            <a:avLst/>
+          </a:prstGeom>
+          <a:noFill/>
+          <a:ln/>
+        </p:spPr>
+        <p:txBody>
+          <a:bodyPr wrap="square" lIns="0" tIns="0" rIns="0" bIns="0" rtlCol="0" anchor="ctr"/>
+          <a:lstStyle/>
+          <a:p>
+            <a:pPr indent="0" marL="0">
+              <a:buNone/>
+            </a:pPr>
+            <a:r>
+              <a:rPr lang="en-US" sz="900" i="1" dirty="0">
+                <a:solidFill>
+                  <a:srgbClr val="3B7DD8"/>
+                </a:solidFill>
+                <a:latin typeface="Arial" pitchFamily="34" charset="0"/>
+                <a:ea typeface="Arial" pitchFamily="34" charset="-122"/>
+                <a:cs typeface="Arial" pitchFamily="34" charset="-120"/>
+              </a:rPr>
+              <a:t>「楽天トラベル フロントのお姉さんがカーディガンに可愛いネイルをしていて笑顔も良く、服装がかしこまった感じではなく自...」</a:t>
+            </a:r>
+            <a:endParaRPr lang="en-US" sz="900" dirty="0"/>
+          </a:p>
+        </p:txBody>
+      </p:sp>
+      <p:sp>
+        <p:nvSpPr>
+          <p:cNvPr id="33" name="Shape 31"/>
+          <p:cNvSpPr/>
+          <p:nvPr/>
+        </p:nvSpPr>
+        <p:spPr>
+          <a:xfrm>
+            <a:off x="3291840" y="2880360"/>
+            <a:ext cx="2651760" cy="1600200"/>
+          </a:xfrm>
+          <a:prstGeom prst="rect">
+            <a:avLst/>
+          </a:prstGeom>
+          <a:solidFill>
+            <a:srgbClr val="FFFFFF"/>
+          </a:solidFill>
+          <a:ln/>
+          <a:effectLst>
+            <a:outerShdw sx="100000" sy="100000" kx="0" ky="0" algn="bl" rotWithShape="0" blurRad="50800" dist="25400" dir="8100000">
+              <a:srgbClr val="000000">
+                <a:alpha val="10000"/>
+              </a:srgbClr>
+            </a:outerShdw>
+          </a:effectLst>
+        </p:spPr>
+      </p:sp>
+      <p:sp>
+        <p:nvSpPr>
+          <p:cNvPr id="34" name="Shape 32"/>
+          <p:cNvSpPr/>
+          <p:nvPr/>
+        </p:nvSpPr>
+        <p:spPr>
+          <a:xfrm>
+            <a:off x="3291840" y="2880360"/>
+            <a:ext cx="54864" cy="1600200"/>
+          </a:xfrm>
+          <a:prstGeom prst="rect">
+            <a:avLst/>
+          </a:prstGeom>
+          <a:solidFill>
+            <a:srgbClr val="16A34A"/>
+          </a:solidFill>
+          <a:ln/>
+        </p:spPr>
+      </p:sp>
+      <p:sp>
+        <p:nvSpPr>
+          <p:cNvPr id="35" name="Shape 33"/>
+          <p:cNvSpPr/>
+          <p:nvPr/>
+        </p:nvSpPr>
+        <p:spPr>
+          <a:xfrm>
+            <a:off x="5120640" y="2953512"/>
+            <a:ext cx="658368" cy="228600"/>
+          </a:xfrm>
+          <a:prstGeom prst="rect">
+            <a:avLst/>
+          </a:prstGeom>
+          <a:solidFill>
+            <a:srgbClr val="DCFCE7"/>
+          </a:solidFill>
+          <a:ln/>
+        </p:spPr>
+      </p:sp>
+      <p:sp>
+        <p:nvSpPr>
+          <p:cNvPr id="36" name="Text 34"/>
+          <p:cNvSpPr/>
+          <p:nvPr/>
+        </p:nvSpPr>
+        <p:spPr>
+          <a:xfrm>
+            <a:off x="5120640" y="2953512"/>
+            <a:ext cx="658368" cy="228600"/>
+          </a:xfrm>
+          <a:prstGeom prst="rect">
+            <a:avLst/>
+          </a:prstGeom>
+          <a:noFill/>
+          <a:ln/>
+        </p:spPr>
+        <p:txBody>
+          <a:bodyPr wrap="square" lIns="0" tIns="0" rIns="0" bIns="0" rtlCol="0" anchor="ctr"/>
+          <a:lstStyle/>
+          <a:p>
+            <a:pPr algn="ctr" indent="0" marL="0">
+              <a:buNone/>
+            </a:pPr>
+            <a:r>
+              <a:rPr lang="en-US" sz="900" b="1" dirty="0">
+                <a:solidFill>
+                  <a:srgbClr val="16A34A"/>
+                </a:solidFill>
+                <a:latin typeface="Arial" pitchFamily="34" charset="0"/>
+                <a:ea typeface="Arial" pitchFamily="34" charset="-122"/>
+                <a:cs typeface="Arial" pitchFamily="34" charset="-120"/>
+              </a:rPr>
+              <a:t>20件+</a:t>
+            </a:r>
+            <a:endParaRPr lang="en-US" sz="900" dirty="0"/>
+          </a:p>
+        </p:txBody>
+      </p:sp>
+      <p:sp>
+        <p:nvSpPr>
+          <p:cNvPr id="37" name="Text 35"/>
+          <p:cNvSpPr/>
+          <p:nvPr/>
+        </p:nvSpPr>
+        <p:spPr>
+          <a:xfrm>
+            <a:off x="3429000" y="2953512"/>
+            <a:ext cx="1645920" cy="274320"/>
+          </a:xfrm>
+          <a:prstGeom prst="rect">
+            <a:avLst/>
+          </a:prstGeom>
+          <a:noFill/>
+          <a:ln/>
+        </p:spPr>
+        <p:txBody>
+          <a:bodyPr wrap="square" lIns="0" tIns="0" rIns="0" bIns="0" rtlCol="0" anchor="ctr"/>
+          <a:lstStyle/>
+          <a:p>
+            <a:pPr indent="0" marL="0">
+              <a:buNone/>
+            </a:pPr>
+            <a:r>
+              <a:rPr lang="en-US" sz="1300" b="1" dirty="0">
+                <a:solidFill>
+                  <a:srgbClr val="1A2744"/>
+                </a:solidFill>
+                <a:latin typeface="Arial" pitchFamily="34" charset="0"/>
+                <a:ea typeface="Arial" pitchFamily="34" charset="-122"/>
+                <a:cs typeface="Arial" pitchFamily="34" charset="-120"/>
+              </a:rPr>
+              <a:t>朝食</a:t>
+            </a:r>
+            <a:endParaRPr lang="en-US" sz="1300" dirty="0"/>
+          </a:p>
+        </p:txBody>
+      </p:sp>
+      <p:sp>
+        <p:nvSpPr>
+          <p:cNvPr id="38" name="Text 36"/>
+          <p:cNvSpPr/>
+          <p:nvPr/>
+        </p:nvSpPr>
+        <p:spPr>
+          <a:xfrm>
+            <a:off x="3429000" y="3246120"/>
+            <a:ext cx="2377440" cy="365760"/>
+          </a:xfrm>
+          <a:prstGeom prst="rect">
+            <a:avLst/>
+          </a:prstGeom>
+          <a:noFill/>
+          <a:ln/>
+        </p:spPr>
+        <p:txBody>
+          <a:bodyPr wrap="square" lIns="0" tIns="0" rIns="0" bIns="0" rtlCol="0" anchor="ctr"/>
+          <a:lstStyle/>
+          <a:p>
+            <a:pPr indent="0" marL="0">
+              <a:buNone/>
+            </a:pPr>
+            <a:r>
+              <a:rPr lang="en-US" sz="900" dirty="0">
+                <a:solidFill>
+                  <a:srgbClr val="64748B"/>
+                </a:solidFill>
+                <a:latin typeface="Arial" pitchFamily="34" charset="0"/>
+                <a:ea typeface="Arial" pitchFamily="34" charset="-122"/>
+                <a:cs typeface="Arial" pitchFamily="34" charset="-120"/>
+              </a:rPr>
+              <a:t>の飲みものがおいてあり美味しかった</a:t>
+            </a:r>
+            <a:endParaRPr lang="en-US" sz="900" dirty="0"/>
+          </a:p>
+        </p:txBody>
+      </p:sp>
+      <p:sp>
+        <p:nvSpPr>
+          <p:cNvPr id="39" name="Text 37"/>
+          <p:cNvSpPr/>
+          <p:nvPr/>
+        </p:nvSpPr>
+        <p:spPr>
+          <a:xfrm>
+            <a:off x="3429000" y="3657600"/>
             <a:ext cx="2377440" cy="640080"/>
           </a:xfrm>
           <a:prstGeom prst="rect">
@@ -11300,13 +11746,13 @@
       </p:sp>
       <p:sp>
         <p:nvSpPr>
-          <p:cNvPr id="26" name="Shape 24"/>
-          <p:cNvSpPr/>
-          <p:nvPr/>
-        </p:nvSpPr>
-        <p:spPr>
-          <a:xfrm>
-            <a:off x="457200" y="2880360"/>
+          <p:cNvPr id="40" name="Shape 38"/>
+          <p:cNvSpPr/>
+          <p:nvPr/>
+        </p:nvSpPr>
+        <p:spPr>
+          <a:xfrm>
+            <a:off x="6126480" y="2880360"/>
             <a:ext cx="2651760" cy="1600200"/>
           </a:xfrm>
           <a:prstGeom prst="rect">
@@ -11327,13 +11773,13 @@
       </p:sp>
       <p:sp>
         <p:nvSpPr>
-          <p:cNvPr id="27" name="Shape 25"/>
-          <p:cNvSpPr/>
-          <p:nvPr/>
-        </p:nvSpPr>
-        <p:spPr>
-          <a:xfrm>
-            <a:off x="457200" y="2880360"/>
+          <p:cNvPr id="41" name="Shape 39"/>
+          <p:cNvSpPr/>
+          <p:nvPr/>
+        </p:nvSpPr>
+        <p:spPr>
+          <a:xfrm>
+            <a:off x="6126480" y="2880360"/>
             <a:ext cx="54864" cy="1600200"/>
           </a:xfrm>
           <a:prstGeom prst="rect">
@@ -11347,13 +11793,13 @@
       </p:sp>
       <p:sp>
         <p:nvSpPr>
-          <p:cNvPr id="28" name="Shape 26"/>
-          <p:cNvSpPr/>
-          <p:nvPr/>
-        </p:nvSpPr>
-        <p:spPr>
-          <a:xfrm>
-            <a:off x="2286000" y="2953512"/>
+          <p:cNvPr id="42" name="Shape 40"/>
+          <p:cNvSpPr/>
+          <p:nvPr/>
+        </p:nvSpPr>
+        <p:spPr>
+          <a:xfrm>
+            <a:off x="7955280" y="2953512"/>
             <a:ext cx="658368" cy="228600"/>
           </a:xfrm>
           <a:prstGeom prst="rect">
@@ -11367,13 +11813,13 @@
       </p:sp>
       <p:sp>
         <p:nvSpPr>
-          <p:cNvPr id="29" name="Text 27"/>
-          <p:cNvSpPr/>
-          <p:nvPr/>
-        </p:nvSpPr>
-        <p:spPr>
-          <a:xfrm>
-            <a:off x="2286000" y="2953512"/>
+          <p:cNvPr id="43" name="Text 41"/>
+          <p:cNvSpPr/>
+          <p:nvPr/>
+        </p:nvSpPr>
+        <p:spPr>
+          <a:xfrm>
+            <a:off x="7955280" y="2953512"/>
             <a:ext cx="658368" cy="228600"/>
           </a:xfrm>
           <a:prstGeom prst="rect">
@@ -11406,13 +11852,13 @@
       </p:sp>
       <p:sp>
         <p:nvSpPr>
-          <p:cNvPr id="30" name="Text 28"/>
-          <p:cNvSpPr/>
-          <p:nvPr/>
-        </p:nvSpPr>
-        <p:spPr>
-          <a:xfrm>
-            <a:off x="594360" y="2953512"/>
+          <p:cNvPr id="44" name="Text 42"/>
+          <p:cNvSpPr/>
+          <p:nvPr/>
+        </p:nvSpPr>
+        <p:spPr>
+          <a:xfrm>
+            <a:off x="6263640" y="2953512"/>
             <a:ext cx="1645920" cy="274320"/>
           </a:xfrm>
           <a:prstGeom prst="rect">
@@ -11437,7 +11883,7 @@
                 <a:ea typeface="Arial" pitchFamily="34" charset="-122"/>
                 <a:cs typeface="Arial" pitchFamily="34" charset="-120"/>
               </a:rPr>
-              <a:t>スタッフの対応</a:t>
+              <a:t>コンビニ・周辺施設</a:t>
             </a:r>
             <a:endParaRPr lang="en-US" sz="1300" dirty="0"/>
           </a:p>
@@ -11445,13 +11891,13 @@
       </p:sp>
       <p:sp>
         <p:nvSpPr>
-          <p:cNvPr id="31" name="Text 29"/>
-          <p:cNvSpPr/>
-          <p:nvPr/>
-        </p:nvSpPr>
-        <p:spPr>
-          <a:xfrm>
-            <a:off x="594360" y="3246120"/>
+          <p:cNvPr id="45" name="Text 43"/>
+          <p:cNvSpPr/>
+          <p:nvPr/>
+        </p:nvSpPr>
+        <p:spPr>
+          <a:xfrm>
+            <a:off x="6263640" y="3246120"/>
             <a:ext cx="2377440" cy="365760"/>
           </a:xfrm>
           <a:prstGeom prst="rect">
@@ -11476,7 +11922,7 @@
                 <a:ea typeface="Arial" pitchFamily="34" charset="-122"/>
                 <a:cs typeface="Arial" pitchFamily="34" charset="-120"/>
               </a:rPr>
-              <a:t>ホテルスタッフは皆さん素晴らしいです</a:t>
+              <a:t>com ホテルには近代的な設備、快適な浴場があり、近隣には様々なコンビニエンスストアもあります</a:t>
             </a:r>
             <a:endParaRPr lang="en-US" sz="900" dirty="0"/>
           </a:p>
@@ -11484,13 +11930,13 @@
       </p:sp>
       <p:sp>
         <p:nvSpPr>
-          <p:cNvPr id="32" name="Text 30"/>
-          <p:cNvSpPr/>
-          <p:nvPr/>
-        </p:nvSpPr>
-        <p:spPr>
-          <a:xfrm>
-            <a:off x="594360" y="3657600"/>
+          <p:cNvPr id="46" name="Text 44"/>
+          <p:cNvSpPr/>
+          <p:nvPr/>
+        </p:nvSpPr>
+        <p:spPr>
+          <a:xfrm>
+            <a:off x="6263640" y="3657600"/>
             <a:ext cx="2377440" cy="640080"/>
           </a:xfrm>
           <a:prstGeom prst="rect">
@@ -11515,453 +11961,7 @@
                 <a:ea typeface="Arial" pitchFamily="34" charset="-122"/>
                 <a:cs typeface="Arial" pitchFamily="34" charset="-120"/>
               </a:rPr>
-              <a:t>「（フロントのスタッフは枕に足跡がついているのを見ても気にせず、そのまま元の場所に戻していた😂）」</a:t>
-            </a:r>
-            <a:endParaRPr lang="en-US" sz="900" dirty="0"/>
-          </a:p>
-        </p:txBody>
-      </p:sp>
-      <p:sp>
-        <p:nvSpPr>
-          <p:cNvPr id="33" name="Shape 31"/>
-          <p:cNvSpPr/>
-          <p:nvPr/>
-        </p:nvSpPr>
-        <p:spPr>
-          <a:xfrm>
-            <a:off x="3291840" y="2880360"/>
-            <a:ext cx="2651760" cy="1600200"/>
-          </a:xfrm>
-          <a:prstGeom prst="rect">
-            <a:avLst/>
-          </a:prstGeom>
-          <a:solidFill>
-            <a:srgbClr val="FFFFFF"/>
-          </a:solidFill>
-          <a:ln/>
-          <a:effectLst>
-            <a:outerShdw sx="100000" sy="100000" kx="0" ky="0" algn="bl" rotWithShape="0" blurRad="50800" dist="25400" dir="8100000">
-              <a:srgbClr val="000000">
-                <a:alpha val="10000"/>
-              </a:srgbClr>
-            </a:outerShdw>
-          </a:effectLst>
-        </p:spPr>
-      </p:sp>
-      <p:sp>
-        <p:nvSpPr>
-          <p:cNvPr id="34" name="Shape 32"/>
-          <p:cNvSpPr/>
-          <p:nvPr/>
-        </p:nvSpPr>
-        <p:spPr>
-          <a:xfrm>
-            <a:off x="3291840" y="2880360"/>
-            <a:ext cx="54864" cy="1600200"/>
-          </a:xfrm>
-          <a:prstGeom prst="rect">
-            <a:avLst/>
-          </a:prstGeom>
-          <a:solidFill>
-            <a:srgbClr val="16A34A"/>
-          </a:solidFill>
-          <a:ln/>
-        </p:spPr>
-      </p:sp>
-      <p:sp>
-        <p:nvSpPr>
-          <p:cNvPr id="35" name="Shape 33"/>
-          <p:cNvSpPr/>
-          <p:nvPr/>
-        </p:nvSpPr>
-        <p:spPr>
-          <a:xfrm>
-            <a:off x="5120640" y="2953512"/>
-            <a:ext cx="658368" cy="228600"/>
-          </a:xfrm>
-          <a:prstGeom prst="rect">
-            <a:avLst/>
-          </a:prstGeom>
-          <a:solidFill>
-            <a:srgbClr val="DCFCE7"/>
-          </a:solidFill>
-          <a:ln/>
-        </p:spPr>
-      </p:sp>
-      <p:sp>
-        <p:nvSpPr>
-          <p:cNvPr id="36" name="Text 34"/>
-          <p:cNvSpPr/>
-          <p:nvPr/>
-        </p:nvSpPr>
-        <p:spPr>
-          <a:xfrm>
-            <a:off x="5120640" y="2953512"/>
-            <a:ext cx="658368" cy="228600"/>
-          </a:xfrm>
-          <a:prstGeom prst="rect">
-            <a:avLst/>
-          </a:prstGeom>
-          <a:noFill/>
-          <a:ln/>
-        </p:spPr>
-        <p:txBody>
-          <a:bodyPr wrap="square" lIns="0" tIns="0" rIns="0" bIns="0" rtlCol="0" anchor="ctr"/>
-          <a:lstStyle/>
-          <a:p>
-            <a:pPr algn="ctr" indent="0" marL="0">
-              <a:buNone/>
-            </a:pPr>
-            <a:r>
-              <a:rPr lang="en-US" sz="900" b="1" dirty="0">
-                <a:solidFill>
-                  <a:srgbClr val="16A34A"/>
-                </a:solidFill>
-                <a:latin typeface="Arial" pitchFamily="34" charset="0"/>
-                <a:ea typeface="Arial" pitchFamily="34" charset="-122"/>
-                <a:cs typeface="Arial" pitchFamily="34" charset="-120"/>
-              </a:rPr>
-              <a:t>10件+</a:t>
-            </a:r>
-            <a:endParaRPr lang="en-US" sz="900" dirty="0"/>
-          </a:p>
-        </p:txBody>
-      </p:sp>
-      <p:sp>
-        <p:nvSpPr>
-          <p:cNvPr id="37" name="Text 35"/>
-          <p:cNvSpPr/>
-          <p:nvPr/>
-        </p:nvSpPr>
-        <p:spPr>
-          <a:xfrm>
-            <a:off x="3429000" y="2953512"/>
-            <a:ext cx="1645920" cy="274320"/>
-          </a:xfrm>
-          <a:prstGeom prst="rect">
-            <a:avLst/>
-          </a:prstGeom>
-          <a:noFill/>
-          <a:ln/>
-        </p:spPr>
-        <p:txBody>
-          <a:bodyPr wrap="square" lIns="0" tIns="0" rIns="0" bIns="0" rtlCol="0" anchor="ctr"/>
-          <a:lstStyle/>
-          <a:p>
-            <a:pPr indent="0" marL="0">
-              <a:buNone/>
-            </a:pPr>
-            <a:r>
-              <a:rPr lang="en-US" sz="1300" b="1" dirty="0">
-                <a:solidFill>
-                  <a:srgbClr val="1A2744"/>
-                </a:solidFill>
-                <a:latin typeface="Arial" pitchFamily="34" charset="0"/>
-                <a:ea typeface="Arial" pitchFamily="34" charset="-122"/>
-                <a:cs typeface="Arial" pitchFamily="34" charset="-120"/>
-              </a:rPr>
-              <a:t>朝食</a:t>
-            </a:r>
-            <a:endParaRPr lang="en-US" sz="1300" dirty="0"/>
-          </a:p>
-        </p:txBody>
-      </p:sp>
-      <p:sp>
-        <p:nvSpPr>
-          <p:cNvPr id="38" name="Text 36"/>
-          <p:cNvSpPr/>
-          <p:nvPr/>
-        </p:nvSpPr>
-        <p:spPr>
-          <a:xfrm>
-            <a:off x="3429000" y="3246120"/>
-            <a:ext cx="2377440" cy="365760"/>
-          </a:xfrm>
-          <a:prstGeom prst="rect">
-            <a:avLst/>
-          </a:prstGeom>
-          <a:noFill/>
-          <a:ln/>
-        </p:spPr>
-        <p:txBody>
-          <a:bodyPr wrap="square" lIns="0" tIns="0" rIns="0" bIns="0" rtlCol="0" anchor="ctr"/>
-          <a:lstStyle/>
-          <a:p>
-            <a:pPr indent="0" marL="0">
-              <a:buNone/>
-            </a:pPr>
-            <a:r>
-              <a:rPr lang="en-US" sz="900" dirty="0">
-                <a:solidFill>
-                  <a:srgbClr val="64748B"/>
-                </a:solidFill>
-                <a:latin typeface="Arial" pitchFamily="34" charset="0"/>
-                <a:ea typeface="Arial" pitchFamily="34" charset="-122"/>
-                <a:cs typeface="Arial" pitchFamily="34" charset="-120"/>
-              </a:rPr>
-              <a:t>朝食ブッフェは和洋完璧で全て美味しい</a:t>
-            </a:r>
-            <a:endParaRPr lang="en-US" sz="900" dirty="0"/>
-          </a:p>
-        </p:txBody>
-      </p:sp>
-      <p:sp>
-        <p:nvSpPr>
-          <p:cNvPr id="39" name="Text 37"/>
-          <p:cNvSpPr/>
-          <p:nvPr/>
-        </p:nvSpPr>
-        <p:spPr>
-          <a:xfrm>
-            <a:off x="3429000" y="3657600"/>
-            <a:ext cx="2377440" cy="640080"/>
-          </a:xfrm>
-          <a:prstGeom prst="rect">
-            <a:avLst/>
-          </a:prstGeom>
-          <a:noFill/>
-          <a:ln/>
-        </p:spPr>
-        <p:txBody>
-          <a:bodyPr wrap="square" lIns="0" tIns="0" rIns="0" bIns="0" rtlCol="0" anchor="ctr"/>
-          <a:lstStyle/>
-          <a:p>
-            <a:pPr indent="0" marL="0">
-              <a:buNone/>
-            </a:pPr>
-            <a:r>
-              <a:rPr lang="en-US" sz="900" i="1" dirty="0">
-                <a:solidFill>
-                  <a:srgbClr val="3B7DD8"/>
-                </a:solidFill>
-                <a:latin typeface="Arial" pitchFamily="34" charset="0"/>
-                <a:ea typeface="Arial" pitchFamily="34" charset="-122"/>
-                <a:cs typeface="Arial" pitchFamily="34" charset="-120"/>
-              </a:rPr>
-              <a:t>「朝食も色んな美味しいものがバイキング形式で選べて最高でした」</a:t>
-            </a:r>
-            <a:endParaRPr lang="en-US" sz="900" dirty="0"/>
-          </a:p>
-        </p:txBody>
-      </p:sp>
-      <p:sp>
-        <p:nvSpPr>
-          <p:cNvPr id="40" name="Shape 38"/>
-          <p:cNvSpPr/>
-          <p:nvPr/>
-        </p:nvSpPr>
-        <p:spPr>
-          <a:xfrm>
-            <a:off x="6126480" y="2880360"/>
-            <a:ext cx="2651760" cy="1600200"/>
-          </a:xfrm>
-          <a:prstGeom prst="rect">
-            <a:avLst/>
-          </a:prstGeom>
-          <a:solidFill>
-            <a:srgbClr val="FFFFFF"/>
-          </a:solidFill>
-          <a:ln/>
-          <a:effectLst>
-            <a:outerShdw sx="100000" sy="100000" kx="0" ky="0" algn="bl" rotWithShape="0" blurRad="50800" dist="25400" dir="8100000">
-              <a:srgbClr val="000000">
-                <a:alpha val="10000"/>
-              </a:srgbClr>
-            </a:outerShdw>
-          </a:effectLst>
-        </p:spPr>
-      </p:sp>
-      <p:sp>
-        <p:nvSpPr>
-          <p:cNvPr id="41" name="Shape 39"/>
-          <p:cNvSpPr/>
-          <p:nvPr/>
-        </p:nvSpPr>
-        <p:spPr>
-          <a:xfrm>
-            <a:off x="6126480" y="2880360"/>
-            <a:ext cx="54864" cy="1600200"/>
-          </a:xfrm>
-          <a:prstGeom prst="rect">
-            <a:avLst/>
-          </a:prstGeom>
-          <a:solidFill>
-            <a:srgbClr val="16A34A"/>
-          </a:solidFill>
-          <a:ln/>
-        </p:spPr>
-      </p:sp>
-      <p:sp>
-        <p:nvSpPr>
-          <p:cNvPr id="42" name="Shape 40"/>
-          <p:cNvSpPr/>
-          <p:nvPr/>
-        </p:nvSpPr>
-        <p:spPr>
-          <a:xfrm>
-            <a:off x="7955280" y="2953512"/>
-            <a:ext cx="658368" cy="228600"/>
-          </a:xfrm>
-          <a:prstGeom prst="rect">
-            <a:avLst/>
-          </a:prstGeom>
-          <a:solidFill>
-            <a:srgbClr val="DCFCE7"/>
-          </a:solidFill>
-          <a:ln/>
-        </p:spPr>
-      </p:sp>
-      <p:sp>
-        <p:nvSpPr>
-          <p:cNvPr id="43" name="Text 41"/>
-          <p:cNvSpPr/>
-          <p:nvPr/>
-        </p:nvSpPr>
-        <p:spPr>
-          <a:xfrm>
-            <a:off x="7955280" y="2953512"/>
-            <a:ext cx="658368" cy="228600"/>
-          </a:xfrm>
-          <a:prstGeom prst="rect">
-            <a:avLst/>
-          </a:prstGeom>
-          <a:noFill/>
-          <a:ln/>
-        </p:spPr>
-        <p:txBody>
-          <a:bodyPr wrap="square" lIns="0" tIns="0" rIns="0" bIns="0" rtlCol="0" anchor="ctr"/>
-          <a:lstStyle/>
-          <a:p>
-            <a:pPr algn="ctr" indent="0" marL="0">
-              <a:buNone/>
-            </a:pPr>
-            <a:r>
-              <a:rPr lang="en-US" sz="900" b="1" dirty="0">
-                <a:solidFill>
-                  <a:srgbClr val="16A34A"/>
-                </a:solidFill>
-                <a:latin typeface="Arial" pitchFamily="34" charset="0"/>
-                <a:ea typeface="Arial" pitchFamily="34" charset="-122"/>
-                <a:cs typeface="Arial" pitchFamily="34" charset="-120"/>
-              </a:rPr>
-              <a:t>7件</a:t>
-            </a:r>
-            <a:endParaRPr lang="en-US" sz="900" dirty="0"/>
-          </a:p>
-        </p:txBody>
-      </p:sp>
-      <p:sp>
-        <p:nvSpPr>
-          <p:cNvPr id="44" name="Text 42"/>
-          <p:cNvSpPr/>
-          <p:nvPr/>
-        </p:nvSpPr>
-        <p:spPr>
-          <a:xfrm>
-            <a:off x="6263640" y="2953512"/>
-            <a:ext cx="1645920" cy="274320"/>
-          </a:xfrm>
-          <a:prstGeom prst="rect">
-            <a:avLst/>
-          </a:prstGeom>
-          <a:noFill/>
-          <a:ln/>
-        </p:spPr>
-        <p:txBody>
-          <a:bodyPr wrap="square" lIns="0" tIns="0" rIns="0" bIns="0" rtlCol="0" anchor="ctr"/>
-          <a:lstStyle/>
-          <a:p>
-            <a:pPr indent="0" marL="0">
-              <a:buNone/>
-            </a:pPr>
-            <a:r>
-              <a:rPr lang="en-US" sz="1300" b="1" dirty="0">
-                <a:solidFill>
-                  <a:srgbClr val="1A2744"/>
-                </a:solidFill>
-                <a:latin typeface="Arial" pitchFamily="34" charset="0"/>
-                <a:ea typeface="Arial" pitchFamily="34" charset="-122"/>
-                <a:cs typeface="Arial" pitchFamily="34" charset="-120"/>
-              </a:rPr>
-              <a:t>コストパフォーマンス</a:t>
-            </a:r>
-            <a:endParaRPr lang="en-US" sz="1300" dirty="0"/>
-          </a:p>
-        </p:txBody>
-      </p:sp>
-      <p:sp>
-        <p:nvSpPr>
-          <p:cNvPr id="45" name="Text 43"/>
-          <p:cNvSpPr/>
-          <p:nvPr/>
-        </p:nvSpPr>
-        <p:spPr>
-          <a:xfrm>
-            <a:off x="6263640" y="3246120"/>
-            <a:ext cx="2377440" cy="365760"/>
-          </a:xfrm>
-          <a:prstGeom prst="rect">
-            <a:avLst/>
-          </a:prstGeom>
-          <a:noFill/>
-          <a:ln/>
-        </p:spPr>
-        <p:txBody>
-          <a:bodyPr wrap="square" lIns="0" tIns="0" rIns="0" bIns="0" rtlCol="0" anchor="ctr"/>
-          <a:lstStyle/>
-          <a:p>
-            <a:pPr indent="0" marL="0">
-              <a:buNone/>
-            </a:pPr>
-            <a:r>
-              <a:rPr lang="en-US" sz="900" dirty="0">
-                <a:solidFill>
-                  <a:srgbClr val="64748B"/>
-                </a:solidFill>
-                <a:latin typeface="Arial" pitchFamily="34" charset="0"/>
-                <a:ea typeface="Arial" pitchFamily="34" charset="-122"/>
-                <a:cs typeface="Arial" pitchFamily="34" charset="-120"/>
-              </a:rPr>
-              <a:t>リーズナブルな時期もあってか、価格帯も大満足です</a:t>
-            </a:r>
-            <a:endParaRPr lang="en-US" sz="900" dirty="0"/>
-          </a:p>
-        </p:txBody>
-      </p:sp>
-      <p:sp>
-        <p:nvSpPr>
-          <p:cNvPr id="46" name="Text 44"/>
-          <p:cNvSpPr/>
-          <p:nvPr/>
-        </p:nvSpPr>
-        <p:spPr>
-          <a:xfrm>
-            <a:off x="6263640" y="3657600"/>
-            <a:ext cx="2377440" cy="640080"/>
-          </a:xfrm>
-          <a:prstGeom prst="rect">
-            <a:avLst/>
-          </a:prstGeom>
-          <a:noFill/>
-          <a:ln/>
-        </p:spPr>
-        <p:txBody>
-          <a:bodyPr wrap="square" lIns="0" tIns="0" rIns="0" bIns="0" rtlCol="0" anchor="ctr"/>
-          <a:lstStyle/>
-          <a:p>
-            <a:pPr indent="0" marL="0">
-              <a:buNone/>
-            </a:pPr>
-            <a:r>
-              <a:rPr lang="en-US" sz="900" i="1" dirty="0">
-                <a:solidFill>
-                  <a:srgbClr val="3B7DD8"/>
-                </a:solidFill>
-                <a:latin typeface="Arial" pitchFamily="34" charset="0"/>
-                <a:ea typeface="Arial" pitchFamily="34" charset="-122"/>
-                <a:cs typeface="Arial" pitchFamily="34" charset="-120"/>
-              </a:rPr>
-              <a:t>「シングルルームは少し狭いですが、内装は素晴らしく、東京の桜シーズンと比べると料金もリーズナブルです」</a:t>
+              <a:t>「正門南口から徒歩5分、ローソンの向かいに位置し、ドン・キホーテのショッピング街まで徒歩12分以内です」</a:t>
             </a:r>
             <a:endParaRPr lang="en-US" sz="900" dirty="0"/>
           </a:p>
@@ -12583,7 +12583,7 @@
                           <a:ea typeface="Arial" pitchFamily="34" charset="-122"/>
                           <a:cs typeface="Arial" pitchFamily="34" charset="-120"/>
                         </a:rPr>
-                        <a:t>部屋の狭さ</a:t>
+                        <a:t>浴室・水回り</a:t>
                       </a:r>
                       <a:endParaRPr lang="en-US" sz="900" dirty="0">
                         <a:latin typeface="Arial" charset="0"/>
@@ -12651,7 +12651,7 @@
                           <a:ea typeface="Arial" pitchFamily="34" charset="-122"/>
                           <a:cs typeface="Arial" pitchFamily="34" charset="-120"/>
                         </a:rPr>
-                        <a:t>狭い部屋だけど2段ベットでワクワクした 綺麗 特にない 特にない</a:t>
+                        <a:t>大浴場のシャワーが少なく、空くのを待たないといけないのが残念でした</a:t>
                       </a:r>
                       <a:endParaRPr lang="en-US" sz="900" dirty="0">
                         <a:latin typeface="Arial" charset="0"/>
@@ -12719,7 +12719,7 @@
                           <a:ea typeface="Arial" pitchFamily="34" charset="-122"/>
                           <a:cs typeface="Arial" pitchFamily="34" charset="-120"/>
                         </a:rPr>
-                        <a:t>9件</a:t>
+                        <a:t>16件</a:t>
                       </a:r>
                       <a:endParaRPr lang="en-US" sz="900" dirty="0">
                         <a:latin typeface="Arial" charset="0"/>
@@ -12857,7 +12857,7 @@
                           <a:ea typeface="Arial" pitchFamily="34" charset="-122"/>
                           <a:cs typeface="Arial" pitchFamily="34" charset="-120"/>
                         </a:rPr>
-                        <a:t>浴室・水回り</a:t>
+                        <a:t>部屋の狭さ</a:t>
                       </a:r>
                       <a:endParaRPr lang="en-US" sz="900" dirty="0">
                         <a:latin typeface="Arial" charset="0"/>
@@ -12925,7 +12925,7 @@
                           <a:ea typeface="Arial" pitchFamily="34" charset="-122"/>
                           <a:cs typeface="Arial" pitchFamily="34" charset="-120"/>
                         </a:rPr>
-                        <a:t>大きな折りたたみ物干しがあったのはいいけど、パウダールームもシャワールームもトイレの壁もオシャレにシンプルすぎて、...</a:t>
+                        <a:t>部屋は狭いけど(キャリーケースを広げたら通れない)新しいからキレイ</a:t>
                       </a:r>
                       <a:endParaRPr lang="en-US" sz="900" dirty="0">
                         <a:latin typeface="Arial" charset="0"/>
@@ -12993,7 +12993,7 @@
                           <a:ea typeface="Arial" pitchFamily="34" charset="-122"/>
                           <a:cs typeface="Arial" pitchFamily="34" charset="-120"/>
                         </a:rPr>
-                        <a:t>9件</a:t>
+                        <a:t>13件</a:t>
                       </a:r>
                       <a:endParaRPr lang="en-US" sz="900" dirty="0">
                         <a:latin typeface="Arial" charset="0"/>
@@ -13405,7 +13405,7 @@
                           <a:ea typeface="Arial" pitchFamily="34" charset="-122"/>
                           <a:cs typeface="Arial" pitchFamily="34" charset="-120"/>
                         </a:rPr>
-                        <a:t>エアコン・空調</a:t>
+                        <a:t>対応・サービスの不満</a:t>
                       </a:r>
                       <a:endParaRPr lang="en-US" sz="900" dirty="0">
                         <a:latin typeface="Arial" charset="0"/>
@@ -13473,7 +13473,7 @@
                           <a:ea typeface="Arial" pitchFamily="34" charset="-122"/>
                           <a:cs typeface="Arial" pitchFamily="34" charset="-120"/>
                         </a:rPr>
-                        <a:t>夜部屋が寒かったので、暖房を入れようとしたら、個人では設定できなかったこと</a:t>
+                        <a:t>大浴場のシャワーが少なく、空くのを待たないといけないのが残念でした</a:t>
                       </a:r>
                       <a:endParaRPr lang="en-US" sz="900" dirty="0">
                         <a:latin typeface="Arial" charset="0"/>
@@ -13541,7 +13541,7 @@
                           <a:ea typeface="Arial" pitchFamily="34" charset="-122"/>
                           <a:cs typeface="Arial" pitchFamily="34" charset="-120"/>
                         </a:rPr>
-                        <a:t>3件</a:t>
+                        <a:t>5件</a:t>
                       </a:r>
                       <a:endParaRPr lang="en-US" sz="900" dirty="0">
                         <a:latin typeface="Arial" charset="0"/>
@@ -13679,7 +13679,7 @@
                           <a:ea typeface="Arial" pitchFamily="34" charset="-122"/>
                           <a:cs typeface="Arial" pitchFamily="34" charset="-120"/>
                         </a:rPr>
-                        <a:t>対応・サービスの不満</a:t>
+                        <a:t>臭い・匂い</a:t>
                       </a:r>
                       <a:endParaRPr lang="en-US" sz="900" dirty="0">
                         <a:latin typeface="Arial" charset="0"/>
@@ -13747,7 +13747,7 @@
                           <a:ea typeface="Arial" pitchFamily="34" charset="-122"/>
                           <a:cs typeface="Arial" pitchFamily="34" charset="-120"/>
                         </a:rPr>
-                        <a:t>大浴場のシャワーが少なく、空くのを待たないといけないのが残念でした</a:t>
+                        <a:t>Agoda 部屋がタバコ臭かったのですが、こちらのミスで喫煙室を予約してしまっていたようでした</a:t>
                       </a:r>
                       <a:endParaRPr lang="en-US" sz="900" dirty="0">
                         <a:latin typeface="Arial" charset="0"/>
@@ -13953,7 +13953,7 @@
                           <a:ea typeface="Arial" pitchFamily="34" charset="-122"/>
                           <a:cs typeface="Arial" pitchFamily="34" charset="-120"/>
                         </a:rPr>
-                        <a:t>設備の老朽化</a:t>
+                        <a:t>エアコン・空調</a:t>
                       </a:r>
                       <a:endParaRPr lang="en-US" sz="900" dirty="0">
                         <a:latin typeface="Arial" charset="0"/>
@@ -14021,7 +14021,7 @@
                           <a:ea typeface="Arial" pitchFamily="34" charset="-122"/>
                           <a:cs typeface="Arial" pitchFamily="34" charset="-120"/>
                         </a:rPr>
-                        <a:t>Google 築年数が浅くおしゃれできれいです</a:t>
+                        <a:t>夜部屋が寒かったので、暖房を入れようとしたら、個人では設定できなかったこと</a:t>
                       </a:r>
                       <a:endParaRPr lang="en-US" sz="900" dirty="0">
                         <a:latin typeface="Arial" charset="0"/>
@@ -14089,7 +14089,7 @@
                           <a:ea typeface="Arial" pitchFamily="34" charset="-122"/>
                           <a:cs typeface="Arial" pitchFamily="34" charset="-120"/>
                         </a:rPr>
-                        <a:t>1件</a:t>
+                        <a:t>3件</a:t>
                       </a:r>
                       <a:endParaRPr lang="en-US" sz="900" dirty="0">
                         <a:latin typeface="Arial" charset="0"/>
@@ -14227,7 +14227,7 @@
                           <a:ea typeface="Arial" pitchFamily="34" charset="-122"/>
                           <a:cs typeface="Arial" pitchFamily="34" charset="-120"/>
                         </a:rPr>
-                        <a:t>臭い・匂い</a:t>
+                        <a:t>窓・採光</a:t>
                       </a:r>
                       <a:endParaRPr lang="en-US" sz="900" dirty="0">
                         <a:latin typeface="Arial" charset="0"/>
@@ -14295,7 +14295,7 @@
                           <a:ea typeface="Arial" pitchFamily="34" charset="-122"/>
                           <a:cs typeface="Arial" pitchFamily="34" charset="-120"/>
                         </a:rPr>
-                        <a:t>Agoda 部屋がタバコ臭かったのですが、こちらのミスで喫煙室を予約してしまっていたようでした</a:t>
+                        <a:t>景色は向かい側がオフィスビルだから カーテンは開けられない</a:t>
                       </a:r>
                       <a:endParaRPr lang="en-US" sz="900" dirty="0">
                         <a:latin typeface="Arial" charset="0"/>
@@ -14363,7 +14363,7 @@
                           <a:ea typeface="Arial" pitchFamily="34" charset="-122"/>
                           <a:cs typeface="Arial" pitchFamily="34" charset="-120"/>
                         </a:rPr>
-                        <a:t>1件</a:t>
+                        <a:t>2件</a:t>
                       </a:r>
                       <a:endParaRPr lang="en-US" sz="900" dirty="0">
                         <a:latin typeface="Arial" charset="0"/>
@@ -14501,7 +14501,7 @@
                           <a:ea typeface="Arial" pitchFamily="34" charset="-122"/>
                           <a:cs typeface="Arial" pitchFamily="34" charset="-120"/>
                         </a:rPr>
-                        <a:t>朝食の改善要望</a:t>
+                        <a:t>設備の老朽化</a:t>
                       </a:r>
                       <a:endParaRPr lang="en-US" sz="900" dirty="0">
                         <a:latin typeface="Arial" charset="0"/>
@@ -14569,7 +14569,7 @@
                           <a:ea typeface="Arial" pitchFamily="34" charset="-122"/>
                           <a:cs typeface="Arial" pitchFamily="34" charset="-120"/>
                         </a:rPr>
-                        <a:t>朝食に関しては、ボリューム・品数・美味しさ満点です</a:t>
+                        <a:t>Google 築年数が浅くおしゃれできれいです</a:t>
                       </a:r>
                       <a:endParaRPr lang="en-US" sz="900" dirty="0">
                         <a:latin typeface="Arial" charset="0"/>
@@ -14775,7 +14775,7 @@
                           <a:ea typeface="Arial" pitchFamily="34" charset="-122"/>
                           <a:cs typeface="Arial" pitchFamily="34" charset="-120"/>
                         </a:rPr>
-                        <a:t>窓・採光</a:t>
+                        <a:t>朝食の改善要望</a:t>
                       </a:r>
                       <a:endParaRPr lang="en-US" sz="900" dirty="0">
                         <a:latin typeface="Arial" charset="0"/>
@@ -14843,7 +14843,7 @@
                           <a:ea typeface="Arial" pitchFamily="34" charset="-122"/>
                           <a:cs typeface="Arial" pitchFamily="34" charset="-120"/>
                         </a:rPr>
-                        <a:t>景色は向かい側がオフィスビルだから カーテンは開けられない</a:t>
+                        <a:t>朝食に関しては、ボリューム・品数・美味しさ満点です</a:t>
                       </a:r>
                       <a:endParaRPr lang="en-US" sz="900" dirty="0">
                         <a:latin typeface="Arial" charset="0"/>

--- a/納品レポート/ホテル別レポート/comment_yokohama_口コミ分析レポート.pptx
+++ b/納品レポート/ホテル別レポート/comment_yokohama_口コミ分析レポート.pptx
@@ -2784,7 +2784,7 @@
                 <a:ea typeface="Arial" pitchFamily="34" charset="-122"/>
                 <a:cs typeface="Arial" pitchFamily="34" charset="-120"/>
               </a:rPr>
-              <a:t>作成日：2026年4月7日</a:t>
+              <a:t>作成日：2026年4月8日</a:t>
             </a:r>
             <a:endParaRPr lang="en-US" sz="1000" dirty="0"/>
           </a:p>
@@ -12993,7 +12993,7 @@
                           <a:ea typeface="Arial" pitchFamily="34" charset="-122"/>
                           <a:cs typeface="Arial" pitchFamily="34" charset="-120"/>
                         </a:rPr>
-                        <a:t>13件</a:t>
+                        <a:t>14件</a:t>
                       </a:r>
                       <a:endParaRPr lang="en-US" sz="900" dirty="0">
                         <a:latin typeface="Arial" charset="0"/>

--- a/納品レポート/ホテル別レポート/comment_yokohama_口コミ分析レポート.pptx
+++ b/納品レポート/ホテル別レポート/comment_yokohama_口コミ分析レポート.pptx
@@ -2784,7 +2784,7 @@
                 <a:ea typeface="Arial" pitchFamily="34" charset="-122"/>
                 <a:cs typeface="Arial" pitchFamily="34" charset="-120"/>
               </a:rPr>
-              <a:t>作成日：2026年4月10日</a:t>
+              <a:t>作成日：2026年4月11日</a:t>
             </a:r>
             <a:endParaRPr lang="en-US" sz="1000" dirty="0"/>
           </a:p>
@@ -12993,7 +12993,7 @@
                           <a:ea typeface="Arial" pitchFamily="34" charset="-122"/>
                           <a:cs typeface="Arial" pitchFamily="34" charset="-120"/>
                         </a:rPr>
-                        <a:t>14件</a:t>
+                        <a:t>13件</a:t>
                       </a:r>
                       <a:endParaRPr lang="en-US" sz="900" dirty="0">
                         <a:latin typeface="Arial" charset="0"/>

--- a/納品レポート/ホテル別レポート/comment_yokohama_口コミ分析レポート.pptx
+++ b/納品レポート/ホテル別レポート/comment_yokohama_口コミ分析レポート.pptx
@@ -180,13 +180,13 @@
                 <c:ptCount val="6"/>
                 <c:lvl>
                   <c:pt idx="0">
-                    <c:v>Google</c:v>
+                    <c:v>じゃらん</c:v>
                   </c:pt>
                   <c:pt idx="1">
-                    <c:v>じゃらん</c:v>
+                    <c:v>楽天トラベル</c:v>
                   </c:pt>
                   <c:pt idx="2">
-                    <c:v>楽天トラベル</c:v>
+                    <c:v>Google</c:v>
                   </c:pt>
                   <c:pt idx="3">
                     <c:v>Trip.com</c:v>
@@ -208,22 +208,22 @@
                 <c:formatCode>General</c:formatCode>
                 <c:ptCount val="6"/>
                 <c:pt idx="0">
-                  <c:v>9.62</c:v>
+                  <c:v>9.5</c:v>
                 </c:pt>
                 <c:pt idx="1">
-                  <c:v>9.27</c:v>
+                  <c:v>9.45</c:v>
                 </c:pt>
                 <c:pt idx="2">
-                  <c:v>9.22</c:v>
+                  <c:v>9.43</c:v>
                 </c:pt>
                 <c:pt idx="3">
-                  <c:v>9.12</c:v>
+                  <c:v>9</c:v>
                 </c:pt>
                 <c:pt idx="4">
-                  <c:v>8.7</c:v>
+                  <c:v>8.76</c:v>
                 </c:pt>
                 <c:pt idx="5">
-                  <c:v>8</c:v>
+                  <c:v>7.88</c:v>
                 </c:pt>
               </c:numCache>
             </c:numRef>
@@ -566,10 +566,10 @@
               <c:numCache>
                 <c:ptCount val="3"/>
                 <c:pt idx="0">
-                  <c:v>111</c:v>
+                  <c:v>56</c:v>
                 </c:pt>
                 <c:pt idx="1">
-                  <c:v>20</c:v>
+                  <c:v>8</c:v>
                 </c:pt>
                 <c:pt idx="2">
                   <c:v>1</c:v>
@@ -795,19 +795,19 @@
                 <c:formatCode>General</c:formatCode>
                 <c:ptCount val="7"/>
                 <c:pt idx="0">
-                  <c:v>62</c:v>
+                  <c:v>30</c:v>
                 </c:pt>
                 <c:pt idx="1">
-                  <c:v>22</c:v>
+                  <c:v>12</c:v>
                 </c:pt>
                 <c:pt idx="2">
-                  <c:v>27</c:v>
+                  <c:v>14</c:v>
                 </c:pt>
                 <c:pt idx="3">
-                  <c:v>11</c:v>
+                  <c:v>4</c:v>
                 </c:pt>
                 <c:pt idx="4">
-                  <c:v>7</c:v>
+                  <c:v>2</c:v>
                 </c:pt>
                 <c:pt idx="5">
                   <c:v>2</c:v>
@@ -2744,7 +2744,7 @@
                 <a:ea typeface="Arial" pitchFamily="34" charset="-122"/>
                 <a:cs typeface="Arial" pitchFamily="34" charset="-120"/>
               </a:rPr>
-              <a:t>分析対象期間：2026年2月〜3月</a:t>
+              <a:t>分析対象期間：2026年3月</a:t>
             </a:r>
             <a:endParaRPr lang="en-US" sz="1000" dirty="0"/>
           </a:p>
@@ -2764,7 +2764,7 @@
                 <a:ea typeface="Arial" pitchFamily="34" charset="-122"/>
                 <a:cs typeface="Arial" pitchFamily="34" charset="-120"/>
               </a:rPr>
-              <a:t>レビュー総数：132件（6サイト）</a:t>
+              <a:t>レビュー総数：65件（6サイト）</a:t>
             </a:r>
             <a:endParaRPr lang="en-US" sz="1000" dirty="0"/>
           </a:p>
@@ -2784,7 +2784,7 @@
                 <a:ea typeface="Arial" pitchFamily="34" charset="-122"/>
                 <a:cs typeface="Arial" pitchFamily="34" charset="-120"/>
               </a:rPr>
-              <a:t>作成日：2026年4月11日</a:t>
+              <a:t>作成日：2026年4月13日</a:t>
             </a:r>
             <a:endParaRPr lang="en-US" sz="1000" dirty="0"/>
           </a:p>
@@ -3330,7 +3330,7 @@
                           <a:ea typeface="Arial" pitchFamily="34" charset="-122"/>
                           <a:cs typeface="Arial" pitchFamily="34" charset="-120"/>
                         </a:rPr>
-                        <a:t>8.83点</a:t>
+                        <a:t>8.82点</a:t>
                       </a:r>
                       <a:endParaRPr lang="en-US" sz="1000" dirty="0">
                         <a:latin typeface="Arial" charset="0"/>
@@ -3604,7 +3604,7 @@
                           <a:ea typeface="Arial" pitchFamily="34" charset="-122"/>
                           <a:cs typeface="Arial" pitchFamily="34" charset="-120"/>
                         </a:rPr>
-                        <a:t>84.1%</a:t>
+                        <a:t>86.2%</a:t>
                       </a:r>
                       <a:endParaRPr lang="en-US" sz="1000" dirty="0">
                         <a:latin typeface="Arial" charset="0"/>
@@ -3672,7 +3672,7 @@
                           <a:ea typeface="Arial" pitchFamily="34" charset="-122"/>
                           <a:cs typeface="Arial" pitchFamily="34" charset="-120"/>
                         </a:rPr>
-                        <a:t>89%以上</a:t>
+                        <a:t>91%以上</a:t>
                       </a:r>
                       <a:endParaRPr lang="en-US" sz="1000" dirty="0">
                         <a:latin typeface="Arial" charset="0"/>
@@ -3878,7 +3878,7 @@
                           <a:ea typeface="Arial" pitchFamily="34" charset="-122"/>
                           <a:cs typeface="Arial" pitchFamily="34" charset="-120"/>
                         </a:rPr>
-                        <a:t>0.8%</a:t>
+                        <a:t>1.5%</a:t>
                       </a:r>
                       <a:endParaRPr lang="en-US" sz="1000" dirty="0">
                         <a:latin typeface="Arial" charset="0"/>
@@ -4152,7 +4152,7 @@
                           <a:ea typeface="Arial" pitchFamily="34" charset="-122"/>
                           <a:cs typeface="Arial" pitchFamily="34" charset="-120"/>
                         </a:rPr>
-                        <a:t>8.0点</a:t>
+                        <a:t>7.9点</a:t>
                       </a:r>
                       <a:endParaRPr lang="en-US" sz="1000" dirty="0">
                         <a:latin typeface="Arial" charset="0"/>
@@ -4220,7 +4220,7 @@
                           <a:ea typeface="Arial" pitchFamily="34" charset="-122"/>
                           <a:cs typeface="Arial" pitchFamily="34" charset="-120"/>
                         </a:rPr>
-                        <a:t>9.0点以上</a:t>
+                        <a:t>8.9点以上</a:t>
                       </a:r>
                       <a:endParaRPr lang="en-US" sz="1000" dirty="0">
                         <a:latin typeface="Arial" charset="0"/>
@@ -4700,7 +4700,7 @@
                           <a:ea typeface="Arial" pitchFamily="34" charset="-122"/>
                           <a:cs typeface="Arial" pitchFamily="34" charset="-120"/>
                         </a:rPr>
-                        <a:t>約16件/期間</a:t>
+                        <a:t>約7件/期間</a:t>
                       </a:r>
                       <a:endParaRPr lang="en-US" sz="1000" dirty="0">
                         <a:latin typeface="Arial" charset="0"/>
@@ -4768,7 +4768,7 @@
                           <a:ea typeface="Arial" pitchFamily="34" charset="-122"/>
                           <a:cs typeface="Arial" pitchFamily="34" charset="-120"/>
                         </a:rPr>
-                        <a:t>8件以下</a:t>
+                        <a:t>3件以下</a:t>
                       </a:r>
                       <a:endParaRPr lang="en-US" sz="1000" dirty="0">
                         <a:latin typeface="Arial" charset="0"/>
@@ -5339,7 +5339,7 @@
                 <a:ea typeface="Arial" pitchFamily="34" charset="-122"/>
                 <a:cs typeface="Arial" pitchFamily="34" charset="-120"/>
               </a:rPr>
-              <a:t>8.83</a:t>
+              <a:t>8.82</a:t>
             </a:r>
             <a:endParaRPr lang="en-US" sz="3200" dirty="0"/>
           </a:p>
@@ -5464,7 +5464,7 @@
                 <a:ea typeface="Arial" pitchFamily="34" charset="-122"/>
                 <a:cs typeface="Arial" pitchFamily="34" charset="-120"/>
               </a:rPr>
-              <a:t>84.1%</a:t>
+              <a:t>86.2%</a:t>
             </a:r>
             <a:endParaRPr lang="en-US" sz="3200" dirty="0"/>
           </a:p>
@@ -5589,7 +5589,7 @@
                 <a:ea typeface="Arial" pitchFamily="34" charset="-122"/>
                 <a:cs typeface="Arial" pitchFamily="34" charset="-120"/>
               </a:rPr>
-              <a:t>0.8%</a:t>
+              <a:t>1.5%</a:t>
             </a:r>
             <a:endParaRPr lang="en-US" sz="3200" dirty="0"/>
           </a:p>
@@ -5714,7 +5714,7 @@
                 <a:ea typeface="Arial" pitchFamily="34" charset="-122"/>
                 <a:cs typeface="Arial" pitchFamily="34" charset="-120"/>
               </a:rPr>
-              <a:t>132件</a:t>
+              <a:t>65件</a:t>
             </a:r>
             <a:endParaRPr lang="en-US" sz="3200" dirty="0"/>
           </a:p>
@@ -6523,7 +6523,7 @@
                 <a:ea typeface="Arial" pitchFamily="34" charset="-122"/>
                 <a:cs typeface="Arial" pitchFamily="34" charset="-120"/>
               </a:rPr>
-              <a:t>8.83</a:t>
+              <a:t>8.82</a:t>
             </a:r>
             <a:endParaRPr lang="en-US" sz="3200" dirty="0"/>
           </a:p>
@@ -6648,7 +6648,7 @@
                 <a:ea typeface="Arial" pitchFamily="34" charset="-122"/>
                 <a:cs typeface="Arial" pitchFamily="34" charset="-120"/>
               </a:rPr>
-              <a:t>84.1%</a:t>
+              <a:t>86.2%</a:t>
             </a:r>
             <a:endParaRPr lang="en-US" sz="3200" dirty="0"/>
           </a:p>
@@ -6773,7 +6773,7 @@
                 <a:ea typeface="Arial" pitchFamily="34" charset="-122"/>
                 <a:cs typeface="Arial" pitchFamily="34" charset="-120"/>
               </a:rPr>
-              <a:t>0.8%</a:t>
+              <a:t>1.5%</a:t>
             </a:r>
             <a:endParaRPr lang="en-US" sz="3200" dirty="0"/>
           </a:p>
@@ -6898,7 +6898,7 @@
                 <a:ea typeface="Arial" pitchFamily="34" charset="-122"/>
                 <a:cs typeface="Arial" pitchFamily="34" charset="-120"/>
               </a:rPr>
-              <a:t>132件</a:t>
+              <a:t>65件</a:t>
             </a:r>
             <a:endParaRPr lang="en-US" sz="3200" dirty="0"/>
           </a:p>
@@ -7319,7 +7319,7 @@
                 <a:ea typeface="Arial" pitchFamily="34" charset="-122"/>
                 <a:cs typeface="Arial" pitchFamily="34" charset="-120"/>
               </a:rPr>
-              <a:t>Google(9.62)が最高スコア。</a:t>
+              <a:t>じゃらん(9.50)が最高スコア。</a:t>
             </a:r>
             <a:endParaRPr lang="en-US" sz="1100" dirty="0"/>
           </a:p>
@@ -7368,7 +7368,7 @@
                 <a:ea typeface="Arial" pitchFamily="34" charset="-122"/>
                 <a:cs typeface="Arial" pitchFamily="34" charset="-120"/>
               </a:rPr>
-              <a:t>Agoda(8.0)が相対的に低い。口コミ返信の強化が急務</a:t>
+              <a:t>Agoda(7.9)が相対的に低い。口コミ返信の強化が急務</a:t>
             </a:r>
             <a:endParaRPr lang="en-US" sz="1100" dirty="0"/>
           </a:p>
@@ -7809,7 +7809,7 @@
                           <a:ea typeface="Arial" pitchFamily="34" charset="-122"/>
                           <a:cs typeface="Arial" pitchFamily="34" charset="-120"/>
                         </a:rPr>
-                        <a:t>Google</a:t>
+                        <a:t>じゃらん</a:t>
                       </a:r>
                       <a:endParaRPr lang="en-US" sz="900" dirty="0">
                         <a:latin typeface="Arial" charset="0"/>
@@ -7877,7 +7877,7 @@
                           <a:ea typeface="Arial" pitchFamily="34" charset="-122"/>
                           <a:cs typeface="Arial" pitchFamily="34" charset="-120"/>
                         </a:rPr>
-                        <a:t>16</a:t>
+                        <a:t>4</a:t>
                       </a:r>
                       <a:endParaRPr lang="en-US" sz="900" dirty="0">
                         <a:latin typeface="Arial" charset="0"/>
@@ -7945,7 +7945,7 @@
                           <a:ea typeface="Arial" pitchFamily="34" charset="-122"/>
                           <a:cs typeface="Arial" pitchFamily="34" charset="-120"/>
                         </a:rPr>
-                        <a:t>4.81</a:t>
+                        <a:t>4.75</a:t>
                       </a:r>
                       <a:endParaRPr lang="en-US" sz="900" dirty="0">
                         <a:latin typeface="Arial" charset="0"/>
@@ -8081,7 +8081,7 @@
                           <a:ea typeface="Arial" pitchFamily="34" charset="-122"/>
                           <a:cs typeface="Arial" pitchFamily="34" charset="-120"/>
                         </a:rPr>
-                        <a:t>9.62</a:t>
+                        <a:t>9.5</a:t>
                       </a:r>
                       <a:endParaRPr lang="en-US" sz="900" dirty="0">
                         <a:latin typeface="Arial" charset="0"/>
@@ -8151,7 +8151,7 @@
                           <a:ea typeface="Arial" pitchFamily="34" charset="-122"/>
                           <a:cs typeface="Arial" pitchFamily="34" charset="-120"/>
                         </a:rPr>
-                        <a:t>じゃらん</a:t>
+                        <a:t>楽天トラベル</a:t>
                       </a:r>
                       <a:endParaRPr lang="en-US" sz="900" dirty="0">
                         <a:latin typeface="Arial" charset="0"/>
@@ -8287,7 +8287,7 @@
                           <a:ea typeface="Arial" pitchFamily="34" charset="-122"/>
                           <a:cs typeface="Arial" pitchFamily="34" charset="-120"/>
                         </a:rPr>
-                        <a:t>4.64</a:t>
+                        <a:t>4.73</a:t>
                       </a:r>
                       <a:endParaRPr lang="en-US" sz="900" dirty="0">
                         <a:latin typeface="Arial" charset="0"/>
@@ -8423,7 +8423,7 @@
                           <a:ea typeface="Arial" pitchFamily="34" charset="-122"/>
                           <a:cs typeface="Arial" pitchFamily="34" charset="-120"/>
                         </a:rPr>
-                        <a:t>9.27</a:t>
+                        <a:t>9.45</a:t>
                       </a:r>
                       <a:endParaRPr lang="en-US" sz="900" dirty="0">
                         <a:latin typeface="Arial" charset="0"/>
@@ -8493,7 +8493,7 @@
                           <a:ea typeface="Arial" pitchFamily="34" charset="-122"/>
                           <a:cs typeface="Arial" pitchFamily="34" charset="-120"/>
                         </a:rPr>
-                        <a:t>楽天トラベル</a:t>
+                        <a:t>Google</a:t>
                       </a:r>
                       <a:endParaRPr lang="en-US" sz="900" dirty="0">
                         <a:latin typeface="Arial" charset="0"/>
@@ -8561,7 +8561,7 @@
                           <a:ea typeface="Arial" pitchFamily="34" charset="-122"/>
                           <a:cs typeface="Arial" pitchFamily="34" charset="-120"/>
                         </a:rPr>
-                        <a:t>18</a:t>
+                        <a:t>7</a:t>
                       </a:r>
                       <a:endParaRPr lang="en-US" sz="900" dirty="0">
                         <a:latin typeface="Arial" charset="0"/>
@@ -8629,7 +8629,7 @@
                           <a:ea typeface="Arial" pitchFamily="34" charset="-122"/>
                           <a:cs typeface="Arial" pitchFamily="34" charset="-120"/>
                         </a:rPr>
-                        <a:t>4.61</a:t>
+                        <a:t>4.71</a:t>
                       </a:r>
                       <a:endParaRPr lang="en-US" sz="900" dirty="0">
                         <a:latin typeface="Arial" charset="0"/>
@@ -8765,7 +8765,7 @@
                           <a:ea typeface="Arial" pitchFamily="34" charset="-122"/>
                           <a:cs typeface="Arial" pitchFamily="34" charset="-120"/>
                         </a:rPr>
-                        <a:t>9.22</a:t>
+                        <a:t>9.43</a:t>
                       </a:r>
                       <a:endParaRPr lang="en-US" sz="900" dirty="0">
                         <a:latin typeface="Arial" charset="0"/>
@@ -8903,7 +8903,7 @@
                           <a:ea typeface="Arial" pitchFamily="34" charset="-122"/>
                           <a:cs typeface="Arial" pitchFamily="34" charset="-120"/>
                         </a:rPr>
-                        <a:t>24</a:t>
+                        <a:t>10</a:t>
                       </a:r>
                       <a:endParaRPr lang="en-US" sz="900" dirty="0">
                         <a:latin typeface="Arial" charset="0"/>
@@ -8971,7 +8971,7 @@
                           <a:ea typeface="Arial" pitchFamily="34" charset="-122"/>
                           <a:cs typeface="Arial" pitchFamily="34" charset="-120"/>
                         </a:rPr>
-                        <a:t>9.12</a:t>
+                        <a:t>9</a:t>
                       </a:r>
                       <a:endParaRPr lang="en-US" sz="900" dirty="0">
                         <a:latin typeface="Arial" charset="0"/>
@@ -9107,7 +9107,7 @@
                           <a:ea typeface="Arial" pitchFamily="34" charset="-122"/>
                           <a:cs typeface="Arial" pitchFamily="34" charset="-120"/>
                         </a:rPr>
-                        <a:t>9.12</a:t>
+                        <a:t>9</a:t>
                       </a:r>
                       <a:endParaRPr lang="en-US" sz="900" dirty="0">
                         <a:latin typeface="Arial" charset="0"/>
@@ -9245,7 +9245,7 @@
                           <a:ea typeface="Arial" pitchFamily="34" charset="-122"/>
                           <a:cs typeface="Arial" pitchFamily="34" charset="-120"/>
                         </a:rPr>
-                        <a:t>30</a:t>
+                        <a:t>17</a:t>
                       </a:r>
                       <a:endParaRPr lang="en-US" sz="900" dirty="0">
                         <a:latin typeface="Arial" charset="0"/>
@@ -9313,7 +9313,7 @@
                           <a:ea typeface="Arial" pitchFamily="34" charset="-122"/>
                           <a:cs typeface="Arial" pitchFamily="34" charset="-120"/>
                         </a:rPr>
-                        <a:t>8.7</a:t>
+                        <a:t>8.76</a:t>
                       </a:r>
                       <a:endParaRPr lang="en-US" sz="900" dirty="0">
                         <a:latin typeface="Arial" charset="0"/>
@@ -9449,7 +9449,7 @@
                           <a:ea typeface="Arial" pitchFamily="34" charset="-122"/>
                           <a:cs typeface="Arial" pitchFamily="34" charset="-120"/>
                         </a:rPr>
-                        <a:t>8.7</a:t>
+                        <a:t>8.76</a:t>
                       </a:r>
                       <a:endParaRPr lang="en-US" sz="900" dirty="0">
                         <a:latin typeface="Arial" charset="0"/>
@@ -9587,7 +9587,7 @@
                           <a:ea typeface="Arial" pitchFamily="34" charset="-122"/>
                           <a:cs typeface="Arial" pitchFamily="34" charset="-120"/>
                         </a:rPr>
-                        <a:t>33</a:t>
+                        <a:t>16</a:t>
                       </a:r>
                       <a:endParaRPr lang="en-US" sz="900" dirty="0">
                         <a:latin typeface="Arial" charset="0"/>
@@ -9655,7 +9655,7 @@
                           <a:ea typeface="Arial" pitchFamily="34" charset="-122"/>
                           <a:cs typeface="Arial" pitchFamily="34" charset="-120"/>
                         </a:rPr>
-                        <a:t>8</a:t>
+                        <a:t>7.88</a:t>
                       </a:r>
                       <a:endParaRPr lang="en-US" sz="900" dirty="0">
                         <a:latin typeface="Arial" charset="0"/>
@@ -9791,7 +9791,7 @@
                           <a:ea typeface="Arial" pitchFamily="34" charset="-122"/>
                           <a:cs typeface="Arial" pitchFamily="34" charset="-120"/>
                         </a:rPr>
-                        <a:t>8</a:t>
+                        <a:t>7.88</a:t>
                       </a:r>
                       <a:endParaRPr lang="en-US" sz="900" dirty="0">
                         <a:latin typeface="Arial" charset="0"/>
@@ -10199,7 +10199,7 @@
                 <a:ea typeface="Arial" pitchFamily="34" charset="-122"/>
                 <a:cs typeface="Arial" pitchFamily="34" charset="-120"/>
               </a:rPr>
-              <a:t>111件（84.1%）</a:t>
+              <a:t>56件（86.2%）</a:t>
             </a:r>
             <a:endParaRPr lang="en-US" sz="1100" dirty="0"/>
           </a:p>
@@ -10297,7 +10297,7 @@
                 <a:ea typeface="Arial" pitchFamily="34" charset="-122"/>
                 <a:cs typeface="Arial" pitchFamily="34" charset="-120"/>
               </a:rPr>
-              <a:t>20件（15.2%）</a:t>
+              <a:t>8件（12.3%）</a:t>
             </a:r>
             <a:endParaRPr lang="en-US" sz="1100" dirty="0"/>
           </a:p>
@@ -10395,7 +10395,7 @@
                 <a:ea typeface="Arial" pitchFamily="34" charset="-122"/>
                 <a:cs typeface="Arial" pitchFamily="34" charset="-120"/>
               </a:rPr>
-              <a:t>1件（0.8%）</a:t>
+              <a:t>1件（1.5%）</a:t>
             </a:r>
             <a:endParaRPr lang="en-US" sz="1100" dirty="0"/>
           </a:p>
@@ -10729,7 +10729,7 @@
                 <a:ea typeface="Arial" pitchFamily="34" charset="-122"/>
                 <a:cs typeface="Arial" pitchFamily="34" charset="-120"/>
               </a:rPr>
-              <a:t>50件+</a:t>
+              <a:t>20件+</a:t>
             </a:r>
             <a:endParaRPr lang="en-US" sz="900" dirty="0"/>
           </a:p>
@@ -10952,7 +10952,7 @@
                 <a:ea typeface="Arial" pitchFamily="34" charset="-122"/>
                 <a:cs typeface="Arial" pitchFamily="34" charset="-120"/>
               </a:rPr>
-              <a:t>50件+</a:t>
+              <a:t>20件+</a:t>
             </a:r>
             <a:endParaRPr lang="en-US" sz="900" dirty="0"/>
           </a:p>
@@ -11398,7 +11398,7 @@
                 <a:ea typeface="Arial" pitchFamily="34" charset="-122"/>
                 <a:cs typeface="Arial" pitchFamily="34" charset="-120"/>
               </a:rPr>
-              <a:t>20件+</a:t>
+              <a:t>10件+</a:t>
             </a:r>
             <a:endParaRPr lang="en-US" sz="900" dirty="0"/>
           </a:p>
@@ -11621,7 +11621,7 @@
                 <a:ea typeface="Arial" pitchFamily="34" charset="-122"/>
                 <a:cs typeface="Arial" pitchFamily="34" charset="-120"/>
               </a:rPr>
-              <a:t>20件+</a:t>
+              <a:t>10件+</a:t>
             </a:r>
             <a:endParaRPr lang="en-US" sz="900" dirty="0"/>
           </a:p>
@@ -11844,7 +11844,7 @@
                 <a:ea typeface="Arial" pitchFamily="34" charset="-122"/>
                 <a:cs typeface="Arial" pitchFamily="34" charset="-120"/>
               </a:rPr>
-              <a:t>10件+</a:t>
+              <a:t>7件</a:t>
             </a:r>
             <a:endParaRPr lang="en-US" sz="900" dirty="0"/>
           </a:p>
@@ -11883,7 +11883,7 @@
                 <a:ea typeface="Arial" pitchFamily="34" charset="-122"/>
                 <a:cs typeface="Arial" pitchFamily="34" charset="-120"/>
               </a:rPr>
-              <a:t>コンビニ・周辺施設</a:t>
+              <a:t>コストパフォーマンス</a:t>
             </a:r>
             <a:endParaRPr lang="en-US" sz="1300" dirty="0"/>
           </a:p>
@@ -11922,7 +11922,7 @@
                 <a:ea typeface="Arial" pitchFamily="34" charset="-122"/>
                 <a:cs typeface="Arial" pitchFamily="34" charset="-120"/>
               </a:rPr>
-              <a:t>com ホテルには近代的な設備、快適な浴場があり、近隣には様々なコンビニエンスストアもあります</a:t>
+              <a:t>リーズナブルな時期もあってか、価格帯も大満足です</a:t>
             </a:r>
             <a:endParaRPr lang="en-US" sz="900" dirty="0"/>
           </a:p>
@@ -11961,7 +11961,7 @@
                 <a:ea typeface="Arial" pitchFamily="34" charset="-122"/>
                 <a:cs typeface="Arial" pitchFamily="34" charset="-120"/>
               </a:rPr>
-              <a:t>「正門南口から徒歩5分、ローソンの向かいに位置し、ドン・キホーテのショッピング街まで徒歩12分以内です」</a:t>
+              <a:t>「シングルルームは少し狭いですが、内装は素晴らしく、東京の桜シーズンと比べると料金もリーズナブルです」</a:t>
             </a:r>
             <a:endParaRPr lang="en-US" sz="900" dirty="0"/>
           </a:p>
@@ -12719,7 +12719,7 @@
                           <a:ea typeface="Arial" pitchFamily="34" charset="-122"/>
                           <a:cs typeface="Arial" pitchFamily="34" charset="-120"/>
                         </a:rPr>
-                        <a:t>16件</a:t>
+                        <a:t>7件</a:t>
                       </a:r>
                       <a:endParaRPr lang="en-US" sz="900" dirty="0">
                         <a:latin typeface="Arial" charset="0"/>
@@ -12993,7 +12993,7 @@
                           <a:ea typeface="Arial" pitchFamily="34" charset="-122"/>
                           <a:cs typeface="Arial" pitchFamily="34" charset="-120"/>
                         </a:rPr>
-                        <a:t>13件</a:t>
+                        <a:t>6件</a:t>
                       </a:r>
                       <a:endParaRPr lang="en-US" sz="900" dirty="0">
                         <a:latin typeface="Arial" charset="0"/>
@@ -13405,7 +13405,7 @@
                           <a:ea typeface="Arial" pitchFamily="34" charset="-122"/>
                           <a:cs typeface="Arial" pitchFamily="34" charset="-120"/>
                         </a:rPr>
-                        <a:t>対応・サービスの不満</a:t>
+                        <a:t>エアコン・空調</a:t>
                       </a:r>
                       <a:endParaRPr lang="en-US" sz="900" dirty="0">
                         <a:latin typeface="Arial" charset="0"/>
@@ -13473,7 +13473,7 @@
                           <a:ea typeface="Arial" pitchFamily="34" charset="-122"/>
                           <a:cs typeface="Arial" pitchFamily="34" charset="-120"/>
                         </a:rPr>
-                        <a:t>大浴場のシャワーが少なく、空くのを待たないといけないのが残念でした</a:t>
+                        <a:t>夜部屋が寒かったので、暖房を入れようとしたら、個人では設定できなかったこと</a:t>
                       </a:r>
                       <a:endParaRPr lang="en-US" sz="900" dirty="0">
                         <a:latin typeface="Arial" charset="0"/>
@@ -13541,7 +13541,7 @@
                           <a:ea typeface="Arial" pitchFamily="34" charset="-122"/>
                           <a:cs typeface="Arial" pitchFamily="34" charset="-120"/>
                         </a:rPr>
-                        <a:t>5件</a:t>
+                        <a:t>3件</a:t>
                       </a:r>
                       <a:endParaRPr lang="en-US" sz="900" dirty="0">
                         <a:latin typeface="Arial" charset="0"/>
@@ -13679,7 +13679,7 @@
                           <a:ea typeface="Arial" pitchFamily="34" charset="-122"/>
                           <a:cs typeface="Arial" pitchFamily="34" charset="-120"/>
                         </a:rPr>
-                        <a:t>臭い・匂い</a:t>
+                        <a:t>対応・サービスの不満</a:t>
                       </a:r>
                       <a:endParaRPr lang="en-US" sz="900" dirty="0">
                         <a:latin typeface="Arial" charset="0"/>
@@ -13747,7 +13747,7 @@
                           <a:ea typeface="Arial" pitchFamily="34" charset="-122"/>
                           <a:cs typeface="Arial" pitchFamily="34" charset="-120"/>
                         </a:rPr>
-                        <a:t>Agoda 部屋がタバコ臭かったのですが、こちらのミスで喫煙室を予約してしまっていたようでした</a:t>
+                        <a:t>大浴場のシャワーが少なく、空くのを待たないといけないのが残念でした</a:t>
                       </a:r>
                       <a:endParaRPr lang="en-US" sz="900" dirty="0">
                         <a:latin typeface="Arial" charset="0"/>
@@ -13953,7 +13953,7 @@
                           <a:ea typeface="Arial" pitchFamily="34" charset="-122"/>
                           <a:cs typeface="Arial" pitchFamily="34" charset="-120"/>
                         </a:rPr>
-                        <a:t>エアコン・空調</a:t>
+                        <a:t>設備の老朽化</a:t>
                       </a:r>
                       <a:endParaRPr lang="en-US" sz="900" dirty="0">
                         <a:latin typeface="Arial" charset="0"/>
@@ -14021,7 +14021,7 @@
                           <a:ea typeface="Arial" pitchFamily="34" charset="-122"/>
                           <a:cs typeface="Arial" pitchFamily="34" charset="-120"/>
                         </a:rPr>
-                        <a:t>夜部屋が寒かったので、暖房を入れようとしたら、個人では設定できなかったこと</a:t>
+                        <a:t>Google 築年数が浅くおしゃれできれいです</a:t>
                       </a:r>
                       <a:endParaRPr lang="en-US" sz="900" dirty="0">
                         <a:latin typeface="Arial" charset="0"/>
@@ -14089,7 +14089,7 @@
                           <a:ea typeface="Arial" pitchFamily="34" charset="-122"/>
                           <a:cs typeface="Arial" pitchFamily="34" charset="-120"/>
                         </a:rPr>
-                        <a:t>3件</a:t>
+                        <a:t>1件</a:t>
                       </a:r>
                       <a:endParaRPr lang="en-US" sz="900" dirty="0">
                         <a:latin typeface="Arial" charset="0"/>
@@ -14227,7 +14227,7 @@
                           <a:ea typeface="Arial" pitchFamily="34" charset="-122"/>
                           <a:cs typeface="Arial" pitchFamily="34" charset="-120"/>
                         </a:rPr>
-                        <a:t>窓・採光</a:t>
+                        <a:t>臭い・匂い</a:t>
                       </a:r>
                       <a:endParaRPr lang="en-US" sz="900" dirty="0">
                         <a:latin typeface="Arial" charset="0"/>
@@ -14295,7 +14295,7 @@
                           <a:ea typeface="Arial" pitchFamily="34" charset="-122"/>
                           <a:cs typeface="Arial" pitchFamily="34" charset="-120"/>
                         </a:rPr>
-                        <a:t>景色は向かい側がオフィスビルだから カーテンは開けられない</a:t>
+                        <a:t>Agoda 部屋がタバコ臭かったのですが、こちらのミスで喫煙室を予約してしまっていたようでした</a:t>
                       </a:r>
                       <a:endParaRPr lang="en-US" sz="900" dirty="0">
                         <a:latin typeface="Arial" charset="0"/>
@@ -14363,7 +14363,7 @@
                           <a:ea typeface="Arial" pitchFamily="34" charset="-122"/>
                           <a:cs typeface="Arial" pitchFamily="34" charset="-120"/>
                         </a:rPr>
-                        <a:t>2件</a:t>
+                        <a:t>1件</a:t>
                       </a:r>
                       <a:endParaRPr lang="en-US" sz="900" dirty="0">
                         <a:latin typeface="Arial" charset="0"/>
@@ -14501,7 +14501,7 @@
                           <a:ea typeface="Arial" pitchFamily="34" charset="-122"/>
                           <a:cs typeface="Arial" pitchFamily="34" charset="-120"/>
                         </a:rPr>
-                        <a:t>設備の老朽化</a:t>
+                        <a:t>朝食の改善要望</a:t>
                       </a:r>
                       <a:endParaRPr lang="en-US" sz="900" dirty="0">
                         <a:latin typeface="Arial" charset="0"/>
@@ -14569,7 +14569,7 @@
                           <a:ea typeface="Arial" pitchFamily="34" charset="-122"/>
                           <a:cs typeface="Arial" pitchFamily="34" charset="-120"/>
                         </a:rPr>
-                        <a:t>Google 築年数が浅くおしゃれできれいです</a:t>
+                        <a:t>朝食に関しては、ボリューム・品数・美味しさ満点です</a:t>
                       </a:r>
                       <a:endParaRPr lang="en-US" sz="900" dirty="0">
                         <a:latin typeface="Arial" charset="0"/>
@@ -14775,7 +14775,7 @@
                           <a:ea typeface="Arial" pitchFamily="34" charset="-122"/>
                           <a:cs typeface="Arial" pitchFamily="34" charset="-120"/>
                         </a:rPr>
-                        <a:t>朝食の改善要望</a:t>
+                        <a:t>窓・採光</a:t>
                       </a:r>
                       <a:endParaRPr lang="en-US" sz="900" dirty="0">
                         <a:latin typeface="Arial" charset="0"/>
@@ -14843,7 +14843,7 @@
                           <a:ea typeface="Arial" pitchFamily="34" charset="-122"/>
                           <a:cs typeface="Arial" pitchFamily="34" charset="-120"/>
                         </a:rPr>
-                        <a:t>朝食に関しては、ボリューム・品数・美味しさ満点です</a:t>
+                        <a:t>景色は向かい側がオフィスビルだから カーテンは開けられない</a:t>
                       </a:r>
                       <a:endParaRPr lang="en-US" sz="900" dirty="0">
                         <a:latin typeface="Arial" charset="0"/>

--- a/納品レポート/ホテル別レポート/comment_yokohama_口コミ分析レポート.pptx
+++ b/納品レポート/ホテル別レポート/comment_yokohama_口コミ分析レポート.pptx
@@ -2784,7 +2784,7 @@
                 <a:ea typeface="Arial" pitchFamily="34" charset="-122"/>
                 <a:cs typeface="Arial" pitchFamily="34" charset="-120"/>
               </a:rPr>
-              <a:t>作成日：2026年4月13日</a:t>
+              <a:t>作成日：2026年4月15日</a:t>
             </a:r>
             <a:endParaRPr lang="en-US" sz="1000" dirty="0"/>
           </a:p>

--- a/納品レポート/ホテル別レポート/comment_yokohama_口コミ分析レポート.pptx
+++ b/納品レポート/ホテル別レポート/comment_yokohama_口コミ分析レポート.pptx
@@ -180,13 +180,13 @@
                 <c:ptCount val="6"/>
                 <c:lvl>
                   <c:pt idx="0">
-                    <c:v>Google</c:v>
+                    <c:v>じゃらん</c:v>
                   </c:pt>
                   <c:pt idx="1">
-                    <c:v>じゃらん</c:v>
+                    <c:v>楽天トラベル</c:v>
                   </c:pt>
                   <c:pt idx="2">
-                    <c:v>楽天トラベル</c:v>
+                    <c:v>Google</c:v>
                   </c:pt>
                   <c:pt idx="3">
                     <c:v>Trip.com</c:v>
@@ -208,22 +208,22 @@
                 <c:formatCode>General</c:formatCode>
                 <c:ptCount val="6"/>
                 <c:pt idx="0">
-                  <c:v>9.62</c:v>
+                  <c:v>9.5</c:v>
                 </c:pt>
                 <c:pt idx="1">
-                  <c:v>9.27</c:v>
+                  <c:v>9.45</c:v>
                 </c:pt>
                 <c:pt idx="2">
-                  <c:v>9.22</c:v>
+                  <c:v>9.43</c:v>
                 </c:pt>
                 <c:pt idx="3">
-                  <c:v>9.12</c:v>
+                  <c:v>9</c:v>
                 </c:pt>
                 <c:pt idx="4">
-                  <c:v>8.7</c:v>
+                  <c:v>8.76</c:v>
                 </c:pt>
                 <c:pt idx="5">
-                  <c:v>8</c:v>
+                  <c:v>7.88</c:v>
                 </c:pt>
               </c:numCache>
             </c:numRef>
@@ -566,10 +566,10 @@
               <c:numCache>
                 <c:ptCount val="3"/>
                 <c:pt idx="0">
-                  <c:v>111</c:v>
+                  <c:v>56</c:v>
                 </c:pt>
                 <c:pt idx="1">
-                  <c:v>20</c:v>
+                  <c:v>8</c:v>
                 </c:pt>
                 <c:pt idx="2">
                   <c:v>1</c:v>
@@ -795,19 +795,19 @@
                 <c:formatCode>General</c:formatCode>
                 <c:ptCount val="7"/>
                 <c:pt idx="0">
-                  <c:v>62</c:v>
+                  <c:v>30</c:v>
                 </c:pt>
                 <c:pt idx="1">
-                  <c:v>22</c:v>
+                  <c:v>12</c:v>
                 </c:pt>
                 <c:pt idx="2">
-                  <c:v>27</c:v>
+                  <c:v>14</c:v>
                 </c:pt>
                 <c:pt idx="3">
-                  <c:v>11</c:v>
+                  <c:v>4</c:v>
                 </c:pt>
                 <c:pt idx="4">
-                  <c:v>7</c:v>
+                  <c:v>2</c:v>
                 </c:pt>
                 <c:pt idx="5">
                   <c:v>2</c:v>
@@ -2744,7 +2744,7 @@
                 <a:ea typeface="Arial" pitchFamily="34" charset="-122"/>
                 <a:cs typeface="Arial" pitchFamily="34" charset="-120"/>
               </a:rPr>
-              <a:t>分析対象期間：2026年2月〜3月</a:t>
+              <a:t>分析対象期間：2026年3月</a:t>
             </a:r>
             <a:endParaRPr lang="en-US" sz="1000" dirty="0"/>
           </a:p>
@@ -2764,7 +2764,7 @@
                 <a:ea typeface="Arial" pitchFamily="34" charset="-122"/>
                 <a:cs typeface="Arial" pitchFamily="34" charset="-120"/>
               </a:rPr>
-              <a:t>レビュー総数：132件（6サイト）</a:t>
+              <a:t>レビュー総数：65件（6サイト）</a:t>
             </a:r>
             <a:endParaRPr lang="en-US" sz="1000" dirty="0"/>
           </a:p>
@@ -2784,7 +2784,7 @@
                 <a:ea typeface="Arial" pitchFamily="34" charset="-122"/>
                 <a:cs typeface="Arial" pitchFamily="34" charset="-120"/>
               </a:rPr>
-              <a:t>作成日：2026年4月16日</a:t>
+              <a:t>作成日：2026年4月20日</a:t>
             </a:r>
             <a:endParaRPr lang="en-US" sz="1000" dirty="0"/>
           </a:p>
@@ -3330,7 +3330,7 @@
                           <a:ea typeface="Arial" pitchFamily="34" charset="-122"/>
                           <a:cs typeface="Arial" pitchFamily="34" charset="-120"/>
                         </a:rPr>
-                        <a:t>8.83点</a:t>
+                        <a:t>8.82点</a:t>
                       </a:r>
                       <a:endParaRPr lang="en-US" sz="1000" dirty="0">
                         <a:latin typeface="Arial" charset="0"/>
@@ -3604,7 +3604,7 @@
                           <a:ea typeface="Arial" pitchFamily="34" charset="-122"/>
                           <a:cs typeface="Arial" pitchFamily="34" charset="-120"/>
                         </a:rPr>
-                        <a:t>84.1%</a:t>
+                        <a:t>86.2%</a:t>
                       </a:r>
                       <a:endParaRPr lang="en-US" sz="1000" dirty="0">
                         <a:latin typeface="Arial" charset="0"/>
@@ -3672,7 +3672,7 @@
                           <a:ea typeface="Arial" pitchFamily="34" charset="-122"/>
                           <a:cs typeface="Arial" pitchFamily="34" charset="-120"/>
                         </a:rPr>
-                        <a:t>89%以上</a:t>
+                        <a:t>91%以上</a:t>
                       </a:r>
                       <a:endParaRPr lang="en-US" sz="1000" dirty="0">
                         <a:latin typeface="Arial" charset="0"/>
@@ -3878,7 +3878,7 @@
                           <a:ea typeface="Arial" pitchFamily="34" charset="-122"/>
                           <a:cs typeface="Arial" pitchFamily="34" charset="-120"/>
                         </a:rPr>
-                        <a:t>0.8%</a:t>
+                        <a:t>1.5%</a:t>
                       </a:r>
                       <a:endParaRPr lang="en-US" sz="1000" dirty="0">
                         <a:latin typeface="Arial" charset="0"/>
@@ -4152,7 +4152,7 @@
                           <a:ea typeface="Arial" pitchFamily="34" charset="-122"/>
                           <a:cs typeface="Arial" pitchFamily="34" charset="-120"/>
                         </a:rPr>
-                        <a:t>8.0点</a:t>
+                        <a:t>7.9点</a:t>
                       </a:r>
                       <a:endParaRPr lang="en-US" sz="1000" dirty="0">
                         <a:latin typeface="Arial" charset="0"/>
@@ -4220,7 +4220,7 @@
                           <a:ea typeface="Arial" pitchFamily="34" charset="-122"/>
                           <a:cs typeface="Arial" pitchFamily="34" charset="-120"/>
                         </a:rPr>
-                        <a:t>9.0点以上</a:t>
+                        <a:t>8.9点以上</a:t>
                       </a:r>
                       <a:endParaRPr lang="en-US" sz="1000" dirty="0">
                         <a:latin typeface="Arial" charset="0"/>
@@ -4700,7 +4700,7 @@
                           <a:ea typeface="Arial" pitchFamily="34" charset="-122"/>
                           <a:cs typeface="Arial" pitchFamily="34" charset="-120"/>
                         </a:rPr>
-                        <a:t>約16件/期間</a:t>
+                        <a:t>約7件/期間</a:t>
                       </a:r>
                       <a:endParaRPr lang="en-US" sz="1000" dirty="0">
                         <a:latin typeface="Arial" charset="0"/>
@@ -4768,7 +4768,7 @@
                           <a:ea typeface="Arial" pitchFamily="34" charset="-122"/>
                           <a:cs typeface="Arial" pitchFamily="34" charset="-120"/>
                         </a:rPr>
-                        <a:t>8件以下</a:t>
+                        <a:t>3件以下</a:t>
                       </a:r>
                       <a:endParaRPr lang="en-US" sz="1000" dirty="0">
                         <a:latin typeface="Arial" charset="0"/>
@@ -5339,7 +5339,7 @@
                 <a:ea typeface="Arial" pitchFamily="34" charset="-122"/>
                 <a:cs typeface="Arial" pitchFamily="34" charset="-120"/>
               </a:rPr>
-              <a:t>8.83</a:t>
+              <a:t>8.82</a:t>
             </a:r>
             <a:endParaRPr lang="en-US" sz="3200" dirty="0"/>
           </a:p>
@@ -5464,7 +5464,7 @@
                 <a:ea typeface="Arial" pitchFamily="34" charset="-122"/>
                 <a:cs typeface="Arial" pitchFamily="34" charset="-120"/>
               </a:rPr>
-              <a:t>84.1%</a:t>
+              <a:t>86.2%</a:t>
             </a:r>
             <a:endParaRPr lang="en-US" sz="3200" dirty="0"/>
           </a:p>
@@ -5589,7 +5589,7 @@
                 <a:ea typeface="Arial" pitchFamily="34" charset="-122"/>
                 <a:cs typeface="Arial" pitchFamily="34" charset="-120"/>
               </a:rPr>
-              <a:t>0.8%</a:t>
+              <a:t>1.5%</a:t>
             </a:r>
             <a:endParaRPr lang="en-US" sz="3200" dirty="0"/>
           </a:p>
@@ -5714,7 +5714,7 @@
                 <a:ea typeface="Arial" pitchFamily="34" charset="-122"/>
                 <a:cs typeface="Arial" pitchFamily="34" charset="-120"/>
               </a:rPr>
-              <a:t>132件</a:t>
+              <a:t>65件</a:t>
             </a:r>
             <a:endParaRPr lang="en-US" sz="3200" dirty="0"/>
           </a:p>
@@ -6523,7 +6523,7 @@
                 <a:ea typeface="Arial" pitchFamily="34" charset="-122"/>
                 <a:cs typeface="Arial" pitchFamily="34" charset="-120"/>
               </a:rPr>
-              <a:t>8.83</a:t>
+              <a:t>8.82</a:t>
             </a:r>
             <a:endParaRPr lang="en-US" sz="3200" dirty="0"/>
           </a:p>
@@ -6648,7 +6648,7 @@
                 <a:ea typeface="Arial" pitchFamily="34" charset="-122"/>
                 <a:cs typeface="Arial" pitchFamily="34" charset="-120"/>
               </a:rPr>
-              <a:t>84.1%</a:t>
+              <a:t>86.2%</a:t>
             </a:r>
             <a:endParaRPr lang="en-US" sz="3200" dirty="0"/>
           </a:p>
@@ -6773,7 +6773,7 @@
                 <a:ea typeface="Arial" pitchFamily="34" charset="-122"/>
                 <a:cs typeface="Arial" pitchFamily="34" charset="-120"/>
               </a:rPr>
-              <a:t>0.8%</a:t>
+              <a:t>1.5%</a:t>
             </a:r>
             <a:endParaRPr lang="en-US" sz="3200" dirty="0"/>
           </a:p>
@@ -6898,7 +6898,7 @@
                 <a:ea typeface="Arial" pitchFamily="34" charset="-122"/>
                 <a:cs typeface="Arial" pitchFamily="34" charset="-120"/>
               </a:rPr>
-              <a:t>132件</a:t>
+              <a:t>65件</a:t>
             </a:r>
             <a:endParaRPr lang="en-US" sz="3200" dirty="0"/>
           </a:p>
@@ -7319,7 +7319,7 @@
                 <a:ea typeface="Arial" pitchFamily="34" charset="-122"/>
                 <a:cs typeface="Arial" pitchFamily="34" charset="-120"/>
               </a:rPr>
-              <a:t>Google(9.62)が最高スコア。</a:t>
+              <a:t>じゃらん(9.50)が最高スコア。</a:t>
             </a:r>
             <a:endParaRPr lang="en-US" sz="1100" dirty="0"/>
           </a:p>
@@ -7368,7 +7368,7 @@
                 <a:ea typeface="Arial" pitchFamily="34" charset="-122"/>
                 <a:cs typeface="Arial" pitchFamily="34" charset="-120"/>
               </a:rPr>
-              <a:t>Agoda(8.0)が相対的に低い。口コミ返信の強化が急務</a:t>
+              <a:t>Agoda(7.9)が相対的に低い。口コミ返信の強化が急務</a:t>
             </a:r>
             <a:endParaRPr lang="en-US" sz="1100" dirty="0"/>
           </a:p>
@@ -7809,7 +7809,7 @@
                           <a:ea typeface="Arial" pitchFamily="34" charset="-122"/>
                           <a:cs typeface="Arial" pitchFamily="34" charset="-120"/>
                         </a:rPr>
-                        <a:t>Google</a:t>
+                        <a:t>じゃらん</a:t>
                       </a:r>
                       <a:endParaRPr lang="en-US" sz="900" dirty="0">
                         <a:latin typeface="Arial" charset="0"/>
@@ -7877,7 +7877,7 @@
                           <a:ea typeface="Arial" pitchFamily="34" charset="-122"/>
                           <a:cs typeface="Arial" pitchFamily="34" charset="-120"/>
                         </a:rPr>
-                        <a:t>16</a:t>
+                        <a:t>4</a:t>
                       </a:r>
                       <a:endParaRPr lang="en-US" sz="900" dirty="0">
                         <a:latin typeface="Arial" charset="0"/>
@@ -7945,7 +7945,7 @@
                           <a:ea typeface="Arial" pitchFamily="34" charset="-122"/>
                           <a:cs typeface="Arial" pitchFamily="34" charset="-120"/>
                         </a:rPr>
-                        <a:t>4.81</a:t>
+                        <a:t>4.75</a:t>
                       </a:r>
                       <a:endParaRPr lang="en-US" sz="900" dirty="0">
                         <a:latin typeface="Arial" charset="0"/>
@@ -8081,7 +8081,7 @@
                           <a:ea typeface="Arial" pitchFamily="34" charset="-122"/>
                           <a:cs typeface="Arial" pitchFamily="34" charset="-120"/>
                         </a:rPr>
-                        <a:t>9.62</a:t>
+                        <a:t>9.5</a:t>
                       </a:r>
                       <a:endParaRPr lang="en-US" sz="900" dirty="0">
                         <a:latin typeface="Arial" charset="0"/>
@@ -8151,7 +8151,7 @@
                           <a:ea typeface="Arial" pitchFamily="34" charset="-122"/>
                           <a:cs typeface="Arial" pitchFamily="34" charset="-120"/>
                         </a:rPr>
-                        <a:t>じゃらん</a:t>
+                        <a:t>楽天トラベル</a:t>
                       </a:r>
                       <a:endParaRPr lang="en-US" sz="900" dirty="0">
                         <a:latin typeface="Arial" charset="0"/>
@@ -8287,7 +8287,7 @@
                           <a:ea typeface="Arial" pitchFamily="34" charset="-122"/>
                           <a:cs typeface="Arial" pitchFamily="34" charset="-120"/>
                         </a:rPr>
-                        <a:t>4.64</a:t>
+                        <a:t>4.73</a:t>
                       </a:r>
                       <a:endParaRPr lang="en-US" sz="900" dirty="0">
                         <a:latin typeface="Arial" charset="0"/>
@@ -8423,7 +8423,7 @@
                           <a:ea typeface="Arial" pitchFamily="34" charset="-122"/>
                           <a:cs typeface="Arial" pitchFamily="34" charset="-120"/>
                         </a:rPr>
-                        <a:t>9.27</a:t>
+                        <a:t>9.45</a:t>
                       </a:r>
                       <a:endParaRPr lang="en-US" sz="900" dirty="0">
                         <a:latin typeface="Arial" charset="0"/>
@@ -8493,7 +8493,7 @@
                           <a:ea typeface="Arial" pitchFamily="34" charset="-122"/>
                           <a:cs typeface="Arial" pitchFamily="34" charset="-120"/>
                         </a:rPr>
-                        <a:t>楽天トラベル</a:t>
+                        <a:t>Google</a:t>
                       </a:r>
                       <a:endParaRPr lang="en-US" sz="900" dirty="0">
                         <a:latin typeface="Arial" charset="0"/>
@@ -8561,7 +8561,7 @@
                           <a:ea typeface="Arial" pitchFamily="34" charset="-122"/>
                           <a:cs typeface="Arial" pitchFamily="34" charset="-120"/>
                         </a:rPr>
-                        <a:t>18</a:t>
+                        <a:t>7</a:t>
                       </a:r>
                       <a:endParaRPr lang="en-US" sz="900" dirty="0">
                         <a:latin typeface="Arial" charset="0"/>
@@ -8629,7 +8629,7 @@
                           <a:ea typeface="Arial" pitchFamily="34" charset="-122"/>
                           <a:cs typeface="Arial" pitchFamily="34" charset="-120"/>
                         </a:rPr>
-                        <a:t>4.61</a:t>
+                        <a:t>4.71</a:t>
                       </a:r>
                       <a:endParaRPr lang="en-US" sz="900" dirty="0">
                         <a:latin typeface="Arial" charset="0"/>
@@ -8765,7 +8765,7 @@
                           <a:ea typeface="Arial" pitchFamily="34" charset="-122"/>
                           <a:cs typeface="Arial" pitchFamily="34" charset="-120"/>
                         </a:rPr>
-                        <a:t>9.22</a:t>
+                        <a:t>9.43</a:t>
                       </a:r>
                       <a:endParaRPr lang="en-US" sz="900" dirty="0">
                         <a:latin typeface="Arial" charset="0"/>
@@ -8903,7 +8903,7 @@
                           <a:ea typeface="Arial" pitchFamily="34" charset="-122"/>
                           <a:cs typeface="Arial" pitchFamily="34" charset="-120"/>
                         </a:rPr>
-                        <a:t>24</a:t>
+                        <a:t>10</a:t>
                       </a:r>
                       <a:endParaRPr lang="en-US" sz="900" dirty="0">
                         <a:latin typeface="Arial" charset="0"/>
@@ -8971,7 +8971,7 @@
                           <a:ea typeface="Arial" pitchFamily="34" charset="-122"/>
                           <a:cs typeface="Arial" pitchFamily="34" charset="-120"/>
                         </a:rPr>
-                        <a:t>9.12</a:t>
+                        <a:t>9</a:t>
                       </a:r>
                       <a:endParaRPr lang="en-US" sz="900" dirty="0">
                         <a:latin typeface="Arial" charset="0"/>
@@ -9107,7 +9107,7 @@
                           <a:ea typeface="Arial" pitchFamily="34" charset="-122"/>
                           <a:cs typeface="Arial" pitchFamily="34" charset="-120"/>
                         </a:rPr>
-                        <a:t>9.12</a:t>
+                        <a:t>9</a:t>
                       </a:r>
                       <a:endParaRPr lang="en-US" sz="900" dirty="0">
                         <a:latin typeface="Arial" charset="0"/>
@@ -9245,7 +9245,7 @@
                           <a:ea typeface="Arial" pitchFamily="34" charset="-122"/>
                           <a:cs typeface="Arial" pitchFamily="34" charset="-120"/>
                         </a:rPr>
-                        <a:t>30</a:t>
+                        <a:t>17</a:t>
                       </a:r>
                       <a:endParaRPr lang="en-US" sz="900" dirty="0">
                         <a:latin typeface="Arial" charset="0"/>
@@ -9313,7 +9313,7 @@
                           <a:ea typeface="Arial" pitchFamily="34" charset="-122"/>
                           <a:cs typeface="Arial" pitchFamily="34" charset="-120"/>
                         </a:rPr>
-                        <a:t>8.7</a:t>
+                        <a:t>8.76</a:t>
                       </a:r>
                       <a:endParaRPr lang="en-US" sz="900" dirty="0">
                         <a:latin typeface="Arial" charset="0"/>
@@ -9449,7 +9449,7 @@
                           <a:ea typeface="Arial" pitchFamily="34" charset="-122"/>
                           <a:cs typeface="Arial" pitchFamily="34" charset="-120"/>
                         </a:rPr>
-                        <a:t>8.7</a:t>
+                        <a:t>8.76</a:t>
                       </a:r>
                       <a:endParaRPr lang="en-US" sz="900" dirty="0">
                         <a:latin typeface="Arial" charset="0"/>
@@ -9587,7 +9587,7 @@
                           <a:ea typeface="Arial" pitchFamily="34" charset="-122"/>
                           <a:cs typeface="Arial" pitchFamily="34" charset="-120"/>
                         </a:rPr>
-                        <a:t>33</a:t>
+                        <a:t>16</a:t>
                       </a:r>
                       <a:endParaRPr lang="en-US" sz="900" dirty="0">
                         <a:latin typeface="Arial" charset="0"/>
@@ -9655,7 +9655,7 @@
                           <a:ea typeface="Arial" pitchFamily="34" charset="-122"/>
                           <a:cs typeface="Arial" pitchFamily="34" charset="-120"/>
                         </a:rPr>
-                        <a:t>8</a:t>
+                        <a:t>7.88</a:t>
                       </a:r>
                       <a:endParaRPr lang="en-US" sz="900" dirty="0">
                         <a:latin typeface="Arial" charset="0"/>
@@ -9791,7 +9791,7 @@
                           <a:ea typeface="Arial" pitchFamily="34" charset="-122"/>
                           <a:cs typeface="Arial" pitchFamily="34" charset="-120"/>
                         </a:rPr>
-                        <a:t>8</a:t>
+                        <a:t>7.88</a:t>
                       </a:r>
                       <a:endParaRPr lang="en-US" sz="900" dirty="0">
                         <a:latin typeface="Arial" charset="0"/>
@@ -10199,7 +10199,7 @@
                 <a:ea typeface="Arial" pitchFamily="34" charset="-122"/>
                 <a:cs typeface="Arial" pitchFamily="34" charset="-120"/>
               </a:rPr>
-              <a:t>111件（84.1%）</a:t>
+              <a:t>56件（86.2%）</a:t>
             </a:r>
             <a:endParaRPr lang="en-US" sz="1100" dirty="0"/>
           </a:p>
@@ -10297,7 +10297,7 @@
                 <a:ea typeface="Arial" pitchFamily="34" charset="-122"/>
                 <a:cs typeface="Arial" pitchFamily="34" charset="-120"/>
               </a:rPr>
-              <a:t>20件（15.2%）</a:t>
+              <a:t>8件（12.3%）</a:t>
             </a:r>
             <a:endParaRPr lang="en-US" sz="1100" dirty="0"/>
           </a:p>
@@ -10395,7 +10395,7 @@
                 <a:ea typeface="Arial" pitchFamily="34" charset="-122"/>
                 <a:cs typeface="Arial" pitchFamily="34" charset="-120"/>
               </a:rPr>
-              <a:t>1件（0.8%）</a:t>
+              <a:t>1件（1.5%）</a:t>
             </a:r>
             <a:endParaRPr lang="en-US" sz="1100" dirty="0"/>
           </a:p>
@@ -10729,7 +10729,7 @@
                 <a:ea typeface="Arial" pitchFamily="34" charset="-122"/>
                 <a:cs typeface="Arial" pitchFamily="34" charset="-120"/>
               </a:rPr>
-              <a:t>50件+</a:t>
+              <a:t>20件+</a:t>
             </a:r>
             <a:endParaRPr lang="en-US" sz="900" dirty="0"/>
           </a:p>
@@ -10952,7 +10952,7 @@
                 <a:ea typeface="Arial" pitchFamily="34" charset="-122"/>
                 <a:cs typeface="Arial" pitchFamily="34" charset="-120"/>
               </a:rPr>
-              <a:t>50件+</a:t>
+              <a:t>20件+</a:t>
             </a:r>
             <a:endParaRPr lang="en-US" sz="900" dirty="0"/>
           </a:p>
@@ -11398,7 +11398,7 @@
                 <a:ea typeface="Arial" pitchFamily="34" charset="-122"/>
                 <a:cs typeface="Arial" pitchFamily="34" charset="-120"/>
               </a:rPr>
-              <a:t>20件+</a:t>
+              <a:t>10件+</a:t>
             </a:r>
             <a:endParaRPr lang="en-US" sz="900" dirty="0"/>
           </a:p>
@@ -11621,7 +11621,7 @@
                 <a:ea typeface="Arial" pitchFamily="34" charset="-122"/>
                 <a:cs typeface="Arial" pitchFamily="34" charset="-120"/>
               </a:rPr>
-              <a:t>20件+</a:t>
+              <a:t>10件+</a:t>
             </a:r>
             <a:endParaRPr lang="en-US" sz="900" dirty="0"/>
           </a:p>
@@ -11844,7 +11844,7 @@
                 <a:ea typeface="Arial" pitchFamily="34" charset="-122"/>
                 <a:cs typeface="Arial" pitchFamily="34" charset="-120"/>
               </a:rPr>
-              <a:t>10件+</a:t>
+              <a:t>7件</a:t>
             </a:r>
             <a:endParaRPr lang="en-US" sz="900" dirty="0"/>
           </a:p>
@@ -11883,7 +11883,7 @@
                 <a:ea typeface="Arial" pitchFamily="34" charset="-122"/>
                 <a:cs typeface="Arial" pitchFamily="34" charset="-120"/>
               </a:rPr>
-              <a:t>コンビニ・周辺施設</a:t>
+              <a:t>コストパフォーマンス</a:t>
             </a:r>
             <a:endParaRPr lang="en-US" sz="1300" dirty="0"/>
           </a:p>
@@ -11922,7 +11922,7 @@
                 <a:ea typeface="Arial" pitchFamily="34" charset="-122"/>
                 <a:cs typeface="Arial" pitchFamily="34" charset="-120"/>
               </a:rPr>
-              <a:t>com ホテルには近代的な設備、快適な浴場があり、近隣には様々なコンビニエンスストアもあります</a:t>
+              <a:t>リーズナブルな時期もあってか、価格帯も大満足です</a:t>
             </a:r>
             <a:endParaRPr lang="en-US" sz="900" dirty="0"/>
           </a:p>
@@ -11961,7 +11961,7 @@
                 <a:ea typeface="Arial" pitchFamily="34" charset="-122"/>
                 <a:cs typeface="Arial" pitchFamily="34" charset="-120"/>
               </a:rPr>
-              <a:t>「正門南口から徒歩5分、ローソンの向かいに位置し、ドン・キホーテのショッピング街まで徒歩12分以内です」</a:t>
+              <a:t>「シングルルームは少し狭いですが、内装は素晴らしく、東京の桜シーズンと比べると料金もリーズナブルです」</a:t>
             </a:r>
             <a:endParaRPr lang="en-US" sz="900" dirty="0"/>
           </a:p>
@@ -12719,7 +12719,7 @@
                           <a:ea typeface="Arial" pitchFamily="34" charset="-122"/>
                           <a:cs typeface="Arial" pitchFamily="34" charset="-120"/>
                         </a:rPr>
-                        <a:t>16件</a:t>
+                        <a:t>7件</a:t>
                       </a:r>
                       <a:endParaRPr lang="en-US" sz="900" dirty="0">
                         <a:latin typeface="Arial" charset="0"/>
@@ -12993,7 +12993,7 @@
                           <a:ea typeface="Arial" pitchFamily="34" charset="-122"/>
                           <a:cs typeface="Arial" pitchFamily="34" charset="-120"/>
                         </a:rPr>
-                        <a:t>14件</a:t>
+                        <a:t>6件</a:t>
                       </a:r>
                       <a:endParaRPr lang="en-US" sz="900" dirty="0">
                         <a:latin typeface="Arial" charset="0"/>
@@ -13405,7 +13405,7 @@
                           <a:ea typeface="Arial" pitchFamily="34" charset="-122"/>
                           <a:cs typeface="Arial" pitchFamily="34" charset="-120"/>
                         </a:rPr>
-                        <a:t>対応・サービスの不満</a:t>
+                        <a:t>エアコン・空調</a:t>
                       </a:r>
                       <a:endParaRPr lang="en-US" sz="900" dirty="0">
                         <a:latin typeface="Arial" charset="0"/>
@@ -13473,7 +13473,7 @@
                           <a:ea typeface="Arial" pitchFamily="34" charset="-122"/>
                           <a:cs typeface="Arial" pitchFamily="34" charset="-120"/>
                         </a:rPr>
-                        <a:t>大浴場のシャワーが少なく、空くのを待たないといけないのが残念でした</a:t>
+                        <a:t>夜部屋が寒かったので、暖房を入れようとしたら、個人では設定できなかったこと</a:t>
                       </a:r>
                       <a:endParaRPr lang="en-US" sz="900" dirty="0">
                         <a:latin typeface="Arial" charset="0"/>
@@ -13541,7 +13541,7 @@
                           <a:ea typeface="Arial" pitchFamily="34" charset="-122"/>
                           <a:cs typeface="Arial" pitchFamily="34" charset="-120"/>
                         </a:rPr>
-                        <a:t>5件</a:t>
+                        <a:t>3件</a:t>
                       </a:r>
                       <a:endParaRPr lang="en-US" sz="900" dirty="0">
                         <a:latin typeface="Arial" charset="0"/>
@@ -13679,7 +13679,7 @@
                           <a:ea typeface="Arial" pitchFamily="34" charset="-122"/>
                           <a:cs typeface="Arial" pitchFamily="34" charset="-120"/>
                         </a:rPr>
-                        <a:t>臭い・匂い</a:t>
+                        <a:t>対応・サービスの不満</a:t>
                       </a:r>
                       <a:endParaRPr lang="en-US" sz="900" dirty="0">
                         <a:latin typeface="Arial" charset="0"/>
@@ -13747,7 +13747,7 @@
                           <a:ea typeface="Arial" pitchFamily="34" charset="-122"/>
                           <a:cs typeface="Arial" pitchFamily="34" charset="-120"/>
                         </a:rPr>
-                        <a:t>Agoda 部屋がタバコ臭かったのですが、こちらのミスで喫煙室を予約してしまっていたようでした</a:t>
+                        <a:t>大浴場のシャワーが少なく、空くのを待たないといけないのが残念でした</a:t>
                       </a:r>
                       <a:endParaRPr lang="en-US" sz="900" dirty="0">
                         <a:latin typeface="Arial" charset="0"/>
@@ -13953,7 +13953,7 @@
                           <a:ea typeface="Arial" pitchFamily="34" charset="-122"/>
                           <a:cs typeface="Arial" pitchFamily="34" charset="-120"/>
                         </a:rPr>
-                        <a:t>エアコン・空調</a:t>
+                        <a:t>設備の老朽化</a:t>
                       </a:r>
                       <a:endParaRPr lang="en-US" sz="900" dirty="0">
                         <a:latin typeface="Arial" charset="0"/>
@@ -14021,7 +14021,7 @@
                           <a:ea typeface="Arial" pitchFamily="34" charset="-122"/>
                           <a:cs typeface="Arial" pitchFamily="34" charset="-120"/>
                         </a:rPr>
-                        <a:t>夜部屋が寒かったので、暖房を入れようとしたら、個人では設定できなかったこと</a:t>
+                        <a:t>Google 築年数が浅くおしゃれできれいです</a:t>
                       </a:r>
                       <a:endParaRPr lang="en-US" sz="900" dirty="0">
                         <a:latin typeface="Arial" charset="0"/>
@@ -14089,7 +14089,7 @@
                           <a:ea typeface="Arial" pitchFamily="34" charset="-122"/>
                           <a:cs typeface="Arial" pitchFamily="34" charset="-120"/>
                         </a:rPr>
-                        <a:t>3件</a:t>
+                        <a:t>1件</a:t>
                       </a:r>
                       <a:endParaRPr lang="en-US" sz="900" dirty="0">
                         <a:latin typeface="Arial" charset="0"/>
@@ -14227,7 +14227,7 @@
                           <a:ea typeface="Arial" pitchFamily="34" charset="-122"/>
                           <a:cs typeface="Arial" pitchFamily="34" charset="-120"/>
                         </a:rPr>
-                        <a:t>窓・採光</a:t>
+                        <a:t>臭い・匂い</a:t>
                       </a:r>
                       <a:endParaRPr lang="en-US" sz="900" dirty="0">
                         <a:latin typeface="Arial" charset="0"/>
@@ -14295,7 +14295,7 @@
                           <a:ea typeface="Arial" pitchFamily="34" charset="-122"/>
                           <a:cs typeface="Arial" pitchFamily="34" charset="-120"/>
                         </a:rPr>
-                        <a:t>景色は向かい側がオフィスビルだから カーテンは開けられない</a:t>
+                        <a:t>Agoda 部屋がタバコ臭かったのですが、こちらのミスで喫煙室を予約してしまっていたようでした</a:t>
                       </a:r>
                       <a:endParaRPr lang="en-US" sz="900" dirty="0">
                         <a:latin typeface="Arial" charset="0"/>
@@ -14363,7 +14363,7 @@
                           <a:ea typeface="Arial" pitchFamily="34" charset="-122"/>
                           <a:cs typeface="Arial" pitchFamily="34" charset="-120"/>
                         </a:rPr>
-                        <a:t>2件</a:t>
+                        <a:t>1件</a:t>
                       </a:r>
                       <a:endParaRPr lang="en-US" sz="900" dirty="0">
                         <a:latin typeface="Arial" charset="0"/>
@@ -14501,7 +14501,7 @@
                           <a:ea typeface="Arial" pitchFamily="34" charset="-122"/>
                           <a:cs typeface="Arial" pitchFamily="34" charset="-120"/>
                         </a:rPr>
-                        <a:t>設備の老朽化</a:t>
+                        <a:t>朝食の改善要望</a:t>
                       </a:r>
                       <a:endParaRPr lang="en-US" sz="900" dirty="0">
                         <a:latin typeface="Arial" charset="0"/>
@@ -14569,7 +14569,7 @@
                           <a:ea typeface="Arial" pitchFamily="34" charset="-122"/>
                           <a:cs typeface="Arial" pitchFamily="34" charset="-120"/>
                         </a:rPr>
-                        <a:t>Google 築年数が浅くおしゃれできれいです</a:t>
+                        <a:t>朝食に関しては、ボリューム・品数・美味しさ満点です</a:t>
                       </a:r>
                       <a:endParaRPr lang="en-US" sz="900" dirty="0">
                         <a:latin typeface="Arial" charset="0"/>
@@ -14775,7 +14775,7 @@
                           <a:ea typeface="Arial" pitchFamily="34" charset="-122"/>
                           <a:cs typeface="Arial" pitchFamily="34" charset="-120"/>
                         </a:rPr>
-                        <a:t>朝食の改善要望</a:t>
+                        <a:t>窓・採光</a:t>
                       </a:r>
                       <a:endParaRPr lang="en-US" sz="900" dirty="0">
                         <a:latin typeface="Arial" charset="0"/>
@@ -14843,7 +14843,7 @@
                           <a:ea typeface="Arial" pitchFamily="34" charset="-122"/>
                           <a:cs typeface="Arial" pitchFamily="34" charset="-120"/>
                         </a:rPr>
-                        <a:t>朝食に関しては、ボリューム・品数・美味しさ満点です</a:t>
+                        <a:t>景色は向かい側がオフィスビルだから カーテンは開けられない</a:t>
                       </a:r>
                       <a:endParaRPr lang="en-US" sz="900" dirty="0">
                         <a:latin typeface="Arial" charset="0"/>

--- a/納品レポート/ホテル別レポート/comment_yokohama_口コミ分析レポート.pptx
+++ b/納品レポート/ホテル別レポート/comment_yokohama_口コミ分析レポート.pptx
@@ -2702,7 +2702,7 @@
                 <a:ea typeface="Arial" pitchFamily="34" charset="-122"/>
                 <a:cs typeface="Arial" pitchFamily="34" charset="-120"/>
               </a:rPr>
-              <a:t>ホテルコメント横浜関内</a:t>
+              <a:t>コメントホテル横浜</a:t>
             </a:r>
             <a:endParaRPr lang="en-US" sz="1600" dirty="0"/>
           </a:p>
@@ -2784,7 +2784,7 @@
                 <a:ea typeface="Arial" pitchFamily="34" charset="-122"/>
                 <a:cs typeface="Arial" pitchFamily="34" charset="-120"/>
               </a:rPr>
-              <a:t>作成日：2026年4月20日</a:t>
+              <a:t>作成日：2026年4月21日</a:t>
             </a:r>
             <a:endParaRPr lang="en-US" sz="1000" dirty="0"/>
           </a:p>

--- a/納品レポート/ホテル別レポート/comment_yokohama_口コミ分析レポート.pptx
+++ b/納品レポート/ホテル別レポート/comment_yokohama_口コミ分析レポート.pptx
@@ -2702,7 +2702,7 @@
                 <a:ea typeface="Arial" pitchFamily="34" charset="-122"/>
                 <a:cs typeface="Arial" pitchFamily="34" charset="-120"/>
               </a:rPr>
-              <a:t>コメントホテル横浜</a:t>
+              <a:t>ホテルコメント横浜関内</a:t>
             </a:r>
             <a:endParaRPr lang="en-US" sz="1600" dirty="0"/>
           </a:p>
@@ -2784,7 +2784,7 @@
                 <a:ea typeface="Arial" pitchFamily="34" charset="-122"/>
                 <a:cs typeface="Arial" pitchFamily="34" charset="-120"/>
               </a:rPr>
-              <a:t>作成日：2026年4月21日</a:t>
+              <a:t>作成日：2026年4月22日</a:t>
             </a:r>
             <a:endParaRPr lang="en-US" sz="1000" dirty="0"/>
           </a:p>
